--- a/lectures/week-02/index.pptx
+++ b/lectures/week-02/index.pptx
@@ -9,6 +9,7 @@
     <p:sldId id="257" r:id="rId3"/>
     <p:sldId id="258" r:id="rId4"/>
     <p:sldId id="259" r:id="rId5"/>
+    <p:sldId id="260" r:id="rId6"/>
   </p:sldIdLst>
   <p:sldSz cx="9144000" cy="5143500" type="screen16x9"/>
   <p:notesSz cx="6858000" cy="9144000"/>
@@ -3208,12 +3209,12 @@
       </p:grpSpPr>
       <p:sp>
         <p:nvSpPr>
-          <p:cNvPr id="2" name="Title 1"/>
-          <p:cNvSpPr>
-            <a:spLocks noGrp="1"/>
-          </p:cNvSpPr>
-          <p:nvPr>
-            <p:ph type="title"/>
+          <p:cNvPr id="3" name="Content Placeholder 2"/>
+          <p:cNvSpPr>
+            <a:spLocks noGrp="1"/>
+          </p:cNvSpPr>
+          <p:nvPr>
+            <p:ph idx="1"/>
           </p:nvPr>
         </p:nvSpPr>
         <p:spPr/>
@@ -3225,35 +3226,12 @@
               <a:buNone/>
             </a:pPr>
             <a:r>
+              <a:rPr b="1"/>
+              <a:t>Draft Material:</a:t>
+            </a:r>
+            <a:r>
               <a:rPr/>
-              <a:t>Preparation</a:t>
-            </a:r>
-          </a:p>
-        </p:txBody>
-      </p:sp>
-      <p:sp>
-        <p:nvSpPr>
-          <p:cNvPr id="3" name="Content Placeholder 2"/>
-          <p:cNvSpPr>
-            <a:spLocks noGrp="1"/>
-          </p:cNvSpPr>
-          <p:nvPr>
-            <p:ph idx="1"/>
-          </p:nvPr>
-        </p:nvSpPr>
-        <p:spPr/>
-        <p:txBody>
-          <a:bodyPr/>
-          <a:lstStyle/>
-          <a:p>
-            <a:pPr lvl="0" indent="0" marL="0">
-              <a:buNone/>
-            </a:pPr>
-            <a:r>
-              <a:rPr>
-                <a:hlinkClick r:id="rId2"/>
-              </a:rPr>
-              <a:t>Flood Risk Assessment and HEC-FDA</a:t>
+              <a:t> This content is under development and subject to change.</a:t>
             </a:r>
           </a:p>
         </p:txBody>
@@ -3300,7 +3278,7 @@
             </a:pPr>
             <a:r>
               <a:rPr/>
-              <a:t>Coming Soon</a:t>
+              <a:t>Preparation</a:t>
             </a:r>
           </a:p>
         </p:txBody>
@@ -3324,8 +3302,10 @@
               <a:buNone/>
             </a:pPr>
             <a:r>
-              <a:rPr/>
-              <a:t>This lecture is under development.</a:t>
+              <a:rPr>
+                <a:hlinkClick r:id="rId2"/>
+              </a:rPr>
+              <a:t>Flood Risk Assessment and HEC-FDA</a:t>
             </a:r>
           </a:p>
         </p:txBody>
@@ -3336,6 +3316,78 @@
 </file>
 
 <file path=ppt/slides/slide4.xml><?xml version="1.0" encoding="utf-8"?>
+<p:sld xmlns:a="http://schemas.openxmlformats.org/drawingml/2006/main" xmlns:r="http://schemas.openxmlformats.org/officeDocument/2006/relationships" xmlns:p="http://schemas.openxmlformats.org/presentationml/2006/main">
+  <p:cSld>
+    <p:spTree>
+      <p:nvGrpSpPr>
+        <p:cNvPr id="1" name=""/>
+        <p:cNvGrpSpPr/>
+        <p:nvPr/>
+      </p:nvGrpSpPr>
+      <p:grpSpPr>
+        <a:xfrm>
+          <a:off x="0" y="0"/>
+          <a:ext cx="0" cy="0"/>
+          <a:chOff x="0" y="0"/>
+          <a:chExt cx="0" cy="0"/>
+        </a:xfrm>
+      </p:grpSpPr>
+      <p:sp>
+        <p:nvSpPr>
+          <p:cNvPr id="2" name="Title 1"/>
+          <p:cNvSpPr>
+            <a:spLocks noGrp="1"/>
+          </p:cNvSpPr>
+          <p:nvPr>
+            <p:ph type="title"/>
+          </p:nvPr>
+        </p:nvSpPr>
+        <p:spPr/>
+        <p:txBody>
+          <a:bodyPr/>
+          <a:lstStyle/>
+          <a:p>
+            <a:pPr lvl="0" indent="0" marL="0">
+              <a:buNone/>
+            </a:pPr>
+            <a:r>
+              <a:rPr/>
+              <a:t>Coming Soon</a:t>
+            </a:r>
+          </a:p>
+        </p:txBody>
+      </p:sp>
+      <p:sp>
+        <p:nvSpPr>
+          <p:cNvPr id="3" name="Content Placeholder 2"/>
+          <p:cNvSpPr>
+            <a:spLocks noGrp="1"/>
+          </p:cNvSpPr>
+          <p:nvPr>
+            <p:ph idx="1"/>
+          </p:nvPr>
+        </p:nvSpPr>
+        <p:spPr/>
+        <p:txBody>
+          <a:bodyPr/>
+          <a:lstStyle/>
+          <a:p>
+            <a:pPr lvl="0" indent="0" marL="0">
+              <a:buNone/>
+            </a:pPr>
+            <a:r>
+              <a:rPr/>
+              <a:t>This lecture is under development.</a:t>
+            </a:r>
+          </a:p>
+        </p:txBody>
+      </p:sp>
+    </p:spTree>
+  </p:cSld>
+</p:sld>
+</file>
+
+<file path=ppt/slides/slide5.xml><?xml version="1.0" encoding="utf-8"?>
 <p:sld xmlns:a="http://schemas.openxmlformats.org/drawingml/2006/main" xmlns:r="http://schemas.openxmlformats.org/officeDocument/2006/relationships" xmlns:p="http://schemas.openxmlformats.org/presentationml/2006/main">
   <p:cSld>
     <p:spTree>

--- a/lectures/week-02/index.pptx
+++ b/lectures/week-02/index.pptx
@@ -4,12 +4,41 @@
   <p:sldMasterIdLst>
     <p:sldMasterId id="2147483648" r:id="rId1"/>
   </p:sldMasterIdLst>
+  <p:notesMasterIdLst>
+    <p:notesMasterId r:id="rId33"/>
+  </p:notesMasterIdLst>
   <p:sldIdLst>
     <p:sldId id="256" r:id="rId2"/>
     <p:sldId id="257" r:id="rId3"/>
     <p:sldId id="258" r:id="rId4"/>
     <p:sldId id="259" r:id="rId5"/>
     <p:sldId id="260" r:id="rId6"/>
+    <p:sldId id="261" r:id="rId7"/>
+    <p:sldId id="262" r:id="rId8"/>
+    <p:sldId id="263" r:id="rId9"/>
+    <p:sldId id="264" r:id="rId10"/>
+    <p:sldId id="265" r:id="rId11"/>
+    <p:sldId id="266" r:id="rId12"/>
+    <p:sldId id="267" r:id="rId13"/>
+    <p:sldId id="268" r:id="rId14"/>
+    <p:sldId id="269" r:id="rId15"/>
+    <p:sldId id="270" r:id="rId16"/>
+    <p:sldId id="271" r:id="rId17"/>
+    <p:sldId id="272" r:id="rId18"/>
+    <p:sldId id="273" r:id="rId19"/>
+    <p:sldId id="274" r:id="rId20"/>
+    <p:sldId id="275" r:id="rId21"/>
+    <p:sldId id="276" r:id="rId22"/>
+    <p:sldId id="277" r:id="rId23"/>
+    <p:sldId id="278" r:id="rId24"/>
+    <p:sldId id="279" r:id="rId25"/>
+    <p:sldId id="280" r:id="rId26"/>
+    <p:sldId id="281" r:id="rId27"/>
+    <p:sldId id="282" r:id="rId28"/>
+    <p:sldId id="283" r:id="rId29"/>
+    <p:sldId id="284" r:id="rId30"/>
+    <p:sldId id="285" r:id="rId31"/>
+    <p:sldId id="286" r:id="rId32"/>
   </p:sldIdLst>
   <p:sldSz cx="9144000" cy="5143500" type="screen16x9"/>
   <p:notesSz cx="6858000" cy="9144000"/>
@@ -125,6 +154,2159 @@
     </p:ext>
   </p:extLst>
 </p:presentation>
+</file>
+
+<file path=ppt/notesMasters/notesMaster1.xml><?xml version="1.0" encoding="utf-8"?>
+<p:notesMaster xmlns:a="http://schemas.openxmlformats.org/drawingml/2006/main" xmlns:r="http://schemas.openxmlformats.org/officeDocument/2006/relationships" xmlns:p="http://schemas.openxmlformats.org/presentationml/2006/main">
+  <p:cSld>
+    <p:bg>
+      <p:bgRef idx="1001">
+        <a:schemeClr val="bg1"/>
+      </p:bgRef>
+    </p:bg>
+    <p:spTree>
+      <p:nvGrpSpPr>
+        <p:cNvPr id="1" name=""/>
+        <p:cNvGrpSpPr/>
+        <p:nvPr/>
+      </p:nvGrpSpPr>
+      <p:grpSpPr>
+        <a:xfrm>
+          <a:off x="0" y="0"/>
+          <a:ext cx="0" cy="0"/>
+          <a:chOff x="0" y="0"/>
+          <a:chExt cx="0" cy="0"/>
+        </a:xfrm>
+      </p:grpSpPr>
+      <p:sp>
+        <p:nvSpPr>
+          <p:cNvPr id="2" name="Header Placeholder 1"/>
+          <p:cNvSpPr>
+            <a:spLocks noGrp="1"/>
+          </p:cNvSpPr>
+          <p:nvPr>
+            <p:ph type="hdr" sz="quarter"/>
+          </p:nvPr>
+        </p:nvSpPr>
+        <p:spPr>
+          <a:xfrm>
+            <a:off x="0" y="0"/>
+            <a:ext cx="2971800" cy="458788"/>
+          </a:xfrm>
+          <a:prstGeom prst="rect">
+            <a:avLst/>
+          </a:prstGeom>
+        </p:spPr>
+        <p:txBody>
+          <a:bodyPr vert="horz" lIns="91440" tIns="45720" rIns="91440" bIns="45720" rtlCol="0"/>
+          <a:lstStyle>
+            <a:lvl1pPr algn="l">
+              <a:defRPr sz="1200"/>
+            </a:lvl1pPr>
+          </a:lstStyle>
+          <a:p>
+            <a:endParaRPr lang="en-US"/>
+          </a:p>
+        </p:txBody>
+      </p:sp>
+      <p:sp>
+        <p:nvSpPr>
+          <p:cNvPr id="3" name="Date Placeholder 2"/>
+          <p:cNvSpPr>
+            <a:spLocks noGrp="1"/>
+          </p:cNvSpPr>
+          <p:nvPr>
+            <p:ph type="dt" idx="1"/>
+          </p:nvPr>
+        </p:nvSpPr>
+        <p:spPr>
+          <a:xfrm>
+            <a:off x="3884613" y="0"/>
+            <a:ext cx="2971800" cy="458788"/>
+          </a:xfrm>
+          <a:prstGeom prst="rect">
+            <a:avLst/>
+          </a:prstGeom>
+        </p:spPr>
+        <p:txBody>
+          <a:bodyPr vert="horz" lIns="91440" tIns="45720" rIns="91440" bIns="45720" rtlCol="0"/>
+          <a:lstStyle>
+            <a:lvl1pPr algn="r">
+              <a:defRPr sz="1200"/>
+            </a:lvl1pPr>
+          </a:lstStyle>
+          <a:p>
+            <a:fld id="{0F9C1CCF-B725-44A7-AA57-5E433BD85C9F}" type="datetimeFigureOut">
+              <a:rPr lang="en-US" smtClean="0"/>
+              <a:t>1/2/22</a:t>
+            </a:fld>
+            <a:endParaRPr lang="en-US"/>
+          </a:p>
+        </p:txBody>
+      </p:sp>
+      <p:sp>
+        <p:nvSpPr>
+          <p:cNvPr id="4" name="Slide Image Placeholder 3"/>
+          <p:cNvSpPr>
+            <a:spLocks noGrp="1" noRot="1" noChangeAspect="1"/>
+          </p:cNvSpPr>
+          <p:nvPr>
+            <p:ph type="sldImg" idx="2"/>
+          </p:nvPr>
+        </p:nvSpPr>
+        <p:spPr>
+          <a:xfrm>
+            <a:off x="685800" y="1143000"/>
+            <a:ext cx="5486400" cy="3086100"/>
+          </a:xfrm>
+          <a:prstGeom prst="rect">
+            <a:avLst/>
+          </a:prstGeom>
+          <a:noFill/>
+          <a:ln w="12700">
+            <a:solidFill>
+              <a:prstClr val="black"/>
+            </a:solidFill>
+          </a:ln>
+        </p:spPr>
+        <p:txBody>
+          <a:bodyPr vert="horz" lIns="91440" tIns="45720" rIns="91440" bIns="45720" rtlCol="0" anchor="ctr"/>
+          <a:lstStyle/>
+          <a:p>
+            <a:endParaRPr lang="en-US"/>
+          </a:p>
+        </p:txBody>
+      </p:sp>
+      <p:sp>
+        <p:nvSpPr>
+          <p:cNvPr id="5" name="Notes Placeholder 4"/>
+          <p:cNvSpPr>
+            <a:spLocks noGrp="1"/>
+          </p:cNvSpPr>
+          <p:nvPr>
+            <p:ph type="body" sz="quarter" idx="3"/>
+          </p:nvPr>
+        </p:nvSpPr>
+        <p:spPr>
+          <a:xfrm>
+            <a:off x="685800" y="4400550"/>
+            <a:ext cx="5486400" cy="3600450"/>
+          </a:xfrm>
+          <a:prstGeom prst="rect">
+            <a:avLst/>
+          </a:prstGeom>
+        </p:spPr>
+        <p:txBody>
+          <a:bodyPr vert="horz" lIns="91440" tIns="45720" rIns="91440" bIns="45720" rtlCol="0"/>
+          <a:lstStyle/>
+          <a:p>
+            <a:pPr lvl="0"/>
+            <a:r>
+              <a:rPr lang="en-US"/>
+              <a:t>Click to edit Master text styles</a:t>
+            </a:r>
+          </a:p>
+          <a:p>
+            <a:pPr lvl="1"/>
+            <a:r>
+              <a:rPr lang="en-US"/>
+              <a:t>Second level</a:t>
+            </a:r>
+          </a:p>
+          <a:p>
+            <a:pPr lvl="2"/>
+            <a:r>
+              <a:rPr lang="en-US"/>
+              <a:t>Third level</a:t>
+            </a:r>
+          </a:p>
+          <a:p>
+            <a:pPr lvl="3"/>
+            <a:r>
+              <a:rPr lang="en-US"/>
+              <a:t>Fourth level</a:t>
+            </a:r>
+          </a:p>
+          <a:p>
+            <a:pPr lvl="4"/>
+            <a:r>
+              <a:rPr lang="en-US"/>
+              <a:t>Fifth level</a:t>
+            </a:r>
+          </a:p>
+        </p:txBody>
+      </p:sp>
+      <p:sp>
+        <p:nvSpPr>
+          <p:cNvPr id="6" name="Footer Placeholder 5"/>
+          <p:cNvSpPr>
+            <a:spLocks noGrp="1"/>
+          </p:cNvSpPr>
+          <p:nvPr>
+            <p:ph type="ftr" sz="quarter" idx="4"/>
+          </p:nvPr>
+        </p:nvSpPr>
+        <p:spPr>
+          <a:xfrm>
+            <a:off x="0" y="8685213"/>
+            <a:ext cx="2971800" cy="458787"/>
+          </a:xfrm>
+          <a:prstGeom prst="rect">
+            <a:avLst/>
+          </a:prstGeom>
+        </p:spPr>
+        <p:txBody>
+          <a:bodyPr vert="horz" lIns="91440" tIns="45720" rIns="91440" bIns="45720" rtlCol="0" anchor="b"/>
+          <a:lstStyle>
+            <a:lvl1pPr algn="l">
+              <a:defRPr sz="1200"/>
+            </a:lvl1pPr>
+          </a:lstStyle>
+          <a:p>
+            <a:endParaRPr lang="en-US"/>
+          </a:p>
+        </p:txBody>
+      </p:sp>
+      <p:sp>
+        <p:nvSpPr>
+          <p:cNvPr id="7" name="Slide Number Placeholder 6"/>
+          <p:cNvSpPr>
+            <a:spLocks noGrp="1"/>
+          </p:cNvSpPr>
+          <p:nvPr>
+            <p:ph type="sldNum" sz="quarter" idx="5"/>
+          </p:nvPr>
+        </p:nvSpPr>
+        <p:spPr>
+          <a:xfrm>
+            <a:off x="3884613" y="8685213"/>
+            <a:ext cx="2971800" cy="458787"/>
+          </a:xfrm>
+          <a:prstGeom prst="rect">
+            <a:avLst/>
+          </a:prstGeom>
+        </p:spPr>
+        <p:txBody>
+          <a:bodyPr vert="horz" lIns="91440" tIns="45720" rIns="91440" bIns="45720" rtlCol="0" anchor="b"/>
+          <a:lstStyle>
+            <a:lvl1pPr algn="r">
+              <a:defRPr sz="1200"/>
+            </a:lvl1pPr>
+          </a:lstStyle>
+          <a:p>
+            <a:fld id="{18BDFEC3-8487-43E8-A154-7C12CBC1FFF2}" type="slidenum">
+              <a:rPr lang="en-US" smtClean="0"/>
+              <a:t>‹#›</a:t>
+            </a:fld>
+            <a:endParaRPr lang="en-US"/>
+          </a:p>
+        </p:txBody>
+      </p:sp>
+    </p:spTree>
+    <p:extLst>
+      <p:ext uri="{BB962C8B-B14F-4D97-AF65-F5344CB8AC3E}">
+        <p14:creationId xmlns:p14="http://schemas.microsoft.com/office/powerpoint/2010/main" val="3782709779"/>
+      </p:ext>
+    </p:extLst>
+  </p:cSld>
+  <p:clrMap bg1="lt1" tx1="dk1" bg2="lt2" tx2="dk2" accent1="accent1" accent2="accent2" accent3="accent3" accent4="accent4" accent5="accent5" accent6="accent6" hlink="hlink" folHlink="folHlink"/>
+  <p:notesStyle>
+    <a:lvl1pPr marL="0" algn="l" defTabSz="914400" rtl="0" eaLnBrk="1" latinLnBrk="0" hangingPunct="1">
+      <a:defRPr sz="1200" kern="1200">
+        <a:solidFill>
+          <a:schemeClr val="tx1"/>
+        </a:solidFill>
+        <a:latin typeface="+mn-lt"/>
+        <a:ea typeface="+mn-ea"/>
+        <a:cs typeface="+mn-cs"/>
+      </a:defRPr>
+    </a:lvl1pPr>
+    <a:lvl2pPr marL="457200" algn="l" defTabSz="914400" rtl="0" eaLnBrk="1" latinLnBrk="0" hangingPunct="1">
+      <a:defRPr sz="1200" kern="1200">
+        <a:solidFill>
+          <a:schemeClr val="tx1"/>
+        </a:solidFill>
+        <a:latin typeface="+mn-lt"/>
+        <a:ea typeface="+mn-ea"/>
+        <a:cs typeface="+mn-cs"/>
+      </a:defRPr>
+    </a:lvl2pPr>
+    <a:lvl3pPr marL="914400" algn="l" defTabSz="914400" rtl="0" eaLnBrk="1" latinLnBrk="0" hangingPunct="1">
+      <a:defRPr sz="1200" kern="1200">
+        <a:solidFill>
+          <a:schemeClr val="tx1"/>
+        </a:solidFill>
+        <a:latin typeface="+mn-lt"/>
+        <a:ea typeface="+mn-ea"/>
+        <a:cs typeface="+mn-cs"/>
+      </a:defRPr>
+    </a:lvl3pPr>
+    <a:lvl4pPr marL="1371600" algn="l" defTabSz="914400" rtl="0" eaLnBrk="1" latinLnBrk="0" hangingPunct="1">
+      <a:defRPr sz="1200" kern="1200">
+        <a:solidFill>
+          <a:schemeClr val="tx1"/>
+        </a:solidFill>
+        <a:latin typeface="+mn-lt"/>
+        <a:ea typeface="+mn-ea"/>
+        <a:cs typeface="+mn-cs"/>
+      </a:defRPr>
+    </a:lvl4pPr>
+    <a:lvl5pPr marL="1828800" algn="l" defTabSz="914400" rtl="0" eaLnBrk="1" latinLnBrk="0" hangingPunct="1">
+      <a:defRPr sz="1200" kern="1200">
+        <a:solidFill>
+          <a:schemeClr val="tx1"/>
+        </a:solidFill>
+        <a:latin typeface="+mn-lt"/>
+        <a:ea typeface="+mn-ea"/>
+        <a:cs typeface="+mn-cs"/>
+      </a:defRPr>
+    </a:lvl5pPr>
+    <a:lvl6pPr marL="2286000" algn="l" defTabSz="914400" rtl="0" eaLnBrk="1" latinLnBrk="0" hangingPunct="1">
+      <a:defRPr sz="1200" kern="1200">
+        <a:solidFill>
+          <a:schemeClr val="tx1"/>
+        </a:solidFill>
+        <a:latin typeface="+mn-lt"/>
+        <a:ea typeface="+mn-ea"/>
+        <a:cs typeface="+mn-cs"/>
+      </a:defRPr>
+    </a:lvl6pPr>
+    <a:lvl7pPr marL="2743200" algn="l" defTabSz="914400" rtl="0" eaLnBrk="1" latinLnBrk="0" hangingPunct="1">
+      <a:defRPr sz="1200" kern="1200">
+        <a:solidFill>
+          <a:schemeClr val="tx1"/>
+        </a:solidFill>
+        <a:latin typeface="+mn-lt"/>
+        <a:ea typeface="+mn-ea"/>
+        <a:cs typeface="+mn-cs"/>
+      </a:defRPr>
+    </a:lvl7pPr>
+    <a:lvl8pPr marL="3200400" algn="l" defTabSz="914400" rtl="0" eaLnBrk="1" latinLnBrk="0" hangingPunct="1">
+      <a:defRPr sz="1200" kern="1200">
+        <a:solidFill>
+          <a:schemeClr val="tx1"/>
+        </a:solidFill>
+        <a:latin typeface="+mn-lt"/>
+        <a:ea typeface="+mn-ea"/>
+        <a:cs typeface="+mn-cs"/>
+      </a:defRPr>
+    </a:lvl8pPr>
+    <a:lvl9pPr marL="3657600" algn="l" defTabSz="914400" rtl="0" eaLnBrk="1" latinLnBrk="0" hangingPunct="1">
+      <a:defRPr sz="1200" kern="1200">
+        <a:solidFill>
+          <a:schemeClr val="tx1"/>
+        </a:solidFill>
+        <a:latin typeface="+mn-lt"/>
+        <a:ea typeface="+mn-ea"/>
+        <a:cs typeface="+mn-cs"/>
+      </a:defRPr>
+    </a:lvl9pPr>
+  </p:notesStyle>
+</p:notesMaster>
+</file>
+
+<file path=ppt/notesSlides/notesSlide1.xml><?xml version="1.0" encoding="utf-8"?>
+<p:notes xmlns:a="http://schemas.openxmlformats.org/drawingml/2006/main" xmlns:r="http://schemas.openxmlformats.org/officeDocument/2006/relationships" xmlns:p="http://schemas.openxmlformats.org/presentationml/2006/main">
+  <p:cSld>
+    <p:spTree>
+      <p:nvGrpSpPr>
+        <p:cNvPr id="1" name=""/>
+        <p:cNvGrpSpPr/>
+        <p:nvPr/>
+      </p:nvGrpSpPr>
+      <p:grpSpPr>
+        <a:xfrm>
+          <a:off x="0" y="0"/>
+          <a:ext cx="0" cy="0"/>
+          <a:chOff x="0" y="0"/>
+          <a:chExt cx="0" cy="0"/>
+        </a:xfrm>
+      </p:grpSpPr>
+      <p:sp>
+        <p:nvSpPr>
+          <p:cNvPr id="2" name="Slide Image Placeholder 1"/>
+          <p:cNvSpPr>
+            <a:spLocks noGrp="1" noRot="1" noChangeAspect="1"/>
+          </p:cNvSpPr>
+          <p:nvPr>
+            <p:ph type="sldImg"/>
+          </p:nvPr>
+        </p:nvSpPr>
+        <p:spPr/>
+      </p:sp>
+      <p:sp>
+        <p:nvSpPr>
+          <p:cNvPr id="3" name="Notes Placeholder 2"/>
+          <p:cNvSpPr>
+            <a:spLocks noGrp="1"/>
+          </p:cNvSpPr>
+          <p:nvPr>
+            <p:ph type="body" idx="1"/>
+          </p:nvPr>
+        </p:nvSpPr>
+        <p:spPr/>
+        <p:txBody>
+          <a:bodyPr/>
+          <a:lstStyle/>
+          <a:p>
+            <a:pPr lvl="0" indent="0" marL="0">
+              <a:buNone/>
+            </a:pPr>
+            <a:r>
+              <a:rPr/>
+              <a:t>Target: 1:02. Hook: start with a concrete business decision. Insurance connects directly to risk quantification.</a:t>
+            </a:r>
+          </a:p>
+        </p:txBody>
+      </p:sp>
+      <p:sp>
+        <p:nvSpPr>
+          <p:cNvPr id="4" name="Slide Number Placeholder 3"/>
+          <p:cNvSpPr>
+            <a:spLocks noGrp="1"/>
+          </p:cNvSpPr>
+          <p:nvPr>
+            <p:ph type="sldNum" sz="quarter" idx="10"/>
+          </p:nvPr>
+        </p:nvSpPr>
+        <p:spPr/>
+        <p:txBody>
+          <a:bodyPr/>
+          <a:lstStyle/>
+          <a:p>
+            <a:fld id="{18BDFEC3-8487-43E8-A154-7C12CBC1FFF2}" type="slidenum">
+              <a:rPr lang="en-US"/>
+              <a:t>4</a:t>
+            </a:fld>
+            <a:endParaRPr lang="en-US"/>
+          </a:p>
+        </p:txBody>
+      </p:sp>
+    </p:spTree>
+  </p:cSld>
+</p:notes>
+</file>
+
+<file path=ppt/notesSlides/notesSlide10.xml><?xml version="1.0" encoding="utf-8"?>
+<p:notes xmlns:a="http://schemas.openxmlformats.org/drawingml/2006/main" xmlns:r="http://schemas.openxmlformats.org/officeDocument/2006/relationships" xmlns:p="http://schemas.openxmlformats.org/presentationml/2006/main">
+  <p:cSld>
+    <p:spTree>
+      <p:nvGrpSpPr>
+        <p:cNvPr id="1" name=""/>
+        <p:cNvGrpSpPr/>
+        <p:nvPr/>
+      </p:nvGrpSpPr>
+      <p:grpSpPr>
+        <a:xfrm>
+          <a:off x="0" y="0"/>
+          <a:ext cx="0" cy="0"/>
+          <a:chOff x="0" y="0"/>
+          <a:chExt cx="0" cy="0"/>
+        </a:xfrm>
+      </p:grpSpPr>
+      <p:sp>
+        <p:nvSpPr>
+          <p:cNvPr id="2" name="Slide Image Placeholder 1"/>
+          <p:cNvSpPr>
+            <a:spLocks noGrp="1" noRot="1" noChangeAspect="1"/>
+          </p:cNvSpPr>
+          <p:nvPr>
+            <p:ph type="sldImg"/>
+          </p:nvPr>
+        </p:nvSpPr>
+        <p:spPr/>
+      </p:sp>
+      <p:sp>
+        <p:nvSpPr>
+          <p:cNvPr id="3" name="Notes Placeholder 2"/>
+          <p:cNvSpPr>
+            <a:spLocks noGrp="1"/>
+          </p:cNvSpPr>
+          <p:nvPr>
+            <p:ph type="body" idx="1"/>
+          </p:nvPr>
+        </p:nvSpPr>
+        <p:spPr/>
+        <p:txBody>
+          <a:bodyPr/>
+          <a:lstStyle/>
+          <a:p>
+            <a:pPr lvl="0" indent="0" marL="0">
+              <a:buNone/>
+            </a:pPr>
+            <a:r>
+              <a:rPr/>
+              <a:t>Target: 1:30. Work through this example on the board.</a:t>
+            </a:r>
+          </a:p>
+        </p:txBody>
+      </p:sp>
+      <p:sp>
+        <p:nvSpPr>
+          <p:cNvPr id="4" name="Slide Number Placeholder 3"/>
+          <p:cNvSpPr>
+            <a:spLocks noGrp="1"/>
+          </p:cNvSpPr>
+          <p:nvPr>
+            <p:ph type="sldNum" sz="quarter" idx="10"/>
+          </p:nvPr>
+        </p:nvSpPr>
+        <p:spPr/>
+        <p:txBody>
+          <a:bodyPr/>
+          <a:lstStyle/>
+          <a:p>
+            <a:fld id="{18BDFEC3-8487-43E8-A154-7C12CBC1FFF2}" type="slidenum">
+              <a:rPr lang="en-US"/>
+              <a:t>15</a:t>
+            </a:fld>
+            <a:endParaRPr lang="en-US"/>
+          </a:p>
+        </p:txBody>
+      </p:sp>
+    </p:spTree>
+  </p:cSld>
+</p:notes>
+</file>
+
+<file path=ppt/notesSlides/notesSlide11.xml><?xml version="1.0" encoding="utf-8"?>
+<p:notes xmlns:a="http://schemas.openxmlformats.org/drawingml/2006/main" xmlns:r="http://schemas.openxmlformats.org/officeDocument/2006/relationships" xmlns:p="http://schemas.openxmlformats.org/presentationml/2006/main">
+  <p:cSld>
+    <p:spTree>
+      <p:nvGrpSpPr>
+        <p:cNvPr id="1" name=""/>
+        <p:cNvGrpSpPr/>
+        <p:nvPr/>
+      </p:nvGrpSpPr>
+      <p:grpSpPr>
+        <a:xfrm>
+          <a:off x="0" y="0"/>
+          <a:ext cx="0" cy="0"/>
+          <a:chOff x="0" y="0"/>
+          <a:chExt cx="0" cy="0"/>
+        </a:xfrm>
+      </p:grpSpPr>
+      <p:sp>
+        <p:nvSpPr>
+          <p:cNvPr id="2" name="Slide Image Placeholder 1"/>
+          <p:cNvSpPr>
+            <a:spLocks noGrp="1" noRot="1" noChangeAspect="1"/>
+          </p:cNvSpPr>
+          <p:nvPr>
+            <p:ph type="sldImg"/>
+          </p:nvPr>
+        </p:nvSpPr>
+        <p:spPr/>
+      </p:sp>
+      <p:sp>
+        <p:nvSpPr>
+          <p:cNvPr id="3" name="Notes Placeholder 2"/>
+          <p:cNvSpPr>
+            <a:spLocks noGrp="1"/>
+          </p:cNvSpPr>
+          <p:nvPr>
+            <p:ph type="body" idx="1"/>
+          </p:nvPr>
+        </p:nvSpPr>
+        <p:spPr/>
+        <p:txBody>
+          <a:bodyPr/>
+          <a:lstStyle/>
+          <a:p>
+            <a:pPr lvl="0" indent="0" marL="0">
+              <a:buNone/>
+            </a:pPr>
+            <a:r>
+              <a:rPr/>
+              <a:t>Target: 1:34. Give students 60 seconds to think. Then cold call 2-3 students.</a:t>
+            </a:r>
+          </a:p>
+        </p:txBody>
+      </p:sp>
+      <p:sp>
+        <p:nvSpPr>
+          <p:cNvPr id="4" name="Slide Number Placeholder 3"/>
+          <p:cNvSpPr>
+            <a:spLocks noGrp="1"/>
+          </p:cNvSpPr>
+          <p:nvPr>
+            <p:ph type="sldNum" sz="quarter" idx="10"/>
+          </p:nvPr>
+        </p:nvSpPr>
+        <p:spPr/>
+        <p:txBody>
+          <a:bodyPr/>
+          <a:lstStyle/>
+          <a:p>
+            <a:fld id="{18BDFEC3-8487-43E8-A154-7C12CBC1FFF2}" type="slidenum">
+              <a:rPr lang="en-US"/>
+              <a:t>16</a:t>
+            </a:fld>
+            <a:endParaRPr lang="en-US"/>
+          </a:p>
+        </p:txBody>
+      </p:sp>
+    </p:spTree>
+  </p:cSld>
+</p:notes>
+</file>
+
+<file path=ppt/notesSlides/notesSlide12.xml><?xml version="1.0" encoding="utf-8"?>
+<p:notes xmlns:a="http://schemas.openxmlformats.org/drawingml/2006/main" xmlns:r="http://schemas.openxmlformats.org/officeDocument/2006/relationships" xmlns:p="http://schemas.openxmlformats.org/presentationml/2006/main">
+  <p:cSld>
+    <p:spTree>
+      <p:nvGrpSpPr>
+        <p:cNvPr id="1" name=""/>
+        <p:cNvGrpSpPr/>
+        <p:nvPr/>
+      </p:nvGrpSpPr>
+      <p:grpSpPr>
+        <a:xfrm>
+          <a:off x="0" y="0"/>
+          <a:ext cx="0" cy="0"/>
+          <a:chOff x="0" y="0"/>
+          <a:chExt cx="0" cy="0"/>
+        </a:xfrm>
+      </p:grpSpPr>
+      <p:sp>
+        <p:nvSpPr>
+          <p:cNvPr id="2" name="Slide Image Placeholder 1"/>
+          <p:cNvSpPr>
+            <a:spLocks noGrp="1" noRot="1" noChangeAspect="1"/>
+          </p:cNvSpPr>
+          <p:nvPr>
+            <p:ph type="sldImg"/>
+          </p:nvPr>
+        </p:nvSpPr>
+        <p:spPr/>
+      </p:sp>
+      <p:sp>
+        <p:nvSpPr>
+          <p:cNvPr id="3" name="Notes Placeholder 2"/>
+          <p:cNvSpPr>
+            <a:spLocks noGrp="1"/>
+          </p:cNvSpPr>
+          <p:nvPr>
+            <p:ph type="body" idx="1"/>
+          </p:nvPr>
+        </p:nvSpPr>
+        <p:spPr/>
+        <p:txBody>
+          <a:bodyPr/>
+          <a:lstStyle/>
+          <a:p>
+            <a:pPr lvl="0" indent="0" marL="0">
+              <a:buNone/>
+            </a:pPr>
+            <a:r>
+              <a:rPr/>
+              <a:t>Target: 1:37. Connect to course theme.</a:t>
+            </a:r>
+          </a:p>
+        </p:txBody>
+      </p:sp>
+      <p:sp>
+        <p:nvSpPr>
+          <p:cNvPr id="4" name="Slide Number Placeholder 3"/>
+          <p:cNvSpPr>
+            <a:spLocks noGrp="1"/>
+          </p:cNvSpPr>
+          <p:nvPr>
+            <p:ph type="sldNum" sz="quarter" idx="10"/>
+          </p:nvPr>
+        </p:nvSpPr>
+        <p:spPr/>
+        <p:txBody>
+          <a:bodyPr/>
+          <a:lstStyle/>
+          <a:p>
+            <a:fld id="{18BDFEC3-8487-43E8-A154-7C12CBC1FFF2}" type="slidenum">
+              <a:rPr lang="en-US"/>
+              <a:t>17</a:t>
+            </a:fld>
+            <a:endParaRPr lang="en-US"/>
+          </a:p>
+        </p:txBody>
+      </p:sp>
+    </p:spTree>
+  </p:cSld>
+</p:notes>
+</file>
+
+<file path=ppt/notesSlides/notesSlide13.xml><?xml version="1.0" encoding="utf-8"?>
+<p:notes xmlns:a="http://schemas.openxmlformats.org/drawingml/2006/main" xmlns:r="http://schemas.openxmlformats.org/officeDocument/2006/relationships" xmlns:p="http://schemas.openxmlformats.org/presentationml/2006/main">
+  <p:cSld>
+    <p:spTree>
+      <p:nvGrpSpPr>
+        <p:cNvPr id="1" name=""/>
+        <p:cNvGrpSpPr/>
+        <p:nvPr/>
+      </p:nvGrpSpPr>
+      <p:grpSpPr>
+        <a:xfrm>
+          <a:off x="0" y="0"/>
+          <a:ext cx="0" cy="0"/>
+          <a:chOff x="0" y="0"/>
+          <a:chExt cx="0" cy="0"/>
+        </a:xfrm>
+      </p:grpSpPr>
+      <p:sp>
+        <p:nvSpPr>
+          <p:cNvPr id="2" name="Slide Image Placeholder 1"/>
+          <p:cNvSpPr>
+            <a:spLocks noGrp="1" noRot="1" noChangeAspect="1"/>
+          </p:cNvSpPr>
+          <p:nvPr>
+            <p:ph type="sldImg"/>
+          </p:nvPr>
+        </p:nvSpPr>
+        <p:spPr/>
+      </p:sp>
+      <p:sp>
+        <p:nvSpPr>
+          <p:cNvPr id="3" name="Notes Placeholder 2"/>
+          <p:cNvSpPr>
+            <a:spLocks noGrp="1"/>
+          </p:cNvSpPr>
+          <p:nvPr>
+            <p:ph type="body" idx="1"/>
+          </p:nvPr>
+        </p:nvSpPr>
+        <p:spPr/>
+        <p:txBody>
+          <a:bodyPr/>
+          <a:lstStyle/>
+          <a:p>
+            <a:pPr lvl="0" indent="0" marL="0">
+              <a:buNone/>
+            </a:pPr>
+            <a:r>
+              <a:rPr/>
+              <a:t>Target: 1:40. Just planting the seed here. Deeper coverage in Week 4.</a:t>
+            </a:r>
+          </a:p>
+        </p:txBody>
+      </p:sp>
+      <p:sp>
+        <p:nvSpPr>
+          <p:cNvPr id="4" name="Slide Number Placeholder 3"/>
+          <p:cNvSpPr>
+            <a:spLocks noGrp="1"/>
+          </p:cNvSpPr>
+          <p:nvPr>
+            <p:ph type="sldNum" sz="quarter" idx="10"/>
+          </p:nvPr>
+        </p:nvSpPr>
+        <p:spPr/>
+        <p:txBody>
+          <a:bodyPr/>
+          <a:lstStyle/>
+          <a:p>
+            <a:fld id="{18BDFEC3-8487-43E8-A154-7C12CBC1FFF2}" type="slidenum">
+              <a:rPr lang="en-US"/>
+              <a:t>19</a:t>
+            </a:fld>
+            <a:endParaRPr lang="en-US"/>
+          </a:p>
+        </p:txBody>
+      </p:sp>
+    </p:spTree>
+  </p:cSld>
+</p:notes>
+</file>
+
+<file path=ppt/notesSlides/notesSlide14.xml><?xml version="1.0" encoding="utf-8"?>
+<p:notes xmlns:a="http://schemas.openxmlformats.org/drawingml/2006/main" xmlns:r="http://schemas.openxmlformats.org/officeDocument/2006/relationships" xmlns:p="http://schemas.openxmlformats.org/presentationml/2006/main">
+  <p:cSld>
+    <p:spTree>
+      <p:nvGrpSpPr>
+        <p:cNvPr id="1" name=""/>
+        <p:cNvGrpSpPr/>
+        <p:nvPr/>
+      </p:nvGrpSpPr>
+      <p:grpSpPr>
+        <a:xfrm>
+          <a:off x="0" y="0"/>
+          <a:ext cx="0" cy="0"/>
+          <a:chOff x="0" y="0"/>
+          <a:chExt cx="0" cy="0"/>
+        </a:xfrm>
+      </p:grpSpPr>
+      <p:sp>
+        <p:nvSpPr>
+          <p:cNvPr id="2" name="Slide Image Placeholder 1"/>
+          <p:cNvSpPr>
+            <a:spLocks noGrp="1" noRot="1" noChangeAspect="1"/>
+          </p:cNvSpPr>
+          <p:nvPr>
+            <p:ph type="sldImg"/>
+          </p:nvPr>
+        </p:nvSpPr>
+        <p:spPr/>
+      </p:sp>
+      <p:sp>
+        <p:nvSpPr>
+          <p:cNvPr id="3" name="Notes Placeholder 2"/>
+          <p:cNvSpPr>
+            <a:spLocks noGrp="1"/>
+          </p:cNvSpPr>
+          <p:nvPr>
+            <p:ph type="body" idx="1"/>
+          </p:nvPr>
+        </p:nvSpPr>
+        <p:spPr/>
+        <p:txBody>
+          <a:bodyPr/>
+          <a:lstStyle/>
+          <a:p>
+            <a:pPr lvl="0" indent="0" marL="0">
+              <a:buNone/>
+            </a:pPr>
+            <a:r>
+              <a:rPr/>
+              <a:t>Target: 1:43. Keep it light. Just enough to use in lab.</a:t>
+            </a:r>
+          </a:p>
+        </p:txBody>
+      </p:sp>
+      <p:sp>
+        <p:nvSpPr>
+          <p:cNvPr id="4" name="Slide Number Placeholder 3"/>
+          <p:cNvSpPr>
+            <a:spLocks noGrp="1"/>
+          </p:cNvSpPr>
+          <p:nvPr>
+            <p:ph type="sldNum" sz="quarter" idx="10"/>
+          </p:nvPr>
+        </p:nvSpPr>
+        <p:spPr/>
+        <p:txBody>
+          <a:bodyPr/>
+          <a:lstStyle/>
+          <a:p>
+            <a:fld id="{18BDFEC3-8487-43E8-A154-7C12CBC1FFF2}" type="slidenum">
+              <a:rPr lang="en-US"/>
+              <a:t>20</a:t>
+            </a:fld>
+            <a:endParaRPr lang="en-US"/>
+          </a:p>
+        </p:txBody>
+      </p:sp>
+    </p:spTree>
+  </p:cSld>
+</p:notes>
+</file>
+
+<file path=ppt/notesSlides/notesSlide15.xml><?xml version="1.0" encoding="utf-8"?>
+<p:notes xmlns:a="http://schemas.openxmlformats.org/drawingml/2006/main" xmlns:r="http://schemas.openxmlformats.org/officeDocument/2006/relationships" xmlns:p="http://schemas.openxmlformats.org/presentationml/2006/main">
+  <p:cSld>
+    <p:spTree>
+      <p:nvGrpSpPr>
+        <p:cNvPr id="1" name=""/>
+        <p:cNvGrpSpPr/>
+        <p:nvPr/>
+      </p:nvGrpSpPr>
+      <p:grpSpPr>
+        <a:xfrm>
+          <a:off x="0" y="0"/>
+          <a:ext cx="0" cy="0"/>
+          <a:chOff x="0" y="0"/>
+          <a:chExt cx="0" cy="0"/>
+        </a:xfrm>
+      </p:grpSpPr>
+      <p:sp>
+        <p:nvSpPr>
+          <p:cNvPr id="2" name="Slide Image Placeholder 1"/>
+          <p:cNvSpPr>
+            <a:spLocks noGrp="1" noRot="1" noChangeAspect="1"/>
+          </p:cNvSpPr>
+          <p:nvPr>
+            <p:ph type="sldImg"/>
+          </p:nvPr>
+        </p:nvSpPr>
+        <p:spPr/>
+      </p:sp>
+      <p:sp>
+        <p:nvSpPr>
+          <p:cNvPr id="3" name="Notes Placeholder 2"/>
+          <p:cNvSpPr>
+            <a:spLocks noGrp="1"/>
+          </p:cNvSpPr>
+          <p:nvPr>
+            <p:ph type="body" idx="1"/>
+          </p:nvPr>
+        </p:nvSpPr>
+        <p:spPr/>
+        <p:txBody>
+          <a:bodyPr/>
+          <a:lstStyle/>
+          <a:p>
+            <a:pPr lvl="0" indent="0" marL="0">
+              <a:buNone/>
+            </a:pPr>
+            <a:r>
+              <a:rPr/>
+              <a:t>Target: 1:46. Preview what they’ll do in lab.</a:t>
+            </a:r>
+          </a:p>
+        </p:txBody>
+      </p:sp>
+      <p:sp>
+        <p:nvSpPr>
+          <p:cNvPr id="4" name="Slide Number Placeholder 3"/>
+          <p:cNvSpPr>
+            <a:spLocks noGrp="1"/>
+          </p:cNvSpPr>
+          <p:nvPr>
+            <p:ph type="sldNum" sz="quarter" idx="10"/>
+          </p:nvPr>
+        </p:nvSpPr>
+        <p:spPr/>
+        <p:txBody>
+          <a:bodyPr/>
+          <a:lstStyle/>
+          <a:p>
+            <a:fld id="{18BDFEC3-8487-43E8-A154-7C12CBC1FFF2}" type="slidenum">
+              <a:rPr lang="en-US"/>
+              <a:t>21</a:t>
+            </a:fld>
+            <a:endParaRPr lang="en-US"/>
+          </a:p>
+        </p:txBody>
+      </p:sp>
+    </p:spTree>
+  </p:cSld>
+</p:notes>
+</file>
+
+<file path=ppt/notesSlides/notesSlide16.xml><?xml version="1.0" encoding="utf-8"?>
+<p:notes xmlns:a="http://schemas.openxmlformats.org/drawingml/2006/main" xmlns:r="http://schemas.openxmlformats.org/officeDocument/2006/relationships" xmlns:p="http://schemas.openxmlformats.org/presentationml/2006/main">
+  <p:cSld>
+    <p:spTree>
+      <p:nvGrpSpPr>
+        <p:cNvPr id="1" name=""/>
+        <p:cNvGrpSpPr/>
+        <p:nvPr/>
+      </p:nvGrpSpPr>
+      <p:grpSpPr>
+        <a:xfrm>
+          <a:off x="0" y="0"/>
+          <a:ext cx="0" cy="0"/>
+          <a:chOff x="0" y="0"/>
+          <a:chExt cx="0" cy="0"/>
+        </a:xfrm>
+      </p:grpSpPr>
+      <p:sp>
+        <p:nvSpPr>
+          <p:cNvPr id="2" name="Slide Image Placeholder 1"/>
+          <p:cNvSpPr>
+            <a:spLocks noGrp="1" noRot="1" noChangeAspect="1"/>
+          </p:cNvSpPr>
+          <p:nvPr>
+            <p:ph type="sldImg"/>
+          </p:nvPr>
+        </p:nvSpPr>
+        <p:spPr/>
+      </p:sp>
+      <p:sp>
+        <p:nvSpPr>
+          <p:cNvPr id="3" name="Notes Placeholder 2"/>
+          <p:cNvSpPr>
+            <a:spLocks noGrp="1"/>
+          </p:cNvSpPr>
+          <p:nvPr>
+            <p:ph type="body" idx="1"/>
+          </p:nvPr>
+        </p:nvSpPr>
+        <p:spPr/>
+        <p:txBody>
+          <a:bodyPr/>
+          <a:lstStyle/>
+          <a:p>
+            <a:pPr lvl="0" indent="0" marL="0">
+              <a:buNone/>
+            </a:pPr>
+            <a:r>
+              <a:rPr/>
+              <a:t>Target: 1:49. Set up the model students will use all semester.</a:t>
+            </a:r>
+          </a:p>
+        </p:txBody>
+      </p:sp>
+      <p:sp>
+        <p:nvSpPr>
+          <p:cNvPr id="4" name="Slide Number Placeholder 3"/>
+          <p:cNvSpPr>
+            <a:spLocks noGrp="1"/>
+          </p:cNvSpPr>
+          <p:nvPr>
+            <p:ph type="sldNum" sz="quarter" idx="10"/>
+          </p:nvPr>
+        </p:nvSpPr>
+        <p:spPr/>
+        <p:txBody>
+          <a:bodyPr/>
+          <a:lstStyle/>
+          <a:p>
+            <a:fld id="{18BDFEC3-8487-43E8-A154-7C12CBC1FFF2}" type="slidenum">
+              <a:rPr lang="en-US"/>
+              <a:t>23</a:t>
+            </a:fld>
+            <a:endParaRPr lang="en-US"/>
+          </a:p>
+        </p:txBody>
+      </p:sp>
+    </p:spTree>
+  </p:cSld>
+</p:notes>
+</file>
+
+<file path=ppt/notesSlides/notesSlide17.xml><?xml version="1.0" encoding="utf-8"?>
+<p:notes xmlns:a="http://schemas.openxmlformats.org/drawingml/2006/main" xmlns:r="http://schemas.openxmlformats.org/officeDocument/2006/relationships" xmlns:p="http://schemas.openxmlformats.org/presentationml/2006/main">
+  <p:cSld>
+    <p:spTree>
+      <p:nvGrpSpPr>
+        <p:cNvPr id="1" name=""/>
+        <p:cNvGrpSpPr/>
+        <p:nvPr/>
+      </p:nvGrpSpPr>
+      <p:grpSpPr>
+        <a:xfrm>
+          <a:off x="0" y="0"/>
+          <a:ext cx="0" cy="0"/>
+          <a:chOff x="0" y="0"/>
+          <a:chExt cx="0" cy="0"/>
+        </a:xfrm>
+      </p:grpSpPr>
+      <p:sp>
+        <p:nvSpPr>
+          <p:cNvPr id="2" name="Slide Image Placeholder 1"/>
+          <p:cNvSpPr>
+            <a:spLocks noGrp="1" noRot="1" noChangeAspect="1"/>
+          </p:cNvSpPr>
+          <p:nvPr>
+            <p:ph type="sldImg"/>
+          </p:nvPr>
+        </p:nvSpPr>
+        <p:spPr/>
+      </p:sp>
+      <p:sp>
+        <p:nvSpPr>
+          <p:cNvPr id="3" name="Notes Placeholder 2"/>
+          <p:cNvSpPr>
+            <a:spLocks noGrp="1"/>
+          </p:cNvSpPr>
+          <p:nvPr>
+            <p:ph type="body" idx="1"/>
+          </p:nvPr>
+        </p:nvSpPr>
+        <p:spPr/>
+        <p:txBody>
+          <a:bodyPr/>
+          <a:lstStyle/>
+          <a:p>
+            <a:pPr lvl="0" indent="0" marL="0">
+              <a:buNone/>
+            </a:pPr>
+            <a:r>
+              <a:rPr/>
+              <a:t>Target: 1:52. Draw on board if no figure available. Simple triangle cross-section.</a:t>
+            </a:r>
+          </a:p>
+        </p:txBody>
+      </p:sp>
+      <p:sp>
+        <p:nvSpPr>
+          <p:cNvPr id="4" name="Slide Number Placeholder 3"/>
+          <p:cNvSpPr>
+            <a:spLocks noGrp="1"/>
+          </p:cNvSpPr>
+          <p:nvPr>
+            <p:ph type="sldNum" sz="quarter" idx="10"/>
+          </p:nvPr>
+        </p:nvSpPr>
+        <p:spPr/>
+        <p:txBody>
+          <a:bodyPr/>
+          <a:lstStyle/>
+          <a:p>
+            <a:fld id="{18BDFEC3-8487-43E8-A154-7C12CBC1FFF2}" type="slidenum">
+              <a:rPr lang="en-US"/>
+              <a:t>24</a:t>
+            </a:fld>
+            <a:endParaRPr lang="en-US"/>
+          </a:p>
+        </p:txBody>
+      </p:sp>
+    </p:spTree>
+  </p:cSld>
+</p:notes>
+</file>
+
+<file path=ppt/notesSlides/notesSlide18.xml><?xml version="1.0" encoding="utf-8"?>
+<p:notes xmlns:a="http://schemas.openxmlformats.org/drawingml/2006/main" xmlns:r="http://schemas.openxmlformats.org/officeDocument/2006/relationships" xmlns:p="http://schemas.openxmlformats.org/presentationml/2006/main">
+  <p:cSld>
+    <p:spTree>
+      <p:nvGrpSpPr>
+        <p:cNvPr id="1" name=""/>
+        <p:cNvGrpSpPr/>
+        <p:nvPr/>
+      </p:nvGrpSpPr>
+      <p:grpSpPr>
+        <a:xfrm>
+          <a:off x="0" y="0"/>
+          <a:ext cx="0" cy="0"/>
+          <a:chOff x="0" y="0"/>
+          <a:chExt cx="0" cy="0"/>
+        </a:xfrm>
+      </p:grpSpPr>
+      <p:sp>
+        <p:nvSpPr>
+          <p:cNvPr id="2" name="Slide Image Placeholder 1"/>
+          <p:cNvSpPr>
+            <a:spLocks noGrp="1" noRot="1" noChangeAspect="1"/>
+          </p:cNvSpPr>
+          <p:nvPr>
+            <p:ph type="sldImg"/>
+          </p:nvPr>
+        </p:nvSpPr>
+        <p:spPr/>
+      </p:sp>
+      <p:sp>
+        <p:nvSpPr>
+          <p:cNvPr id="3" name="Notes Placeholder 2"/>
+          <p:cNvSpPr>
+            <a:spLocks noGrp="1"/>
+          </p:cNvSpPr>
+          <p:nvPr>
+            <p:ph type="body" idx="1"/>
+          </p:nvPr>
+        </p:nvSpPr>
+        <p:spPr/>
+        <p:txBody>
+          <a:bodyPr/>
+          <a:lstStyle/>
+          <a:p>
+            <a:pPr lvl="0" indent="0" marL="0">
+              <a:buNone/>
+            </a:pPr>
+            <a:r>
+              <a:rPr/>
+              <a:t>Target: 1:55. Map back to XLRM.</a:t>
+            </a:r>
+          </a:p>
+        </p:txBody>
+      </p:sp>
+      <p:sp>
+        <p:nvSpPr>
+          <p:cNvPr id="4" name="Slide Number Placeholder 3"/>
+          <p:cNvSpPr>
+            <a:spLocks noGrp="1"/>
+          </p:cNvSpPr>
+          <p:nvPr>
+            <p:ph type="sldNum" sz="quarter" idx="10"/>
+          </p:nvPr>
+        </p:nvSpPr>
+        <p:spPr/>
+        <p:txBody>
+          <a:bodyPr/>
+          <a:lstStyle/>
+          <a:p>
+            <a:fld id="{18BDFEC3-8487-43E8-A154-7C12CBC1FFF2}" type="slidenum">
+              <a:rPr lang="en-US"/>
+              <a:t>25</a:t>
+            </a:fld>
+            <a:endParaRPr lang="en-US"/>
+          </a:p>
+        </p:txBody>
+      </p:sp>
+    </p:spTree>
+  </p:cSld>
+</p:notes>
+</file>
+
+<file path=ppt/notesSlides/notesSlide19.xml><?xml version="1.0" encoding="utf-8"?>
+<p:notes xmlns:a="http://schemas.openxmlformats.org/drawingml/2006/main" xmlns:r="http://schemas.openxmlformats.org/officeDocument/2006/relationships" xmlns:p="http://schemas.openxmlformats.org/presentationml/2006/main">
+  <p:cSld>
+    <p:spTree>
+      <p:nvGrpSpPr>
+        <p:cNvPr id="1" name=""/>
+        <p:cNvGrpSpPr/>
+        <p:nvPr/>
+      </p:nvGrpSpPr>
+      <p:grpSpPr>
+        <a:xfrm>
+          <a:off x="0" y="0"/>
+          <a:ext cx="0" cy="0"/>
+          <a:chOff x="0" y="0"/>
+          <a:chExt cx="0" cy="0"/>
+        </a:xfrm>
+      </p:grpSpPr>
+      <p:sp>
+        <p:nvSpPr>
+          <p:cNvPr id="2" name="Slide Image Placeholder 1"/>
+          <p:cNvSpPr>
+            <a:spLocks noGrp="1" noRot="1" noChangeAspect="1"/>
+          </p:cNvSpPr>
+          <p:nvPr>
+            <p:ph type="sldImg"/>
+          </p:nvPr>
+        </p:nvSpPr>
+        <p:spPr/>
+      </p:sp>
+      <p:sp>
+        <p:nvSpPr>
+          <p:cNvPr id="3" name="Notes Placeholder 2"/>
+          <p:cNvSpPr>
+            <a:spLocks noGrp="1"/>
+          </p:cNvSpPr>
+          <p:nvPr>
+            <p:ph type="body" idx="1"/>
+          </p:nvPr>
+        </p:nvSpPr>
+        <p:spPr/>
+        <p:txBody>
+          <a:bodyPr/>
+          <a:lstStyle/>
+          <a:p>
+            <a:pPr lvl="0" indent="0" marL="0">
+              <a:buNone/>
+            </a:pPr>
+            <a:r>
+              <a:rPr/>
+              <a:t>Target: 1:58. Set expectations for the semester.</a:t>
+            </a:r>
+          </a:p>
+        </p:txBody>
+      </p:sp>
+      <p:sp>
+        <p:nvSpPr>
+          <p:cNvPr id="4" name="Slide Number Placeholder 3"/>
+          <p:cNvSpPr>
+            <a:spLocks noGrp="1"/>
+          </p:cNvSpPr>
+          <p:nvPr>
+            <p:ph type="sldNum" sz="quarter" idx="10"/>
+          </p:nvPr>
+        </p:nvSpPr>
+        <p:spPr/>
+        <p:txBody>
+          <a:bodyPr/>
+          <a:lstStyle/>
+          <a:p>
+            <a:fld id="{18BDFEC3-8487-43E8-A154-7C12CBC1FFF2}" type="slidenum">
+              <a:rPr lang="en-US"/>
+              <a:t>26</a:t>
+            </a:fld>
+            <a:endParaRPr lang="en-US"/>
+          </a:p>
+        </p:txBody>
+      </p:sp>
+    </p:spTree>
+  </p:cSld>
+</p:notes>
+</file>
+
+<file path=ppt/notesSlides/notesSlide2.xml><?xml version="1.0" encoding="utf-8"?>
+<p:notes xmlns:a="http://schemas.openxmlformats.org/drawingml/2006/main" xmlns:r="http://schemas.openxmlformats.org/officeDocument/2006/relationships" xmlns:p="http://schemas.openxmlformats.org/presentationml/2006/main">
+  <p:cSld>
+    <p:spTree>
+      <p:nvGrpSpPr>
+        <p:cNvPr id="1" name=""/>
+        <p:cNvGrpSpPr/>
+        <p:nvPr/>
+      </p:nvGrpSpPr>
+      <p:grpSpPr>
+        <a:xfrm>
+          <a:off x="0" y="0"/>
+          <a:ext cx="0" cy="0"/>
+          <a:chOff x="0" y="0"/>
+          <a:chExt cx="0" cy="0"/>
+        </a:xfrm>
+      </p:grpSpPr>
+      <p:sp>
+        <p:nvSpPr>
+          <p:cNvPr id="2" name="Slide Image Placeholder 1"/>
+          <p:cNvSpPr>
+            <a:spLocks noGrp="1" noRot="1" noChangeAspect="1"/>
+          </p:cNvSpPr>
+          <p:nvPr>
+            <p:ph type="sldImg"/>
+          </p:nvPr>
+        </p:nvSpPr>
+        <p:spPr/>
+      </p:sp>
+      <p:sp>
+        <p:nvSpPr>
+          <p:cNvPr id="3" name="Notes Placeholder 2"/>
+          <p:cNvSpPr>
+            <a:spLocks noGrp="1"/>
+          </p:cNvSpPr>
+          <p:nvPr>
+            <p:ph type="body" idx="1"/>
+          </p:nvPr>
+        </p:nvSpPr>
+        <p:spPr/>
+        <p:txBody>
+          <a:bodyPr/>
+          <a:lstStyle/>
+          <a:p>
+            <a:pPr lvl="0" indent="0" marL="0">
+              <a:buNone/>
+            </a:pPr>
+            <a:r>
+              <a:rPr/>
+              <a:t>Target: 1:04. Frame the lecture around this question.</a:t>
+            </a:r>
+          </a:p>
+        </p:txBody>
+      </p:sp>
+      <p:sp>
+        <p:nvSpPr>
+          <p:cNvPr id="4" name="Slide Number Placeholder 3"/>
+          <p:cNvSpPr>
+            <a:spLocks noGrp="1"/>
+          </p:cNvSpPr>
+          <p:nvPr>
+            <p:ph type="sldNum" sz="quarter" idx="10"/>
+          </p:nvPr>
+        </p:nvSpPr>
+        <p:spPr/>
+        <p:txBody>
+          <a:bodyPr/>
+          <a:lstStyle/>
+          <a:p>
+            <a:fld id="{18BDFEC3-8487-43E8-A154-7C12CBC1FFF2}" type="slidenum">
+              <a:rPr lang="en-US"/>
+              <a:t>5</a:t>
+            </a:fld>
+            <a:endParaRPr lang="en-US"/>
+          </a:p>
+        </p:txBody>
+      </p:sp>
+    </p:spTree>
+  </p:cSld>
+</p:notes>
+</file>
+
+<file path=ppt/notesSlides/notesSlide20.xml><?xml version="1.0" encoding="utf-8"?>
+<p:notes xmlns:a="http://schemas.openxmlformats.org/drawingml/2006/main" xmlns:r="http://schemas.openxmlformats.org/officeDocument/2006/relationships" xmlns:p="http://schemas.openxmlformats.org/presentationml/2006/main">
+  <p:cSld>
+    <p:spTree>
+      <p:nvGrpSpPr>
+        <p:cNvPr id="1" name=""/>
+        <p:cNvGrpSpPr/>
+        <p:nvPr/>
+      </p:nvGrpSpPr>
+      <p:grpSpPr>
+        <a:xfrm>
+          <a:off x="0" y="0"/>
+          <a:ext cx="0" cy="0"/>
+          <a:chOff x="0" y="0"/>
+          <a:chExt cx="0" cy="0"/>
+        </a:xfrm>
+      </p:grpSpPr>
+      <p:sp>
+        <p:nvSpPr>
+          <p:cNvPr id="2" name="Slide Image Placeholder 1"/>
+          <p:cNvSpPr>
+            <a:spLocks noGrp="1" noRot="1" noChangeAspect="1"/>
+          </p:cNvSpPr>
+          <p:nvPr>
+            <p:ph type="sldImg"/>
+          </p:nvPr>
+        </p:nvSpPr>
+        <p:spPr/>
+      </p:sp>
+      <p:sp>
+        <p:nvSpPr>
+          <p:cNvPr id="3" name="Notes Placeholder 2"/>
+          <p:cNvSpPr>
+            <a:spLocks noGrp="1"/>
+          </p:cNvSpPr>
+          <p:nvPr>
+            <p:ph type="body" idx="1"/>
+          </p:nvPr>
+        </p:nvSpPr>
+        <p:spPr/>
+        <p:txBody>
+          <a:bodyPr/>
+          <a:lstStyle/>
+          <a:p>
+            <a:pPr lvl="0" indent="0" marL="0">
+              <a:buNone/>
+            </a:pPr>
+            <a:r>
+              <a:rPr/>
+              <a:t>Target: 1:01. Summarize main points.</a:t>
+            </a:r>
+          </a:p>
+        </p:txBody>
+      </p:sp>
+      <p:sp>
+        <p:nvSpPr>
+          <p:cNvPr id="4" name="Slide Number Placeholder 3"/>
+          <p:cNvSpPr>
+            <a:spLocks noGrp="1"/>
+          </p:cNvSpPr>
+          <p:nvPr>
+            <p:ph type="sldNum" sz="quarter" idx="10"/>
+          </p:nvPr>
+        </p:nvSpPr>
+        <p:spPr/>
+        <p:txBody>
+          <a:bodyPr/>
+          <a:lstStyle/>
+          <a:p>
+            <a:fld id="{18BDFEC3-8487-43E8-A154-7C12CBC1FFF2}" type="slidenum">
+              <a:rPr lang="en-US"/>
+              <a:t>28</a:t>
+            </a:fld>
+            <a:endParaRPr lang="en-US"/>
+          </a:p>
+        </p:txBody>
+      </p:sp>
+    </p:spTree>
+  </p:cSld>
+</p:notes>
+</file>
+
+<file path=ppt/notesSlides/notesSlide21.xml><?xml version="1.0" encoding="utf-8"?>
+<p:notes xmlns:a="http://schemas.openxmlformats.org/drawingml/2006/main" xmlns:r="http://schemas.openxmlformats.org/officeDocument/2006/relationships" xmlns:p="http://schemas.openxmlformats.org/presentationml/2006/main">
+  <p:cSld>
+    <p:spTree>
+      <p:nvGrpSpPr>
+        <p:cNvPr id="1" name=""/>
+        <p:cNvGrpSpPr/>
+        <p:nvPr/>
+      </p:nvGrpSpPr>
+      <p:grpSpPr>
+        <a:xfrm>
+          <a:off x="0" y="0"/>
+          <a:ext cx="0" cy="0"/>
+          <a:chOff x="0" y="0"/>
+          <a:chExt cx="0" cy="0"/>
+        </a:xfrm>
+      </p:grpSpPr>
+      <p:sp>
+        <p:nvSpPr>
+          <p:cNvPr id="2" name="Slide Image Placeholder 1"/>
+          <p:cNvSpPr>
+            <a:spLocks noGrp="1" noRot="1" noChangeAspect="1"/>
+          </p:cNvSpPr>
+          <p:nvPr>
+            <p:ph type="sldImg"/>
+          </p:nvPr>
+        </p:nvSpPr>
+        <p:spPr/>
+      </p:sp>
+      <p:sp>
+        <p:nvSpPr>
+          <p:cNvPr id="3" name="Notes Placeholder 2"/>
+          <p:cNvSpPr>
+            <a:spLocks noGrp="1"/>
+          </p:cNvSpPr>
+          <p:nvPr>
+            <p:ph type="body" idx="1"/>
+          </p:nvPr>
+        </p:nvSpPr>
+        <p:spPr/>
+        <p:txBody>
+          <a:bodyPr/>
+          <a:lstStyle/>
+          <a:p>
+            <a:pPr lvl="0" indent="0" marL="0">
+              <a:buNone/>
+            </a:pPr>
+            <a:r>
+              <a:rPr/>
+              <a:t>Target: 1:03. Connect to Friday’s lab.</a:t>
+            </a:r>
+          </a:p>
+        </p:txBody>
+      </p:sp>
+      <p:sp>
+        <p:nvSpPr>
+          <p:cNvPr id="4" name="Slide Number Placeholder 3"/>
+          <p:cNvSpPr>
+            <a:spLocks noGrp="1"/>
+          </p:cNvSpPr>
+          <p:nvPr>
+            <p:ph type="sldNum" sz="quarter" idx="10"/>
+          </p:nvPr>
+        </p:nvSpPr>
+        <p:spPr/>
+        <p:txBody>
+          <a:bodyPr/>
+          <a:lstStyle/>
+          <a:p>
+            <a:fld id="{18BDFEC3-8487-43E8-A154-7C12CBC1FFF2}" type="slidenum">
+              <a:rPr lang="en-US"/>
+              <a:t>29</a:t>
+            </a:fld>
+            <a:endParaRPr lang="en-US"/>
+          </a:p>
+        </p:txBody>
+      </p:sp>
+    </p:spTree>
+  </p:cSld>
+</p:notes>
+</file>
+
+<file path=ppt/notesSlides/notesSlide22.xml><?xml version="1.0" encoding="utf-8"?>
+<p:notes xmlns:a="http://schemas.openxmlformats.org/drawingml/2006/main" xmlns:r="http://schemas.openxmlformats.org/officeDocument/2006/relationships" xmlns:p="http://schemas.openxmlformats.org/presentationml/2006/main">
+  <p:cSld>
+    <p:spTree>
+      <p:nvGrpSpPr>
+        <p:cNvPr id="1" name=""/>
+        <p:cNvGrpSpPr/>
+        <p:nvPr/>
+      </p:nvGrpSpPr>
+      <p:grpSpPr>
+        <a:xfrm>
+          <a:off x="0" y="0"/>
+          <a:ext cx="0" cy="0"/>
+          <a:chOff x="0" y="0"/>
+          <a:chExt cx="0" cy="0"/>
+        </a:xfrm>
+      </p:grpSpPr>
+      <p:sp>
+        <p:nvSpPr>
+          <p:cNvPr id="2" name="Slide Image Placeholder 1"/>
+          <p:cNvSpPr>
+            <a:spLocks noGrp="1" noRot="1" noChangeAspect="1"/>
+          </p:cNvSpPr>
+          <p:nvPr>
+            <p:ph type="sldImg"/>
+          </p:nvPr>
+        </p:nvSpPr>
+        <p:spPr/>
+      </p:sp>
+      <p:sp>
+        <p:nvSpPr>
+          <p:cNvPr id="3" name="Notes Placeholder 2"/>
+          <p:cNvSpPr>
+            <a:spLocks noGrp="1"/>
+          </p:cNvSpPr>
+          <p:nvPr>
+            <p:ph type="body" idx="1"/>
+          </p:nvPr>
+        </p:nvSpPr>
+        <p:spPr/>
+        <p:txBody>
+          <a:bodyPr/>
+          <a:lstStyle/>
+          <a:p>
+            <a:pPr lvl="0" indent="0" marL="0">
+              <a:buNone/>
+            </a:pPr>
+            <a:r>
+              <a:rPr/>
+              <a:t>Target: 1:05. Reading assignment and preparation.</a:t>
+            </a:r>
+          </a:p>
+        </p:txBody>
+      </p:sp>
+      <p:sp>
+        <p:nvSpPr>
+          <p:cNvPr id="4" name="Slide Number Placeholder 3"/>
+          <p:cNvSpPr>
+            <a:spLocks noGrp="1"/>
+          </p:cNvSpPr>
+          <p:nvPr>
+            <p:ph type="sldNum" sz="quarter" idx="10"/>
+          </p:nvPr>
+        </p:nvSpPr>
+        <p:spPr/>
+        <p:txBody>
+          <a:bodyPr/>
+          <a:lstStyle/>
+          <a:p>
+            <a:fld id="{18BDFEC3-8487-43E8-A154-7C12CBC1FFF2}" type="slidenum">
+              <a:rPr lang="en-US"/>
+              <a:t>30</a:t>
+            </a:fld>
+            <a:endParaRPr lang="en-US"/>
+          </a:p>
+        </p:txBody>
+      </p:sp>
+    </p:spTree>
+  </p:cSld>
+</p:notes>
+</file>
+
+<file path=ppt/notesSlides/notesSlide3.xml><?xml version="1.0" encoding="utf-8"?>
+<p:notes xmlns:a="http://schemas.openxmlformats.org/drawingml/2006/main" xmlns:r="http://schemas.openxmlformats.org/officeDocument/2006/relationships" xmlns:p="http://schemas.openxmlformats.org/presentationml/2006/main">
+  <p:cSld>
+    <p:spTree>
+      <p:nvGrpSpPr>
+        <p:cNvPr id="1" name=""/>
+        <p:cNvGrpSpPr/>
+        <p:nvPr/>
+      </p:nvGrpSpPr>
+      <p:grpSpPr>
+        <a:xfrm>
+          <a:off x="0" y="0"/>
+          <a:ext cx="0" cy="0"/>
+          <a:chOff x="0" y="0"/>
+          <a:chExt cx="0" cy="0"/>
+        </a:xfrm>
+      </p:grpSpPr>
+      <p:sp>
+        <p:nvSpPr>
+          <p:cNvPr id="2" name="Slide Image Placeholder 1"/>
+          <p:cNvSpPr>
+            <a:spLocks noGrp="1" noRot="1" noChangeAspect="1"/>
+          </p:cNvSpPr>
+          <p:nvPr>
+            <p:ph type="sldImg"/>
+          </p:nvPr>
+        </p:nvSpPr>
+        <p:spPr/>
+      </p:sp>
+      <p:sp>
+        <p:nvSpPr>
+          <p:cNvPr id="3" name="Notes Placeholder 2"/>
+          <p:cNvSpPr>
+            <a:spLocks noGrp="1"/>
+          </p:cNvSpPr>
+          <p:nvPr>
+            <p:ph type="body" idx="1"/>
+          </p:nvPr>
+        </p:nvSpPr>
+        <p:spPr/>
+        <p:txBody>
+          <a:bodyPr/>
+          <a:lstStyle/>
+          <a:p>
+            <a:pPr lvl="0" indent="0" marL="0">
+              <a:buNone/>
+            </a:pPr>
+            <a:r>
+              <a:rPr/>
+              <a:t>Target: 1:07. Emphasize that hazard is the physical event, not the damage.</a:t>
+            </a:r>
+          </a:p>
+        </p:txBody>
+      </p:sp>
+      <p:sp>
+        <p:nvSpPr>
+          <p:cNvPr id="4" name="Slide Number Placeholder 3"/>
+          <p:cNvSpPr>
+            <a:spLocks noGrp="1"/>
+          </p:cNvSpPr>
+          <p:nvPr>
+            <p:ph type="sldNum" sz="quarter" idx="10"/>
+          </p:nvPr>
+        </p:nvSpPr>
+        <p:spPr/>
+        <p:txBody>
+          <a:bodyPr/>
+          <a:lstStyle/>
+          <a:p>
+            <a:fld id="{18BDFEC3-8487-43E8-A154-7C12CBC1FFF2}" type="slidenum">
+              <a:rPr lang="en-US"/>
+              <a:t>7</a:t>
+            </a:fld>
+            <a:endParaRPr lang="en-US"/>
+          </a:p>
+        </p:txBody>
+      </p:sp>
+    </p:spTree>
+  </p:cSld>
+</p:notes>
+</file>
+
+<file path=ppt/notesSlides/notesSlide4.xml><?xml version="1.0" encoding="utf-8"?>
+<p:notes xmlns:a="http://schemas.openxmlformats.org/drawingml/2006/main" xmlns:r="http://schemas.openxmlformats.org/officeDocument/2006/relationships" xmlns:p="http://schemas.openxmlformats.org/presentationml/2006/main">
+  <p:cSld>
+    <p:spTree>
+      <p:nvGrpSpPr>
+        <p:cNvPr id="1" name=""/>
+        <p:cNvGrpSpPr/>
+        <p:nvPr/>
+      </p:nvGrpSpPr>
+      <p:grpSpPr>
+        <a:xfrm>
+          <a:off x="0" y="0"/>
+          <a:ext cx="0" cy="0"/>
+          <a:chOff x="0" y="0"/>
+          <a:chExt cx="0" cy="0"/>
+        </a:xfrm>
+      </p:grpSpPr>
+      <p:sp>
+        <p:nvSpPr>
+          <p:cNvPr id="2" name="Slide Image Placeholder 1"/>
+          <p:cNvSpPr>
+            <a:spLocks noGrp="1" noRot="1" noChangeAspect="1"/>
+          </p:cNvSpPr>
+          <p:nvPr>
+            <p:ph type="sldImg"/>
+          </p:nvPr>
+        </p:nvSpPr>
+        <p:spPr/>
+      </p:sp>
+      <p:sp>
+        <p:nvSpPr>
+          <p:cNvPr id="3" name="Notes Placeholder 2"/>
+          <p:cNvSpPr>
+            <a:spLocks noGrp="1"/>
+          </p:cNvSpPr>
+          <p:nvPr>
+            <p:ph type="body" idx="1"/>
+          </p:nvPr>
+        </p:nvSpPr>
+        <p:spPr/>
+        <p:txBody>
+          <a:bodyPr/>
+          <a:lstStyle/>
+          <a:p>
+            <a:pPr lvl="0" indent="0" marL="0">
+              <a:buNone/>
+            </a:pPr>
+            <a:r>
+              <a:rPr/>
+              <a:t>Target: 1:10. Exposure is about WHAT is at risk, not how vulnerable it is.</a:t>
+            </a:r>
+          </a:p>
+        </p:txBody>
+      </p:sp>
+      <p:sp>
+        <p:nvSpPr>
+          <p:cNvPr id="4" name="Slide Number Placeholder 3"/>
+          <p:cNvSpPr>
+            <a:spLocks noGrp="1"/>
+          </p:cNvSpPr>
+          <p:nvPr>
+            <p:ph type="sldNum" sz="quarter" idx="10"/>
+          </p:nvPr>
+        </p:nvSpPr>
+        <p:spPr/>
+        <p:txBody>
+          <a:bodyPr/>
+          <a:lstStyle/>
+          <a:p>
+            <a:fld id="{18BDFEC3-8487-43E8-A154-7C12CBC1FFF2}" type="slidenum">
+              <a:rPr lang="en-US"/>
+              <a:t>8</a:t>
+            </a:fld>
+            <a:endParaRPr lang="en-US"/>
+          </a:p>
+        </p:txBody>
+      </p:sp>
+    </p:spTree>
+  </p:cSld>
+</p:notes>
+</file>
+
+<file path=ppt/notesSlides/notesSlide5.xml><?xml version="1.0" encoding="utf-8"?>
+<p:notes xmlns:a="http://schemas.openxmlformats.org/drawingml/2006/main" xmlns:r="http://schemas.openxmlformats.org/officeDocument/2006/relationships" xmlns:p="http://schemas.openxmlformats.org/presentationml/2006/main">
+  <p:cSld>
+    <p:spTree>
+      <p:nvGrpSpPr>
+        <p:cNvPr id="1" name=""/>
+        <p:cNvGrpSpPr/>
+        <p:nvPr/>
+      </p:nvGrpSpPr>
+      <p:grpSpPr>
+        <a:xfrm>
+          <a:off x="0" y="0"/>
+          <a:ext cx="0" cy="0"/>
+          <a:chOff x="0" y="0"/>
+          <a:chExt cx="0" cy="0"/>
+        </a:xfrm>
+      </p:grpSpPr>
+      <p:sp>
+        <p:nvSpPr>
+          <p:cNvPr id="2" name="Slide Image Placeholder 1"/>
+          <p:cNvSpPr>
+            <a:spLocks noGrp="1" noRot="1" noChangeAspect="1"/>
+          </p:cNvSpPr>
+          <p:nvPr>
+            <p:ph type="sldImg"/>
+          </p:nvPr>
+        </p:nvSpPr>
+        <p:spPr/>
+      </p:sp>
+      <p:sp>
+        <p:nvSpPr>
+          <p:cNvPr id="3" name="Notes Placeholder 2"/>
+          <p:cNvSpPr>
+            <a:spLocks noGrp="1"/>
+          </p:cNvSpPr>
+          <p:nvPr>
+            <p:ph type="body" idx="1"/>
+          </p:nvPr>
+        </p:nvSpPr>
+        <p:spPr/>
+        <p:txBody>
+          <a:bodyPr/>
+          <a:lstStyle/>
+          <a:p>
+            <a:pPr lvl="0" indent="0" marL="0">
+              <a:buNone/>
+            </a:pPr>
+            <a:r>
+              <a:rPr/>
+              <a:t>Target: 1:13. This is where depth-damage functions come in.</a:t>
+            </a:r>
+          </a:p>
+        </p:txBody>
+      </p:sp>
+      <p:sp>
+        <p:nvSpPr>
+          <p:cNvPr id="4" name="Slide Number Placeholder 3"/>
+          <p:cNvSpPr>
+            <a:spLocks noGrp="1"/>
+          </p:cNvSpPr>
+          <p:nvPr>
+            <p:ph type="sldNum" sz="quarter" idx="10"/>
+          </p:nvPr>
+        </p:nvSpPr>
+        <p:spPr/>
+        <p:txBody>
+          <a:bodyPr/>
+          <a:lstStyle/>
+          <a:p>
+            <a:fld id="{18BDFEC3-8487-43E8-A154-7C12CBC1FFF2}" type="slidenum">
+              <a:rPr lang="en-US"/>
+              <a:t>9</a:t>
+            </a:fld>
+            <a:endParaRPr lang="en-US"/>
+          </a:p>
+        </p:txBody>
+      </p:sp>
+    </p:spTree>
+  </p:cSld>
+</p:notes>
+</file>
+
+<file path=ppt/notesSlides/notesSlide6.xml><?xml version="1.0" encoding="utf-8"?>
+<p:notes xmlns:a="http://schemas.openxmlformats.org/drawingml/2006/main" xmlns:r="http://schemas.openxmlformats.org/officeDocument/2006/relationships" xmlns:p="http://schemas.openxmlformats.org/presentationml/2006/main">
+  <p:cSld>
+    <p:spTree>
+      <p:nvGrpSpPr>
+        <p:cNvPr id="1" name=""/>
+        <p:cNvGrpSpPr/>
+        <p:nvPr/>
+      </p:nvGrpSpPr>
+      <p:grpSpPr>
+        <a:xfrm>
+          <a:off x="0" y="0"/>
+          <a:ext cx="0" cy="0"/>
+          <a:chOff x="0" y="0"/>
+          <a:chExt cx="0" cy="0"/>
+        </a:xfrm>
+      </p:grpSpPr>
+      <p:sp>
+        <p:nvSpPr>
+          <p:cNvPr id="2" name="Slide Image Placeholder 1"/>
+          <p:cNvSpPr>
+            <a:spLocks noGrp="1" noRot="1" noChangeAspect="1"/>
+          </p:cNvSpPr>
+          <p:nvPr>
+            <p:ph type="sldImg"/>
+          </p:nvPr>
+        </p:nvSpPr>
+        <p:spPr/>
+      </p:sp>
+      <p:sp>
+        <p:nvSpPr>
+          <p:cNvPr id="3" name="Notes Placeholder 2"/>
+          <p:cNvSpPr>
+            <a:spLocks noGrp="1"/>
+          </p:cNvSpPr>
+          <p:nvPr>
+            <p:ph type="body" idx="1"/>
+          </p:nvPr>
+        </p:nvSpPr>
+        <p:spPr/>
+        <p:txBody>
+          <a:bodyPr/>
+          <a:lstStyle/>
+          <a:p>
+            <a:pPr lvl="0" indent="0" marL="0">
+              <a:buNone/>
+            </a:pPr>
+            <a:r>
+              <a:rPr/>
+              <a:t>Target: 1:17. Show the Wing figure. Discuss uncertainty in these relationships.</a:t>
+            </a:r>
+          </a:p>
+        </p:txBody>
+      </p:sp>
+      <p:sp>
+        <p:nvSpPr>
+          <p:cNvPr id="4" name="Slide Number Placeholder 3"/>
+          <p:cNvSpPr>
+            <a:spLocks noGrp="1"/>
+          </p:cNvSpPr>
+          <p:nvPr>
+            <p:ph type="sldNum" sz="quarter" idx="10"/>
+          </p:nvPr>
+        </p:nvSpPr>
+        <p:spPr/>
+        <p:txBody>
+          <a:bodyPr/>
+          <a:lstStyle/>
+          <a:p>
+            <a:fld id="{18BDFEC3-8487-43E8-A154-7C12CBC1FFF2}" type="slidenum">
+              <a:rPr lang="en-US"/>
+              <a:t>10</a:t>
+            </a:fld>
+            <a:endParaRPr lang="en-US"/>
+          </a:p>
+        </p:txBody>
+      </p:sp>
+    </p:spTree>
+  </p:cSld>
+</p:notes>
+</file>
+
+<file path=ppt/notesSlides/notesSlide7.xml><?xml version="1.0" encoding="utf-8"?>
+<p:notes xmlns:a="http://schemas.openxmlformats.org/drawingml/2006/main" xmlns:r="http://schemas.openxmlformats.org/officeDocument/2006/relationships" xmlns:p="http://schemas.openxmlformats.org/presentationml/2006/main">
+  <p:cSld>
+    <p:spTree>
+      <p:nvGrpSpPr>
+        <p:cNvPr id="1" name=""/>
+        <p:cNvGrpSpPr/>
+        <p:nvPr/>
+      </p:nvGrpSpPr>
+      <p:grpSpPr>
+        <a:xfrm>
+          <a:off x="0" y="0"/>
+          <a:ext cx="0" cy="0"/>
+          <a:chOff x="0" y="0"/>
+          <a:chExt cx="0" cy="0"/>
+        </a:xfrm>
+      </p:grpSpPr>
+      <p:sp>
+        <p:nvSpPr>
+          <p:cNvPr id="2" name="Slide Image Placeholder 1"/>
+          <p:cNvSpPr>
+            <a:spLocks noGrp="1" noRot="1" noChangeAspect="1"/>
+          </p:cNvSpPr>
+          <p:nvPr>
+            <p:ph type="sldImg"/>
+          </p:nvPr>
+        </p:nvSpPr>
+        <p:spPr/>
+      </p:sp>
+      <p:sp>
+        <p:nvSpPr>
+          <p:cNvPr id="3" name="Notes Placeholder 2"/>
+          <p:cNvSpPr>
+            <a:spLocks noGrp="1"/>
+          </p:cNvSpPr>
+          <p:nvPr>
+            <p:ph type="body" idx="1"/>
+          </p:nvPr>
+        </p:nvSpPr>
+        <p:spPr/>
+        <p:txBody>
+          <a:bodyPr/>
+          <a:lstStyle/>
+          <a:p>
+            <a:pPr lvl="0" indent="0" marL="0">
+              <a:buNone/>
+            </a:pPr>
+            <a:r>
+              <a:rPr/>
+              <a:t>Target: 1:20. Pause and ask students what they notice.</a:t>
+            </a:r>
+          </a:p>
+        </p:txBody>
+      </p:sp>
+      <p:sp>
+        <p:nvSpPr>
+          <p:cNvPr id="4" name="Slide Number Placeholder 3"/>
+          <p:cNvSpPr>
+            <a:spLocks noGrp="1"/>
+          </p:cNvSpPr>
+          <p:nvPr>
+            <p:ph type="sldNum" sz="quarter" idx="10"/>
+          </p:nvPr>
+        </p:nvSpPr>
+        <p:spPr/>
+        <p:txBody>
+          <a:bodyPr/>
+          <a:lstStyle/>
+          <a:p>
+            <a:fld id="{18BDFEC3-8487-43E8-A154-7C12CBC1FFF2}" type="slidenum">
+              <a:rPr lang="en-US"/>
+              <a:t>11</a:t>
+            </a:fld>
+            <a:endParaRPr lang="en-US"/>
+          </a:p>
+        </p:txBody>
+      </p:sp>
+    </p:spTree>
+  </p:cSld>
+</p:notes>
+</file>
+
+<file path=ppt/notesSlides/notesSlide8.xml><?xml version="1.0" encoding="utf-8"?>
+<p:notes xmlns:a="http://schemas.openxmlformats.org/drawingml/2006/main" xmlns:r="http://schemas.openxmlformats.org/officeDocument/2006/relationships" xmlns:p="http://schemas.openxmlformats.org/presentationml/2006/main">
+  <p:cSld>
+    <p:spTree>
+      <p:nvGrpSpPr>
+        <p:cNvPr id="1" name=""/>
+        <p:cNvGrpSpPr/>
+        <p:nvPr/>
+      </p:nvGrpSpPr>
+      <p:grpSpPr>
+        <a:xfrm>
+          <a:off x="0" y="0"/>
+          <a:ext cx="0" cy="0"/>
+          <a:chOff x="0" y="0"/>
+          <a:chExt cx="0" cy="0"/>
+        </a:xfrm>
+      </p:grpSpPr>
+      <p:sp>
+        <p:nvSpPr>
+          <p:cNvPr id="2" name="Slide Image Placeholder 1"/>
+          <p:cNvSpPr>
+            <a:spLocks noGrp="1" noRot="1" noChangeAspect="1"/>
+          </p:cNvSpPr>
+          <p:nvPr>
+            <p:ph type="sldImg"/>
+          </p:nvPr>
+        </p:nvSpPr>
+        <p:spPr/>
+      </p:sp>
+      <p:sp>
+        <p:nvSpPr>
+          <p:cNvPr id="3" name="Notes Placeholder 2"/>
+          <p:cNvSpPr>
+            <a:spLocks noGrp="1"/>
+          </p:cNvSpPr>
+          <p:nvPr>
+            <p:ph type="body" idx="1"/>
+          </p:nvPr>
+        </p:nvSpPr>
+        <p:spPr/>
+        <p:txBody>
+          <a:bodyPr/>
+          <a:lstStyle/>
+          <a:p>
+            <a:pPr lvl="0" indent="0" marL="0">
+              <a:buNone/>
+            </a:pPr>
+            <a:r>
+              <a:rPr/>
+              <a:t>Target: 1:23. Core equation for the course. Write on board.</a:t>
+            </a:r>
+          </a:p>
+        </p:txBody>
+      </p:sp>
+      <p:sp>
+        <p:nvSpPr>
+          <p:cNvPr id="4" name="Slide Number Placeholder 3"/>
+          <p:cNvSpPr>
+            <a:spLocks noGrp="1"/>
+          </p:cNvSpPr>
+          <p:nvPr>
+            <p:ph type="sldNum" sz="quarter" idx="10"/>
+          </p:nvPr>
+        </p:nvSpPr>
+        <p:spPr/>
+        <p:txBody>
+          <a:bodyPr/>
+          <a:lstStyle/>
+          <a:p>
+            <a:fld id="{18BDFEC3-8487-43E8-A154-7C12CBC1FFF2}" type="slidenum">
+              <a:rPr lang="en-US"/>
+              <a:t>12</a:t>
+            </a:fld>
+            <a:endParaRPr lang="en-US"/>
+          </a:p>
+        </p:txBody>
+      </p:sp>
+    </p:spTree>
+  </p:cSld>
+</p:notes>
+</file>
+
+<file path=ppt/notesSlides/notesSlide9.xml><?xml version="1.0" encoding="utf-8"?>
+<p:notes xmlns:a="http://schemas.openxmlformats.org/drawingml/2006/main" xmlns:r="http://schemas.openxmlformats.org/officeDocument/2006/relationships" xmlns:p="http://schemas.openxmlformats.org/presentationml/2006/main">
+  <p:cSld>
+    <p:spTree>
+      <p:nvGrpSpPr>
+        <p:cNvPr id="1" name=""/>
+        <p:cNvGrpSpPr/>
+        <p:nvPr/>
+      </p:nvGrpSpPr>
+      <p:grpSpPr>
+        <a:xfrm>
+          <a:off x="0" y="0"/>
+          <a:ext cx="0" cy="0"/>
+          <a:chOff x="0" y="0"/>
+          <a:chExt cx="0" cy="0"/>
+        </a:xfrm>
+      </p:grpSpPr>
+      <p:sp>
+        <p:nvSpPr>
+          <p:cNvPr id="2" name="Slide Image Placeholder 1"/>
+          <p:cNvSpPr>
+            <a:spLocks noGrp="1" noRot="1" noChangeAspect="1"/>
+          </p:cNvSpPr>
+          <p:nvPr>
+            <p:ph type="sldImg"/>
+          </p:nvPr>
+        </p:nvSpPr>
+        <p:spPr/>
+      </p:sp>
+      <p:sp>
+        <p:nvSpPr>
+          <p:cNvPr id="3" name="Notes Placeholder 2"/>
+          <p:cNvSpPr>
+            <a:spLocks noGrp="1"/>
+          </p:cNvSpPr>
+          <p:nvPr>
+            <p:ph type="body" idx="1"/>
+          </p:nvPr>
+        </p:nvSpPr>
+        <p:spPr/>
+        <p:txBody>
+          <a:bodyPr/>
+          <a:lstStyle/>
+          <a:p>
+            <a:pPr lvl="0" indent="0" marL="0">
+              <a:buNone/>
+            </a:pPr>
+            <a:r>
+              <a:rPr/>
+              <a:t>Target: 1:26. Quick review. Students should recognize this from week 1.</a:t>
+            </a:r>
+          </a:p>
+        </p:txBody>
+      </p:sp>
+      <p:sp>
+        <p:nvSpPr>
+          <p:cNvPr id="4" name="Slide Number Placeholder 3"/>
+          <p:cNvSpPr>
+            <a:spLocks noGrp="1"/>
+          </p:cNvSpPr>
+          <p:nvPr>
+            <p:ph type="sldNum" sz="quarter" idx="10"/>
+          </p:nvPr>
+        </p:nvSpPr>
+        <p:spPr/>
+        <p:txBody>
+          <a:bodyPr/>
+          <a:lstStyle/>
+          <a:p>
+            <a:fld id="{18BDFEC3-8487-43E8-A154-7C12CBC1FFF2}" type="slidenum">
+              <a:rPr lang="en-US"/>
+              <a:t>14</a:t>
+            </a:fld>
+            <a:endParaRPr lang="en-US"/>
+          </a:p>
+        </p:txBody>
+      </p:sp>
+    </p:spTree>
+  </p:cSld>
+</p:notes>
 </file>
 
 <file path=ppt/slideLayouts/slideLayout1.xml><?xml version="1.0" encoding="utf-8"?>
@@ -3190,6 +5372,1563 @@
 </p:sld>
 </file>
 
+<file path=ppt/slides/slide10.xml><?xml version="1.0" encoding="utf-8"?>
+<p:sld xmlns:a="http://schemas.openxmlformats.org/drawingml/2006/main" xmlns:r="http://schemas.openxmlformats.org/officeDocument/2006/relationships" xmlns:p="http://schemas.openxmlformats.org/presentationml/2006/main">
+  <p:cSld>
+    <p:spTree>
+      <p:nvGrpSpPr>
+        <p:cNvPr id="1" name=""/>
+        <p:cNvGrpSpPr/>
+        <p:nvPr/>
+      </p:nvGrpSpPr>
+      <p:grpSpPr>
+        <a:xfrm>
+          <a:off x="0" y="0"/>
+          <a:ext cx="0" cy="0"/>
+          <a:chOff x="0" y="0"/>
+          <a:chExt cx="0" cy="0"/>
+        </a:xfrm>
+      </p:grpSpPr>
+      <p:sp>
+        <p:nvSpPr>
+          <p:cNvPr id="2" name="Title 1"/>
+          <p:cNvSpPr>
+            <a:spLocks noGrp="1"/>
+          </p:cNvSpPr>
+          <p:nvPr>
+            <p:ph type="title"/>
+          </p:nvPr>
+        </p:nvSpPr>
+        <p:spPr/>
+        <p:txBody>
+          <a:bodyPr/>
+          <a:lstStyle/>
+          <a:p>
+            <a:pPr lvl="0" indent="0" marL="0">
+              <a:buNone/>
+            </a:pPr>
+            <a:r>
+              <a:rPr/>
+              <a:t>Depth-Damage Functions</a:t>
+            </a:r>
+          </a:p>
+        </p:txBody>
+      </p:sp>
+      <p:pic>
+        <p:nvPicPr>
+          <p:cNvPr descr="wing_vulnerability_2020_fig1.jpg" id="0" name="Picture 1"/>
+          <p:cNvPicPr>
+            <a:picLocks noGrp="1" noChangeAspect="1"/>
+          </p:cNvPicPr>
+          <p:nvPr/>
+        </p:nvPicPr>
+        <p:blipFill>
+          <a:blip r:embed="rId3"/>
+          <a:stretch>
+            <a:fillRect/>
+          </a:stretch>
+        </p:blipFill>
+        <p:spPr bwMode="auto">
+          <a:xfrm>
+            <a:off x="2311400" y="1193800"/>
+            <a:ext cx="4508500" cy="2882900"/>
+          </a:xfrm>
+          <a:prstGeom prst="rect">
+            <a:avLst/>
+          </a:prstGeom>
+          <a:noFill/>
+          <a:ln w="9525">
+            <a:noFill/>
+            <a:headEnd/>
+            <a:tailEnd/>
+          </a:ln>
+        </p:spPr>
+      </p:pic>
+      <p:sp>
+        <p:nvSpPr>
+          <p:cNvPr id="1" name="TextBox 3"/>
+          <p:cNvSpPr txBox="1"/>
+          <p:nvPr/>
+        </p:nvSpPr>
+        <p:spPr>
+          <a:xfrm>
+            <a:off x="457200" y="4076700"/>
+            <a:ext cx="8229600" cy="508000"/>
+          </a:xfrm>
+          <a:prstGeom prst="rect">
+            <a:avLst/>
+          </a:prstGeom>
+          <a:noFill/>
+        </p:spPr>
+        <p:txBody>
+          <a:bodyPr/>
+          <a:lstStyle/>
+          <a:p>
+            <a:pPr lvl="0" indent="0" marL="0" algn="ctr">
+              <a:buNone/>
+            </a:pPr>
+            <a:r>
+              <a:rPr/>
+              <a:t>Figure 1: Empirical depth-damage relationships from NFIP claims data. Boxplots show Wing et al. (2020) analysis; lines show USACE depth-damage curves.</a:t>
+            </a:r>
+          </a:p>
+        </p:txBody>
+      </p:sp>
+    </p:spTree>
+  </p:cSld>
+</p:sld>
+</file>
+
+<file path=ppt/slides/slide11.xml><?xml version="1.0" encoding="utf-8"?>
+<p:sld xmlns:a="http://schemas.openxmlformats.org/drawingml/2006/main" xmlns:r="http://schemas.openxmlformats.org/officeDocument/2006/relationships" xmlns:p="http://schemas.openxmlformats.org/presentationml/2006/main">
+  <p:cSld>
+    <p:spTree>
+      <p:nvGrpSpPr>
+        <p:cNvPr id="1" name=""/>
+        <p:cNvGrpSpPr/>
+        <p:nvPr/>
+      </p:nvGrpSpPr>
+      <p:grpSpPr>
+        <a:xfrm>
+          <a:off x="0" y="0"/>
+          <a:ext cx="0" cy="0"/>
+          <a:chOff x="0" y="0"/>
+          <a:chExt cx="0" cy="0"/>
+        </a:xfrm>
+      </p:grpSpPr>
+      <p:sp>
+        <p:nvSpPr>
+          <p:cNvPr id="2" name="Title 1"/>
+          <p:cNvSpPr>
+            <a:spLocks noGrp="1"/>
+          </p:cNvSpPr>
+          <p:nvPr>
+            <p:ph type="title"/>
+          </p:nvPr>
+        </p:nvSpPr>
+        <p:spPr/>
+        <p:txBody>
+          <a:bodyPr/>
+          <a:lstStyle/>
+          <a:p>
+            <a:pPr lvl="0" indent="0" marL="0">
+              <a:buNone/>
+            </a:pPr>
+            <a:r>
+              <a:rPr/>
+              <a:t>Key Observations</a:t>
+            </a:r>
+          </a:p>
+        </p:txBody>
+      </p:sp>
+      <p:sp>
+        <p:nvSpPr>
+          <p:cNvPr id="3" name="Content Placeholder 2"/>
+          <p:cNvSpPr>
+            <a:spLocks noGrp="1"/>
+          </p:cNvSpPr>
+          <p:nvPr>
+            <p:ph idx="1"/>
+          </p:nvPr>
+        </p:nvSpPr>
+        <p:spPr/>
+        <p:txBody>
+          <a:bodyPr/>
+          <a:lstStyle/>
+          <a:p>
+            <a:pPr lvl="0" indent="0" marL="0">
+              <a:buNone/>
+            </a:pPr>
+            <a:r>
+              <a:rPr/>
+              <a:t>From the depth-damage data:</a:t>
+            </a:r>
+          </a:p>
+          <a:p>
+            <a:pPr lvl="0"/>
+            <a:r>
+              <a:rPr/>
+              <a:t>Damage increases with depth (obvious)</a:t>
+            </a:r>
+          </a:p>
+          <a:p>
+            <a:pPr lvl="0"/>
+            <a:r>
+              <a:rPr b="1"/>
+              <a:t>Huge uncertainty</a:t>
+            </a:r>
+            <a:r>
+              <a:rPr/>
+              <a:t> at any given depth</a:t>
+            </a:r>
+          </a:p>
+          <a:p>
+            <a:pPr lvl="0"/>
+            <a:r>
+              <a:rPr/>
+              <a:t>Empirical data differs from engineering curves</a:t>
+            </a:r>
+          </a:p>
+          <a:p>
+            <a:pPr lvl="0"/>
+            <a:r>
+              <a:rPr/>
+              <a:t>First foot of water causes significant damage</a:t>
+            </a:r>
+          </a:p>
+        </p:txBody>
+      </p:sp>
+    </p:spTree>
+  </p:cSld>
+  <p:timing>
+    <p:tnLst>
+      <p:par>
+        <p:cTn id="1" dur="indefinite" restart="never" nodeType="tmRoot">
+          <p:childTnLst>
+            <p:seq concurrent="1" nextAc="seek">
+              <p:cTn id="2" dur="indefinite" nodeType="mainSeq">
+                <p:childTnLst>
+                  <p:par>
+                    <p:cTn id="3" fill="hold">
+                      <p:stCondLst>
+                        <p:cond delay="indefinite"/>
+                      </p:stCondLst>
+                      <p:childTnLst>
+                        <p:par>
+                          <p:cTn id="4" fill="hold">
+                            <p:stCondLst>
+                              <p:cond delay="0"/>
+                            </p:stCondLst>
+                            <p:childTnLst>
+                              <p:par>
+                                <p:cTn id="5" presetID="1" presetClass="entr" presetSubtype="0" fill="hold" grpId="0" nodeType="clickEffect">
+                                  <p:stCondLst>
+                                    <p:cond delay="0"/>
+                                  </p:stCondLst>
+                                  <p:childTnLst>
+                                    <p:set>
+                                      <p:cBhvr>
+                                        <p:cTn id="6" dur="1" fill="hold">
+                                          <p:stCondLst>
+                                            <p:cond delay="0"/>
+                                          </p:stCondLst>
+                                        </p:cTn>
+                                        <p:tgtEl>
+                                          <p:spTgt spid="3">
+                                            <p:txEl>
+                                              <p:pRg st="1" end="1"/>
+                                            </p:txEl>
+                                          </p:spTgt>
+                                        </p:tgtEl>
+                                        <p:attrNameLst>
+                                          <p:attrName>style.visibility</p:attrName>
+                                        </p:attrNameLst>
+                                      </p:cBhvr>
+                                      <p:to>
+                                        <p:strVal val="visible"/>
+                                      </p:to>
+                                    </p:set>
+                                  </p:childTnLst>
+                                </p:cTn>
+                              </p:par>
+                            </p:childTnLst>
+                          </p:cTn>
+                        </p:par>
+                      </p:childTnLst>
+                    </p:cTn>
+                  </p:par>
+                  <p:par>
+                    <p:cTn id="7" fill="hold">
+                      <p:stCondLst>
+                        <p:cond delay="indefinite"/>
+                      </p:stCondLst>
+                      <p:childTnLst>
+                        <p:par>
+                          <p:cTn id="8" fill="hold">
+                            <p:stCondLst>
+                              <p:cond delay="0"/>
+                            </p:stCondLst>
+                            <p:childTnLst>
+                              <p:par>
+                                <p:cTn id="9" presetID="1" presetClass="entr" presetSubtype="0" fill="hold" grpId="0" nodeType="clickEffect">
+                                  <p:stCondLst>
+                                    <p:cond delay="0"/>
+                                  </p:stCondLst>
+                                  <p:childTnLst>
+                                    <p:set>
+                                      <p:cBhvr>
+                                        <p:cTn id="10" dur="1" fill="hold">
+                                          <p:stCondLst>
+                                            <p:cond delay="0"/>
+                                          </p:stCondLst>
+                                        </p:cTn>
+                                        <p:tgtEl>
+                                          <p:spTgt spid="3">
+                                            <p:txEl>
+                                              <p:pRg st="2" end="2"/>
+                                            </p:txEl>
+                                          </p:spTgt>
+                                        </p:tgtEl>
+                                        <p:attrNameLst>
+                                          <p:attrName>style.visibility</p:attrName>
+                                        </p:attrNameLst>
+                                      </p:cBhvr>
+                                      <p:to>
+                                        <p:strVal val="visible"/>
+                                      </p:to>
+                                    </p:set>
+                                  </p:childTnLst>
+                                </p:cTn>
+                              </p:par>
+                            </p:childTnLst>
+                          </p:cTn>
+                        </p:par>
+                      </p:childTnLst>
+                    </p:cTn>
+                  </p:par>
+                  <p:par>
+                    <p:cTn id="11" fill="hold">
+                      <p:stCondLst>
+                        <p:cond delay="indefinite"/>
+                      </p:stCondLst>
+                      <p:childTnLst>
+                        <p:par>
+                          <p:cTn id="12" fill="hold">
+                            <p:stCondLst>
+                              <p:cond delay="0"/>
+                            </p:stCondLst>
+                            <p:childTnLst>
+                              <p:par>
+                                <p:cTn id="13" presetID="1" presetClass="entr" presetSubtype="0" fill="hold" grpId="0" nodeType="clickEffect">
+                                  <p:stCondLst>
+                                    <p:cond delay="0"/>
+                                  </p:stCondLst>
+                                  <p:childTnLst>
+                                    <p:set>
+                                      <p:cBhvr>
+                                        <p:cTn id="14" dur="1" fill="hold">
+                                          <p:stCondLst>
+                                            <p:cond delay="0"/>
+                                          </p:stCondLst>
+                                        </p:cTn>
+                                        <p:tgtEl>
+                                          <p:spTgt spid="3">
+                                            <p:txEl>
+                                              <p:pRg st="3" end="3"/>
+                                            </p:txEl>
+                                          </p:spTgt>
+                                        </p:tgtEl>
+                                        <p:attrNameLst>
+                                          <p:attrName>style.visibility</p:attrName>
+                                        </p:attrNameLst>
+                                      </p:cBhvr>
+                                      <p:to>
+                                        <p:strVal val="visible"/>
+                                      </p:to>
+                                    </p:set>
+                                  </p:childTnLst>
+                                </p:cTn>
+                              </p:par>
+                            </p:childTnLst>
+                          </p:cTn>
+                        </p:par>
+                      </p:childTnLst>
+                    </p:cTn>
+                  </p:par>
+                  <p:par>
+                    <p:cTn id="15" fill="hold">
+                      <p:stCondLst>
+                        <p:cond delay="indefinite"/>
+                      </p:stCondLst>
+                      <p:childTnLst>
+                        <p:par>
+                          <p:cTn id="16" fill="hold">
+                            <p:stCondLst>
+                              <p:cond delay="0"/>
+                            </p:stCondLst>
+                            <p:childTnLst>
+                              <p:par>
+                                <p:cTn id="17" presetID="1" presetClass="entr" presetSubtype="0" fill="hold" grpId="0" nodeType="clickEffect">
+                                  <p:stCondLst>
+                                    <p:cond delay="0"/>
+                                  </p:stCondLst>
+                                  <p:childTnLst>
+                                    <p:set>
+                                      <p:cBhvr>
+                                        <p:cTn id="18" dur="1" fill="hold">
+                                          <p:stCondLst>
+                                            <p:cond delay="0"/>
+                                          </p:stCondLst>
+                                        </p:cTn>
+                                        <p:tgtEl>
+                                          <p:spTgt spid="3">
+                                            <p:txEl>
+                                              <p:pRg st="4" end="4"/>
+                                            </p:txEl>
+                                          </p:spTgt>
+                                        </p:tgtEl>
+                                        <p:attrNameLst>
+                                          <p:attrName>style.visibility</p:attrName>
+                                        </p:attrNameLst>
+                                      </p:cBhvr>
+                                      <p:to>
+                                        <p:strVal val="visible"/>
+                                      </p:to>
+                                    </p:set>
+                                  </p:childTnLst>
+                                </p:cTn>
+                              </p:par>
+                            </p:childTnLst>
+                          </p:cTn>
+                        </p:par>
+                      </p:childTnLst>
+                    </p:cTn>
+                  </p:par>
+                </p:childTnLst>
+              </p:cTn>
+              <p:prevCondLst>
+                <p:cond evt="onPrev" delay="0">
+                  <p:tgtEl>
+                    <p:sldTgt/>
+                  </p:tgtEl>
+                </p:cond>
+              </p:prevCondLst>
+              <p:nextCondLst>
+                <p:cond evt="onNext" delay="0">
+                  <p:tgtEl>
+                    <p:sldTgt/>
+                  </p:tgtEl>
+                </p:cond>
+              </p:nextCondLst>
+            </p:seq>
+          </p:childTnLst>
+        </p:cTn>
+      </p:par>
+    </p:tnLst>
+    <p:bldLst>
+      <p:bldP spid="3" grpId="0" uiExpand="1" build="p"/>
+    </p:bldLst>
+  </p:timing>
+</p:sld>
+</file>
+
+<file path=ppt/slides/slide12.xml><?xml version="1.0" encoding="utf-8"?>
+<p:sld xmlns:a="http://schemas.openxmlformats.org/drawingml/2006/main" xmlns:r="http://schemas.openxmlformats.org/officeDocument/2006/relationships" xmlns:p="http://schemas.openxmlformats.org/presentationml/2006/main">
+  <p:cSld>
+    <p:spTree>
+      <p:nvGrpSpPr>
+        <p:cNvPr id="1" name=""/>
+        <p:cNvGrpSpPr/>
+        <p:nvPr/>
+      </p:nvGrpSpPr>
+      <p:grpSpPr>
+        <a:xfrm>
+          <a:off x="0" y="0"/>
+          <a:ext cx="0" cy="0"/>
+          <a:chOff x="0" y="0"/>
+          <a:chExt cx="0" cy="0"/>
+        </a:xfrm>
+      </p:grpSpPr>
+      <p:sp>
+        <p:nvSpPr>
+          <p:cNvPr id="2" name="Title 1"/>
+          <p:cNvSpPr>
+            <a:spLocks noGrp="1"/>
+          </p:cNvSpPr>
+          <p:nvPr>
+            <p:ph type="title"/>
+          </p:nvPr>
+        </p:nvSpPr>
+        <p:spPr/>
+        <p:txBody>
+          <a:bodyPr/>
+          <a:lstStyle/>
+          <a:p>
+            <a:pPr lvl="0" indent="0" marL="0">
+              <a:buNone/>
+            </a:pPr>
+            <a:r>
+              <a:rPr/>
+              <a:t>Risk = f(Hazard, Exposure, Vulnerability)</a:t>
+            </a:r>
+          </a:p>
+        </p:txBody>
+      </p:sp>
+      <mc:AlternateContent xmlns:mc="http://schemas.openxmlformats.org/markup-compatibility/2006">
+        <mc:Choice xmlns:a14="http://schemas.microsoft.com/office/drawing/2010/main" Requires="a14">
+          <p:sp>
+            <p:nvSpPr>
+              <p:cNvPr id="3" name="Content Placeholder 2"/>
+              <p:cNvSpPr>
+                <a:spLocks noGrp="1"/>
+              </p:cNvSpPr>
+              <p:nvPr>
+                <p:ph idx="1"/>
+              </p:nvPr>
+            </p:nvSpPr>
+            <p:spPr/>
+            <p:txBody>
+              <a:bodyPr/>
+              <a:lstStyle/>
+              <a:p>
+                <a:pPr lvl="0" indent="0" marL="0">
+                  <a:buNone/>
+                </a:pPr>
+                <a:r>
+                  <a:rPr/>
+                  <a:t>The fundamental equation:</a:t>
+                </a:r>
+              </a:p>
+              <a:p>
+                <a:pPr lvl="0" indent="0" marL="0">
+                  <a:buNone/>
+                </a:pPr>
+                <a14:m>
+                  <m:oMathPara xmlns:m="http://schemas.openxmlformats.org/officeDocument/2006/math">
+                    <m:oMathParaPr>
+                      <m:jc m:val="center"/>
+                    </m:oMathParaPr>
+                    <m:oMath>
+                      <m:r>
+                        <m:rPr>
+                          <m:nor/>
+                          <m:sty m:val="p"/>
+                        </m:rPr>
+                        <m:t>Damage</m:t>
+                      </m:r>
+                      <m:r>
+                        <m:rPr>
+                          <m:sty m:val="p"/>
+                        </m:rPr>
+                        <m:t>=</m:t>
+                      </m:r>
+                      <m:r>
+                        <m:rPr>
+                          <m:nor/>
+                          <m:sty m:val="p"/>
+                        </m:rPr>
+                        <m:t>Vulnerability</m:t>
+                      </m:r>
+                      <m:d>
+                        <m:dPr>
+                          <m:begChr m:val="("/>
+                          <m:sepChr m:val=""/>
+                          <m:endChr m:val=")"/>
+                          <m:grow/>
+                        </m:dPr>
+                        <m:e>
+                          <m:r>
+                            <m:t>h</m:t>
+                          </m:r>
+                        </m:e>
+                      </m:d>
+                      <m:r>
+                        <m:rPr>
+                          <m:sty m:val="p"/>
+                        </m:rPr>
+                        <m:t>×</m:t>
+                      </m:r>
+                      <m:r>
+                        <m:rPr>
+                          <m:nor/>
+                          <m:sty m:val="p"/>
+                        </m:rPr>
+                        <m:t>Exposure</m:t>
+                      </m:r>
+                    </m:oMath>
+                  </m:oMathPara>
+                </a14:m>
+              </a:p>
+              <a:p>
+                <a:pPr lvl="0" indent="0" marL="0">
+                  <a:buNone/>
+                </a:pPr>
+                <a:r>
+                  <a:rPr/>
+                  <a:t>where </a:t>
+                </a:r>
+                <a14:m>
+                  <m:oMath xmlns:m="http://schemas.openxmlformats.org/officeDocument/2006/math">
+                    <m:r>
+                      <m:t>h</m:t>
+                    </m:r>
+                  </m:oMath>
+                </a14:m>
+                <a:r>
+                  <a:rPr/>
+                  <a:t> is the hazard intensity (e.g., flood depth).</a:t>
+                </a:r>
+              </a:p>
+              <a:p>
+                <a:pPr lvl="0" indent="0" marL="0">
+                  <a:buNone/>
+                </a:pPr>
+                <a:r>
+                  <a:rPr/>
+                  <a:t>For </a:t>
+                </a:r>
+                <a:r>
+                  <a:rPr b="1"/>
+                  <a:t>expected damages</a:t>
+                </a:r>
+                <a:r>
+                  <a:rPr/>
+                  <a:t>, we integrate over the hazard distribution:</a:t>
+                </a:r>
+              </a:p>
+              <a:p>
+                <a:pPr lvl="0" indent="0" marL="0">
+                  <a:buNone/>
+                </a:pPr>
+                <a14:m>
+                  <m:oMathPara xmlns:m="http://schemas.openxmlformats.org/officeDocument/2006/math">
+                    <m:oMathParaPr>
+                      <m:jc m:val="center"/>
+                    </m:oMathParaPr>
+                    <m:oMath>
+                      <m:r>
+                        <m:t>E</m:t>
+                      </m:r>
+                      <m:d>
+                        <m:dPr>
+                          <m:begChr m:val="["/>
+                          <m:sepChr m:val=""/>
+                          <m:endChr m:val="]"/>
+                          <m:grow/>
+                        </m:dPr>
+                        <m:e>
+                          <m:r>
+                            <m:rPr>
+                              <m:nor/>
+                              <m:sty m:val="p"/>
+                            </m:rPr>
+                            <m:t>Damage</m:t>
+                          </m:r>
+                        </m:e>
+                      </m:d>
+                      <m:r>
+                        <m:rPr>
+                          <m:sty m:val="p"/>
+                        </m:rPr>
+                        <m:t>=</m:t>
+                      </m:r>
+                      <m:r>
+                        <m:rPr>
+                          <m:sty m:val="p"/>
+                        </m:rPr>
+                        <m:t>∫</m:t>
+                      </m:r>
+                      <m:r>
+                        <m:rPr>
+                          <m:nor/>
+                          <m:sty m:val="p"/>
+                        </m:rPr>
+                        <m:t>Vulnerability</m:t>
+                      </m:r>
+                      <m:d>
+                        <m:dPr>
+                          <m:begChr m:val="("/>
+                          <m:sepChr m:val=""/>
+                          <m:endChr m:val=")"/>
+                          <m:grow/>
+                        </m:dPr>
+                        <m:e>
+                          <m:r>
+                            <m:t>h</m:t>
+                          </m:r>
+                        </m:e>
+                      </m:d>
+                      <m:r>
+                        <m:rPr>
+                          <m:sty m:val="p"/>
+                        </m:rPr>
+                        <m:t>×</m:t>
+                      </m:r>
+                      <m:r>
+                        <m:rPr>
+                          <m:nor/>
+                          <m:sty m:val="p"/>
+                        </m:rPr>
+                        <m:t>Exposure</m:t>
+                      </m:r>
+                      <m:r>
+                        <m:rPr>
+                          <m:sty m:val="p"/>
+                        </m:rPr>
+                        <m:t>×</m:t>
+                      </m:r>
+                      <m:r>
+                        <m:t>p</m:t>
+                      </m:r>
+                      <m:d>
+                        <m:dPr>
+                          <m:begChr m:val="("/>
+                          <m:sepChr m:val=""/>
+                          <m:endChr m:val=")"/>
+                          <m:grow/>
+                        </m:dPr>
+                        <m:e>
+                          <m:r>
+                            <m:t>h</m:t>
+                          </m:r>
+                        </m:e>
+                      </m:d>
+                      <m:r>
+                        <m:t> </m:t>
+                      </m:r>
+                      <m:r>
+                        <m:t>d</m:t>
+                      </m:r>
+                      <m:r>
+                        <m:t>h</m:t>
+                      </m:r>
+                    </m:oMath>
+                  </m:oMathPara>
+                </a14:m>
+              </a:p>
+            </p:txBody>
+          </p:sp>
+        </mc:Choice>
+      </mc:AlternateContent>
+    </p:spTree>
+  </p:cSld>
+</p:sld>
+</file>
+
+<file path=ppt/slides/slide13.xml><?xml version="1.0" encoding="utf-8"?>
+<p:sld xmlns:a="http://schemas.openxmlformats.org/drawingml/2006/main" xmlns:r="http://schemas.openxmlformats.org/officeDocument/2006/relationships" xmlns:p="http://schemas.openxmlformats.org/presentationml/2006/main">
+  <p:cSld>
+    <p:spTree>
+      <p:nvGrpSpPr>
+        <p:cNvPr id="1" name=""/>
+        <p:cNvGrpSpPr/>
+        <p:nvPr/>
+      </p:nvGrpSpPr>
+      <p:grpSpPr>
+        <a:xfrm>
+          <a:off x="0" y="0"/>
+          <a:ext cx="0" cy="0"/>
+          <a:chOff x="0" y="0"/>
+          <a:chExt cx="0" cy="0"/>
+        </a:xfrm>
+      </p:grpSpPr>
+      <p:sp>
+        <p:nvSpPr>
+          <p:cNvPr id="2" name="Title 1"/>
+          <p:cNvSpPr>
+            <a:spLocks noGrp="1"/>
+          </p:cNvSpPr>
+          <p:nvPr>
+            <p:ph type="title"/>
+          </p:nvPr>
+        </p:nvSpPr>
+        <p:spPr>
+          <a:xfrm>
+            <a:off x="722313" y="3305176"/>
+            <a:ext cx="7772400" cy="1021556"/>
+          </a:xfrm>
+        </p:spPr>
+        <p:txBody>
+          <a:bodyPr/>
+          <a:lstStyle/>
+          <a:p>
+            <a:pPr lvl="0" indent="0" marL="0">
+              <a:buNone/>
+            </a:pPr>
+            <a:r>
+              <a:rPr/>
+              <a:t>XLRM Framework</a:t>
+            </a:r>
+          </a:p>
+        </p:txBody>
+      </p:sp>
+    </p:spTree>
+  </p:cSld>
+</p:sld>
+</file>
+
+<file path=ppt/slides/slide14.xml><?xml version="1.0" encoding="utf-8"?>
+<p:sld xmlns:a="http://schemas.openxmlformats.org/drawingml/2006/main" xmlns:r="http://schemas.openxmlformats.org/officeDocument/2006/relationships" xmlns:p="http://schemas.openxmlformats.org/presentationml/2006/main">
+  <p:cSld>
+    <p:spTree>
+      <p:nvGrpSpPr>
+        <p:cNvPr id="1" name=""/>
+        <p:cNvGrpSpPr/>
+        <p:nvPr/>
+      </p:nvGrpSpPr>
+      <p:grpSpPr>
+        <a:xfrm>
+          <a:off x="0" y="0"/>
+          <a:ext cx="0" cy="0"/>
+          <a:chOff x="0" y="0"/>
+          <a:chExt cx="0" cy="0"/>
+        </a:xfrm>
+      </p:grpSpPr>
+      <p:sp>
+        <p:nvSpPr>
+          <p:cNvPr id="2" name="Title 1"/>
+          <p:cNvSpPr>
+            <a:spLocks noGrp="1"/>
+          </p:cNvSpPr>
+          <p:nvPr>
+            <p:ph type="title"/>
+          </p:nvPr>
+        </p:nvSpPr>
+        <p:spPr/>
+        <p:txBody>
+          <a:bodyPr/>
+          <a:lstStyle/>
+          <a:p>
+            <a:pPr lvl="0" indent="0" marL="0">
+              <a:buNone/>
+            </a:pPr>
+            <a:r>
+              <a:rPr/>
+              <a:t>Review from Week 1</a:t>
+            </a:r>
+          </a:p>
+        </p:txBody>
+      </p:sp>
+      <p:sp>
+        <p:nvSpPr>
+          <p:cNvPr id="3" name="Content Placeholder 2"/>
+          <p:cNvSpPr>
+            <a:spLocks noGrp="1"/>
+          </p:cNvSpPr>
+          <p:nvPr>
+            <p:ph idx="1"/>
+          </p:nvPr>
+        </p:nvSpPr>
+        <p:spPr/>
+        <p:txBody>
+          <a:bodyPr/>
+          <a:lstStyle/>
+          <a:p>
+            <a:pPr lvl="0" indent="0" marL="0">
+              <a:buNone/>
+            </a:pPr>
+            <a:r>
+              <a:rPr/>
+              <a:t>XLRM helps us structure decision problems under uncertainty:</a:t>
+            </a:r>
+          </a:p>
+          <a:p>
+            <a:pPr lvl="0"/>
+            <a:r>
+              <a:rPr b="1"/>
+              <a:t>X</a:t>
+            </a:r>
+            <a:r>
+              <a:rPr/>
+              <a:t>: e</a:t>
+            </a:r>
+            <a:r>
+              <a:rPr b="1"/>
+              <a:t>X</a:t>
+            </a:r>
+            <a:r>
+              <a:rPr/>
+              <a:t>ogenous uncertainties (things we can’t control)</a:t>
+            </a:r>
+          </a:p>
+          <a:p>
+            <a:pPr lvl="0"/>
+            <a:r>
+              <a:rPr b="1"/>
+              <a:t>L</a:t>
+            </a:r>
+            <a:r>
+              <a:rPr/>
+              <a:t>: </a:t>
+            </a:r>
+            <a:r>
+              <a:rPr b="1"/>
+              <a:t>L</a:t>
+            </a:r>
+            <a:r>
+              <a:rPr/>
+              <a:t>evers (things we can control)</a:t>
+            </a:r>
+          </a:p>
+          <a:p>
+            <a:pPr lvl="0"/>
+            <a:r>
+              <a:rPr b="1"/>
+              <a:t>R</a:t>
+            </a:r>
+            <a:r>
+              <a:rPr/>
+              <a:t>: </a:t>
+            </a:r>
+            <a:r>
+              <a:rPr b="1"/>
+              <a:t>R</a:t>
+            </a:r>
+            <a:r>
+              <a:rPr/>
+              <a:t>elationships (models connecting X and L to outcomes)</a:t>
+            </a:r>
+          </a:p>
+          <a:p>
+            <a:pPr lvl="0"/>
+            <a:r>
+              <a:rPr b="1"/>
+              <a:t>M</a:t>
+            </a:r>
+            <a:r>
+              <a:rPr/>
+              <a:t>: </a:t>
+            </a:r>
+            <a:r>
+              <a:rPr b="1"/>
+              <a:t>M</a:t>
+            </a:r>
+            <a:r>
+              <a:rPr/>
+              <a:t>etrics (how we measure success)</a:t>
+            </a:r>
+          </a:p>
+        </p:txBody>
+      </p:sp>
+    </p:spTree>
+  </p:cSld>
+</p:sld>
+</file>
+
+<file path=ppt/slides/slide15.xml><?xml version="1.0" encoding="utf-8"?>
+<p:sld xmlns:a="http://schemas.openxmlformats.org/drawingml/2006/main" xmlns:r="http://schemas.openxmlformats.org/officeDocument/2006/relationships" xmlns:p="http://schemas.openxmlformats.org/presentationml/2006/main">
+  <p:cSld>
+    <p:spTree>
+      <p:nvGrpSpPr>
+        <p:cNvPr id="1" name=""/>
+        <p:cNvGrpSpPr/>
+        <p:nvPr/>
+      </p:nvGrpSpPr>
+      <p:grpSpPr>
+        <a:xfrm>
+          <a:off x="0" y="0"/>
+          <a:ext cx="0" cy="0"/>
+          <a:chOff x="0" y="0"/>
+          <a:chExt cx="0" cy="0"/>
+        </a:xfrm>
+      </p:grpSpPr>
+      <p:sp>
+        <p:nvSpPr>
+          <p:cNvPr id="2" name="Title 1"/>
+          <p:cNvSpPr>
+            <a:spLocks noGrp="1"/>
+          </p:cNvSpPr>
+          <p:nvPr>
+            <p:ph type="title"/>
+          </p:nvPr>
+        </p:nvSpPr>
+        <p:spPr/>
+        <p:txBody>
+          <a:bodyPr/>
+          <a:lstStyle/>
+          <a:p>
+            <a:pPr lvl="0" indent="0" marL="0">
+              <a:buNone/>
+            </a:pPr>
+            <a:r>
+              <a:rPr/>
+              <a:t>XLRM for Flood Risk</a:t>
+            </a:r>
+          </a:p>
+        </p:txBody>
+      </p:sp>
+      <p:graphicFrame>
+        <p:nvGraphicFramePr>
+          <p:cNvPr id="6" name="Content Placeholder 5"/>
+          <p:cNvGraphicFramePr>
+            <a:graphicFrameLocks noGrp="1"/>
+          </p:cNvGraphicFramePr>
+          <p:nvPr>
+            <p:ph idx="1"/>
+          </p:nvPr>
+        </p:nvGraphicFramePr>
+        <p:xfrm>
+          <a:off x="457200" y="1193800"/>
+          <a:ext cx="8229600" cy="3390900"/>
+        </p:xfrm>
+        <a:graphic>
+          <a:graphicData uri="http://schemas.openxmlformats.org/drawingml/2006/table">
+            <a:tbl>
+              <a:tblPr firstRow="1" bandRow="1">
+                <a:tableStyleId>{5C22544A-7EE6-4342-B048-85BDC9FD1C3A}</a:tableStyleId>
+              </a:tblPr>
+              <a:tblGrid>
+                <a:gridCol w="4114800"/>
+                <a:gridCol w="4114800"/>
+              </a:tblGrid>
+              <a:tr h="0">
+                <a:tc>
+                  <a:txBody>
+                    <a:bodyPr/>
+                    <a:lstStyle/>
+                    <a:p>
+                      <a:pPr lvl="0" indent="0" marL="0">
+                        <a:buNone/>
+                      </a:pPr>
+                      <a:r>
+                        <a:rPr/>
+                        <a:t>Component</a:t>
+                      </a:r>
+                    </a:p>
+                  </a:txBody>
+                  <a:tcPr/>
+                </a:tc>
+                <a:tc>
+                  <a:txBody>
+                    <a:bodyPr/>
+                    <a:lstStyle/>
+                    <a:p>
+                      <a:pPr lvl="0" indent="0" marL="0">
+                        <a:buNone/>
+                      </a:pPr>
+                      <a:r>
+                        <a:rPr/>
+                        <a:t>Flood Risk Example</a:t>
+                      </a:r>
+                    </a:p>
+                  </a:txBody>
+                  <a:tcPr/>
+                </a:tc>
+              </a:tr>
+              <a:tr h="0">
+                <a:tc>
+                  <a:txBody>
+                    <a:bodyPr/>
+                    <a:lstStyle/>
+                    <a:p>
+                      <a:pPr lvl="0" indent="0" marL="0">
+                        <a:buNone/>
+                      </a:pPr>
+                      <a:r>
+                        <a:rPr b="1"/>
+                        <a:t>X</a:t>
+                      </a:r>
+                    </a:p>
+                  </a:txBody>
+                </a:tc>
+                <a:tc>
+                  <a:txBody>
+                    <a:bodyPr/>
+                    <a:lstStyle/>
+                    <a:p>
+                      <a:pPr lvl="0" indent="0" marL="0">
+                        <a:buNone/>
+                      </a:pPr>
+                      <a:r>
+                        <a:rPr/>
+                        <a:t>Sea level rise, storm intensity, housing prices</a:t>
+                      </a:r>
+                    </a:p>
+                  </a:txBody>
+                </a:tc>
+              </a:tr>
+              <a:tr h="0">
+                <a:tc>
+                  <a:txBody>
+                    <a:bodyPr/>
+                    <a:lstStyle/>
+                    <a:p>
+                      <a:pPr lvl="0" indent="0" marL="0">
+                        <a:buNone/>
+                      </a:pPr>
+                      <a:r>
+                        <a:rPr b="1"/>
+                        <a:t>L</a:t>
+                      </a:r>
+                    </a:p>
+                  </a:txBody>
+                </a:tc>
+                <a:tc>
+                  <a:txBody>
+                    <a:bodyPr/>
+                    <a:lstStyle/>
+                    <a:p>
+                      <a:pPr lvl="0" indent="0" marL="0">
+                        <a:buNone/>
+                      </a:pPr>
+                      <a:r>
+                        <a:rPr/>
+                        <a:t>Elevate house, build seawall, buy insurance, retreat</a:t>
+                      </a:r>
+                    </a:p>
+                  </a:txBody>
+                </a:tc>
+              </a:tr>
+              <a:tr h="0">
+                <a:tc>
+                  <a:txBody>
+                    <a:bodyPr/>
+                    <a:lstStyle/>
+                    <a:p>
+                      <a:pPr lvl="0" indent="0" marL="0">
+                        <a:buNone/>
+                      </a:pPr>
+                      <a:r>
+                        <a:rPr b="1"/>
+                        <a:t>R</a:t>
+                      </a:r>
+                    </a:p>
+                  </a:txBody>
+                </a:tc>
+                <a:tc>
+                  <a:txBody>
+                    <a:bodyPr/>
+                    <a:lstStyle/>
+                    <a:p>
+                      <a:pPr lvl="0" indent="0" marL="0">
+                        <a:buNone/>
+                      </a:pPr>
+                      <a:r>
+                        <a:rPr/>
+                        <a:t>Depth-damage function, storm surge model, economic model</a:t>
+                      </a:r>
+                    </a:p>
+                  </a:txBody>
+                </a:tc>
+              </a:tr>
+              <a:tr h="0">
+                <a:tc>
+                  <a:txBody>
+                    <a:bodyPr/>
+                    <a:lstStyle/>
+                    <a:p>
+                      <a:pPr lvl="0" indent="0" marL="0">
+                        <a:buNone/>
+                      </a:pPr>
+                      <a:r>
+                        <a:rPr b="1"/>
+                        <a:t>M</a:t>
+                      </a:r>
+                    </a:p>
+                  </a:txBody>
+                </a:tc>
+                <a:tc>
+                  <a:txBody>
+                    <a:bodyPr/>
+                    <a:lstStyle/>
+                    <a:p>
+                      <a:pPr lvl="0" indent="0" marL="0">
+                        <a:buNone/>
+                      </a:pPr>
+                      <a:r>
+                        <a:rPr/>
+                        <a:t>Expected annual damages, probability of ruin, NPV</a:t>
+                      </a:r>
+                    </a:p>
+                  </a:txBody>
+                </a:tc>
+              </a:tr>
+            </a:tbl>
+          </a:graphicData>
+        </a:graphic>
+      </p:graphicFrame>
+    </p:spTree>
+  </p:cSld>
+</p:sld>
+</file>
+
+<file path=ppt/slides/slide16.xml><?xml version="1.0" encoding="utf-8"?>
+<p:sld xmlns:a="http://schemas.openxmlformats.org/drawingml/2006/main" xmlns:r="http://schemas.openxmlformats.org/officeDocument/2006/relationships" xmlns:p="http://schemas.openxmlformats.org/presentationml/2006/main">
+  <p:cSld>
+    <p:spTree>
+      <p:nvGrpSpPr>
+        <p:cNvPr id="1" name=""/>
+        <p:cNvGrpSpPr/>
+        <p:nvPr/>
+      </p:nvGrpSpPr>
+      <p:grpSpPr>
+        <a:xfrm>
+          <a:off x="0" y="0"/>
+          <a:ext cx="0" cy="0"/>
+          <a:chOff x="0" y="0"/>
+          <a:chExt cx="0" cy="0"/>
+        </a:xfrm>
+      </p:grpSpPr>
+      <p:sp>
+        <p:nvSpPr>
+          <p:cNvPr id="2" name="Title 1"/>
+          <p:cNvSpPr>
+            <a:spLocks noGrp="1"/>
+          </p:cNvSpPr>
+          <p:nvPr>
+            <p:ph type="title"/>
+          </p:nvPr>
+        </p:nvSpPr>
+        <p:spPr/>
+        <p:txBody>
+          <a:bodyPr/>
+          <a:lstStyle/>
+          <a:p>
+            <a:pPr lvl="0" indent="0" marL="0">
+              <a:buNone/>
+            </a:pPr>
+            <a:r>
+              <a:rPr/>
+              <a:t>Your Turn</a:t>
+            </a:r>
+          </a:p>
+        </p:txBody>
+      </p:sp>
+      <p:sp>
+        <p:nvSpPr>
+          <p:cNvPr id="3" name="Content Placeholder 2"/>
+          <p:cNvSpPr>
+            <a:spLocks noGrp="1"/>
+          </p:cNvSpPr>
+          <p:nvPr>
+            <p:ph idx="1"/>
+          </p:nvPr>
+        </p:nvSpPr>
+        <p:spPr/>
+        <p:txBody>
+          <a:bodyPr/>
+          <a:lstStyle/>
+          <a:p>
+            <a:pPr lvl="0" indent="0" marL="0">
+              <a:buNone/>
+            </a:pPr>
+            <a:r>
+              <a:rPr/>
+              <a:t>A city is deciding whether to build a new seawall.</a:t>
+            </a:r>
+          </a:p>
+          <a:p>
+            <a:pPr lvl="0" indent="0" marL="0">
+              <a:buNone/>
+            </a:pPr>
+            <a:r>
+              <a:rPr/>
+              <a:t>What are the </a:t>
+            </a:r>
+            <a:r>
+              <a:rPr b="1"/>
+              <a:t>X</a:t>
+            </a:r>
+            <a:r>
+              <a:rPr/>
+              <a:t>, </a:t>
+            </a:r>
+            <a:r>
+              <a:rPr b="1"/>
+              <a:t>L</a:t>
+            </a:r>
+            <a:r>
+              <a:rPr/>
+              <a:t>, </a:t>
+            </a:r>
+            <a:r>
+              <a:rPr b="1"/>
+              <a:t>R</a:t>
+            </a:r>
+            <a:r>
+              <a:rPr/>
+              <a:t>, and </a:t>
+            </a:r>
+            <a:r>
+              <a:rPr b="1"/>
+              <a:t>M</a:t>
+            </a:r>
+            <a:r>
+              <a:rPr/>
+              <a:t>?</a:t>
+            </a:r>
+          </a:p>
+          <a:p>
+            <a:pPr lvl="0" indent="0" marL="0">
+              <a:buNone/>
+            </a:pPr>
+            <a:r>
+              <a:rPr/>
+              <a:t>Discuss with a neighbor for 60 seconds.</a:t>
+            </a:r>
+          </a:p>
+        </p:txBody>
+      </p:sp>
+    </p:spTree>
+  </p:cSld>
+</p:sld>
+</file>
+
+<file path=ppt/slides/slide17.xml><?xml version="1.0" encoding="utf-8"?>
+<p:sld xmlns:a="http://schemas.openxmlformats.org/drawingml/2006/main" xmlns:r="http://schemas.openxmlformats.org/officeDocument/2006/relationships" xmlns:p="http://schemas.openxmlformats.org/presentationml/2006/main">
+  <p:cSld>
+    <p:spTree>
+      <p:nvGrpSpPr>
+        <p:cNvPr id="1" name=""/>
+        <p:cNvGrpSpPr/>
+        <p:nvPr/>
+      </p:nvGrpSpPr>
+      <p:grpSpPr>
+        <a:xfrm>
+          <a:off x="0" y="0"/>
+          <a:ext cx="0" cy="0"/>
+          <a:chOff x="0" y="0"/>
+          <a:chExt cx="0" cy="0"/>
+        </a:xfrm>
+      </p:grpSpPr>
+      <p:sp>
+        <p:nvSpPr>
+          <p:cNvPr id="2" name="Title 1"/>
+          <p:cNvSpPr>
+            <a:spLocks noGrp="1"/>
+          </p:cNvSpPr>
+          <p:nvPr>
+            <p:ph type="title"/>
+          </p:nvPr>
+        </p:nvSpPr>
+        <p:spPr/>
+        <p:txBody>
+          <a:bodyPr/>
+          <a:lstStyle/>
+          <a:p>
+            <a:pPr lvl="0" indent="0" marL="0">
+              <a:buNone/>
+            </a:pPr>
+            <a:r>
+              <a:rPr/>
+              <a:t>Key Insight</a:t>
+            </a:r>
+          </a:p>
+        </p:txBody>
+      </p:sp>
+      <p:sp>
+        <p:nvSpPr>
+          <p:cNvPr id="3" name="Content Placeholder 2"/>
+          <p:cNvSpPr>
+            <a:spLocks noGrp="1"/>
+          </p:cNvSpPr>
+          <p:nvPr>
+            <p:ph idx="1"/>
+          </p:nvPr>
+        </p:nvSpPr>
+        <p:spPr/>
+        <p:txBody>
+          <a:bodyPr/>
+          <a:lstStyle/>
+          <a:p>
+            <a:pPr lvl="0" indent="0" marL="0">
+              <a:buNone/>
+            </a:pPr>
+            <a:r>
+              <a:rPr/>
+              <a:t>The XLRM framework helps us:</a:t>
+            </a:r>
+          </a:p>
+          <a:p>
+            <a:pPr lvl="0" indent="-342900" marL="342900">
+              <a:buAutoNum type="arabicPeriod"/>
+            </a:pPr>
+            <a:r>
+              <a:rPr/>
+              <a:t>Identify what we know vs. what is uncertain</a:t>
+            </a:r>
+          </a:p>
+          <a:p>
+            <a:pPr lvl="0" indent="-342900" marL="342900">
+              <a:buAutoNum type="arabicPeriod"/>
+            </a:pPr>
+            <a:r>
+              <a:rPr/>
+              <a:t>Clarify what decisions we control</a:t>
+            </a:r>
+          </a:p>
+          <a:p>
+            <a:pPr lvl="0" indent="-342900" marL="342900">
+              <a:buAutoNum type="arabicPeriod"/>
+            </a:pPr>
+            <a:r>
+              <a:rPr/>
+              <a:t>Make explicit how we model the system</a:t>
+            </a:r>
+          </a:p>
+          <a:p>
+            <a:pPr lvl="0" indent="-342900" marL="342900">
+              <a:buAutoNum type="arabicPeriod"/>
+            </a:pPr>
+            <a:r>
+              <a:rPr/>
+              <a:t>Define how we measure success</a:t>
+            </a:r>
+          </a:p>
+          <a:p>
+            <a:pPr lvl="0" indent="0" marL="0">
+              <a:buNone/>
+            </a:pPr>
+            <a:r>
+              <a:rPr/>
+              <a:t>This is how we structure complex problems throughout the course.</a:t>
+            </a:r>
+          </a:p>
+        </p:txBody>
+      </p:sp>
+    </p:spTree>
+  </p:cSld>
+</p:sld>
+</file>
+
+<file path=ppt/slides/slide18.xml><?xml version="1.0" encoding="utf-8"?>
+<p:sld xmlns:a="http://schemas.openxmlformats.org/drawingml/2006/main" xmlns:r="http://schemas.openxmlformats.org/officeDocument/2006/relationships" xmlns:p="http://schemas.openxmlformats.org/presentationml/2006/main">
+  <p:cSld>
+    <p:spTree>
+      <p:nvGrpSpPr>
+        <p:cNvPr id="1" name=""/>
+        <p:cNvGrpSpPr/>
+        <p:nvPr/>
+      </p:nvGrpSpPr>
+      <p:grpSpPr>
+        <a:xfrm>
+          <a:off x="0" y="0"/>
+          <a:ext cx="0" cy="0"/>
+          <a:chOff x="0" y="0"/>
+          <a:chExt cx="0" cy="0"/>
+        </a:xfrm>
+      </p:grpSpPr>
+      <p:sp>
+        <p:nvSpPr>
+          <p:cNvPr id="2" name="Title 1"/>
+          <p:cNvSpPr>
+            <a:spLocks noGrp="1"/>
+          </p:cNvSpPr>
+          <p:nvPr>
+            <p:ph type="title"/>
+          </p:nvPr>
+        </p:nvSpPr>
+        <p:spPr>
+          <a:xfrm>
+            <a:off x="722313" y="3305176"/>
+            <a:ext cx="7772400" cy="1021556"/>
+          </a:xfrm>
+        </p:spPr>
+        <p:txBody>
+          <a:bodyPr/>
+          <a:lstStyle/>
+          <a:p>
+            <a:pPr lvl="0" indent="0" marL="0">
+              <a:buNone/>
+            </a:pPr>
+            <a:r>
+              <a:rPr/>
+              <a:t>Extreme Value Theory (Brief)</a:t>
+            </a:r>
+          </a:p>
+        </p:txBody>
+      </p:sp>
+    </p:spTree>
+  </p:cSld>
+</p:sld>
+</file>
+
+<file path=ppt/slides/slide19.xml><?xml version="1.0" encoding="utf-8"?>
+<p:sld xmlns:a="http://schemas.openxmlformats.org/drawingml/2006/main" xmlns:r="http://schemas.openxmlformats.org/officeDocument/2006/relationships" xmlns:p="http://schemas.openxmlformats.org/presentationml/2006/main">
+  <p:cSld>
+    <p:spTree>
+      <p:nvGrpSpPr>
+        <p:cNvPr id="1" name=""/>
+        <p:cNvGrpSpPr/>
+        <p:nvPr/>
+      </p:nvGrpSpPr>
+      <p:grpSpPr>
+        <a:xfrm>
+          <a:off x="0" y="0"/>
+          <a:ext cx="0" cy="0"/>
+          <a:chOff x="0" y="0"/>
+          <a:chExt cx="0" cy="0"/>
+        </a:xfrm>
+      </p:grpSpPr>
+      <p:sp>
+        <p:nvSpPr>
+          <p:cNvPr id="2" name="Title 1"/>
+          <p:cNvSpPr>
+            <a:spLocks noGrp="1"/>
+          </p:cNvSpPr>
+          <p:nvPr>
+            <p:ph type="title"/>
+          </p:nvPr>
+        </p:nvSpPr>
+        <p:spPr/>
+        <p:txBody>
+          <a:bodyPr/>
+          <a:lstStyle/>
+          <a:p>
+            <a:pPr lvl="0" indent="0" marL="0">
+              <a:buNone/>
+            </a:pPr>
+            <a:r>
+              <a:rPr/>
+              <a:t>Why Extremes Matter</a:t>
+            </a:r>
+          </a:p>
+        </p:txBody>
+      </p:sp>
+      <p:sp>
+        <p:nvSpPr>
+          <p:cNvPr id="3" name="Content Placeholder 2"/>
+          <p:cNvSpPr>
+            <a:spLocks noGrp="1"/>
+          </p:cNvSpPr>
+          <p:nvPr>
+            <p:ph idx="1"/>
+          </p:nvPr>
+        </p:nvSpPr>
+        <p:spPr/>
+        <p:txBody>
+          <a:bodyPr/>
+          <a:lstStyle/>
+          <a:p>
+            <a:pPr lvl="0" indent="0" marL="0">
+              <a:buNone/>
+            </a:pPr>
+            <a:r>
+              <a:rPr/>
+              <a:t>Most flood damage comes from </a:t>
+            </a:r>
+            <a:r>
+              <a:rPr b="1"/>
+              <a:t>rare, extreme events</a:t>
+            </a:r>
+            <a:r>
+              <a:rPr/>
+              <a:t>.</a:t>
+            </a:r>
+          </a:p>
+          <a:p>
+            <a:pPr lvl="0" indent="0" marL="0">
+              <a:buNone/>
+            </a:pPr>
+            <a:r>
+              <a:rPr/>
+              <a:t>The problem: Normal distributions </a:t>
+            </a:r>
+            <a:r>
+              <a:rPr b="1"/>
+              <a:t>underestimate extreme risks</a:t>
+            </a:r>
+            <a:r>
+              <a:rPr/>
+              <a:t>.</a:t>
+            </a:r>
+          </a:p>
+          <a:p>
+            <a:pPr lvl="0" indent="0" marL="0">
+              <a:buNone/>
+            </a:pPr>
+            <a:r>
+              <a:rPr/>
+              <a:t>We need specialized tools for modeling the tails of distributions.</a:t>
+            </a:r>
+          </a:p>
+        </p:txBody>
+      </p:sp>
+    </p:spTree>
+  </p:cSld>
+</p:sld>
+</file>
+
 <file path=ppt/slides/slide2.xml><?xml version="1.0" encoding="utf-8"?>
 <p:sld xmlns:a="http://schemas.openxmlformats.org/drawingml/2006/main" xmlns:r="http://schemas.openxmlformats.org/officeDocument/2006/relationships" xmlns:p="http://schemas.openxmlformats.org/presentationml/2006/main">
   <p:cSld>
@@ -3232,6 +6971,1376 @@
             <a:r>
               <a:rPr/>
               <a:t> This content is under development and subject to change.</a:t>
+            </a:r>
+          </a:p>
+        </p:txBody>
+      </p:sp>
+    </p:spTree>
+  </p:cSld>
+</p:sld>
+</file>
+
+<file path=ppt/slides/slide20.xml><?xml version="1.0" encoding="utf-8"?>
+<p:sld xmlns:a="http://schemas.openxmlformats.org/drawingml/2006/main" xmlns:r="http://schemas.openxmlformats.org/officeDocument/2006/relationships" xmlns:p="http://schemas.openxmlformats.org/presentationml/2006/main">
+  <p:cSld>
+    <p:spTree>
+      <p:nvGrpSpPr>
+        <p:cNvPr id="1" name=""/>
+        <p:cNvGrpSpPr/>
+        <p:nvPr/>
+      </p:nvGrpSpPr>
+      <p:grpSpPr>
+        <a:xfrm>
+          <a:off x="0" y="0"/>
+          <a:ext cx="0" cy="0"/>
+          <a:chOff x="0" y="0"/>
+          <a:chExt cx="0" cy="0"/>
+        </a:xfrm>
+      </p:grpSpPr>
+      <p:sp>
+        <p:nvSpPr>
+          <p:cNvPr id="2" name="Title 1"/>
+          <p:cNvSpPr>
+            <a:spLocks noGrp="1"/>
+          </p:cNvSpPr>
+          <p:nvPr>
+            <p:ph type="title"/>
+          </p:nvPr>
+        </p:nvSpPr>
+        <p:spPr/>
+        <p:txBody>
+          <a:bodyPr/>
+          <a:lstStyle/>
+          <a:p>
+            <a:pPr lvl="0" indent="0" marL="0">
+              <a:buNone/>
+            </a:pPr>
+            <a:r>
+              <a:rPr/>
+              <a:t>The GEV Distribution</a:t>
+            </a:r>
+          </a:p>
+        </p:txBody>
+      </p:sp>
+      <mc:AlternateContent xmlns:mc="http://schemas.openxmlformats.org/markup-compatibility/2006">
+        <mc:Choice xmlns:a14="http://schemas.microsoft.com/office/drawing/2010/main" Requires="a14">
+          <p:sp>
+            <p:nvSpPr>
+              <p:cNvPr id="3" name="Content Placeholder 2"/>
+              <p:cNvSpPr>
+                <a:spLocks noGrp="1"/>
+              </p:cNvSpPr>
+              <p:nvPr>
+                <p:ph idx="1"/>
+              </p:nvPr>
+            </p:nvSpPr>
+            <p:spPr/>
+            <p:txBody>
+              <a:bodyPr/>
+              <a:lstStyle/>
+              <a:p>
+                <a:pPr lvl="0" indent="0" marL="0">
+                  <a:buNone/>
+                </a:pPr>
+                <a:r>
+                  <a:rPr/>
+                  <a:t>The </a:t>
+                </a:r>
+                <a:r>
+                  <a:rPr b="1"/>
+                  <a:t>Generalized Extreme Value (GEV)</a:t>
+                </a:r>
+                <a:r>
+                  <a:rPr/>
+                  <a:t> distribution is designed for annual maxima.</a:t>
+                </a:r>
+              </a:p>
+              <a:p>
+                <a:pPr lvl="0" indent="0" marL="0">
+                  <a:buNone/>
+                </a:pPr>
+                <a:r>
+                  <a:rPr/>
+                  <a:t>Three parameters:</a:t>
+                </a:r>
+              </a:p>
+              <a:p>
+                <a:pPr lvl="0"/>
+                <a14:m>
+                  <m:oMath xmlns:m="http://schemas.openxmlformats.org/officeDocument/2006/math">
+                    <m:r>
+                      <m:t>μ</m:t>
+                    </m:r>
+                  </m:oMath>
+                </a14:m>
+                <a:r>
+                  <a:rPr/>
+                  <a:t> (location): Where the distribution is centered</a:t>
+                </a:r>
+              </a:p>
+              <a:p>
+                <a:pPr lvl="0"/>
+                <a14:m>
+                  <m:oMath xmlns:m="http://schemas.openxmlformats.org/officeDocument/2006/math">
+                    <m:r>
+                      <m:t>σ</m:t>
+                    </m:r>
+                  </m:oMath>
+                </a14:m>
+                <a:r>
+                  <a:rPr/>
+                  <a:t> (scale): How spread out it is</a:t>
+                </a:r>
+              </a:p>
+              <a:p>
+                <a:pPr lvl="0"/>
+                <a14:m>
+                  <m:oMath xmlns:m="http://schemas.openxmlformats.org/officeDocument/2006/math">
+                    <m:r>
+                      <m:t>ξ</m:t>
+                    </m:r>
+                  </m:oMath>
+                </a14:m>
+                <a:r>
+                  <a:rPr/>
+                  <a:t> (shape): How heavy the tail is</a:t>
+                </a:r>
+              </a:p>
+              <a:p>
+                <a:pPr lvl="0" indent="0" marL="0">
+                  <a:buNone/>
+                </a:pPr>
+                <a:r>
+                  <a:rPr/>
+                  <a:t>For a deeper dive: </a:t>
+                </a:r>
+                <a:r>
+                  <a:rPr>
+                    <a:hlinkClick r:id="rId3"/>
+                  </a:rPr>
+                  <a:t>CEVE 543</a:t>
+                </a:r>
+              </a:p>
+            </p:txBody>
+          </p:sp>
+        </mc:Choice>
+      </mc:AlternateContent>
+    </p:spTree>
+  </p:cSld>
+</p:sld>
+</file>
+
+<file path=ppt/slides/slide21.xml><?xml version="1.0" encoding="utf-8"?>
+<p:sld xmlns:a="http://schemas.openxmlformats.org/drawingml/2006/main" xmlns:r="http://schemas.openxmlformats.org/officeDocument/2006/relationships" xmlns:p="http://schemas.openxmlformats.org/presentationml/2006/main">
+  <p:cSld>
+    <p:spTree>
+      <p:nvGrpSpPr>
+        <p:cNvPr id="1" name=""/>
+        <p:cNvGrpSpPr/>
+        <p:nvPr/>
+      </p:nvGrpSpPr>
+      <p:grpSpPr>
+        <a:xfrm>
+          <a:off x="0" y="0"/>
+          <a:ext cx="0" cy="0"/>
+          <a:chOff x="0" y="0"/>
+          <a:chExt cx="0" cy="0"/>
+        </a:xfrm>
+      </p:grpSpPr>
+      <p:sp>
+        <p:nvSpPr>
+          <p:cNvPr id="2" name="Title 1"/>
+          <p:cNvSpPr>
+            <a:spLocks noGrp="1"/>
+          </p:cNvSpPr>
+          <p:nvPr>
+            <p:ph type="title"/>
+          </p:nvPr>
+        </p:nvSpPr>
+        <p:spPr/>
+        <p:txBody>
+          <a:bodyPr/>
+          <a:lstStyle/>
+          <a:p>
+            <a:pPr lvl="0" indent="0" marL="0">
+              <a:buNone/>
+            </a:pPr>
+            <a:r>
+              <a:rPr/>
+              <a:t>GEV in Practice</a:t>
+            </a:r>
+          </a:p>
+        </p:txBody>
+      </p:sp>
+      <p:sp>
+        <p:nvSpPr>
+          <p:cNvPr id="3" name="Content Placeholder 2"/>
+          <p:cNvSpPr>
+            <a:spLocks noGrp="1"/>
+          </p:cNvSpPr>
+          <p:nvPr>
+            <p:ph idx="1"/>
+          </p:nvPr>
+        </p:nvSpPr>
+        <p:spPr/>
+        <p:txBody>
+          <a:bodyPr/>
+          <a:lstStyle/>
+          <a:p>
+            <a:pPr lvl="0" indent="0" marL="0">
+              <a:buNone/>
+            </a:pPr>
+            <a:r>
+              <a:rPr/>
+              <a:t>In lab on Friday, you will:</a:t>
+            </a:r>
+          </a:p>
+          <a:p>
+            <a:pPr lvl="0" indent="-342900" marL="342900">
+              <a:buAutoNum type="arabicPeriod"/>
+            </a:pPr>
+            <a:r>
+              <a:rPr/>
+              <a:t>Fit a GEV distribution to real gauge data</a:t>
+            </a:r>
+          </a:p>
+          <a:p>
+            <a:pPr lvl="0" indent="-342900" marL="342900">
+              <a:buAutoNum type="arabicPeriod"/>
+            </a:pPr>
+            <a:r>
+              <a:rPr/>
+              <a:t>Sample from it to generate many possible flood scenarios</a:t>
+            </a:r>
+          </a:p>
+          <a:p>
+            <a:pPr lvl="0" indent="-342900" marL="342900">
+              <a:buAutoNum type="arabicPeriod"/>
+            </a:pPr>
+            <a:r>
+              <a:rPr/>
+              <a:t>Pass those through a damage model</a:t>
+            </a:r>
+          </a:p>
+          <a:p>
+            <a:pPr lvl="0" indent="-342900" marL="342900">
+              <a:buAutoNum type="arabicPeriod"/>
+            </a:pPr>
+            <a:r>
+              <a:rPr/>
+              <a:t>Study the resulting distribution of damages</a:t>
+            </a:r>
+          </a:p>
+          <a:p>
+            <a:pPr lvl="0" indent="0" marL="0">
+              <a:buNone/>
+            </a:pPr>
+            <a:r>
+              <a:rPr/>
+              <a:t>This is </a:t>
+            </a:r>
+            <a:r>
+              <a:rPr b="1"/>
+              <a:t>uncertainty quantification</a:t>
+            </a:r>
+            <a:r>
+              <a:rPr/>
+              <a:t> in action.</a:t>
+            </a:r>
+          </a:p>
+        </p:txBody>
+      </p:sp>
+    </p:spTree>
+  </p:cSld>
+</p:sld>
+</file>
+
+<file path=ppt/slides/slide22.xml><?xml version="1.0" encoding="utf-8"?>
+<p:sld xmlns:a="http://schemas.openxmlformats.org/drawingml/2006/main" xmlns:r="http://schemas.openxmlformats.org/officeDocument/2006/relationships" xmlns:p="http://schemas.openxmlformats.org/presentationml/2006/main">
+  <p:cSld>
+    <p:spTree>
+      <p:nvGrpSpPr>
+        <p:cNvPr id="1" name=""/>
+        <p:cNvGrpSpPr/>
+        <p:nvPr/>
+      </p:nvGrpSpPr>
+      <p:grpSpPr>
+        <a:xfrm>
+          <a:off x="0" y="0"/>
+          <a:ext cx="0" cy="0"/>
+          <a:chOff x="0" y="0"/>
+          <a:chExt cx="0" cy="0"/>
+        </a:xfrm>
+      </p:grpSpPr>
+      <p:sp>
+        <p:nvSpPr>
+          <p:cNvPr id="2" name="Title 1"/>
+          <p:cNvSpPr>
+            <a:spLocks noGrp="1"/>
+          </p:cNvSpPr>
+          <p:nvPr>
+            <p:ph type="title"/>
+          </p:nvPr>
+        </p:nvSpPr>
+        <p:spPr>
+          <a:xfrm>
+            <a:off x="722313" y="3305176"/>
+            <a:ext cx="7772400" cy="1021556"/>
+          </a:xfrm>
+        </p:spPr>
+        <p:txBody>
+          <a:bodyPr/>
+          <a:lstStyle/>
+          <a:p>
+            <a:pPr lvl="0" indent="0" marL="0">
+              <a:buNone/>
+            </a:pPr>
+            <a:r>
+              <a:rPr/>
+              <a:t>The iCOW Model</a:t>
+            </a:r>
+          </a:p>
+        </p:txBody>
+      </p:sp>
+    </p:spTree>
+  </p:cSld>
+</p:sld>
+</file>
+
+<file path=ppt/slides/slide23.xml><?xml version="1.0" encoding="utf-8"?>
+<p:sld xmlns:a="http://schemas.openxmlformats.org/drawingml/2006/main" xmlns:r="http://schemas.openxmlformats.org/officeDocument/2006/relationships" xmlns:p="http://schemas.openxmlformats.org/presentationml/2006/main">
+  <p:cSld>
+    <p:spTree>
+      <p:nvGrpSpPr>
+        <p:cNvPr id="1" name=""/>
+        <p:cNvGrpSpPr/>
+        <p:nvPr/>
+      </p:nvGrpSpPr>
+      <p:grpSpPr>
+        <a:xfrm>
+          <a:off x="0" y="0"/>
+          <a:ext cx="0" cy="0"/>
+          <a:chOff x="0" y="0"/>
+          <a:chExt cx="0" cy="0"/>
+        </a:xfrm>
+      </p:grpSpPr>
+      <p:sp>
+        <p:nvSpPr>
+          <p:cNvPr id="2" name="Title 1"/>
+          <p:cNvSpPr>
+            <a:spLocks noGrp="1"/>
+          </p:cNvSpPr>
+          <p:nvPr>
+            <p:ph type="title"/>
+          </p:nvPr>
+        </p:nvSpPr>
+        <p:spPr/>
+        <p:txBody>
+          <a:bodyPr/>
+          <a:lstStyle/>
+          <a:p>
+            <a:pPr lvl="0" indent="0" marL="0">
+              <a:buNone/>
+            </a:pPr>
+            <a:r>
+              <a:rPr/>
+              <a:t>Introducing iCOW</a:t>
+            </a:r>
+          </a:p>
+        </p:txBody>
+      </p:sp>
+      <p:sp>
+        <p:nvSpPr>
+          <p:cNvPr id="3" name="Content Placeholder 2"/>
+          <p:cNvSpPr>
+            <a:spLocks noGrp="1"/>
+          </p:cNvSpPr>
+          <p:nvPr>
+            <p:ph idx="1"/>
+          </p:nvPr>
+        </p:nvSpPr>
+        <p:spPr/>
+        <p:txBody>
+          <a:bodyPr/>
+          <a:lstStyle/>
+          <a:p>
+            <a:pPr lvl="0" indent="0" marL="0">
+              <a:buNone/>
+            </a:pPr>
+            <a:r>
+              <a:rPr b="1"/>
+              <a:t>iCOW</a:t>
+            </a:r>
+            <a:r>
+              <a:rPr/>
+              <a:t> = </a:t>
+            </a:r>
+            <a:r>
+              <a:rPr b="1"/>
+              <a:t>i</a:t>
+            </a:r>
+            <a:r>
+              <a:rPr/>
+              <a:t>dealized </a:t>
+            </a:r>
+            <a:r>
+              <a:rPr b="1"/>
+              <a:t>C</a:t>
+            </a:r>
+            <a:r>
+              <a:rPr/>
+              <a:t>ost </a:t>
+            </a:r>
+            <a:r>
+              <a:rPr b="1"/>
+              <a:t>o</a:t>
+            </a:r>
+            <a:r>
+              <a:rPr/>
+              <a:t>f </a:t>
+            </a:r>
+            <a:r>
+              <a:rPr b="1"/>
+              <a:t>W</a:t>
+            </a:r>
+            <a:r>
+              <a:rPr/>
+              <a:t>aiting</a:t>
+            </a:r>
+          </a:p>
+          <a:p>
+            <a:pPr lvl="0" indent="0" marL="0">
+              <a:buNone/>
+            </a:pPr>
+            <a:r>
+              <a:rPr/>
+              <a:t>Based on Ceres, Forest, and Keller (2019): “City on a Wedge”</a:t>
+            </a:r>
+          </a:p>
+          <a:p>
+            <a:pPr lvl="0" indent="0" marL="0">
+              <a:buNone/>
+            </a:pPr>
+            <a:r>
+              <a:rPr/>
+              <a:t>A simple, fast, pedagogical model for flood risk management.</a:t>
+            </a:r>
+          </a:p>
+        </p:txBody>
+      </p:sp>
+    </p:spTree>
+  </p:cSld>
+</p:sld>
+</file>
+
+<file path=ppt/slides/slide24.xml><?xml version="1.0" encoding="utf-8"?>
+<p:sld xmlns:a="http://schemas.openxmlformats.org/drawingml/2006/main" xmlns:r="http://schemas.openxmlformats.org/officeDocument/2006/relationships" xmlns:p="http://schemas.openxmlformats.org/presentationml/2006/main">
+  <p:cSld>
+    <p:spTree>
+      <p:nvGrpSpPr>
+        <p:cNvPr id="1" name=""/>
+        <p:cNvGrpSpPr/>
+        <p:nvPr/>
+      </p:nvGrpSpPr>
+      <p:grpSpPr>
+        <a:xfrm>
+          <a:off x="0" y="0"/>
+          <a:ext cx="0" cy="0"/>
+          <a:chOff x="0" y="0"/>
+          <a:chExt cx="0" cy="0"/>
+        </a:xfrm>
+      </p:grpSpPr>
+      <p:sp>
+        <p:nvSpPr>
+          <p:cNvPr id="2" name="Title 1"/>
+          <p:cNvSpPr>
+            <a:spLocks noGrp="1"/>
+          </p:cNvSpPr>
+          <p:nvPr>
+            <p:ph type="title"/>
+          </p:nvPr>
+        </p:nvSpPr>
+        <p:spPr/>
+        <p:txBody>
+          <a:bodyPr/>
+          <a:lstStyle/>
+          <a:p>
+            <a:pPr lvl="0" indent="0" marL="0">
+              <a:buNone/>
+            </a:pPr>
+            <a:r>
+              <a:rPr/>
+              <a:t>City on a Wedge</a:t>
+            </a:r>
+          </a:p>
+        </p:txBody>
+      </p:sp>
+      <p:sp>
+        <p:nvSpPr>
+          <p:cNvPr id="3" name="Content Placeholder 2"/>
+          <p:cNvSpPr>
+            <a:spLocks noGrp="1"/>
+          </p:cNvSpPr>
+          <p:nvPr>
+            <p:ph idx="1"/>
+          </p:nvPr>
+        </p:nvSpPr>
+        <p:spPr/>
+        <p:txBody>
+          <a:bodyPr/>
+          <a:lstStyle/>
+          <a:p>
+            <a:pPr lvl="0" indent="0" marL="0">
+              <a:buNone/>
+            </a:pPr>
+            <a:r>
+              <a:rPr/>
+              <a:t>Imagine a city on a triangular wedge:</a:t>
+            </a:r>
+          </a:p>
+          <a:p>
+            <a:pPr lvl="0"/>
+            <a:r>
+              <a:rPr/>
+              <a:t>One side faces the water</a:t>
+            </a:r>
+          </a:p>
+          <a:p>
+            <a:pPr lvl="0"/>
+            <a:r>
+              <a:rPr/>
+              <a:t>Elevation increases as you move inland</a:t>
+            </a:r>
+          </a:p>
+          <a:p>
+            <a:pPr lvl="0"/>
+            <a:r>
+              <a:rPr/>
+              <a:t>Houses at different elevations face different flood risks</a:t>
+            </a:r>
+          </a:p>
+          <a:p>
+            <a:pPr lvl="0" indent="0" marL="0">
+              <a:buNone/>
+            </a:pPr>
+            <a:r>
+              <a:rPr/>
+              <a:t>Simple geometry makes calculations tractable.</a:t>
+            </a:r>
+          </a:p>
+        </p:txBody>
+      </p:sp>
+    </p:spTree>
+  </p:cSld>
+</p:sld>
+</file>
+
+<file path=ppt/slides/slide25.xml><?xml version="1.0" encoding="utf-8"?>
+<p:sld xmlns:a="http://schemas.openxmlformats.org/drawingml/2006/main" xmlns:r="http://schemas.openxmlformats.org/officeDocument/2006/relationships" xmlns:p="http://schemas.openxmlformats.org/presentationml/2006/main">
+  <p:cSld>
+    <p:spTree>
+      <p:nvGrpSpPr>
+        <p:cNvPr id="1" name=""/>
+        <p:cNvGrpSpPr/>
+        <p:nvPr/>
+      </p:nvGrpSpPr>
+      <p:grpSpPr>
+        <a:xfrm>
+          <a:off x="0" y="0"/>
+          <a:ext cx="0" cy="0"/>
+          <a:chOff x="0" y="0"/>
+          <a:chExt cx="0" cy="0"/>
+        </a:xfrm>
+      </p:grpSpPr>
+      <p:sp>
+        <p:nvSpPr>
+          <p:cNvPr id="2" name="Title 1"/>
+          <p:cNvSpPr>
+            <a:spLocks noGrp="1"/>
+          </p:cNvSpPr>
+          <p:nvPr>
+            <p:ph type="title"/>
+          </p:nvPr>
+        </p:nvSpPr>
+        <p:spPr/>
+        <p:txBody>
+          <a:bodyPr/>
+          <a:lstStyle/>
+          <a:p>
+            <a:pPr lvl="0" indent="0" marL="0">
+              <a:buNone/>
+            </a:pPr>
+            <a:r>
+              <a:rPr/>
+              <a:t>iCOW Components</a:t>
+            </a:r>
+          </a:p>
+        </p:txBody>
+      </p:sp>
+      <p:graphicFrame>
+        <p:nvGraphicFramePr>
+          <p:cNvPr id="6" name="Content Placeholder 5"/>
+          <p:cNvGraphicFramePr>
+            <a:graphicFrameLocks noGrp="1"/>
+          </p:cNvGraphicFramePr>
+          <p:nvPr>
+            <p:ph idx="1"/>
+          </p:nvPr>
+        </p:nvGraphicFramePr>
+        <p:xfrm>
+          <a:off x="457200" y="1193800"/>
+          <a:ext cx="8229600" cy="3390900"/>
+        </p:xfrm>
+        <a:graphic>
+          <a:graphicData uri="http://schemas.openxmlformats.org/drawingml/2006/table">
+            <a:tbl>
+              <a:tblPr firstRow="1" bandRow="1">
+                <a:tableStyleId>{5C22544A-7EE6-4342-B048-85BDC9FD1C3A}</a:tableStyleId>
+              </a:tblPr>
+              <a:tblGrid>
+                <a:gridCol w="4114800"/>
+                <a:gridCol w="4114800"/>
+              </a:tblGrid>
+              <a:tr h="0">
+                <a:tc>
+                  <a:txBody>
+                    <a:bodyPr/>
+                    <a:lstStyle/>
+                    <a:p>
+                      <a:pPr lvl="0" indent="0" marL="0">
+                        <a:buNone/>
+                      </a:pPr>
+                      <a:r>
+                        <a:rPr/>
+                        <a:t>Component</a:t>
+                      </a:r>
+                    </a:p>
+                  </a:txBody>
+                  <a:tcPr/>
+                </a:tc>
+                <a:tc>
+                  <a:txBody>
+                    <a:bodyPr/>
+                    <a:lstStyle/>
+                    <a:p>
+                      <a:pPr lvl="0" indent="0" marL="0">
+                        <a:buNone/>
+                      </a:pPr>
+                      <a:r>
+                        <a:rPr/>
+                        <a:t>iCOW Implementation</a:t>
+                      </a:r>
+                    </a:p>
+                  </a:txBody>
+                  <a:tcPr/>
+                </a:tc>
+              </a:tr>
+              <a:tr h="0">
+                <a:tc>
+                  <a:txBody>
+                    <a:bodyPr/>
+                    <a:lstStyle/>
+                    <a:p>
+                      <a:pPr lvl="0" indent="0" marL="0">
+                        <a:buNone/>
+                      </a:pPr>
+                      <a:r>
+                        <a:rPr b="1"/>
+                        <a:t>Hazard</a:t>
+                      </a:r>
+                    </a:p>
+                  </a:txBody>
+                </a:tc>
+                <a:tc>
+                  <a:txBody>
+                    <a:bodyPr/>
+                    <a:lstStyle/>
+                    <a:p>
+                      <a:pPr lvl="0" indent="0" marL="0">
+                        <a:buNone/>
+                      </a:pPr>
+                      <a:r>
+                        <a:rPr/>
+                        <a:t>Storm surge / flood stage (GEV distribution)</a:t>
+                      </a:r>
+                    </a:p>
+                  </a:txBody>
+                </a:tc>
+              </a:tr>
+              <a:tr h="0">
+                <a:tc>
+                  <a:txBody>
+                    <a:bodyPr/>
+                    <a:lstStyle/>
+                    <a:p>
+                      <a:pPr lvl="0" indent="0" marL="0">
+                        <a:buNone/>
+                      </a:pPr>
+                      <a:r>
+                        <a:rPr b="1"/>
+                        <a:t>Exposure</a:t>
+                      </a:r>
+                    </a:p>
+                  </a:txBody>
+                </a:tc>
+                <a:tc>
+                  <a:txBody>
+                    <a:bodyPr/>
+                    <a:lstStyle/>
+                    <a:p>
+                      <a:pPr lvl="0" indent="0" marL="0">
+                        <a:buNone/>
+                      </a:pPr>
+                      <a:r>
+                        <a:rPr/>
+                        <a:t>Houses at different elevations</a:t>
+                      </a:r>
+                    </a:p>
+                  </a:txBody>
+                </a:tc>
+              </a:tr>
+              <a:tr h="0">
+                <a:tc>
+                  <a:txBody>
+                    <a:bodyPr/>
+                    <a:lstStyle/>
+                    <a:p>
+                      <a:pPr lvl="0" indent="0" marL="0">
+                        <a:buNone/>
+                      </a:pPr>
+                      <a:r>
+                        <a:rPr b="1"/>
+                        <a:t>Vulnerability</a:t>
+                      </a:r>
+                    </a:p>
+                  </a:txBody>
+                </a:tc>
+                <a:tc>
+                  <a:txBody>
+                    <a:bodyPr/>
+                    <a:lstStyle/>
+                    <a:p>
+                      <a:pPr lvl="0" indent="0" marL="0">
+                        <a:buNone/>
+                      </a:pPr>
+                      <a:r>
+                        <a:rPr/>
+                        <a:t>Depth-damage function</a:t>
+                      </a:r>
+                    </a:p>
+                  </a:txBody>
+                </a:tc>
+              </a:tr>
+              <a:tr h="0">
+                <a:tc>
+                  <a:txBody>
+                    <a:bodyPr/>
+                    <a:lstStyle/>
+                    <a:p>
+                      <a:pPr lvl="0" indent="0" marL="0">
+                        <a:buNone/>
+                      </a:pPr>
+                      <a:r>
+                        <a:rPr b="1"/>
+                        <a:t>Levers</a:t>
+                      </a:r>
+                    </a:p>
+                  </a:txBody>
+                </a:tc>
+                <a:tc>
+                  <a:txBody>
+                    <a:bodyPr/>
+                    <a:lstStyle/>
+                    <a:p>
+                      <a:pPr lvl="0" indent="0" marL="0">
+                        <a:buNone/>
+                      </a:pPr>
+                      <a:r>
+                        <a:rPr/>
+                        <a:t>Elevate houses, build seawall, managed retreat</a:t>
+                      </a:r>
+                    </a:p>
+                  </a:txBody>
+                </a:tc>
+              </a:tr>
+            </a:tbl>
+          </a:graphicData>
+        </a:graphic>
+      </p:graphicFrame>
+    </p:spTree>
+  </p:cSld>
+</p:sld>
+</file>
+
+<file path=ppt/slides/slide26.xml><?xml version="1.0" encoding="utf-8"?>
+<p:sld xmlns:a="http://schemas.openxmlformats.org/drawingml/2006/main" xmlns:r="http://schemas.openxmlformats.org/officeDocument/2006/relationships" xmlns:p="http://schemas.openxmlformats.org/presentationml/2006/main">
+  <p:cSld>
+    <p:spTree>
+      <p:nvGrpSpPr>
+        <p:cNvPr id="1" name=""/>
+        <p:cNvGrpSpPr/>
+        <p:nvPr/>
+      </p:nvGrpSpPr>
+      <p:grpSpPr>
+        <a:xfrm>
+          <a:off x="0" y="0"/>
+          <a:ext cx="0" cy="0"/>
+          <a:chOff x="0" y="0"/>
+          <a:chExt cx="0" cy="0"/>
+        </a:xfrm>
+      </p:grpSpPr>
+      <p:sp>
+        <p:nvSpPr>
+          <p:cNvPr id="2" name="Title 1"/>
+          <p:cNvSpPr>
+            <a:spLocks noGrp="1"/>
+          </p:cNvSpPr>
+          <p:nvPr>
+            <p:ph type="title"/>
+          </p:nvPr>
+        </p:nvSpPr>
+        <p:spPr/>
+        <p:txBody>
+          <a:bodyPr/>
+          <a:lstStyle/>
+          <a:p>
+            <a:pPr lvl="0" indent="0" marL="0">
+              <a:buNone/>
+            </a:pPr>
+            <a:r>
+              <a:rPr/>
+              <a:t>Why iCOW?</a:t>
+            </a:r>
+          </a:p>
+        </p:txBody>
+      </p:sp>
+      <p:sp>
+        <p:nvSpPr>
+          <p:cNvPr id="3" name="Content Placeholder 2"/>
+          <p:cNvSpPr>
+            <a:spLocks noGrp="1"/>
+          </p:cNvSpPr>
+          <p:nvPr>
+            <p:ph idx="1"/>
+          </p:nvPr>
+        </p:nvSpPr>
+        <p:spPr/>
+        <p:txBody>
+          <a:bodyPr/>
+          <a:lstStyle/>
+          <a:p>
+            <a:pPr lvl="0" indent="0" marL="0">
+              <a:buNone/>
+            </a:pPr>
+            <a:r>
+              <a:rPr/>
+              <a:t>Why use this simplified model?</a:t>
+            </a:r>
+          </a:p>
+          <a:p>
+            <a:pPr lvl="0"/>
+            <a:r>
+              <a:rPr b="1"/>
+              <a:t>Fast enough</a:t>
+            </a:r>
+            <a:r>
+              <a:rPr/>
+              <a:t> for many Monte Carlo simulations</a:t>
+            </a:r>
+          </a:p>
+          <a:p>
+            <a:pPr lvl="0"/>
+            <a:r>
+              <a:rPr b="1"/>
+              <a:t>Simple enough</a:t>
+            </a:r>
+            <a:r>
+              <a:rPr/>
+              <a:t> to understand completely</a:t>
+            </a:r>
+          </a:p>
+          <a:p>
+            <a:pPr lvl="0"/>
+            <a:r>
+              <a:rPr b="1"/>
+              <a:t>Rich enough</a:t>
+            </a:r>
+            <a:r>
+              <a:rPr/>
+              <a:t> to explore real trade-offs</a:t>
+            </a:r>
+          </a:p>
+          <a:p>
+            <a:pPr lvl="0" indent="0" marL="0">
+              <a:buNone/>
+            </a:pPr>
+            <a:r>
+              <a:rPr/>
+              <a:t>We will use iCOW throughout the semester to explore risk management decisions.</a:t>
+            </a:r>
+          </a:p>
+        </p:txBody>
+      </p:sp>
+    </p:spTree>
+  </p:cSld>
+  <p:timing>
+    <p:tnLst>
+      <p:par>
+        <p:cTn id="1" dur="indefinite" restart="never" nodeType="tmRoot">
+          <p:childTnLst>
+            <p:seq concurrent="1" nextAc="seek">
+              <p:cTn id="2" dur="indefinite" nodeType="mainSeq">
+                <p:childTnLst>
+                  <p:par>
+                    <p:cTn id="3" fill="hold">
+                      <p:stCondLst>
+                        <p:cond delay="indefinite"/>
+                      </p:stCondLst>
+                      <p:childTnLst>
+                        <p:par>
+                          <p:cTn id="4" fill="hold">
+                            <p:stCondLst>
+                              <p:cond delay="0"/>
+                            </p:stCondLst>
+                            <p:childTnLst>
+                              <p:par>
+                                <p:cTn id="5" presetID="1" presetClass="entr" presetSubtype="0" fill="hold" grpId="0" nodeType="clickEffect">
+                                  <p:stCondLst>
+                                    <p:cond delay="0"/>
+                                  </p:stCondLst>
+                                  <p:childTnLst>
+                                    <p:set>
+                                      <p:cBhvr>
+                                        <p:cTn id="6" dur="1" fill="hold">
+                                          <p:stCondLst>
+                                            <p:cond delay="0"/>
+                                          </p:stCondLst>
+                                        </p:cTn>
+                                        <p:tgtEl>
+                                          <p:spTgt spid="3">
+                                            <p:txEl>
+                                              <p:pRg st="1" end="1"/>
+                                            </p:txEl>
+                                          </p:spTgt>
+                                        </p:tgtEl>
+                                        <p:attrNameLst>
+                                          <p:attrName>style.visibility</p:attrName>
+                                        </p:attrNameLst>
+                                      </p:cBhvr>
+                                      <p:to>
+                                        <p:strVal val="visible"/>
+                                      </p:to>
+                                    </p:set>
+                                  </p:childTnLst>
+                                </p:cTn>
+                              </p:par>
+                            </p:childTnLst>
+                          </p:cTn>
+                        </p:par>
+                      </p:childTnLst>
+                    </p:cTn>
+                  </p:par>
+                  <p:par>
+                    <p:cTn id="7" fill="hold">
+                      <p:stCondLst>
+                        <p:cond delay="indefinite"/>
+                      </p:stCondLst>
+                      <p:childTnLst>
+                        <p:par>
+                          <p:cTn id="8" fill="hold">
+                            <p:stCondLst>
+                              <p:cond delay="0"/>
+                            </p:stCondLst>
+                            <p:childTnLst>
+                              <p:par>
+                                <p:cTn id="9" presetID="1" presetClass="entr" presetSubtype="0" fill="hold" grpId="0" nodeType="clickEffect">
+                                  <p:stCondLst>
+                                    <p:cond delay="0"/>
+                                  </p:stCondLst>
+                                  <p:childTnLst>
+                                    <p:set>
+                                      <p:cBhvr>
+                                        <p:cTn id="10" dur="1" fill="hold">
+                                          <p:stCondLst>
+                                            <p:cond delay="0"/>
+                                          </p:stCondLst>
+                                        </p:cTn>
+                                        <p:tgtEl>
+                                          <p:spTgt spid="3">
+                                            <p:txEl>
+                                              <p:pRg st="2" end="2"/>
+                                            </p:txEl>
+                                          </p:spTgt>
+                                        </p:tgtEl>
+                                        <p:attrNameLst>
+                                          <p:attrName>style.visibility</p:attrName>
+                                        </p:attrNameLst>
+                                      </p:cBhvr>
+                                      <p:to>
+                                        <p:strVal val="visible"/>
+                                      </p:to>
+                                    </p:set>
+                                  </p:childTnLst>
+                                </p:cTn>
+                              </p:par>
+                            </p:childTnLst>
+                          </p:cTn>
+                        </p:par>
+                      </p:childTnLst>
+                    </p:cTn>
+                  </p:par>
+                  <p:par>
+                    <p:cTn id="11" fill="hold">
+                      <p:stCondLst>
+                        <p:cond delay="indefinite"/>
+                      </p:stCondLst>
+                      <p:childTnLst>
+                        <p:par>
+                          <p:cTn id="12" fill="hold">
+                            <p:stCondLst>
+                              <p:cond delay="0"/>
+                            </p:stCondLst>
+                            <p:childTnLst>
+                              <p:par>
+                                <p:cTn id="13" presetID="1" presetClass="entr" presetSubtype="0" fill="hold" grpId="0" nodeType="clickEffect">
+                                  <p:stCondLst>
+                                    <p:cond delay="0"/>
+                                  </p:stCondLst>
+                                  <p:childTnLst>
+                                    <p:set>
+                                      <p:cBhvr>
+                                        <p:cTn id="14" dur="1" fill="hold">
+                                          <p:stCondLst>
+                                            <p:cond delay="0"/>
+                                          </p:stCondLst>
+                                        </p:cTn>
+                                        <p:tgtEl>
+                                          <p:spTgt spid="3">
+                                            <p:txEl>
+                                              <p:pRg st="3" end="3"/>
+                                            </p:txEl>
+                                          </p:spTgt>
+                                        </p:tgtEl>
+                                        <p:attrNameLst>
+                                          <p:attrName>style.visibility</p:attrName>
+                                        </p:attrNameLst>
+                                      </p:cBhvr>
+                                      <p:to>
+                                        <p:strVal val="visible"/>
+                                      </p:to>
+                                    </p:set>
+                                  </p:childTnLst>
+                                </p:cTn>
+                              </p:par>
+                            </p:childTnLst>
+                          </p:cTn>
+                        </p:par>
+                      </p:childTnLst>
+                    </p:cTn>
+                  </p:par>
+                </p:childTnLst>
+              </p:cTn>
+              <p:prevCondLst>
+                <p:cond evt="onPrev" delay="0">
+                  <p:tgtEl>
+                    <p:sldTgt/>
+                  </p:tgtEl>
+                </p:cond>
+              </p:prevCondLst>
+              <p:nextCondLst>
+                <p:cond evt="onNext" delay="0">
+                  <p:tgtEl>
+                    <p:sldTgt/>
+                  </p:tgtEl>
+                </p:cond>
+              </p:nextCondLst>
+            </p:seq>
+          </p:childTnLst>
+        </p:cTn>
+      </p:par>
+    </p:tnLst>
+    <p:bldLst>
+      <p:bldP spid="3" grpId="0" uiExpand="1" build="p"/>
+    </p:bldLst>
+  </p:timing>
+</p:sld>
+</file>
+
+<file path=ppt/slides/slide27.xml><?xml version="1.0" encoding="utf-8"?>
+<p:sld xmlns:a="http://schemas.openxmlformats.org/drawingml/2006/main" xmlns:r="http://schemas.openxmlformats.org/officeDocument/2006/relationships" xmlns:p="http://schemas.openxmlformats.org/presentationml/2006/main">
+  <p:cSld>
+    <p:spTree>
+      <p:nvGrpSpPr>
+        <p:cNvPr id="1" name=""/>
+        <p:cNvGrpSpPr/>
+        <p:nvPr/>
+      </p:nvGrpSpPr>
+      <p:grpSpPr>
+        <a:xfrm>
+          <a:off x="0" y="0"/>
+          <a:ext cx="0" cy="0"/>
+          <a:chOff x="0" y="0"/>
+          <a:chExt cx="0" cy="0"/>
+        </a:xfrm>
+      </p:grpSpPr>
+      <p:sp>
+        <p:nvSpPr>
+          <p:cNvPr id="2" name="Title 1"/>
+          <p:cNvSpPr>
+            <a:spLocks noGrp="1"/>
+          </p:cNvSpPr>
+          <p:nvPr>
+            <p:ph type="title"/>
+          </p:nvPr>
+        </p:nvSpPr>
+        <p:spPr>
+          <a:xfrm>
+            <a:off x="722313" y="3305176"/>
+            <a:ext cx="7772400" cy="1021556"/>
+          </a:xfrm>
+        </p:spPr>
+        <p:txBody>
+          <a:bodyPr/>
+          <a:lstStyle/>
+          <a:p>
+            <a:pPr lvl="0" indent="0" marL="0">
+              <a:buNone/>
+            </a:pPr>
+            <a:r>
+              <a:rPr/>
+              <a:t>Wrap Up</a:t>
+            </a:r>
+          </a:p>
+        </p:txBody>
+      </p:sp>
+    </p:spTree>
+  </p:cSld>
+</p:sld>
+</file>
+
+<file path=ppt/slides/slide28.xml><?xml version="1.0" encoding="utf-8"?>
+<p:sld xmlns:a="http://schemas.openxmlformats.org/drawingml/2006/main" xmlns:r="http://schemas.openxmlformats.org/officeDocument/2006/relationships" xmlns:p="http://schemas.openxmlformats.org/presentationml/2006/main">
+  <p:cSld>
+    <p:spTree>
+      <p:nvGrpSpPr>
+        <p:cNvPr id="1" name=""/>
+        <p:cNvGrpSpPr/>
+        <p:nvPr/>
+      </p:nvGrpSpPr>
+      <p:grpSpPr>
+        <a:xfrm>
+          <a:off x="0" y="0"/>
+          <a:ext cx="0" cy="0"/>
+          <a:chOff x="0" y="0"/>
+          <a:chExt cx="0" cy="0"/>
+        </a:xfrm>
+      </p:grpSpPr>
+      <p:sp>
+        <p:nvSpPr>
+          <p:cNvPr id="2" name="Title 1"/>
+          <p:cNvSpPr>
+            <a:spLocks noGrp="1"/>
+          </p:cNvSpPr>
+          <p:nvPr>
+            <p:ph type="title"/>
+          </p:nvPr>
+        </p:nvSpPr>
+        <p:spPr/>
+        <p:txBody>
+          <a:bodyPr/>
+          <a:lstStyle/>
+          <a:p>
+            <a:pPr lvl="0" indent="0" marL="0">
+              <a:buNone/>
+            </a:pPr>
+            <a:r>
+              <a:rPr/>
+              <a:t>Key Takeaways</a:t>
+            </a:r>
+          </a:p>
+        </p:txBody>
+      </p:sp>
+      <p:sp>
+        <p:nvSpPr>
+          <p:cNvPr id="3" name="Content Placeholder 2"/>
+          <p:cNvSpPr>
+            <a:spLocks noGrp="1"/>
+          </p:cNvSpPr>
+          <p:nvPr>
+            <p:ph idx="1"/>
+          </p:nvPr>
+        </p:nvSpPr>
+        <p:spPr/>
+        <p:txBody>
+          <a:bodyPr/>
+          <a:lstStyle/>
+          <a:p>
+            <a:pPr lvl="0" indent="-342900" marL="342900">
+              <a:buAutoNum type="arabicPeriod"/>
+            </a:pPr>
+            <a:r>
+              <a:rPr b="1"/>
+              <a:t>Risk</a:t>
+            </a:r>
+            <a:r>
+              <a:rPr/>
+              <a:t> emerges from the interaction of hazard, exposure, and vulnerability</a:t>
+            </a:r>
+          </a:p>
+          <a:p>
+            <a:pPr lvl="0" indent="-342900" marL="342900">
+              <a:buAutoNum type="arabicPeriod"/>
+            </a:pPr>
+            <a:r>
+              <a:rPr b="1"/>
+              <a:t>XLRM</a:t>
+            </a:r>
+            <a:r>
+              <a:rPr/>
+              <a:t> helps us structure complex decision problems</a:t>
+            </a:r>
+          </a:p>
+          <a:p>
+            <a:pPr lvl="0" indent="-342900" marL="342900">
+              <a:buAutoNum type="arabicPeriod"/>
+            </a:pPr>
+            <a:r>
+              <a:rPr b="1"/>
+              <a:t>Extreme events</a:t>
+            </a:r>
+            <a:r>
+              <a:rPr/>
+              <a:t> require specialized distributions (GEV)</a:t>
+            </a:r>
+          </a:p>
+          <a:p>
+            <a:pPr lvl="0" indent="-342900" marL="342900">
+              <a:buAutoNum type="arabicPeriod"/>
+            </a:pPr>
+            <a:r>
+              <a:rPr b="1"/>
+              <a:t>iCOW</a:t>
+            </a:r>
+            <a:r>
+              <a:rPr/>
+              <a:t> is our pedagogical sandbox for exploring flood risk decisions</a:t>
+            </a:r>
+          </a:p>
+        </p:txBody>
+      </p:sp>
+    </p:spTree>
+  </p:cSld>
+</p:sld>
+</file>
+
+<file path=ppt/slides/slide29.xml><?xml version="1.0" encoding="utf-8"?>
+<p:sld xmlns:a="http://schemas.openxmlformats.org/drawingml/2006/main" xmlns:r="http://schemas.openxmlformats.org/officeDocument/2006/relationships" xmlns:p="http://schemas.openxmlformats.org/presentationml/2006/main">
+  <p:cSld>
+    <p:spTree>
+      <p:nvGrpSpPr>
+        <p:cNvPr id="1" name=""/>
+        <p:cNvGrpSpPr/>
+        <p:nvPr/>
+      </p:nvGrpSpPr>
+      <p:grpSpPr>
+        <a:xfrm>
+          <a:off x="0" y="0"/>
+          <a:ext cx="0" cy="0"/>
+          <a:chOff x="0" y="0"/>
+          <a:chExt cx="0" cy="0"/>
+        </a:xfrm>
+      </p:grpSpPr>
+      <p:sp>
+        <p:nvSpPr>
+          <p:cNvPr id="2" name="Title 1"/>
+          <p:cNvSpPr>
+            <a:spLocks noGrp="1"/>
+          </p:cNvSpPr>
+          <p:nvPr>
+            <p:ph type="title"/>
+          </p:nvPr>
+        </p:nvSpPr>
+        <p:spPr/>
+        <p:txBody>
+          <a:bodyPr/>
+          <a:lstStyle/>
+          <a:p>
+            <a:pPr lvl="0" indent="0" marL="0">
+              <a:buNone/>
+            </a:pPr>
+            <a:r>
+              <a:rPr/>
+              <a:t>Lab Preview</a:t>
+            </a:r>
+          </a:p>
+        </p:txBody>
+      </p:sp>
+      <p:sp>
+        <p:nvSpPr>
+          <p:cNvPr id="3" name="Content Placeholder 2"/>
+          <p:cNvSpPr>
+            <a:spLocks noGrp="1"/>
+          </p:cNvSpPr>
+          <p:nvPr>
+            <p:ph idx="1"/>
+          </p:nvPr>
+        </p:nvSpPr>
+        <p:spPr/>
+        <p:txBody>
+          <a:bodyPr/>
+          <a:lstStyle/>
+          <a:p>
+            <a:pPr lvl="0" indent="0" marL="0">
+              <a:buNone/>
+            </a:pPr>
+            <a:r>
+              <a:rPr/>
+              <a:t>On Friday, you will:</a:t>
+            </a:r>
+          </a:p>
+          <a:p>
+            <a:pPr lvl="0" indent="-342900" marL="342900">
+              <a:buAutoNum type="arabicPeriod"/>
+            </a:pPr>
+            <a:r>
+              <a:rPr/>
+              <a:t>Fit a GEV distribution to real flood gauge data</a:t>
+            </a:r>
+          </a:p>
+          <a:p>
+            <a:pPr lvl="0" indent="-342900" marL="342900">
+              <a:buAutoNum type="arabicPeriod"/>
+            </a:pPr>
+            <a:r>
+              <a:rPr/>
+              <a:t>Define a HAZUS-style depth-damage function</a:t>
+            </a:r>
+          </a:p>
+          <a:p>
+            <a:pPr lvl="0" indent="-342900" marL="342900">
+              <a:buAutoNum type="arabicPeriod"/>
+            </a:pPr>
+            <a:r>
+              <a:rPr/>
+              <a:t>Compute damage distributions using Monte Carlo</a:t>
+            </a:r>
+          </a:p>
+          <a:p>
+            <a:pPr lvl="0" indent="-342900" marL="342900">
+              <a:buAutoNum type="arabicPeriod"/>
+            </a:pPr>
+            <a:r>
+              <a:rPr/>
+              <a:t>Extend to 100 houses at varying elevations</a:t>
+            </a:r>
+          </a:p>
+          <a:p>
+            <a:pPr lvl="0" indent="-342900" marL="342900">
+              <a:buAutoNum type="arabicPeriod"/>
+            </a:pPr>
+            <a:r>
+              <a:rPr/>
+              <a:t>Get started with the ICOW package</a:t>
             </a:r>
           </a:p>
         </p:txBody>
@@ -3268,7 +8377,12 @@
             <p:ph type="title"/>
           </p:nvPr>
         </p:nvSpPr>
-        <p:spPr/>
+        <p:spPr>
+          <a:xfrm>
+            <a:off x="722313" y="3305176"/>
+            <a:ext cx="7772400" cy="1021556"/>
+          </a:xfrm>
+        </p:spPr>
         <p:txBody>
           <a:bodyPr/>
           <a:lstStyle/>
@@ -3278,7 +8392,54 @@
             </a:pPr>
             <a:r>
               <a:rPr/>
-              <a:t>Preparation</a:t>
+              <a:t>Hook: The Insurance Dilemma</a:t>
+            </a:r>
+          </a:p>
+        </p:txBody>
+      </p:sp>
+    </p:spTree>
+  </p:cSld>
+</p:sld>
+</file>
+
+<file path=ppt/slides/slide30.xml><?xml version="1.0" encoding="utf-8"?>
+<p:sld xmlns:a="http://schemas.openxmlformats.org/drawingml/2006/main" xmlns:r="http://schemas.openxmlformats.org/officeDocument/2006/relationships" xmlns:p="http://schemas.openxmlformats.org/presentationml/2006/main">
+  <p:cSld>
+    <p:spTree>
+      <p:nvGrpSpPr>
+        <p:cNvPr id="1" name=""/>
+        <p:cNvGrpSpPr/>
+        <p:nvPr/>
+      </p:nvGrpSpPr>
+      <p:grpSpPr>
+        <a:xfrm>
+          <a:off x="0" y="0"/>
+          <a:ext cx="0" cy="0"/>
+          <a:chOff x="0" y="0"/>
+          <a:chExt cx="0" cy="0"/>
+        </a:xfrm>
+      </p:grpSpPr>
+      <p:sp>
+        <p:nvSpPr>
+          <p:cNvPr id="2" name="Title 1"/>
+          <p:cNvSpPr>
+            <a:spLocks noGrp="1"/>
+          </p:cNvSpPr>
+          <p:nvPr>
+            <p:ph type="title"/>
+          </p:nvPr>
+        </p:nvSpPr>
+        <p:spPr/>
+        <p:txBody>
+          <a:bodyPr/>
+          <a:lstStyle/>
+          <a:p>
+            <a:pPr lvl="0" indent="0" marL="0">
+              <a:buNone/>
+            </a:pPr>
+            <a:r>
+              <a:rPr/>
+              <a:t>Before Friday</a:t>
             </a:r>
           </a:p>
         </p:txBody>
@@ -3301,11 +8462,160 @@
             <a:pPr lvl="0" indent="0" marL="0">
               <a:buNone/>
             </a:pPr>
+            <a:r>
+              <a:rPr b="1"/>
+              <a:t>Reading:</a:t>
+            </a:r>
+            <a:r>
+              <a:rPr/>
+              <a:t> Ceres, Forest, and Keller (2019) “City on a Wedge”</a:t>
+            </a:r>
+          </a:p>
+          <a:p>
+            <a:pPr lvl="0"/>
+            <a:r>
+              <a:rPr/>
+              <a:t>Focus on Sections 1-3 (model description)</a:t>
+            </a:r>
+          </a:p>
+          <a:p>
+            <a:pPr lvl="0"/>
+            <a:r>
+              <a:rPr/>
+              <a:t>Understand the geometry and assumptions</a:t>
+            </a:r>
+          </a:p>
+          <a:p>
+            <a:pPr lvl="0"/>
+            <a:r>
+              <a:rPr/>
+              <a:t>Come prepared with questions</a:t>
+            </a:r>
+          </a:p>
+          <a:p>
+            <a:pPr lvl="0" indent="0" marL="0">
+              <a:buNone/>
+            </a:pPr>
+            <a:r>
+              <a:rPr/>
+              <a:t>This gives you context for the lab and the rest of the semester.</a:t>
+            </a:r>
+          </a:p>
+        </p:txBody>
+      </p:sp>
+    </p:spTree>
+  </p:cSld>
+</p:sld>
+</file>
+
+<file path=ppt/slides/slide31.xml><?xml version="1.0" encoding="utf-8"?>
+<p:sld xmlns:a="http://schemas.openxmlformats.org/drawingml/2006/main" xmlns:r="http://schemas.openxmlformats.org/officeDocument/2006/relationships" xmlns:p="http://schemas.openxmlformats.org/presentationml/2006/main">
+  <p:cSld>
+    <p:spTree>
+      <p:nvGrpSpPr>
+        <p:cNvPr id="1" name=""/>
+        <p:cNvGrpSpPr/>
+        <p:nvPr/>
+      </p:nvGrpSpPr>
+      <p:grpSpPr>
+        <a:xfrm>
+          <a:off x="0" y="0"/>
+          <a:ext cx="0" cy="0"/>
+          <a:chOff x="0" y="0"/>
+          <a:chExt cx="0" cy="0"/>
+        </a:xfrm>
+      </p:grpSpPr>
+      <p:sp>
+        <p:nvSpPr>
+          <p:cNvPr id="2" name="Title 1"/>
+          <p:cNvSpPr>
+            <a:spLocks noGrp="1"/>
+          </p:cNvSpPr>
+          <p:nvPr>
+            <p:ph type="title"/>
+          </p:nvPr>
+        </p:nvSpPr>
+        <p:spPr/>
+        <p:txBody>
+          <a:bodyPr/>
+          <a:lstStyle/>
+          <a:p>
+            <a:pPr lvl="0" indent="0" marL="0">
+              <a:buNone/>
+            </a:pPr>
+            <a:r>
+              <a:rPr/>
+              <a:t>References</a:t>
+            </a:r>
+          </a:p>
+        </p:txBody>
+      </p:sp>
+      <p:sp>
+        <p:nvSpPr>
+          <p:cNvPr id="3" name="Content Placeholder 2"/>
+          <p:cNvSpPr>
+            <a:spLocks noGrp="1"/>
+          </p:cNvSpPr>
+          <p:nvPr>
+            <p:ph idx="1"/>
+          </p:nvPr>
+        </p:nvSpPr>
+        <p:spPr/>
+        <p:txBody>
+          <a:bodyPr/>
+          <a:lstStyle/>
+          <a:p>
+            <a:pPr lvl="0" indent="0" marL="0">
+              <a:buNone/>
+            </a:pPr>
+            <a:r>
+              <a:rPr/>
+              <a:t>Ceres, Robert L., Chris E. Forest, and Klaus Keller. 2019. “Optimization of Multiple Storm Surge Risk Mitigation Strategies for an Island City On a Wedge.” </a:t>
+            </a:r>
+            <a:r>
+              <a:rPr i="1"/>
+              <a:t>Environmental Modelling &amp; Software</a:t>
+            </a:r>
+            <a:r>
+              <a:rPr/>
+              <a:t> 119 (September): 341–53. </a:t>
+            </a:r>
             <a:r>
               <a:rPr>
                 <a:hlinkClick r:id="rId2"/>
               </a:rPr>
-              <a:t>Flood Risk Assessment and HEC-FDA</a:t>
+              <a:t>https://doi.org/10.1016/j.envsoft.2019.06.011</a:t>
+            </a:r>
+            <a:r>
+              <a:rPr/>
+              <a:t>.</a:t>
+            </a:r>
+          </a:p>
+          <a:p>
+            <a:pPr lvl="0" indent="0" marL="0">
+              <a:buNone/>
+            </a:pPr>
+            <a:r>
+              <a:rPr/>
+              <a:t>Wing, Oliver E. J., Nicholas Pinter, Paul D. Bates, and Carolyn Kousky. 2020. “New Insights into US Flood Vulnerability Revealed from Flood Insurance Big Data.” </a:t>
+            </a:r>
+            <a:r>
+              <a:rPr i="1"/>
+              <a:t>Nature Communications</a:t>
+            </a:r>
+            <a:r>
+              <a:rPr/>
+              <a:t> 11 (1, 1): 1444. </a:t>
+            </a:r>
+            <a:r>
+              <a:rPr>
+                <a:hlinkClick r:id="rId3"/>
+              </a:rPr>
+              <a:t>https://doi.org/10.1038/s41467-020-15264-2</a:t>
+            </a:r>
+            <a:r>
+              <a:rPr/>
+              <a:t>.</a:t>
             </a:r>
           </a:p>
         </p:txBody>
@@ -3352,7 +8662,7 @@
             </a:pPr>
             <a:r>
               <a:rPr/>
-              <a:t>Coming Soon</a:t>
+              <a:t>A Pricing Problem</a:t>
             </a:r>
           </a:p>
         </p:txBody>
@@ -3377,13 +8687,223 @@
             </a:pPr>
             <a:r>
               <a:rPr/>
-              <a:t>This lecture is under development.</a:t>
+              <a:t>An insurance company wants to offer flood insurance for coastal homes.</a:t>
+            </a:r>
+          </a:p>
+          <a:p>
+            <a:pPr lvl="0" indent="0" marL="0">
+              <a:buNone/>
+            </a:pPr>
+            <a:r>
+              <a:rPr/>
+              <a:t>To set premiums, they need to answer:</a:t>
+            </a:r>
+          </a:p>
+          <a:p>
+            <a:pPr lvl="0"/>
+            <a:r>
+              <a:rPr/>
+              <a:t>How often will floods occur?</a:t>
+            </a:r>
+          </a:p>
+          <a:p>
+            <a:pPr lvl="0"/>
+            <a:r>
+              <a:rPr/>
+              <a:t>How bad will those floods be?</a:t>
+            </a:r>
+          </a:p>
+          <a:p>
+            <a:pPr lvl="0"/>
+            <a:r>
+              <a:rPr/>
+              <a:t>How much damage will result?</a:t>
             </a:r>
           </a:p>
         </p:txBody>
       </p:sp>
     </p:spTree>
   </p:cSld>
+  <p:timing>
+    <p:tnLst>
+      <p:par>
+        <p:cTn id="1" dur="indefinite" restart="never" nodeType="tmRoot">
+          <p:childTnLst>
+            <p:seq concurrent="1" nextAc="seek">
+              <p:cTn id="2" dur="indefinite" nodeType="mainSeq">
+                <p:childTnLst>
+                  <p:par>
+                    <p:cTn id="3" fill="hold">
+                      <p:stCondLst>
+                        <p:cond delay="indefinite"/>
+                      </p:stCondLst>
+                      <p:childTnLst>
+                        <p:par>
+                          <p:cTn id="4" fill="hold">
+                            <p:stCondLst>
+                              <p:cond delay="0"/>
+                            </p:stCondLst>
+                            <p:childTnLst>
+                              <p:par>
+                                <p:cTn id="5" presetID="1" presetClass="entr" presetSubtype="0" fill="hold" grpId="0" nodeType="clickEffect">
+                                  <p:stCondLst>
+                                    <p:cond delay="0"/>
+                                  </p:stCondLst>
+                                  <p:childTnLst>
+                                    <p:set>
+                                      <p:cBhvr>
+                                        <p:cTn id="6" dur="1" fill="hold">
+                                          <p:stCondLst>
+                                            <p:cond delay="0"/>
+                                          </p:stCondLst>
+                                        </p:cTn>
+                                        <p:tgtEl>
+                                          <p:spTgt spid="3">
+                                            <p:txEl>
+                                              <p:pRg st="2" end="2"/>
+                                            </p:txEl>
+                                          </p:spTgt>
+                                        </p:tgtEl>
+                                        <p:attrNameLst>
+                                          <p:attrName>style.visibility</p:attrName>
+                                        </p:attrNameLst>
+                                      </p:cBhvr>
+                                      <p:to>
+                                        <p:strVal val="visible"/>
+                                      </p:to>
+                                    </p:set>
+                                  </p:childTnLst>
+                                </p:cTn>
+                              </p:par>
+                            </p:childTnLst>
+                          </p:cTn>
+                        </p:par>
+                      </p:childTnLst>
+                    </p:cTn>
+                  </p:par>
+                  <p:par>
+                    <p:cTn id="7" fill="hold">
+                      <p:stCondLst>
+                        <p:cond delay="indefinite"/>
+                      </p:stCondLst>
+                      <p:childTnLst>
+                        <p:par>
+                          <p:cTn id="8" fill="hold">
+                            <p:stCondLst>
+                              <p:cond delay="0"/>
+                            </p:stCondLst>
+                            <p:childTnLst>
+                              <p:par>
+                                <p:cTn id="9" presetID="1" presetClass="entr" presetSubtype="0" fill="hold" grpId="0" nodeType="clickEffect">
+                                  <p:stCondLst>
+                                    <p:cond delay="0"/>
+                                  </p:stCondLst>
+                                  <p:childTnLst>
+                                    <p:set>
+                                      <p:cBhvr>
+                                        <p:cTn id="10" dur="1" fill="hold">
+                                          <p:stCondLst>
+                                            <p:cond delay="0"/>
+                                          </p:stCondLst>
+                                        </p:cTn>
+                                        <p:tgtEl>
+                                          <p:spTgt spid="3">
+                                            <p:txEl>
+                                              <p:pRg st="3" end="3"/>
+                                            </p:txEl>
+                                          </p:spTgt>
+                                        </p:tgtEl>
+                                        <p:attrNameLst>
+                                          <p:attrName>style.visibility</p:attrName>
+                                        </p:attrNameLst>
+                                      </p:cBhvr>
+                                      <p:to>
+                                        <p:strVal val="visible"/>
+                                      </p:to>
+                                    </p:set>
+                                  </p:childTnLst>
+                                </p:cTn>
+                              </p:par>
+                            </p:childTnLst>
+                          </p:cTn>
+                        </p:par>
+                      </p:childTnLst>
+                    </p:cTn>
+                  </p:par>
+                  <p:par>
+                    <p:cTn id="11" fill="hold">
+                      <p:stCondLst>
+                        <p:cond delay="indefinite"/>
+                      </p:stCondLst>
+                      <p:childTnLst>
+                        <p:par>
+                          <p:cTn id="12" fill="hold">
+                            <p:stCondLst>
+                              <p:cond delay="0"/>
+                            </p:stCondLst>
+                            <p:childTnLst>
+                              <p:par>
+                                <p:cTn id="13" presetID="1" presetClass="entr" presetSubtype="0" fill="hold" grpId="0" nodeType="clickEffect">
+                                  <p:stCondLst>
+                                    <p:cond delay="0"/>
+                                  </p:stCondLst>
+                                  <p:childTnLst>
+                                    <p:set>
+                                      <p:cBhvr>
+                                        <p:cTn id="14" dur="1" fill="hold">
+                                          <p:stCondLst>
+                                            <p:cond delay="0"/>
+                                          </p:stCondLst>
+                                        </p:cTn>
+                                        <p:tgtEl>
+                                          <p:spTgt spid="3">
+                                            <p:txEl>
+                                              <p:pRg st="4" end="4"/>
+                                            </p:txEl>
+                                          </p:spTgt>
+                                        </p:tgtEl>
+                                        <p:attrNameLst>
+                                          <p:attrName>style.visibility</p:attrName>
+                                        </p:attrNameLst>
+                                      </p:cBhvr>
+                                      <p:to>
+                                        <p:strVal val="visible"/>
+                                      </p:to>
+                                    </p:set>
+                                  </p:childTnLst>
+                                </p:cTn>
+                              </p:par>
+                            </p:childTnLst>
+                          </p:cTn>
+                        </p:par>
+                      </p:childTnLst>
+                    </p:cTn>
+                  </p:par>
+                </p:childTnLst>
+              </p:cTn>
+              <p:prevCondLst>
+                <p:cond evt="onPrev" delay="0">
+                  <p:tgtEl>
+                    <p:sldTgt/>
+                  </p:tgtEl>
+                </p:cond>
+              </p:prevCondLst>
+              <p:nextCondLst>
+                <p:cond evt="onNext" delay="0">
+                  <p:tgtEl>
+                    <p:sldTgt/>
+                  </p:tgtEl>
+                </p:cond>
+              </p:nextCondLst>
+            </p:seq>
+          </p:childTnLst>
+        </p:cTn>
+      </p:par>
+    </p:tnLst>
+    <p:bldLst>
+      <p:bldP spid="3" grpId="0" uiExpand="1" build="p"/>
+    </p:bldLst>
+  </p:timing>
 </p:sld>
 </file>
 
@@ -3424,7 +8944,724 @@
             </a:pPr>
             <a:r>
               <a:rPr/>
-              <a:t>References</a:t>
+              <a:t>The Core Question</a:t>
+            </a:r>
+          </a:p>
+        </p:txBody>
+      </p:sp>
+      <p:sp>
+        <p:nvSpPr>
+          <p:cNvPr id="3" name="Content Placeholder 2"/>
+          <p:cNvSpPr>
+            <a:spLocks noGrp="1"/>
+          </p:cNvSpPr>
+          <p:nvPr>
+            <p:ph idx="1"/>
+          </p:nvPr>
+        </p:nvSpPr>
+        <p:spPr/>
+        <p:txBody>
+          <a:bodyPr/>
+          <a:lstStyle/>
+          <a:p>
+            <a:pPr lvl="0" indent="0" marL="0">
+              <a:buNone/>
+            </a:pPr>
+            <a:r>
+              <a:rPr b="1"/>
+              <a:t>How do we translate hazards into damages?</a:t>
+            </a:r>
+          </a:p>
+          <a:p>
+            <a:pPr lvl="0" indent="0" marL="0">
+              <a:buNone/>
+            </a:pPr>
+            <a:r>
+              <a:rPr/>
+              <a:t>Today we will:</a:t>
+            </a:r>
+          </a:p>
+          <a:p>
+            <a:pPr lvl="0" indent="-342900" marL="342900">
+              <a:buAutoNum type="arabicPeriod"/>
+            </a:pPr>
+            <a:r>
+              <a:rPr/>
+              <a:t>Define key vocabulary: hazard, exposure, vulnerability</a:t>
+            </a:r>
+          </a:p>
+          <a:p>
+            <a:pPr lvl="0" indent="-342900" marL="342900">
+              <a:buAutoNum type="arabicPeriod"/>
+            </a:pPr>
+            <a:r>
+              <a:rPr/>
+              <a:t>Review the XLRM framework for structuring risk problems</a:t>
+            </a:r>
+          </a:p>
+          <a:p>
+            <a:pPr lvl="0" indent="-342900" marL="342900">
+              <a:buAutoNum type="arabicPeriod"/>
+            </a:pPr>
+            <a:r>
+              <a:rPr/>
+              <a:t>Introduce the GEV distribution for extreme events</a:t>
+            </a:r>
+          </a:p>
+          <a:p>
+            <a:pPr lvl="0" indent="-342900" marL="342900">
+              <a:buAutoNum type="arabicPeriod"/>
+            </a:pPr>
+            <a:r>
+              <a:rPr/>
+              <a:t>Preview the iCOW model we’ll use all semester</a:t>
+            </a:r>
+          </a:p>
+        </p:txBody>
+      </p:sp>
+    </p:spTree>
+  </p:cSld>
+  <p:timing>
+    <p:tnLst>
+      <p:par>
+        <p:cTn id="1" dur="indefinite" restart="never" nodeType="tmRoot">
+          <p:childTnLst>
+            <p:seq concurrent="1" nextAc="seek">
+              <p:cTn id="2" dur="indefinite" nodeType="mainSeq">
+                <p:childTnLst>
+                  <p:par>
+                    <p:cTn id="3" fill="hold">
+                      <p:stCondLst>
+                        <p:cond delay="indefinite"/>
+                      </p:stCondLst>
+                      <p:childTnLst>
+                        <p:par>
+                          <p:cTn id="4" fill="hold">
+                            <p:stCondLst>
+                              <p:cond delay="0"/>
+                            </p:stCondLst>
+                            <p:childTnLst>
+                              <p:par>
+                                <p:cTn id="5" presetID="1" presetClass="entr" presetSubtype="0" fill="hold" grpId="0" nodeType="clickEffect">
+                                  <p:stCondLst>
+                                    <p:cond delay="0"/>
+                                  </p:stCondLst>
+                                  <p:childTnLst>
+                                    <p:set>
+                                      <p:cBhvr>
+                                        <p:cTn id="6" dur="1" fill="hold">
+                                          <p:stCondLst>
+                                            <p:cond delay="0"/>
+                                          </p:stCondLst>
+                                        </p:cTn>
+                                        <p:tgtEl>
+                                          <p:spTgt spid="3">
+                                            <p:txEl>
+                                              <p:pRg st="2" end="2"/>
+                                            </p:txEl>
+                                          </p:spTgt>
+                                        </p:tgtEl>
+                                        <p:attrNameLst>
+                                          <p:attrName>style.visibility</p:attrName>
+                                        </p:attrNameLst>
+                                      </p:cBhvr>
+                                      <p:to>
+                                        <p:strVal val="visible"/>
+                                      </p:to>
+                                    </p:set>
+                                  </p:childTnLst>
+                                </p:cTn>
+                              </p:par>
+                            </p:childTnLst>
+                          </p:cTn>
+                        </p:par>
+                      </p:childTnLst>
+                    </p:cTn>
+                  </p:par>
+                  <p:par>
+                    <p:cTn id="7" fill="hold">
+                      <p:stCondLst>
+                        <p:cond delay="indefinite"/>
+                      </p:stCondLst>
+                      <p:childTnLst>
+                        <p:par>
+                          <p:cTn id="8" fill="hold">
+                            <p:stCondLst>
+                              <p:cond delay="0"/>
+                            </p:stCondLst>
+                            <p:childTnLst>
+                              <p:par>
+                                <p:cTn id="9" presetID="1" presetClass="entr" presetSubtype="0" fill="hold" grpId="0" nodeType="clickEffect">
+                                  <p:stCondLst>
+                                    <p:cond delay="0"/>
+                                  </p:stCondLst>
+                                  <p:childTnLst>
+                                    <p:set>
+                                      <p:cBhvr>
+                                        <p:cTn id="10" dur="1" fill="hold">
+                                          <p:stCondLst>
+                                            <p:cond delay="0"/>
+                                          </p:stCondLst>
+                                        </p:cTn>
+                                        <p:tgtEl>
+                                          <p:spTgt spid="3">
+                                            <p:txEl>
+                                              <p:pRg st="3" end="3"/>
+                                            </p:txEl>
+                                          </p:spTgt>
+                                        </p:tgtEl>
+                                        <p:attrNameLst>
+                                          <p:attrName>style.visibility</p:attrName>
+                                        </p:attrNameLst>
+                                      </p:cBhvr>
+                                      <p:to>
+                                        <p:strVal val="visible"/>
+                                      </p:to>
+                                    </p:set>
+                                  </p:childTnLst>
+                                </p:cTn>
+                              </p:par>
+                            </p:childTnLst>
+                          </p:cTn>
+                        </p:par>
+                      </p:childTnLst>
+                    </p:cTn>
+                  </p:par>
+                  <p:par>
+                    <p:cTn id="11" fill="hold">
+                      <p:stCondLst>
+                        <p:cond delay="indefinite"/>
+                      </p:stCondLst>
+                      <p:childTnLst>
+                        <p:par>
+                          <p:cTn id="12" fill="hold">
+                            <p:stCondLst>
+                              <p:cond delay="0"/>
+                            </p:stCondLst>
+                            <p:childTnLst>
+                              <p:par>
+                                <p:cTn id="13" presetID="1" presetClass="entr" presetSubtype="0" fill="hold" grpId="0" nodeType="clickEffect">
+                                  <p:stCondLst>
+                                    <p:cond delay="0"/>
+                                  </p:stCondLst>
+                                  <p:childTnLst>
+                                    <p:set>
+                                      <p:cBhvr>
+                                        <p:cTn id="14" dur="1" fill="hold">
+                                          <p:stCondLst>
+                                            <p:cond delay="0"/>
+                                          </p:stCondLst>
+                                        </p:cTn>
+                                        <p:tgtEl>
+                                          <p:spTgt spid="3">
+                                            <p:txEl>
+                                              <p:pRg st="4" end="4"/>
+                                            </p:txEl>
+                                          </p:spTgt>
+                                        </p:tgtEl>
+                                        <p:attrNameLst>
+                                          <p:attrName>style.visibility</p:attrName>
+                                        </p:attrNameLst>
+                                      </p:cBhvr>
+                                      <p:to>
+                                        <p:strVal val="visible"/>
+                                      </p:to>
+                                    </p:set>
+                                  </p:childTnLst>
+                                </p:cTn>
+                              </p:par>
+                            </p:childTnLst>
+                          </p:cTn>
+                        </p:par>
+                      </p:childTnLst>
+                    </p:cTn>
+                  </p:par>
+                  <p:par>
+                    <p:cTn id="15" fill="hold">
+                      <p:stCondLst>
+                        <p:cond delay="indefinite"/>
+                      </p:stCondLst>
+                      <p:childTnLst>
+                        <p:par>
+                          <p:cTn id="16" fill="hold">
+                            <p:stCondLst>
+                              <p:cond delay="0"/>
+                            </p:stCondLst>
+                            <p:childTnLst>
+                              <p:par>
+                                <p:cTn id="17" presetID="1" presetClass="entr" presetSubtype="0" fill="hold" grpId="0" nodeType="clickEffect">
+                                  <p:stCondLst>
+                                    <p:cond delay="0"/>
+                                  </p:stCondLst>
+                                  <p:childTnLst>
+                                    <p:set>
+                                      <p:cBhvr>
+                                        <p:cTn id="18" dur="1" fill="hold">
+                                          <p:stCondLst>
+                                            <p:cond delay="0"/>
+                                          </p:stCondLst>
+                                        </p:cTn>
+                                        <p:tgtEl>
+                                          <p:spTgt spid="3">
+                                            <p:txEl>
+                                              <p:pRg st="5" end="5"/>
+                                            </p:txEl>
+                                          </p:spTgt>
+                                        </p:tgtEl>
+                                        <p:attrNameLst>
+                                          <p:attrName>style.visibility</p:attrName>
+                                        </p:attrNameLst>
+                                      </p:cBhvr>
+                                      <p:to>
+                                        <p:strVal val="visible"/>
+                                      </p:to>
+                                    </p:set>
+                                  </p:childTnLst>
+                                </p:cTn>
+                              </p:par>
+                            </p:childTnLst>
+                          </p:cTn>
+                        </p:par>
+                      </p:childTnLst>
+                    </p:cTn>
+                  </p:par>
+                </p:childTnLst>
+              </p:cTn>
+              <p:prevCondLst>
+                <p:cond evt="onPrev" delay="0">
+                  <p:tgtEl>
+                    <p:sldTgt/>
+                  </p:tgtEl>
+                </p:cond>
+              </p:prevCondLst>
+              <p:nextCondLst>
+                <p:cond evt="onNext" delay="0">
+                  <p:tgtEl>
+                    <p:sldTgt/>
+                  </p:tgtEl>
+                </p:cond>
+              </p:nextCondLst>
+            </p:seq>
+          </p:childTnLst>
+        </p:cTn>
+      </p:par>
+    </p:tnLst>
+    <p:bldLst>
+      <p:bldP spid="3" grpId="0" uiExpand="1" build="p"/>
+    </p:bldLst>
+  </p:timing>
+</p:sld>
+</file>
+
+<file path=ppt/slides/slide6.xml><?xml version="1.0" encoding="utf-8"?>
+<p:sld xmlns:a="http://schemas.openxmlformats.org/drawingml/2006/main" xmlns:r="http://schemas.openxmlformats.org/officeDocument/2006/relationships" xmlns:p="http://schemas.openxmlformats.org/presentationml/2006/main">
+  <p:cSld>
+    <p:spTree>
+      <p:nvGrpSpPr>
+        <p:cNvPr id="1" name=""/>
+        <p:cNvGrpSpPr/>
+        <p:nvPr/>
+      </p:nvGrpSpPr>
+      <p:grpSpPr>
+        <a:xfrm>
+          <a:off x="0" y="0"/>
+          <a:ext cx="0" cy="0"/>
+          <a:chOff x="0" y="0"/>
+          <a:chExt cx="0" cy="0"/>
+        </a:xfrm>
+      </p:grpSpPr>
+      <p:sp>
+        <p:nvSpPr>
+          <p:cNvPr id="2" name="Title 1"/>
+          <p:cNvSpPr>
+            <a:spLocks noGrp="1"/>
+          </p:cNvSpPr>
+          <p:nvPr>
+            <p:ph type="title"/>
+          </p:nvPr>
+        </p:nvSpPr>
+        <p:spPr>
+          <a:xfrm>
+            <a:off x="722313" y="3305176"/>
+            <a:ext cx="7772400" cy="1021556"/>
+          </a:xfrm>
+        </p:spPr>
+        <p:txBody>
+          <a:bodyPr/>
+          <a:lstStyle/>
+          <a:p>
+            <a:pPr lvl="0" indent="0" marL="0">
+              <a:buNone/>
+            </a:pPr>
+            <a:r>
+              <a:rPr/>
+              <a:t>Risk Analysis Vocabulary</a:t>
+            </a:r>
+          </a:p>
+        </p:txBody>
+      </p:sp>
+    </p:spTree>
+  </p:cSld>
+</p:sld>
+</file>
+
+<file path=ppt/slides/slide7.xml><?xml version="1.0" encoding="utf-8"?>
+<p:sld xmlns:a="http://schemas.openxmlformats.org/drawingml/2006/main" xmlns:r="http://schemas.openxmlformats.org/officeDocument/2006/relationships" xmlns:p="http://schemas.openxmlformats.org/presentationml/2006/main">
+  <p:cSld>
+    <p:spTree>
+      <p:nvGrpSpPr>
+        <p:cNvPr id="1" name=""/>
+        <p:cNvGrpSpPr/>
+        <p:nvPr/>
+      </p:nvGrpSpPr>
+      <p:grpSpPr>
+        <a:xfrm>
+          <a:off x="0" y="0"/>
+          <a:ext cx="0" cy="0"/>
+          <a:chOff x="0" y="0"/>
+          <a:chExt cx="0" cy="0"/>
+        </a:xfrm>
+      </p:grpSpPr>
+      <p:sp>
+        <p:nvSpPr>
+          <p:cNvPr id="2" name="Title 1"/>
+          <p:cNvSpPr>
+            <a:spLocks noGrp="1"/>
+          </p:cNvSpPr>
+          <p:nvPr>
+            <p:ph type="title"/>
+          </p:nvPr>
+        </p:nvSpPr>
+        <p:spPr/>
+        <p:txBody>
+          <a:bodyPr/>
+          <a:lstStyle/>
+          <a:p>
+            <a:pPr lvl="0" indent="0" marL="0">
+              <a:buNone/>
+            </a:pPr>
+            <a:r>
+              <a:rPr/>
+              <a:t>Hazard</a:t>
+            </a:r>
+          </a:p>
+        </p:txBody>
+      </p:sp>
+      <p:sp>
+        <p:nvSpPr>
+          <p:cNvPr id="3" name="Content Placeholder 2"/>
+          <p:cNvSpPr>
+            <a:spLocks noGrp="1"/>
+          </p:cNvSpPr>
+          <p:nvPr>
+            <p:ph idx="1"/>
+          </p:nvPr>
+        </p:nvSpPr>
+        <p:spPr/>
+        <p:txBody>
+          <a:bodyPr/>
+          <a:lstStyle/>
+          <a:p>
+            <a:pPr lvl="0" indent="0" marL="0">
+              <a:buNone/>
+            </a:pPr>
+            <a:r>
+              <a:rPr b="1"/>
+              <a:t>Hazard:</a:t>
+            </a:r>
+            <a:r>
+              <a:rPr/>
+              <a:t> The physical event or phenomenon</a:t>
+            </a:r>
+          </a:p>
+          <a:p>
+            <a:pPr lvl="0"/>
+            <a:r>
+              <a:rPr/>
+              <a:t>Flood depth at a location</a:t>
+            </a:r>
+          </a:p>
+          <a:p>
+            <a:pPr lvl="0"/>
+            <a:r>
+              <a:rPr/>
+              <a:t>Wind speed during a storm</a:t>
+            </a:r>
+          </a:p>
+          <a:p>
+            <a:pPr lvl="0"/>
+            <a:r>
+              <a:rPr/>
+              <a:t>Ground shaking from an earthquake</a:t>
+            </a:r>
+          </a:p>
+          <a:p>
+            <a:pPr lvl="0"/>
+            <a:r>
+              <a:rPr/>
+              <a:t>Extreme temperature</a:t>
+            </a:r>
+          </a:p>
+          <a:p>
+            <a:pPr lvl="0" indent="0" marL="0">
+              <a:buNone/>
+            </a:pPr>
+            <a:r>
+              <a:rPr/>
+              <a:t>Key insight: Hazards are characterized by </a:t>
+            </a:r>
+            <a:r>
+              <a:rPr b="1"/>
+              <a:t>probability distributions</a:t>
+            </a:r>
+            <a:r>
+              <a:rPr/>
+              <a:t>, not single values.</a:t>
+            </a:r>
+          </a:p>
+        </p:txBody>
+      </p:sp>
+    </p:spTree>
+  </p:cSld>
+</p:sld>
+</file>
+
+<file path=ppt/slides/slide8.xml><?xml version="1.0" encoding="utf-8"?>
+<p:sld xmlns:a="http://schemas.openxmlformats.org/drawingml/2006/main" xmlns:r="http://schemas.openxmlformats.org/officeDocument/2006/relationships" xmlns:p="http://schemas.openxmlformats.org/presentationml/2006/main">
+  <p:cSld>
+    <p:spTree>
+      <p:nvGrpSpPr>
+        <p:cNvPr id="1" name=""/>
+        <p:cNvGrpSpPr/>
+        <p:nvPr/>
+      </p:nvGrpSpPr>
+      <p:grpSpPr>
+        <a:xfrm>
+          <a:off x="0" y="0"/>
+          <a:ext cx="0" cy="0"/>
+          <a:chOff x="0" y="0"/>
+          <a:chExt cx="0" cy="0"/>
+        </a:xfrm>
+      </p:grpSpPr>
+      <p:sp>
+        <p:nvSpPr>
+          <p:cNvPr id="2" name="Title 1"/>
+          <p:cNvSpPr>
+            <a:spLocks noGrp="1"/>
+          </p:cNvSpPr>
+          <p:nvPr>
+            <p:ph type="title"/>
+          </p:nvPr>
+        </p:nvSpPr>
+        <p:spPr/>
+        <p:txBody>
+          <a:bodyPr/>
+          <a:lstStyle/>
+          <a:p>
+            <a:pPr lvl="0" indent="0" marL="0">
+              <a:buNone/>
+            </a:pPr>
+            <a:r>
+              <a:rPr/>
+              <a:t>Exposure</a:t>
+            </a:r>
+          </a:p>
+        </p:txBody>
+      </p:sp>
+      <p:sp>
+        <p:nvSpPr>
+          <p:cNvPr id="3" name="Content Placeholder 2"/>
+          <p:cNvSpPr>
+            <a:spLocks noGrp="1"/>
+          </p:cNvSpPr>
+          <p:nvPr>
+            <p:ph idx="1"/>
+          </p:nvPr>
+        </p:nvSpPr>
+        <p:spPr/>
+        <p:txBody>
+          <a:bodyPr/>
+          <a:lstStyle/>
+          <a:p>
+            <a:pPr lvl="0" indent="0" marL="0">
+              <a:buNone/>
+            </a:pPr>
+            <a:r>
+              <a:rPr b="1"/>
+              <a:t>Exposure:</a:t>
+            </a:r>
+            <a:r>
+              <a:rPr/>
+              <a:t> What is at risk?</a:t>
+            </a:r>
+          </a:p>
+          <a:p>
+            <a:pPr lvl="0"/>
+            <a:r>
+              <a:rPr/>
+              <a:t>Buildings and infrastructure</a:t>
+            </a:r>
+          </a:p>
+          <a:p>
+            <a:pPr lvl="0"/>
+            <a:r>
+              <a:rPr/>
+              <a:t>People and livelihoods</a:t>
+            </a:r>
+          </a:p>
+          <a:p>
+            <a:pPr lvl="0"/>
+            <a:r>
+              <a:rPr/>
+              <a:t>Agricultural land</a:t>
+            </a:r>
+          </a:p>
+          <a:p>
+            <a:pPr lvl="0"/>
+            <a:r>
+              <a:rPr/>
+              <a:t>Economic activity</a:t>
+            </a:r>
+          </a:p>
+          <a:p>
+            <a:pPr lvl="0" indent="0" marL="0">
+              <a:buNone/>
+            </a:pPr>
+            <a:r>
+              <a:rPr/>
+              <a:t>Key insight: Exposure </a:t>
+            </a:r>
+            <a:r>
+              <a:rPr b="1"/>
+              <a:t>changes over time</a:t>
+            </a:r>
+            <a:r>
+              <a:rPr/>
+              <a:t> with development and migration.</a:t>
+            </a:r>
+          </a:p>
+        </p:txBody>
+      </p:sp>
+    </p:spTree>
+  </p:cSld>
+</p:sld>
+</file>
+
+<file path=ppt/slides/slide9.xml><?xml version="1.0" encoding="utf-8"?>
+<p:sld xmlns:a="http://schemas.openxmlformats.org/drawingml/2006/main" xmlns:r="http://schemas.openxmlformats.org/officeDocument/2006/relationships" xmlns:p="http://schemas.openxmlformats.org/presentationml/2006/main">
+  <p:cSld>
+    <p:spTree>
+      <p:nvGrpSpPr>
+        <p:cNvPr id="1" name=""/>
+        <p:cNvGrpSpPr/>
+        <p:nvPr/>
+      </p:nvGrpSpPr>
+      <p:grpSpPr>
+        <a:xfrm>
+          <a:off x="0" y="0"/>
+          <a:ext cx="0" cy="0"/>
+          <a:chOff x="0" y="0"/>
+          <a:chExt cx="0" cy="0"/>
+        </a:xfrm>
+      </p:grpSpPr>
+      <p:sp>
+        <p:nvSpPr>
+          <p:cNvPr id="2" name="Title 1"/>
+          <p:cNvSpPr>
+            <a:spLocks noGrp="1"/>
+          </p:cNvSpPr>
+          <p:nvPr>
+            <p:ph type="title"/>
+          </p:nvPr>
+        </p:nvSpPr>
+        <p:spPr/>
+        <p:txBody>
+          <a:bodyPr/>
+          <a:lstStyle/>
+          <a:p>
+            <a:pPr lvl="0" indent="0" marL="0">
+              <a:buNone/>
+            </a:pPr>
+            <a:r>
+              <a:rPr/>
+              <a:t>Vulnerability</a:t>
+            </a:r>
+          </a:p>
+        </p:txBody>
+      </p:sp>
+      <p:sp>
+        <p:nvSpPr>
+          <p:cNvPr id="3" name="Content Placeholder 2"/>
+          <p:cNvSpPr>
+            <a:spLocks noGrp="1"/>
+          </p:cNvSpPr>
+          <p:nvPr>
+            <p:ph idx="1"/>
+          </p:nvPr>
+        </p:nvSpPr>
+        <p:spPr/>
+        <p:txBody>
+          <a:bodyPr/>
+          <a:lstStyle/>
+          <a:p>
+            <a:pPr lvl="0" indent="0" marL="0">
+              <a:buNone/>
+            </a:pPr>
+            <a:r>
+              <a:rPr b="1"/>
+              <a:t>Vulnerability:</a:t>
+            </a:r>
+            <a:r>
+              <a:rPr/>
+              <a:t> Propensity to suffer damage given exposure to hazard</a:t>
+            </a:r>
+          </a:p>
+          <a:p>
+            <a:pPr lvl="0" indent="0" marL="0">
+              <a:buNone/>
+            </a:pPr>
+            <a:r>
+              <a:rPr/>
+              <a:t>Important distinction:</a:t>
+            </a:r>
+          </a:p>
+          <a:p>
+            <a:pPr lvl="0"/>
+            <a:r>
+              <a:rPr b="1"/>
+              <a:t>Fragility:</a:t>
+            </a:r>
+            <a:r>
+              <a:rPr/>
+              <a:t> Probability of failure (binary)</a:t>
+            </a:r>
+          </a:p>
+          <a:p>
+            <a:pPr lvl="0"/>
+            <a:r>
+              <a:rPr b="1"/>
+              <a:t>Vulnerability:</a:t>
+            </a:r>
+            <a:r>
+              <a:rPr/>
+              <a:t> Degree of damage (continuous)</a:t>
+            </a:r>
+          </a:p>
+          <a:p>
+            <a:pPr lvl="0" indent="0" marL="0">
+              <a:buNone/>
+            </a:pPr>
+            <a:r>
+              <a:rPr/>
+              <a:t>For floods, we typically use </a:t>
+            </a:r>
+            <a:r>
+              <a:rPr b="1"/>
+              <a:t>depth-damage functions</a:t>
+            </a:r>
+            <a:r>
+              <a:rPr/>
+              <a:t> to quantify vulnerability.</a:t>
             </a:r>
           </a:p>
         </p:txBody>

--- a/lectures/week-02/index.pptx
+++ b/lectures/week-02/index.pptx
@@ -5,7 +5,7 @@
     <p:sldMasterId id="2147483648" r:id="rId1"/>
   </p:sldMasterIdLst>
   <p:notesMasterIdLst>
-    <p:notesMasterId r:id="rId33"/>
+    <p:notesMasterId r:id="rId46"/>
   </p:notesMasterIdLst>
   <p:sldIdLst>
     <p:sldId id="256" r:id="rId2"/>
@@ -39,6 +39,19 @@
     <p:sldId id="284" r:id="rId30"/>
     <p:sldId id="285" r:id="rId31"/>
     <p:sldId id="286" r:id="rId32"/>
+    <p:sldId id="287" r:id="rId33"/>
+    <p:sldId id="288" r:id="rId34"/>
+    <p:sldId id="289" r:id="rId35"/>
+    <p:sldId id="290" r:id="rId36"/>
+    <p:sldId id="291" r:id="rId37"/>
+    <p:sldId id="292" r:id="rId38"/>
+    <p:sldId id="293" r:id="rId39"/>
+    <p:sldId id="294" r:id="rId40"/>
+    <p:sldId id="295" r:id="rId41"/>
+    <p:sldId id="296" r:id="rId42"/>
+    <p:sldId id="297" r:id="rId43"/>
+    <p:sldId id="298" r:id="rId44"/>
+    <p:sldId id="299" r:id="rId45"/>
   </p:sldIdLst>
   <p:sldSz cx="9144000" cy="5143500" type="screen16x9"/>
   <p:notesSz cx="6858000" cy="9144000"/>
@@ -554,7 +567,7 @@
             </a:pPr>
             <a:r>
               <a:rPr/>
-              <a:t>Target: 1:02. Hook: start with a concrete business decision. Insurance connects directly to risk quantification.</a:t>
+              <a:t>Target: 1:00. Open with a question that motivates the math.</a:t>
             </a:r>
           </a:p>
         </p:txBody>
@@ -576,7 +589,7 @@
           <a:p>
             <a:fld id="{18BDFEC3-8487-43E8-A154-7C12CBC1FFF2}" type="slidenum">
               <a:rPr lang="en-US"/>
-              <a:t>4</a:t>
+              <a:t>2</a:t>
             </a:fld>
             <a:endParaRPr lang="en-US"/>
           </a:p>
@@ -636,7 +649,7 @@
             </a:pPr>
             <a:r>
               <a:rPr/>
-              <a:t>Target: 1:30. Work through this example on the board.</a:t>
+              <a:t>Target: 1:20. Show the Wing figure. Discuss the huge uncertainty in these relationships.</a:t>
             </a:r>
           </a:p>
         </p:txBody>
@@ -658,7 +671,7 @@
           <a:p>
             <a:fld id="{18BDFEC3-8487-43E8-A154-7C12CBC1FFF2}" type="slidenum">
               <a:rPr lang="en-US"/>
-              <a:t>15</a:t>
+              <a:t>14</a:t>
             </a:fld>
             <a:endParaRPr lang="en-US"/>
           </a:p>
@@ -718,7 +731,7 @@
             </a:pPr>
             <a:r>
               <a:rPr/>
-              <a:t>Target: 1:34. Give students 60 seconds to think. Then cold call 2-3 students.</a:t>
+              <a:t>Target: 1:22. Pause and ask students what they observe.</a:t>
             </a:r>
           </a:p>
         </p:txBody>
@@ -740,7 +753,7 @@
           <a:p>
             <a:fld id="{18BDFEC3-8487-43E8-A154-7C12CBC1FFF2}" type="slidenum">
               <a:rPr lang="en-US"/>
-              <a:t>16</a:t>
+              <a:t>15</a:t>
             </a:fld>
             <a:endParaRPr lang="en-US"/>
           </a:p>
@@ -800,7 +813,7 @@
             </a:pPr>
             <a:r>
               <a:rPr/>
-              <a:t>Target: 1:37. Connect to course theme.</a:t>
+              <a:t>Target: 1:24. Core equation for the course. Write on board.</a:t>
             </a:r>
           </a:p>
         </p:txBody>
@@ -882,7 +895,7 @@
             </a:pPr>
             <a:r>
               <a:rPr/>
-              <a:t>Target: 1:40. Just planting the seed here. Deeper coverage in Week 4.</a:t>
+              <a:t>Target: 1:26. This figure shows the full workflow from data to expected annual damage.</a:t>
             </a:r>
           </a:p>
         </p:txBody>
@@ -904,7 +917,7 @@
           <a:p>
             <a:fld id="{18BDFEC3-8487-43E8-A154-7C12CBC1FFF2}" type="slidenum">
               <a:rPr lang="en-US"/>
-              <a:t>19</a:t>
+              <a:t>18</a:t>
             </a:fld>
             <a:endParaRPr lang="en-US"/>
           </a:p>
@@ -964,7 +977,7 @@
             </a:pPr>
             <a:r>
               <a:rPr/>
-              <a:t>Target: 1:43. Keep it light. Just enough to use in lab.</a:t>
+              <a:t>Target: 1:28. Give students 60 seconds to think. Then cold call 2-3 students.</a:t>
             </a:r>
           </a:p>
         </p:txBody>
@@ -986,7 +999,7 @@
           <a:p>
             <a:fld id="{18BDFEC3-8487-43E8-A154-7C12CBC1FFF2}" type="slidenum">
               <a:rPr lang="en-US"/>
-              <a:t>20</a:t>
+              <a:t>19</a:t>
             </a:fld>
             <a:endParaRPr lang="en-US"/>
           </a:p>
@@ -1046,7 +1059,7 @@
             </a:pPr>
             <a:r>
               <a:rPr/>
-              <a:t>Target: 1:46. Preview what they’ll do in lab.</a:t>
+              <a:t>Target: 1:32. This is the bridge to Friday’s lab. Draw on board if helpful.</a:t>
             </a:r>
           </a:p>
         </p:txBody>
@@ -1128,7 +1141,7 @@
             </a:pPr>
             <a:r>
               <a:rPr/>
-              <a:t>Target: 1:49. Set up the model students will use all semester.</a:t>
+              <a:t>Target: 1:34. Simple example to build intuition.</a:t>
             </a:r>
           </a:p>
         </p:txBody>
@@ -1150,7 +1163,7 @@
           <a:p>
             <a:fld id="{18BDFEC3-8487-43E8-A154-7C12CBC1FFF2}" type="slidenum">
               <a:rPr lang="en-US"/>
-              <a:t>23</a:t>
+              <a:t>22</a:t>
             </a:fld>
             <a:endParaRPr lang="en-US"/>
           </a:p>
@@ -1210,7 +1223,7 @@
             </a:pPr>
             <a:r>
               <a:rPr/>
-              <a:t>Target: 1:52. Draw on board if no figure available. Simple triangle cross-section.</a:t>
+              <a:t>Target: 1:36. Critical conceptual point. This equation WILL be on assessments. Draw convex function with secant line above curve.</a:t>
             </a:r>
           </a:p>
         </p:txBody>
@@ -1232,7 +1245,7 @@
           <a:p>
             <a:fld id="{18BDFEC3-8487-43E8-A154-7C12CBC1FFF2}" type="slidenum">
               <a:rPr lang="en-US"/>
-              <a:t>24</a:t>
+              <a:t>25</a:t>
             </a:fld>
             <a:endParaRPr lang="en-US"/>
           </a:p>
@@ -1292,7 +1305,7 @@
             </a:pPr>
             <a:r>
               <a:rPr/>
-              <a:t>Target: 1:55. Map back to XLRM.</a:t>
+              <a:t>Target: 1:38. Concrete example demonstrating the inequality.</a:t>
             </a:r>
           </a:p>
         </p:txBody>
@@ -1314,7 +1327,7 @@
           <a:p>
             <a:fld id="{18BDFEC3-8487-43E8-A154-7C12CBC1FFF2}" type="slidenum">
               <a:rPr lang="en-US"/>
-              <a:t>25</a:t>
+              <a:t>26</a:t>
             </a:fld>
             <a:endParaRPr lang="en-US"/>
           </a:p>
@@ -1374,7 +1387,7 @@
             </a:pPr>
             <a:r>
               <a:rPr/>
-              <a:t>Target: 1:58. Set expectations for the semester.</a:t>
+              <a:t>Target: 1:40. Connect Monte Carlo to the integration problem.</a:t>
             </a:r>
           </a:p>
         </p:txBody>
@@ -1396,7 +1409,7 @@
           <a:p>
             <a:fld id="{18BDFEC3-8487-43E8-A154-7C12CBC1FFF2}" type="slidenum">
               <a:rPr lang="en-US"/>
-              <a:t>26</a:t>
+              <a:t>29</a:t>
             </a:fld>
             <a:endParaRPr lang="en-US"/>
           </a:p>
@@ -1456,7 +1469,7 @@
             </a:pPr>
             <a:r>
               <a:rPr/>
-              <a:t>Target: 1:04. Frame the lecture around this question.</a:t>
+              <a:t>Target: 1:03. Get brains working immediately. Give 30 seconds to think, then cold call 2-3 students.</a:t>
             </a:r>
           </a:p>
         </p:txBody>
@@ -1478,7 +1491,7 @@
           <a:p>
             <a:fld id="{18BDFEC3-8487-43E8-A154-7C12CBC1FFF2}" type="slidenum">
               <a:rPr lang="en-US"/>
-              <a:t>5</a:t>
+              <a:t>3</a:t>
             </a:fld>
             <a:endParaRPr lang="en-US"/>
           </a:p>
@@ -1538,7 +1551,7 @@
             </a:pPr>
             <a:r>
               <a:rPr/>
-              <a:t>Target: 1:01. Summarize main points.</a:t>
+              <a:t>Target: 1:42. Keep it simple - just the intuition.</a:t>
             </a:r>
           </a:p>
         </p:txBody>
@@ -1560,7 +1573,7 @@
           <a:p>
             <a:fld id="{18BDFEC3-8487-43E8-A154-7C12CBC1FFF2}" type="slidenum">
               <a:rPr lang="en-US"/>
-              <a:t>28</a:t>
+              <a:t>30</a:t>
             </a:fld>
             <a:endParaRPr lang="en-US"/>
           </a:p>
@@ -1620,7 +1633,7 @@
             </a:pPr>
             <a:r>
               <a:rPr/>
-              <a:t>Target: 1:03. Connect to Friday’s lab.</a:t>
+              <a:t>Target: 1:43. Procedural summary connecting to lab.</a:t>
             </a:r>
           </a:p>
         </p:txBody>
@@ -1642,7 +1655,7 @@
           <a:p>
             <a:fld id="{18BDFEC3-8487-43E8-A154-7C12CBC1FFF2}" type="slidenum">
               <a:rPr lang="en-US"/>
-              <a:t>29</a:t>
+              <a:t>31</a:t>
             </a:fld>
             <a:endParaRPr lang="en-US"/>
           </a:p>
@@ -1702,7 +1715,7 @@
             </a:pPr>
             <a:r>
               <a:rPr/>
-              <a:t>Target: 1:05. Reading assignment and preparation.</a:t>
+              <a:t>Target: 1:44. Just planting the seed here. Deeper coverage in Week 4.</a:t>
             </a:r>
           </a:p>
         </p:txBody>
@@ -1724,7 +1737,581 @@
           <a:p>
             <a:fld id="{18BDFEC3-8487-43E8-A154-7C12CBC1FFF2}" type="slidenum">
               <a:rPr lang="en-US"/>
-              <a:t>30</a:t>
+              <a:t>33</a:t>
+            </a:fld>
+            <a:endParaRPr lang="en-US"/>
+          </a:p>
+        </p:txBody>
+      </p:sp>
+    </p:spTree>
+  </p:cSld>
+</p:notes>
+</file>
+
+<file path=ppt/notesSlides/notesSlide23.xml><?xml version="1.0" encoding="utf-8"?>
+<p:notes xmlns:a="http://schemas.openxmlformats.org/drawingml/2006/main" xmlns:r="http://schemas.openxmlformats.org/officeDocument/2006/relationships" xmlns:p="http://schemas.openxmlformats.org/presentationml/2006/main">
+  <p:cSld>
+    <p:spTree>
+      <p:nvGrpSpPr>
+        <p:cNvPr id="1" name=""/>
+        <p:cNvGrpSpPr/>
+        <p:nvPr/>
+      </p:nvGrpSpPr>
+      <p:grpSpPr>
+        <a:xfrm>
+          <a:off x="0" y="0"/>
+          <a:ext cx="0" cy="0"/>
+          <a:chOff x="0" y="0"/>
+          <a:chExt cx="0" cy="0"/>
+        </a:xfrm>
+      </p:grpSpPr>
+      <p:sp>
+        <p:nvSpPr>
+          <p:cNvPr id="2" name="Slide Image Placeholder 1"/>
+          <p:cNvSpPr>
+            <a:spLocks noGrp="1" noRot="1" noChangeAspect="1"/>
+          </p:cNvSpPr>
+          <p:nvPr>
+            <p:ph type="sldImg"/>
+          </p:nvPr>
+        </p:nvSpPr>
+        <p:spPr/>
+      </p:sp>
+      <p:sp>
+        <p:nvSpPr>
+          <p:cNvPr id="3" name="Notes Placeholder 2"/>
+          <p:cNvSpPr>
+            <a:spLocks noGrp="1"/>
+          </p:cNvSpPr>
+          <p:nvPr>
+            <p:ph type="body" idx="1"/>
+          </p:nvPr>
+        </p:nvSpPr>
+        <p:spPr/>
+        <p:txBody>
+          <a:bodyPr/>
+          <a:lstStyle/>
+          <a:p>
+            <a:pPr lvl="0" indent="0" marL="0">
+              <a:buNone/>
+            </a:pPr>
+            <a:r>
+              <a:rPr/>
+              <a:t>Target: 1:45. Keep it light. Just enough to use in lab.</a:t>
+            </a:r>
+          </a:p>
+        </p:txBody>
+      </p:sp>
+      <p:sp>
+        <p:nvSpPr>
+          <p:cNvPr id="4" name="Slide Number Placeholder 3"/>
+          <p:cNvSpPr>
+            <a:spLocks noGrp="1"/>
+          </p:cNvSpPr>
+          <p:nvPr>
+            <p:ph type="sldNum" sz="quarter" idx="10"/>
+          </p:nvPr>
+        </p:nvSpPr>
+        <p:spPr/>
+        <p:txBody>
+          <a:bodyPr/>
+          <a:lstStyle/>
+          <a:p>
+            <a:fld id="{18BDFEC3-8487-43E8-A154-7C12CBC1FFF2}" type="slidenum">
+              <a:rPr lang="en-US"/>
+              <a:t>34</a:t>
+            </a:fld>
+            <a:endParaRPr lang="en-US"/>
+          </a:p>
+        </p:txBody>
+      </p:sp>
+    </p:spTree>
+  </p:cSld>
+</p:notes>
+</file>
+
+<file path=ppt/notesSlides/notesSlide24.xml><?xml version="1.0" encoding="utf-8"?>
+<p:notes xmlns:a="http://schemas.openxmlformats.org/drawingml/2006/main" xmlns:r="http://schemas.openxmlformats.org/officeDocument/2006/relationships" xmlns:p="http://schemas.openxmlformats.org/presentationml/2006/main">
+  <p:cSld>
+    <p:spTree>
+      <p:nvGrpSpPr>
+        <p:cNvPr id="1" name=""/>
+        <p:cNvGrpSpPr/>
+        <p:nvPr/>
+      </p:nvGrpSpPr>
+      <p:grpSpPr>
+        <a:xfrm>
+          <a:off x="0" y="0"/>
+          <a:ext cx="0" cy="0"/>
+          <a:chOff x="0" y="0"/>
+          <a:chExt cx="0" cy="0"/>
+        </a:xfrm>
+      </p:grpSpPr>
+      <p:sp>
+        <p:nvSpPr>
+          <p:cNvPr id="2" name="Slide Image Placeholder 1"/>
+          <p:cNvSpPr>
+            <a:spLocks noGrp="1" noRot="1" noChangeAspect="1"/>
+          </p:cNvSpPr>
+          <p:nvPr>
+            <p:ph type="sldImg"/>
+          </p:nvPr>
+        </p:nvSpPr>
+        <p:spPr/>
+      </p:sp>
+      <p:sp>
+        <p:nvSpPr>
+          <p:cNvPr id="3" name="Notes Placeholder 2"/>
+          <p:cNvSpPr>
+            <a:spLocks noGrp="1"/>
+          </p:cNvSpPr>
+          <p:nvPr>
+            <p:ph type="body" idx="1"/>
+          </p:nvPr>
+        </p:nvSpPr>
+        <p:spPr/>
+        <p:txBody>
+          <a:bodyPr/>
+          <a:lstStyle/>
+          <a:p>
+            <a:pPr lvl="0" indent="0" marL="0">
+              <a:buNone/>
+            </a:pPr>
+            <a:r>
+              <a:rPr/>
+              <a:t>Target: 1:46. Preview what they’ll do in lab.</a:t>
+            </a:r>
+          </a:p>
+        </p:txBody>
+      </p:sp>
+      <p:sp>
+        <p:nvSpPr>
+          <p:cNvPr id="4" name="Slide Number Placeholder 3"/>
+          <p:cNvSpPr>
+            <a:spLocks noGrp="1"/>
+          </p:cNvSpPr>
+          <p:nvPr>
+            <p:ph type="sldNum" sz="quarter" idx="10"/>
+          </p:nvPr>
+        </p:nvSpPr>
+        <p:spPr/>
+        <p:txBody>
+          <a:bodyPr/>
+          <a:lstStyle/>
+          <a:p>
+            <a:fld id="{18BDFEC3-8487-43E8-A154-7C12CBC1FFF2}" type="slidenum">
+              <a:rPr lang="en-US"/>
+              <a:t>35</a:t>
+            </a:fld>
+            <a:endParaRPr lang="en-US"/>
+          </a:p>
+        </p:txBody>
+      </p:sp>
+    </p:spTree>
+  </p:cSld>
+</p:notes>
+</file>
+
+<file path=ppt/notesSlides/notesSlide25.xml><?xml version="1.0" encoding="utf-8"?>
+<p:notes xmlns:a="http://schemas.openxmlformats.org/drawingml/2006/main" xmlns:r="http://schemas.openxmlformats.org/officeDocument/2006/relationships" xmlns:p="http://schemas.openxmlformats.org/presentationml/2006/main">
+  <p:cSld>
+    <p:spTree>
+      <p:nvGrpSpPr>
+        <p:cNvPr id="1" name=""/>
+        <p:cNvGrpSpPr/>
+        <p:nvPr/>
+      </p:nvGrpSpPr>
+      <p:grpSpPr>
+        <a:xfrm>
+          <a:off x="0" y="0"/>
+          <a:ext cx="0" cy="0"/>
+          <a:chOff x="0" y="0"/>
+          <a:chExt cx="0" cy="0"/>
+        </a:xfrm>
+      </p:grpSpPr>
+      <p:sp>
+        <p:nvSpPr>
+          <p:cNvPr id="2" name="Slide Image Placeholder 1"/>
+          <p:cNvSpPr>
+            <a:spLocks noGrp="1" noRot="1" noChangeAspect="1"/>
+          </p:cNvSpPr>
+          <p:nvPr>
+            <p:ph type="sldImg"/>
+          </p:nvPr>
+        </p:nvSpPr>
+        <p:spPr/>
+      </p:sp>
+      <p:sp>
+        <p:nvSpPr>
+          <p:cNvPr id="3" name="Notes Placeholder 2"/>
+          <p:cNvSpPr>
+            <a:spLocks noGrp="1"/>
+          </p:cNvSpPr>
+          <p:nvPr>
+            <p:ph type="body" idx="1"/>
+          </p:nvPr>
+        </p:nvSpPr>
+        <p:spPr/>
+        <p:txBody>
+          <a:bodyPr/>
+          <a:lstStyle/>
+          <a:p>
+            <a:pPr lvl="0" indent="0" marL="0">
+              <a:buNone/>
+            </a:pPr>
+            <a:r>
+              <a:rPr/>
+              <a:t>Target: 1:47. Set up the problem students will use all semester.</a:t>
+            </a:r>
+          </a:p>
+        </p:txBody>
+      </p:sp>
+      <p:sp>
+        <p:nvSpPr>
+          <p:cNvPr id="4" name="Slide Number Placeholder 3"/>
+          <p:cNvSpPr>
+            <a:spLocks noGrp="1"/>
+          </p:cNvSpPr>
+          <p:nvPr>
+            <p:ph type="sldNum" sz="quarter" idx="10"/>
+          </p:nvPr>
+        </p:nvSpPr>
+        <p:spPr/>
+        <p:txBody>
+          <a:bodyPr/>
+          <a:lstStyle/>
+          <a:p>
+            <a:fld id="{18BDFEC3-8487-43E8-A154-7C12CBC1FFF2}" type="slidenum">
+              <a:rPr lang="en-US"/>
+              <a:t>37</a:t>
+            </a:fld>
+            <a:endParaRPr lang="en-US"/>
+          </a:p>
+        </p:txBody>
+      </p:sp>
+    </p:spTree>
+  </p:cSld>
+</p:notes>
+</file>
+
+<file path=ppt/notesSlides/notesSlide26.xml><?xml version="1.0" encoding="utf-8"?>
+<p:notes xmlns:a="http://schemas.openxmlformats.org/drawingml/2006/main" xmlns:r="http://schemas.openxmlformats.org/officeDocument/2006/relationships" xmlns:p="http://schemas.openxmlformats.org/presentationml/2006/main">
+  <p:cSld>
+    <p:spTree>
+      <p:nvGrpSpPr>
+        <p:cNvPr id="1" name=""/>
+        <p:cNvGrpSpPr/>
+        <p:nvPr/>
+      </p:nvGrpSpPr>
+      <p:grpSpPr>
+        <a:xfrm>
+          <a:off x="0" y="0"/>
+          <a:ext cx="0" cy="0"/>
+          <a:chOff x="0" y="0"/>
+          <a:chExt cx="0" cy="0"/>
+        </a:xfrm>
+      </p:grpSpPr>
+      <p:sp>
+        <p:nvSpPr>
+          <p:cNvPr id="2" name="Slide Image Placeholder 1"/>
+          <p:cNvSpPr>
+            <a:spLocks noGrp="1" noRot="1" noChangeAspect="1"/>
+          </p:cNvSpPr>
+          <p:nvPr>
+            <p:ph type="sldImg"/>
+          </p:nvPr>
+        </p:nvSpPr>
+        <p:spPr/>
+      </p:sp>
+      <p:sp>
+        <p:nvSpPr>
+          <p:cNvPr id="3" name="Notes Placeholder 2"/>
+          <p:cNvSpPr>
+            <a:spLocks noGrp="1"/>
+          </p:cNvSpPr>
+          <p:nvPr>
+            <p:ph type="body" idx="1"/>
+          </p:nvPr>
+        </p:nvSpPr>
+        <p:spPr/>
+        <p:txBody>
+          <a:bodyPr/>
+          <a:lstStyle/>
+          <a:p>
+            <a:pPr lvl="0" indent="0" marL="0">
+              <a:buNone/>
+            </a:pPr>
+            <a:r>
+              <a:rPr/>
+              <a:t>Target: 1:48. Draw on board if helpful.</a:t>
+            </a:r>
+          </a:p>
+        </p:txBody>
+      </p:sp>
+      <p:sp>
+        <p:nvSpPr>
+          <p:cNvPr id="4" name="Slide Number Placeholder 3"/>
+          <p:cNvSpPr>
+            <a:spLocks noGrp="1"/>
+          </p:cNvSpPr>
+          <p:nvPr>
+            <p:ph type="sldNum" sz="quarter" idx="10"/>
+          </p:nvPr>
+        </p:nvSpPr>
+        <p:spPr/>
+        <p:txBody>
+          <a:bodyPr/>
+          <a:lstStyle/>
+          <a:p>
+            <a:fld id="{18BDFEC3-8487-43E8-A154-7C12CBC1FFF2}" type="slidenum">
+              <a:rPr lang="en-US"/>
+              <a:t>39</a:t>
+            </a:fld>
+            <a:endParaRPr lang="en-US"/>
+          </a:p>
+        </p:txBody>
+      </p:sp>
+    </p:spTree>
+  </p:cSld>
+</p:notes>
+</file>
+
+<file path=ppt/notesSlides/notesSlide27.xml><?xml version="1.0" encoding="utf-8"?>
+<p:notes xmlns:a="http://schemas.openxmlformats.org/drawingml/2006/main" xmlns:r="http://schemas.openxmlformats.org/officeDocument/2006/relationships" xmlns:p="http://schemas.openxmlformats.org/presentationml/2006/main">
+  <p:cSld>
+    <p:spTree>
+      <p:nvGrpSpPr>
+        <p:cNvPr id="1" name=""/>
+        <p:cNvGrpSpPr/>
+        <p:nvPr/>
+      </p:nvGrpSpPr>
+      <p:grpSpPr>
+        <a:xfrm>
+          <a:off x="0" y="0"/>
+          <a:ext cx="0" cy="0"/>
+          <a:chOff x="0" y="0"/>
+          <a:chExt cx="0" cy="0"/>
+        </a:xfrm>
+      </p:grpSpPr>
+      <p:sp>
+        <p:nvSpPr>
+          <p:cNvPr id="2" name="Slide Image Placeholder 1"/>
+          <p:cNvSpPr>
+            <a:spLocks noGrp="1" noRot="1" noChangeAspect="1"/>
+          </p:cNvSpPr>
+          <p:nvPr>
+            <p:ph type="sldImg"/>
+          </p:nvPr>
+        </p:nvSpPr>
+        <p:spPr/>
+      </p:sp>
+      <p:sp>
+        <p:nvSpPr>
+          <p:cNvPr id="3" name="Notes Placeholder 2"/>
+          <p:cNvSpPr>
+            <a:spLocks noGrp="1"/>
+          </p:cNvSpPr>
+          <p:nvPr>
+            <p:ph type="body" idx="1"/>
+          </p:nvPr>
+        </p:nvSpPr>
+        <p:spPr/>
+        <p:txBody>
+          <a:bodyPr/>
+          <a:lstStyle/>
+          <a:p>
+            <a:pPr lvl="0" indent="0" marL="0">
+              <a:buNone/>
+            </a:pPr>
+            <a:r>
+              <a:rPr/>
+              <a:t>Target: 1:48. Connect to the iCOW model and SimOptDecisions.</a:t>
+            </a:r>
+          </a:p>
+        </p:txBody>
+      </p:sp>
+      <p:sp>
+        <p:nvSpPr>
+          <p:cNvPr id="4" name="Slide Number Placeholder 3"/>
+          <p:cNvSpPr>
+            <a:spLocks noGrp="1"/>
+          </p:cNvSpPr>
+          <p:nvPr>
+            <p:ph type="sldNum" sz="quarter" idx="10"/>
+          </p:nvPr>
+        </p:nvSpPr>
+        <p:spPr/>
+        <p:txBody>
+          <a:bodyPr/>
+          <a:lstStyle/>
+          <a:p>
+            <a:fld id="{18BDFEC3-8487-43E8-A154-7C12CBC1FFF2}" type="slidenum">
+              <a:rPr lang="en-US"/>
+              <a:t>40</a:t>
+            </a:fld>
+            <a:endParaRPr lang="en-US"/>
+          </a:p>
+        </p:txBody>
+      </p:sp>
+    </p:spTree>
+  </p:cSld>
+</p:notes>
+</file>
+
+<file path=ppt/notesSlides/notesSlide28.xml><?xml version="1.0" encoding="utf-8"?>
+<p:notes xmlns:a="http://schemas.openxmlformats.org/drawingml/2006/main" xmlns:r="http://schemas.openxmlformats.org/officeDocument/2006/relationships" xmlns:p="http://schemas.openxmlformats.org/presentationml/2006/main">
+  <p:cSld>
+    <p:spTree>
+      <p:nvGrpSpPr>
+        <p:cNvPr id="1" name=""/>
+        <p:cNvGrpSpPr/>
+        <p:nvPr/>
+      </p:nvGrpSpPr>
+      <p:grpSpPr>
+        <a:xfrm>
+          <a:off x="0" y="0"/>
+          <a:ext cx="0" cy="0"/>
+          <a:chOff x="0" y="0"/>
+          <a:chExt cx="0" cy="0"/>
+        </a:xfrm>
+      </p:grpSpPr>
+      <p:sp>
+        <p:nvSpPr>
+          <p:cNvPr id="2" name="Slide Image Placeholder 1"/>
+          <p:cNvSpPr>
+            <a:spLocks noGrp="1" noRot="1" noChangeAspect="1"/>
+          </p:cNvSpPr>
+          <p:nvPr>
+            <p:ph type="sldImg"/>
+          </p:nvPr>
+        </p:nvSpPr>
+        <p:spPr/>
+      </p:sp>
+      <p:sp>
+        <p:nvSpPr>
+          <p:cNvPr id="3" name="Notes Placeholder 2"/>
+          <p:cNvSpPr>
+            <a:spLocks noGrp="1"/>
+          </p:cNvSpPr>
+          <p:nvPr>
+            <p:ph type="body" idx="1"/>
+          </p:nvPr>
+        </p:nvSpPr>
+        <p:spPr/>
+        <p:txBody>
+          <a:bodyPr/>
+          <a:lstStyle/>
+          <a:p>
+            <a:pPr lvl="0" indent="0" marL="0">
+              <a:buNone/>
+            </a:pPr>
+            <a:r>
+              <a:rPr/>
+              <a:t>Target: 1:49. Summarize main points.</a:t>
+            </a:r>
+          </a:p>
+        </p:txBody>
+      </p:sp>
+      <p:sp>
+        <p:nvSpPr>
+          <p:cNvPr id="4" name="Slide Number Placeholder 3"/>
+          <p:cNvSpPr>
+            <a:spLocks noGrp="1"/>
+          </p:cNvSpPr>
+          <p:nvPr>
+            <p:ph type="sldNum" sz="quarter" idx="10"/>
+          </p:nvPr>
+        </p:nvSpPr>
+        <p:spPr/>
+        <p:txBody>
+          <a:bodyPr/>
+          <a:lstStyle/>
+          <a:p>
+            <a:fld id="{18BDFEC3-8487-43E8-A154-7C12CBC1FFF2}" type="slidenum">
+              <a:rPr lang="en-US"/>
+              <a:t>42</a:t>
+            </a:fld>
+            <a:endParaRPr lang="en-US"/>
+          </a:p>
+        </p:txBody>
+      </p:sp>
+    </p:spTree>
+  </p:cSld>
+</p:notes>
+</file>
+
+<file path=ppt/notesSlides/notesSlide29.xml><?xml version="1.0" encoding="utf-8"?>
+<p:notes xmlns:a="http://schemas.openxmlformats.org/drawingml/2006/main" xmlns:r="http://schemas.openxmlformats.org/officeDocument/2006/relationships" xmlns:p="http://schemas.openxmlformats.org/presentationml/2006/main">
+  <p:cSld>
+    <p:spTree>
+      <p:nvGrpSpPr>
+        <p:cNvPr id="1" name=""/>
+        <p:cNvGrpSpPr/>
+        <p:nvPr/>
+      </p:nvGrpSpPr>
+      <p:grpSpPr>
+        <a:xfrm>
+          <a:off x="0" y="0"/>
+          <a:ext cx="0" cy="0"/>
+          <a:chOff x="0" y="0"/>
+          <a:chExt cx="0" cy="0"/>
+        </a:xfrm>
+      </p:grpSpPr>
+      <p:sp>
+        <p:nvSpPr>
+          <p:cNvPr id="2" name="Slide Image Placeholder 1"/>
+          <p:cNvSpPr>
+            <a:spLocks noGrp="1" noRot="1" noChangeAspect="1"/>
+          </p:cNvSpPr>
+          <p:nvPr>
+            <p:ph type="sldImg"/>
+          </p:nvPr>
+        </p:nvSpPr>
+        <p:spPr/>
+      </p:sp>
+      <p:sp>
+        <p:nvSpPr>
+          <p:cNvPr id="3" name="Notes Placeholder 2"/>
+          <p:cNvSpPr>
+            <a:spLocks noGrp="1"/>
+          </p:cNvSpPr>
+          <p:nvPr>
+            <p:ph type="body" idx="1"/>
+          </p:nvPr>
+        </p:nvSpPr>
+        <p:spPr/>
+        <p:txBody>
+          <a:bodyPr/>
+          <a:lstStyle/>
+          <a:p>
+            <a:pPr lvl="0" indent="0" marL="0">
+              <a:buNone/>
+            </a:pPr>
+            <a:r>
+              <a:rPr/>
+              <a:t>Target: 1:50. Connect to Friday’s lab.</a:t>
+            </a:r>
+          </a:p>
+        </p:txBody>
+      </p:sp>
+      <p:sp>
+        <p:nvSpPr>
+          <p:cNvPr id="4" name="Slide Number Placeholder 3"/>
+          <p:cNvSpPr>
+            <a:spLocks noGrp="1"/>
+          </p:cNvSpPr>
+          <p:nvPr>
+            <p:ph type="sldNum" sz="quarter" idx="10"/>
+          </p:nvPr>
+        </p:nvSpPr>
+        <p:spPr/>
+        <p:txBody>
+          <a:bodyPr/>
+          <a:lstStyle/>
+          <a:p>
+            <a:fld id="{18BDFEC3-8487-43E8-A154-7C12CBC1FFF2}" type="slidenum">
+              <a:rPr lang="en-US"/>
+              <a:t>43</a:t>
             </a:fld>
             <a:endParaRPr lang="en-US"/>
           </a:p>
@@ -1784,7 +2371,7 @@
             </a:pPr>
             <a:r>
               <a:rPr/>
-              <a:t>Target: 1:07. Emphasize that hazard is the physical event, not the damage.</a:t>
+              <a:t>Target: 1:05. Key insight: we weight by probability.</a:t>
             </a:r>
           </a:p>
         </p:txBody>
@@ -1806,7 +2393,7 @@
           <a:p>
             <a:fld id="{18BDFEC3-8487-43E8-A154-7C12CBC1FFF2}" type="slidenum">
               <a:rPr lang="en-US"/>
-              <a:t>7</a:t>
+              <a:t>5</a:t>
             </a:fld>
             <a:endParaRPr lang="en-US"/>
           </a:p>
@@ -1866,7 +2453,7 @@
             </a:pPr>
             <a:r>
               <a:rPr/>
-              <a:t>Target: 1:10. Exposure is about WHAT is at risk, not how vulnerable it is.</a:t>
+              <a:t>Target: 1:07. Quick roadmap.</a:t>
             </a:r>
           </a:p>
         </p:txBody>
@@ -1888,7 +2475,7 @@
           <a:p>
             <a:fld id="{18BDFEC3-8487-43E8-A154-7C12CBC1FFF2}" type="slidenum">
               <a:rPr lang="en-US"/>
-              <a:t>8</a:t>
+              <a:t>6</a:t>
             </a:fld>
             <a:endParaRPr lang="en-US"/>
           </a:p>
@@ -1948,7 +2535,7 @@
             </a:pPr>
             <a:r>
               <a:rPr/>
-              <a:t>Target: 1:13. This is where depth-damage functions come in.</a:t>
+              <a:t>Target: 1:10. Emphasize that hazard is the physical event, not the damage.</a:t>
             </a:r>
           </a:p>
         </p:txBody>
@@ -1970,7 +2557,7 @@
           <a:p>
             <a:fld id="{18BDFEC3-8487-43E8-A154-7C12CBC1FFF2}" type="slidenum">
               <a:rPr lang="en-US"/>
-              <a:t>9</a:t>
+              <a:t>8</a:t>
             </a:fld>
             <a:endParaRPr lang="en-US"/>
           </a:p>
@@ -2030,7 +2617,7 @@
             </a:pPr>
             <a:r>
               <a:rPr/>
-              <a:t>Target: 1:17. Show the Wing figure. Discuss uncertainty in these relationships.</a:t>
+              <a:t>Target: 1:12. Exposure is about WHAT is at risk, not how vulnerable it is.</a:t>
             </a:r>
           </a:p>
         </p:txBody>
@@ -2052,7 +2639,7 @@
           <a:p>
             <a:fld id="{18BDFEC3-8487-43E8-A154-7C12CBC1FFF2}" type="slidenum">
               <a:rPr lang="en-US"/>
-              <a:t>10</a:t>
+              <a:t>9</a:t>
             </a:fld>
             <a:endParaRPr lang="en-US"/>
           </a:p>
@@ -2112,7 +2699,7 @@
             </a:pPr>
             <a:r>
               <a:rPr/>
-              <a:t>Target: 1:20. Pause and ask students what they notice.</a:t>
+              <a:t>Target: 1:14. Local example: Houston’s footprint has exploded.</a:t>
             </a:r>
           </a:p>
         </p:txBody>
@@ -2194,7 +2781,7 @@
             </a:pPr>
             <a:r>
               <a:rPr/>
-              <a:t>Target: 1:23. Core equation for the course. Write on board.</a:t>
+              <a:t>Target: 1:16. This is where depth-damage functions come in.</a:t>
             </a:r>
           </a:p>
         </p:txBody>
@@ -2276,7 +2863,7 @@
             </a:pPr>
             <a:r>
               <a:rPr/>
-              <a:t>Target: 1:26. Quick review. Students should recognize this from week 1.</a:t>
+              <a:t>Target: 1:18. Show the Gidaris figure - panel (a) is a 3D fragility surface, panel (b) shows fragility curves.</a:t>
             </a:r>
           </a:p>
         </p:txBody>
@@ -2298,7 +2885,7 @@
           <a:p>
             <a:fld id="{18BDFEC3-8487-43E8-A154-7C12CBC1FFF2}" type="slidenum">
               <a:rPr lang="en-US"/>
-              <a:t>14</a:t>
+              <a:t>13</a:t>
             </a:fld>
             <a:endParaRPr lang="en-US"/>
           </a:p>
@@ -5391,12 +5978,12 @@
       </p:grpSpPr>
       <p:sp>
         <p:nvSpPr>
-          <p:cNvPr id="2" name="Title 1"/>
-          <p:cNvSpPr>
-            <a:spLocks noGrp="1"/>
-          </p:cNvSpPr>
-          <p:nvPr>
-            <p:ph type="title"/>
+          <p:cNvPr id="3" name="Content Placeholder 2"/>
+          <p:cNvSpPr>
+            <a:spLocks noGrp="1"/>
+          </p:cNvSpPr>
+          <p:nvPr>
+            <p:ph idx="1" sz="half"/>
           </p:nvPr>
         </p:nvSpPr>
         <p:spPr/>
@@ -5408,30 +5995,62 @@
               <a:buNone/>
             </a:pPr>
             <a:r>
-              <a:rPr/>
-              <a:t>Depth-Damage Functions</a:t>
+              <a:rPr b="1"/>
+              <a:t>Exposure</a:t>
+            </a:r>
+            <a:r>
+              <a:rPr/>
+              <a:t> = assets that could be affected</a:t>
+            </a:r>
+          </a:p>
+          <a:p>
+            <a:pPr lvl="0"/>
+            <a:r>
+              <a:rPr/>
+              <a:t>Buildings and infrastructure</a:t>
+            </a:r>
+          </a:p>
+          <a:p>
+            <a:pPr lvl="0"/>
+            <a:r>
+              <a:rPr/>
+              <a:t>People and livelihoods</a:t>
+            </a:r>
+          </a:p>
+          <a:p>
+            <a:pPr lvl="0"/>
+            <a:r>
+              <a:rPr/>
+              <a:t>Agricultural land</a:t>
+            </a:r>
+          </a:p>
+          <a:p>
+            <a:pPr lvl="0"/>
+            <a:r>
+              <a:rPr/>
+              <a:t>Economic activity</a:t>
             </a:r>
           </a:p>
         </p:txBody>
       </p:sp>
       <p:pic>
         <p:nvPicPr>
-          <p:cNvPr descr="wing_vulnerability_2020_fig1.jpg" id="0" name="Picture 1"/>
+          <p:cNvPr descr="jongman_exposure_2012_fig2.png" id="0" name="Picture 1"/>
           <p:cNvPicPr>
             <a:picLocks noGrp="1" noChangeAspect="1"/>
           </p:cNvPicPr>
           <p:nvPr/>
         </p:nvPicPr>
         <p:blipFill>
-          <a:blip r:embed="rId3"/>
+          <a:blip r:embed="rId2"/>
           <a:stretch>
             <a:fillRect/>
           </a:stretch>
         </p:blipFill>
         <p:spPr bwMode="auto">
           <a:xfrm>
-            <a:off x="2311400" y="1193800"/>
-            <a:ext cx="4508500" cy="2882900"/>
+            <a:off x="4648200" y="1752600"/>
+            <a:ext cx="4038600" cy="1752600"/>
           </a:xfrm>
           <a:prstGeom prst="rect">
             <a:avLst/>
@@ -5452,8 +6071,8 @@
         </p:nvSpPr>
         <p:spPr>
           <a:xfrm>
-            <a:off x="457200" y="4076700"/>
-            <a:ext cx="8229600" cy="508000"/>
+            <a:off x="4648200" y="4076700"/>
+            <a:ext cx="4038600" cy="508000"/>
           </a:xfrm>
           <a:prstGeom prst="rect">
             <a:avLst/>
@@ -5469,7 +6088,7 @@
             </a:pPr>
             <a:r>
               <a:rPr/>
-              <a:t>Figure 1: Empirical depth-damage relationships from NFIP claims data. Boxplots show Wing et al. (2020) analysis; lines show USACE depth-damage curves.</a:t>
+              <a:t>Figure 1: Global flood exposure has grown 10× since 1970. Source: Jongman, Ward, and Aerts (2012)</a:t>
             </a:r>
           </a:p>
         </p:txBody>
@@ -5516,7 +6135,473 @@
             </a:pPr>
             <a:r>
               <a:rPr/>
-              <a:t>Key Observations</a:t>
+              <a:t>Exposure Changes Over Time</a:t>
+            </a:r>
+          </a:p>
+        </p:txBody>
+      </p:sp>
+      <p:pic>
+        <p:nvPicPr>
+          <p:cNvPr descr="tedesco_exposure_2020_fig8.png" id="0" name="Picture 1"/>
+          <p:cNvPicPr>
+            <a:picLocks noGrp="1" noChangeAspect="1"/>
+          </p:cNvPicPr>
+          <p:nvPr/>
+        </p:nvPicPr>
+        <p:blipFill>
+          <a:blip r:embed="rId3"/>
+          <a:stretch>
+            <a:fillRect/>
+          </a:stretch>
+        </p:blipFill>
+        <p:spPr bwMode="auto">
+          <a:xfrm>
+            <a:off x="2578100" y="1193800"/>
+            <a:ext cx="3987800" cy="2882900"/>
+          </a:xfrm>
+          <a:prstGeom prst="rect">
+            <a:avLst/>
+          </a:prstGeom>
+          <a:noFill/>
+          <a:ln w="9525">
+            <a:noFill/>
+            <a:headEnd/>
+            <a:tailEnd/>
+          </a:ln>
+        </p:spPr>
+      </p:pic>
+      <p:sp>
+        <p:nvSpPr>
+          <p:cNvPr id="1" name="TextBox 3"/>
+          <p:cNvSpPr txBox="1"/>
+          <p:nvPr/>
+        </p:nvSpPr>
+        <p:spPr>
+          <a:xfrm>
+            <a:off x="457200" y="4076700"/>
+            <a:ext cx="8229600" cy="508000"/>
+          </a:xfrm>
+          <a:prstGeom prst="rect">
+            <a:avLst/>
+          </a:prstGeom>
+          <a:noFill/>
+        </p:spPr>
+        <p:txBody>
+          <a:bodyPr/>
+          <a:lstStyle/>
+          <a:p>
+            <a:pPr lvl="0" indent="0" marL="0" algn="ctr">
+              <a:buNone/>
+            </a:pPr>
+            <a:r>
+              <a:rPr/>
+              <a:t>Figure 2: Houston’s built footprint 1800-2018. Development into flood-prone areas increases exposure. Source: Tedesco, McAlpine, and Porter (2020)</a:t>
+            </a:r>
+          </a:p>
+        </p:txBody>
+      </p:sp>
+    </p:spTree>
+  </p:cSld>
+</p:sld>
+</file>
+
+<file path=ppt/slides/slide12.xml><?xml version="1.0" encoding="utf-8"?>
+<p:sld xmlns:a="http://schemas.openxmlformats.org/drawingml/2006/main" xmlns:r="http://schemas.openxmlformats.org/officeDocument/2006/relationships" xmlns:p="http://schemas.openxmlformats.org/presentationml/2006/main">
+  <p:cSld>
+    <p:spTree>
+      <p:nvGrpSpPr>
+        <p:cNvPr id="1" name=""/>
+        <p:cNvGrpSpPr/>
+        <p:nvPr/>
+      </p:nvGrpSpPr>
+      <p:grpSpPr>
+        <a:xfrm>
+          <a:off x="0" y="0"/>
+          <a:ext cx="0" cy="0"/>
+          <a:chOff x="0" y="0"/>
+          <a:chExt cx="0" cy="0"/>
+        </a:xfrm>
+      </p:grpSpPr>
+      <p:sp>
+        <p:nvSpPr>
+          <p:cNvPr id="2" name="Title 1"/>
+          <p:cNvSpPr>
+            <a:spLocks noGrp="1"/>
+          </p:cNvSpPr>
+          <p:nvPr>
+            <p:ph type="title"/>
+          </p:nvPr>
+        </p:nvSpPr>
+        <p:spPr/>
+        <p:txBody>
+          <a:bodyPr/>
+          <a:lstStyle/>
+          <a:p>
+            <a:pPr lvl="0" indent="0" marL="0">
+              <a:buNone/>
+            </a:pPr>
+            <a:r>
+              <a:rPr/>
+              <a:t>Vulnerability</a:t>
+            </a:r>
+          </a:p>
+        </p:txBody>
+      </p:sp>
+      <p:sp>
+        <p:nvSpPr>
+          <p:cNvPr id="3" name="Content Placeholder 2"/>
+          <p:cNvSpPr>
+            <a:spLocks noGrp="1"/>
+          </p:cNvSpPr>
+          <p:nvPr>
+            <p:ph idx="1"/>
+          </p:nvPr>
+        </p:nvSpPr>
+        <p:spPr/>
+        <p:txBody>
+          <a:bodyPr/>
+          <a:lstStyle/>
+          <a:p>
+            <a:pPr lvl="0" indent="0" marL="0">
+              <a:buNone/>
+            </a:pPr>
+            <a:r>
+              <a:rPr b="1"/>
+              <a:t>Vulnerability:</a:t>
+            </a:r>
+            <a:r>
+              <a:rPr/>
+              <a:t> Propensity to suffer damage given exposure to hazard</a:t>
+            </a:r>
+          </a:p>
+          <a:p>
+            <a:pPr lvl="0" indent="0" marL="0">
+              <a:buNone/>
+            </a:pPr>
+            <a:r>
+              <a:rPr/>
+              <a:t>Important distinction:</a:t>
+            </a:r>
+          </a:p>
+          <a:p>
+            <a:pPr lvl="0"/>
+            <a:r>
+              <a:rPr b="1"/>
+              <a:t>Fragility:</a:t>
+            </a:r>
+            <a:r>
+              <a:rPr/>
+              <a:t> Probability of failure (binary)</a:t>
+            </a:r>
+          </a:p>
+          <a:p>
+            <a:pPr lvl="0"/>
+            <a:r>
+              <a:rPr b="1"/>
+              <a:t>Vulnerability:</a:t>
+            </a:r>
+            <a:r>
+              <a:rPr/>
+              <a:t> Degree of damage (continuous, 0-1)</a:t>
+            </a:r>
+          </a:p>
+        </p:txBody>
+      </p:sp>
+    </p:spTree>
+  </p:cSld>
+</p:sld>
+</file>
+
+<file path=ppt/slides/slide13.xml><?xml version="1.0" encoding="utf-8"?>
+<p:sld xmlns:a="http://schemas.openxmlformats.org/drawingml/2006/main" xmlns:r="http://schemas.openxmlformats.org/officeDocument/2006/relationships" xmlns:p="http://schemas.openxmlformats.org/presentationml/2006/main">
+  <p:cSld>
+    <p:spTree>
+      <p:nvGrpSpPr>
+        <p:cNvPr id="1" name=""/>
+        <p:cNvGrpSpPr/>
+        <p:nvPr/>
+      </p:nvGrpSpPr>
+      <p:grpSpPr>
+        <a:xfrm>
+          <a:off x="0" y="0"/>
+          <a:ext cx="0" cy="0"/>
+          <a:chOff x="0" y="0"/>
+          <a:chExt cx="0" cy="0"/>
+        </a:xfrm>
+      </p:grpSpPr>
+      <p:sp>
+        <p:nvSpPr>
+          <p:cNvPr id="2" name="Title 1"/>
+          <p:cNvSpPr>
+            <a:spLocks noGrp="1"/>
+          </p:cNvSpPr>
+          <p:nvPr>
+            <p:ph type="title"/>
+          </p:nvPr>
+        </p:nvSpPr>
+        <p:spPr/>
+        <p:txBody>
+          <a:bodyPr/>
+          <a:lstStyle/>
+          <a:p>
+            <a:pPr lvl="0" indent="0" marL="0">
+              <a:buNone/>
+            </a:pPr>
+            <a:r>
+              <a:rPr/>
+              <a:t>Fragility vs. Vulnerability</a:t>
+            </a:r>
+          </a:p>
+        </p:txBody>
+      </p:sp>
+      <p:pic>
+        <p:nvPicPr>
+          <p:cNvPr descr="gidaris_multiplehazard_2017.jpg" id="0" name="Picture 1"/>
+          <p:cNvPicPr>
+            <a:picLocks noGrp="1" noChangeAspect="1"/>
+          </p:cNvPicPr>
+          <p:nvPr/>
+        </p:nvPicPr>
+        <p:blipFill>
+          <a:blip r:embed="rId3"/>
+          <a:stretch>
+            <a:fillRect/>
+          </a:stretch>
+        </p:blipFill>
+        <p:spPr bwMode="auto">
+          <a:xfrm>
+            <a:off x="1638300" y="1193800"/>
+            <a:ext cx="5880100" cy="2882900"/>
+          </a:xfrm>
+          <a:prstGeom prst="rect">
+            <a:avLst/>
+          </a:prstGeom>
+          <a:noFill/>
+          <a:ln w="9525">
+            <a:noFill/>
+            <a:headEnd/>
+            <a:tailEnd/>
+          </a:ln>
+        </p:spPr>
+      </p:pic>
+      <p:sp>
+        <p:nvSpPr>
+          <p:cNvPr id="1" name="TextBox 3"/>
+          <p:cNvSpPr txBox="1"/>
+          <p:nvPr/>
+        </p:nvSpPr>
+        <p:spPr>
+          <a:xfrm>
+            <a:off x="457200" y="4076700"/>
+            <a:ext cx="8229600" cy="508000"/>
+          </a:xfrm>
+          <a:prstGeom prst="rect">
+            <a:avLst/>
+          </a:prstGeom>
+          <a:noFill/>
+        </p:spPr>
+        <p:txBody>
+          <a:bodyPr/>
+          <a:lstStyle/>
+          <a:p>
+            <a:pPr lvl="0" indent="0" marL="0" algn="ctr">
+              <a:buNone/>
+            </a:pPr>
+            <a:r>
+              <a:rPr/>
+              <a:t>Figure 3: Fragility surfaces (a) and curves (b) show probability of damage given hazard intensity. Source: Gidaris et al. (2017)</a:t>
+            </a:r>
+          </a:p>
+        </p:txBody>
+      </p:sp>
+    </p:spTree>
+  </p:cSld>
+</p:sld>
+</file>
+
+<file path=ppt/slides/slide14.xml><?xml version="1.0" encoding="utf-8"?>
+<p:sld xmlns:a="http://schemas.openxmlformats.org/drawingml/2006/main" xmlns:r="http://schemas.openxmlformats.org/officeDocument/2006/relationships" xmlns:p="http://schemas.openxmlformats.org/presentationml/2006/main">
+  <p:cSld>
+    <p:spTree>
+      <p:nvGrpSpPr>
+        <p:cNvPr id="1" name=""/>
+        <p:cNvGrpSpPr/>
+        <p:nvPr/>
+      </p:nvGrpSpPr>
+      <p:grpSpPr>
+        <a:xfrm>
+          <a:off x="0" y="0"/>
+          <a:ext cx="0" cy="0"/>
+          <a:chOff x="0" y="0"/>
+          <a:chExt cx="0" cy="0"/>
+        </a:xfrm>
+      </p:grpSpPr>
+      <p:sp>
+        <p:nvSpPr>
+          <p:cNvPr id="2" name="Title 1"/>
+          <p:cNvSpPr>
+            <a:spLocks noGrp="1"/>
+          </p:cNvSpPr>
+          <p:nvPr>
+            <p:ph type="title"/>
+          </p:nvPr>
+        </p:nvSpPr>
+        <p:spPr>
+          <a:xfrm>
+            <a:off x="457201" y="204787"/>
+            <a:ext cx="3008313" cy="871538"/>
+          </a:xfrm>
+        </p:spPr>
+        <p:txBody>
+          <a:bodyPr/>
+          <a:lstStyle/>
+          <a:p>
+            <a:pPr lvl="0" indent="0" marL="0">
+              <a:buNone/>
+            </a:pPr>
+            <a:r>
+              <a:rPr/>
+              <a:t>Depth-Damage Functions</a:t>
+            </a:r>
+          </a:p>
+        </p:txBody>
+      </p:sp>
+      <p:sp>
+        <p:nvSpPr>
+          <p:cNvPr id="4" name="Text Placeholder 3"/>
+          <p:cNvSpPr>
+            <a:spLocks noGrp="1"/>
+          </p:cNvSpPr>
+          <p:nvPr>
+            <p:ph idx="2" sz="half" type="body"/>
+          </p:nvPr>
+        </p:nvSpPr>
+        <p:spPr/>
+        <p:txBody>
+          <a:bodyPr/>
+          <a:lstStyle/>
+          <a:p>
+            <a:pPr lvl="0" indent="0" marL="0">
+              <a:buNone/>
+            </a:pPr>
+            <a:r>
+              <a:rPr/>
+              <a:t>For floods, </a:t>
+            </a:r>
+            <a:r>
+              <a:rPr b="1"/>
+              <a:t>depth-damage functions</a:t>
+            </a:r>
+            <a:r>
+              <a:rPr/>
+              <a:t> quantify vulnerability:</a:t>
+            </a:r>
+          </a:p>
+        </p:txBody>
+      </p:sp>
+      <p:pic>
+        <p:nvPicPr>
+          <p:cNvPr descr="wing_vulnerability_2020_fig1.jpg" id="0" name="Picture 1"/>
+          <p:cNvPicPr>
+            <a:picLocks noGrp="1" noChangeAspect="1"/>
+          </p:cNvPicPr>
+          <p:nvPr/>
+        </p:nvPicPr>
+        <p:blipFill>
+          <a:blip r:embed="rId3"/>
+          <a:stretch>
+            <a:fillRect/>
+          </a:stretch>
+        </p:blipFill>
+        <p:spPr bwMode="auto">
+          <a:xfrm>
+            <a:off x="3568700" y="508000"/>
+            <a:ext cx="5105400" cy="3263900"/>
+          </a:xfrm>
+          <a:prstGeom prst="rect">
+            <a:avLst/>
+          </a:prstGeom>
+          <a:noFill/>
+          <a:ln w="9525">
+            <a:noFill/>
+            <a:headEnd/>
+            <a:tailEnd/>
+          </a:ln>
+        </p:spPr>
+      </p:pic>
+      <p:sp>
+        <p:nvSpPr>
+          <p:cNvPr id="1" name="TextBox 3"/>
+          <p:cNvSpPr txBox="1"/>
+          <p:nvPr/>
+        </p:nvSpPr>
+        <p:spPr>
+          <a:xfrm>
+            <a:off x="3568700" y="4076700"/>
+            <a:ext cx="5105400" cy="508000"/>
+          </a:xfrm>
+          <a:prstGeom prst="rect">
+            <a:avLst/>
+          </a:prstGeom>
+          <a:noFill/>
+        </p:spPr>
+        <p:txBody>
+          <a:bodyPr/>
+          <a:lstStyle/>
+          <a:p>
+            <a:pPr lvl="0" indent="0" marL="0" algn="ctr">
+              <a:buNone/>
+            </a:pPr>
+            <a:r>
+              <a:rPr/>
+              <a:t>Figure 4: Empirical depth-damage from NFIP claims data. Boxplots: Wing et al. (2020) analysis. Lines: USACE engineering curves.</a:t>
+            </a:r>
+          </a:p>
+        </p:txBody>
+      </p:sp>
+    </p:spTree>
+  </p:cSld>
+</p:sld>
+</file>
+
+<file path=ppt/slides/slide15.xml><?xml version="1.0" encoding="utf-8"?>
+<p:sld xmlns:a="http://schemas.openxmlformats.org/drawingml/2006/main" xmlns:r="http://schemas.openxmlformats.org/officeDocument/2006/relationships" xmlns:p="http://schemas.openxmlformats.org/presentationml/2006/main">
+  <p:cSld>
+    <p:spTree>
+      <p:nvGrpSpPr>
+        <p:cNvPr id="1" name=""/>
+        <p:cNvGrpSpPr/>
+        <p:nvPr/>
+      </p:nvGrpSpPr>
+      <p:grpSpPr>
+        <a:xfrm>
+          <a:off x="0" y="0"/>
+          <a:ext cx="0" cy="0"/>
+          <a:chOff x="0" y="0"/>
+          <a:chExt cx="0" cy="0"/>
+        </a:xfrm>
+      </p:grpSpPr>
+      <p:sp>
+        <p:nvSpPr>
+          <p:cNvPr id="2" name="Title 1"/>
+          <p:cNvSpPr>
+            <a:spLocks noGrp="1"/>
+          </p:cNvSpPr>
+          <p:nvPr>
+            <p:ph type="title"/>
+          </p:nvPr>
+        </p:nvSpPr>
+        <p:spPr/>
+        <p:txBody>
+          <a:bodyPr/>
+          <a:lstStyle/>
+          <a:p>
+            <a:pPr lvl="0" indent="0" marL="0">
+              <a:buNone/>
+            </a:pPr>
+            <a:r>
+              <a:rPr/>
+              <a:t>What Do You Notice?</a:t>
             </a:r>
           </a:p>
         </p:txBody>
@@ -5812,7 +6897,59 @@
 </p:sld>
 </file>
 
-<file path=ppt/slides/slide12.xml><?xml version="1.0" encoding="utf-8"?>
+<file path=ppt/slides/slide16.xml><?xml version="1.0" encoding="utf-8"?>
+<p:sld xmlns:a="http://schemas.openxmlformats.org/drawingml/2006/main" xmlns:r="http://schemas.openxmlformats.org/officeDocument/2006/relationships" xmlns:p="http://schemas.openxmlformats.org/presentationml/2006/main">
+  <p:cSld>
+    <p:spTree>
+      <p:nvGrpSpPr>
+        <p:cNvPr id="1" name=""/>
+        <p:cNvGrpSpPr/>
+        <p:nvPr/>
+      </p:nvGrpSpPr>
+      <p:grpSpPr>
+        <a:xfrm>
+          <a:off x="0" y="0"/>
+          <a:ext cx="0" cy="0"/>
+          <a:chOff x="0" y="0"/>
+          <a:chExt cx="0" cy="0"/>
+        </a:xfrm>
+      </p:grpSpPr>
+      <p:sp>
+        <p:nvSpPr>
+          <p:cNvPr id="2" name="Title 1"/>
+          <p:cNvSpPr>
+            <a:spLocks noGrp="1"/>
+          </p:cNvSpPr>
+          <p:nvPr>
+            <p:ph type="title"/>
+          </p:nvPr>
+        </p:nvSpPr>
+        <p:spPr>
+          <a:xfrm>
+            <a:off x="722313" y="3305176"/>
+            <a:ext cx="7772400" cy="1021556"/>
+          </a:xfrm>
+        </p:spPr>
+        <p:txBody>
+          <a:bodyPr/>
+          <a:lstStyle/>
+          <a:p>
+            <a:pPr lvl="0" indent="0" marL="0">
+              <a:buNone/>
+            </a:pPr>
+            <a:r>
+              <a:rPr/>
+              <a:t>From Components to Risk</a:t>
+            </a:r>
+          </a:p>
+        </p:txBody>
+      </p:sp>
+    </p:spTree>
+  </p:cSld>
+</p:sld>
+</file>
+
+<file path=ppt/slides/slide17.xml><?xml version="1.0" encoding="utf-8"?>
 <p:sld xmlns:a="http://schemas.openxmlformats.org/drawingml/2006/main" xmlns:r="http://schemas.openxmlformats.org/officeDocument/2006/relationships" xmlns:p="http://schemas.openxmlformats.org/presentationml/2006/main">
   <p:cSld>
     <p:spTree>
@@ -6095,682 +7232,6 @@
 </p:sld>
 </file>
 
-<file path=ppt/slides/slide13.xml><?xml version="1.0" encoding="utf-8"?>
-<p:sld xmlns:a="http://schemas.openxmlformats.org/drawingml/2006/main" xmlns:r="http://schemas.openxmlformats.org/officeDocument/2006/relationships" xmlns:p="http://schemas.openxmlformats.org/presentationml/2006/main">
-  <p:cSld>
-    <p:spTree>
-      <p:nvGrpSpPr>
-        <p:cNvPr id="1" name=""/>
-        <p:cNvGrpSpPr/>
-        <p:nvPr/>
-      </p:nvGrpSpPr>
-      <p:grpSpPr>
-        <a:xfrm>
-          <a:off x="0" y="0"/>
-          <a:ext cx="0" cy="0"/>
-          <a:chOff x="0" y="0"/>
-          <a:chExt cx="0" cy="0"/>
-        </a:xfrm>
-      </p:grpSpPr>
-      <p:sp>
-        <p:nvSpPr>
-          <p:cNvPr id="2" name="Title 1"/>
-          <p:cNvSpPr>
-            <a:spLocks noGrp="1"/>
-          </p:cNvSpPr>
-          <p:nvPr>
-            <p:ph type="title"/>
-          </p:nvPr>
-        </p:nvSpPr>
-        <p:spPr>
-          <a:xfrm>
-            <a:off x="722313" y="3305176"/>
-            <a:ext cx="7772400" cy="1021556"/>
-          </a:xfrm>
-        </p:spPr>
-        <p:txBody>
-          <a:bodyPr/>
-          <a:lstStyle/>
-          <a:p>
-            <a:pPr lvl="0" indent="0" marL="0">
-              <a:buNone/>
-            </a:pPr>
-            <a:r>
-              <a:rPr/>
-              <a:t>XLRM Framework</a:t>
-            </a:r>
-          </a:p>
-        </p:txBody>
-      </p:sp>
-    </p:spTree>
-  </p:cSld>
-</p:sld>
-</file>
-
-<file path=ppt/slides/slide14.xml><?xml version="1.0" encoding="utf-8"?>
-<p:sld xmlns:a="http://schemas.openxmlformats.org/drawingml/2006/main" xmlns:r="http://schemas.openxmlformats.org/officeDocument/2006/relationships" xmlns:p="http://schemas.openxmlformats.org/presentationml/2006/main">
-  <p:cSld>
-    <p:spTree>
-      <p:nvGrpSpPr>
-        <p:cNvPr id="1" name=""/>
-        <p:cNvGrpSpPr/>
-        <p:nvPr/>
-      </p:nvGrpSpPr>
-      <p:grpSpPr>
-        <a:xfrm>
-          <a:off x="0" y="0"/>
-          <a:ext cx="0" cy="0"/>
-          <a:chOff x="0" y="0"/>
-          <a:chExt cx="0" cy="0"/>
-        </a:xfrm>
-      </p:grpSpPr>
-      <p:sp>
-        <p:nvSpPr>
-          <p:cNvPr id="2" name="Title 1"/>
-          <p:cNvSpPr>
-            <a:spLocks noGrp="1"/>
-          </p:cNvSpPr>
-          <p:nvPr>
-            <p:ph type="title"/>
-          </p:nvPr>
-        </p:nvSpPr>
-        <p:spPr/>
-        <p:txBody>
-          <a:bodyPr/>
-          <a:lstStyle/>
-          <a:p>
-            <a:pPr lvl="0" indent="0" marL="0">
-              <a:buNone/>
-            </a:pPr>
-            <a:r>
-              <a:rPr/>
-              <a:t>Review from Week 1</a:t>
-            </a:r>
-          </a:p>
-        </p:txBody>
-      </p:sp>
-      <p:sp>
-        <p:nvSpPr>
-          <p:cNvPr id="3" name="Content Placeholder 2"/>
-          <p:cNvSpPr>
-            <a:spLocks noGrp="1"/>
-          </p:cNvSpPr>
-          <p:nvPr>
-            <p:ph idx="1"/>
-          </p:nvPr>
-        </p:nvSpPr>
-        <p:spPr/>
-        <p:txBody>
-          <a:bodyPr/>
-          <a:lstStyle/>
-          <a:p>
-            <a:pPr lvl="0" indent="0" marL="0">
-              <a:buNone/>
-            </a:pPr>
-            <a:r>
-              <a:rPr/>
-              <a:t>XLRM helps us structure decision problems under uncertainty:</a:t>
-            </a:r>
-          </a:p>
-          <a:p>
-            <a:pPr lvl="0"/>
-            <a:r>
-              <a:rPr b="1"/>
-              <a:t>X</a:t>
-            </a:r>
-            <a:r>
-              <a:rPr/>
-              <a:t>: e</a:t>
-            </a:r>
-            <a:r>
-              <a:rPr b="1"/>
-              <a:t>X</a:t>
-            </a:r>
-            <a:r>
-              <a:rPr/>
-              <a:t>ogenous uncertainties (things we can’t control)</a:t>
-            </a:r>
-          </a:p>
-          <a:p>
-            <a:pPr lvl="0"/>
-            <a:r>
-              <a:rPr b="1"/>
-              <a:t>L</a:t>
-            </a:r>
-            <a:r>
-              <a:rPr/>
-              <a:t>: </a:t>
-            </a:r>
-            <a:r>
-              <a:rPr b="1"/>
-              <a:t>L</a:t>
-            </a:r>
-            <a:r>
-              <a:rPr/>
-              <a:t>evers (things we can control)</a:t>
-            </a:r>
-          </a:p>
-          <a:p>
-            <a:pPr lvl="0"/>
-            <a:r>
-              <a:rPr b="1"/>
-              <a:t>R</a:t>
-            </a:r>
-            <a:r>
-              <a:rPr/>
-              <a:t>: </a:t>
-            </a:r>
-            <a:r>
-              <a:rPr b="1"/>
-              <a:t>R</a:t>
-            </a:r>
-            <a:r>
-              <a:rPr/>
-              <a:t>elationships (models connecting X and L to outcomes)</a:t>
-            </a:r>
-          </a:p>
-          <a:p>
-            <a:pPr lvl="0"/>
-            <a:r>
-              <a:rPr b="1"/>
-              <a:t>M</a:t>
-            </a:r>
-            <a:r>
-              <a:rPr/>
-              <a:t>: </a:t>
-            </a:r>
-            <a:r>
-              <a:rPr b="1"/>
-              <a:t>M</a:t>
-            </a:r>
-            <a:r>
-              <a:rPr/>
-              <a:t>etrics (how we measure success)</a:t>
-            </a:r>
-          </a:p>
-        </p:txBody>
-      </p:sp>
-    </p:spTree>
-  </p:cSld>
-</p:sld>
-</file>
-
-<file path=ppt/slides/slide15.xml><?xml version="1.0" encoding="utf-8"?>
-<p:sld xmlns:a="http://schemas.openxmlformats.org/drawingml/2006/main" xmlns:r="http://schemas.openxmlformats.org/officeDocument/2006/relationships" xmlns:p="http://schemas.openxmlformats.org/presentationml/2006/main">
-  <p:cSld>
-    <p:spTree>
-      <p:nvGrpSpPr>
-        <p:cNvPr id="1" name=""/>
-        <p:cNvGrpSpPr/>
-        <p:nvPr/>
-      </p:nvGrpSpPr>
-      <p:grpSpPr>
-        <a:xfrm>
-          <a:off x="0" y="0"/>
-          <a:ext cx="0" cy="0"/>
-          <a:chOff x="0" y="0"/>
-          <a:chExt cx="0" cy="0"/>
-        </a:xfrm>
-      </p:grpSpPr>
-      <p:sp>
-        <p:nvSpPr>
-          <p:cNvPr id="2" name="Title 1"/>
-          <p:cNvSpPr>
-            <a:spLocks noGrp="1"/>
-          </p:cNvSpPr>
-          <p:nvPr>
-            <p:ph type="title"/>
-          </p:nvPr>
-        </p:nvSpPr>
-        <p:spPr/>
-        <p:txBody>
-          <a:bodyPr/>
-          <a:lstStyle/>
-          <a:p>
-            <a:pPr lvl="0" indent="0" marL="0">
-              <a:buNone/>
-            </a:pPr>
-            <a:r>
-              <a:rPr/>
-              <a:t>XLRM for Flood Risk</a:t>
-            </a:r>
-          </a:p>
-        </p:txBody>
-      </p:sp>
-      <p:graphicFrame>
-        <p:nvGraphicFramePr>
-          <p:cNvPr id="6" name="Content Placeholder 5"/>
-          <p:cNvGraphicFramePr>
-            <a:graphicFrameLocks noGrp="1"/>
-          </p:cNvGraphicFramePr>
-          <p:nvPr>
-            <p:ph idx="1"/>
-          </p:nvPr>
-        </p:nvGraphicFramePr>
-        <p:xfrm>
-          <a:off x="457200" y="1193800"/>
-          <a:ext cx="8229600" cy="3390900"/>
-        </p:xfrm>
-        <a:graphic>
-          <a:graphicData uri="http://schemas.openxmlformats.org/drawingml/2006/table">
-            <a:tbl>
-              <a:tblPr firstRow="1" bandRow="1">
-                <a:tableStyleId>{5C22544A-7EE6-4342-B048-85BDC9FD1C3A}</a:tableStyleId>
-              </a:tblPr>
-              <a:tblGrid>
-                <a:gridCol w="4114800"/>
-                <a:gridCol w="4114800"/>
-              </a:tblGrid>
-              <a:tr h="0">
-                <a:tc>
-                  <a:txBody>
-                    <a:bodyPr/>
-                    <a:lstStyle/>
-                    <a:p>
-                      <a:pPr lvl="0" indent="0" marL="0">
-                        <a:buNone/>
-                      </a:pPr>
-                      <a:r>
-                        <a:rPr/>
-                        <a:t>Component</a:t>
-                      </a:r>
-                    </a:p>
-                  </a:txBody>
-                  <a:tcPr/>
-                </a:tc>
-                <a:tc>
-                  <a:txBody>
-                    <a:bodyPr/>
-                    <a:lstStyle/>
-                    <a:p>
-                      <a:pPr lvl="0" indent="0" marL="0">
-                        <a:buNone/>
-                      </a:pPr>
-                      <a:r>
-                        <a:rPr/>
-                        <a:t>Flood Risk Example</a:t>
-                      </a:r>
-                    </a:p>
-                  </a:txBody>
-                  <a:tcPr/>
-                </a:tc>
-              </a:tr>
-              <a:tr h="0">
-                <a:tc>
-                  <a:txBody>
-                    <a:bodyPr/>
-                    <a:lstStyle/>
-                    <a:p>
-                      <a:pPr lvl="0" indent="0" marL="0">
-                        <a:buNone/>
-                      </a:pPr>
-                      <a:r>
-                        <a:rPr b="1"/>
-                        <a:t>X</a:t>
-                      </a:r>
-                    </a:p>
-                  </a:txBody>
-                </a:tc>
-                <a:tc>
-                  <a:txBody>
-                    <a:bodyPr/>
-                    <a:lstStyle/>
-                    <a:p>
-                      <a:pPr lvl="0" indent="0" marL="0">
-                        <a:buNone/>
-                      </a:pPr>
-                      <a:r>
-                        <a:rPr/>
-                        <a:t>Sea level rise, storm intensity, housing prices</a:t>
-                      </a:r>
-                    </a:p>
-                  </a:txBody>
-                </a:tc>
-              </a:tr>
-              <a:tr h="0">
-                <a:tc>
-                  <a:txBody>
-                    <a:bodyPr/>
-                    <a:lstStyle/>
-                    <a:p>
-                      <a:pPr lvl="0" indent="0" marL="0">
-                        <a:buNone/>
-                      </a:pPr>
-                      <a:r>
-                        <a:rPr b="1"/>
-                        <a:t>L</a:t>
-                      </a:r>
-                    </a:p>
-                  </a:txBody>
-                </a:tc>
-                <a:tc>
-                  <a:txBody>
-                    <a:bodyPr/>
-                    <a:lstStyle/>
-                    <a:p>
-                      <a:pPr lvl="0" indent="0" marL="0">
-                        <a:buNone/>
-                      </a:pPr>
-                      <a:r>
-                        <a:rPr/>
-                        <a:t>Elevate house, build seawall, buy insurance, retreat</a:t>
-                      </a:r>
-                    </a:p>
-                  </a:txBody>
-                </a:tc>
-              </a:tr>
-              <a:tr h="0">
-                <a:tc>
-                  <a:txBody>
-                    <a:bodyPr/>
-                    <a:lstStyle/>
-                    <a:p>
-                      <a:pPr lvl="0" indent="0" marL="0">
-                        <a:buNone/>
-                      </a:pPr>
-                      <a:r>
-                        <a:rPr b="1"/>
-                        <a:t>R</a:t>
-                      </a:r>
-                    </a:p>
-                  </a:txBody>
-                </a:tc>
-                <a:tc>
-                  <a:txBody>
-                    <a:bodyPr/>
-                    <a:lstStyle/>
-                    <a:p>
-                      <a:pPr lvl="0" indent="0" marL="0">
-                        <a:buNone/>
-                      </a:pPr>
-                      <a:r>
-                        <a:rPr/>
-                        <a:t>Depth-damage function, storm surge model, economic model</a:t>
-                      </a:r>
-                    </a:p>
-                  </a:txBody>
-                </a:tc>
-              </a:tr>
-              <a:tr h="0">
-                <a:tc>
-                  <a:txBody>
-                    <a:bodyPr/>
-                    <a:lstStyle/>
-                    <a:p>
-                      <a:pPr lvl="0" indent="0" marL="0">
-                        <a:buNone/>
-                      </a:pPr>
-                      <a:r>
-                        <a:rPr b="1"/>
-                        <a:t>M</a:t>
-                      </a:r>
-                    </a:p>
-                  </a:txBody>
-                </a:tc>
-                <a:tc>
-                  <a:txBody>
-                    <a:bodyPr/>
-                    <a:lstStyle/>
-                    <a:p>
-                      <a:pPr lvl="0" indent="0" marL="0">
-                        <a:buNone/>
-                      </a:pPr>
-                      <a:r>
-                        <a:rPr/>
-                        <a:t>Expected annual damages, probability of ruin, NPV</a:t>
-                      </a:r>
-                    </a:p>
-                  </a:txBody>
-                </a:tc>
-              </a:tr>
-            </a:tbl>
-          </a:graphicData>
-        </a:graphic>
-      </p:graphicFrame>
-    </p:spTree>
-  </p:cSld>
-</p:sld>
-</file>
-
-<file path=ppt/slides/slide16.xml><?xml version="1.0" encoding="utf-8"?>
-<p:sld xmlns:a="http://schemas.openxmlformats.org/drawingml/2006/main" xmlns:r="http://schemas.openxmlformats.org/officeDocument/2006/relationships" xmlns:p="http://schemas.openxmlformats.org/presentationml/2006/main">
-  <p:cSld>
-    <p:spTree>
-      <p:nvGrpSpPr>
-        <p:cNvPr id="1" name=""/>
-        <p:cNvGrpSpPr/>
-        <p:nvPr/>
-      </p:nvGrpSpPr>
-      <p:grpSpPr>
-        <a:xfrm>
-          <a:off x="0" y="0"/>
-          <a:ext cx="0" cy="0"/>
-          <a:chOff x="0" y="0"/>
-          <a:chExt cx="0" cy="0"/>
-        </a:xfrm>
-      </p:grpSpPr>
-      <p:sp>
-        <p:nvSpPr>
-          <p:cNvPr id="2" name="Title 1"/>
-          <p:cNvSpPr>
-            <a:spLocks noGrp="1"/>
-          </p:cNvSpPr>
-          <p:nvPr>
-            <p:ph type="title"/>
-          </p:nvPr>
-        </p:nvSpPr>
-        <p:spPr/>
-        <p:txBody>
-          <a:bodyPr/>
-          <a:lstStyle/>
-          <a:p>
-            <a:pPr lvl="0" indent="0" marL="0">
-              <a:buNone/>
-            </a:pPr>
-            <a:r>
-              <a:rPr/>
-              <a:t>Your Turn</a:t>
-            </a:r>
-          </a:p>
-        </p:txBody>
-      </p:sp>
-      <p:sp>
-        <p:nvSpPr>
-          <p:cNvPr id="3" name="Content Placeholder 2"/>
-          <p:cNvSpPr>
-            <a:spLocks noGrp="1"/>
-          </p:cNvSpPr>
-          <p:nvPr>
-            <p:ph idx="1"/>
-          </p:nvPr>
-        </p:nvSpPr>
-        <p:spPr/>
-        <p:txBody>
-          <a:bodyPr/>
-          <a:lstStyle/>
-          <a:p>
-            <a:pPr lvl="0" indent="0" marL="0">
-              <a:buNone/>
-            </a:pPr>
-            <a:r>
-              <a:rPr/>
-              <a:t>A city is deciding whether to build a new seawall.</a:t>
-            </a:r>
-          </a:p>
-          <a:p>
-            <a:pPr lvl="0" indent="0" marL="0">
-              <a:buNone/>
-            </a:pPr>
-            <a:r>
-              <a:rPr/>
-              <a:t>What are the </a:t>
-            </a:r>
-            <a:r>
-              <a:rPr b="1"/>
-              <a:t>X</a:t>
-            </a:r>
-            <a:r>
-              <a:rPr/>
-              <a:t>, </a:t>
-            </a:r>
-            <a:r>
-              <a:rPr b="1"/>
-              <a:t>L</a:t>
-            </a:r>
-            <a:r>
-              <a:rPr/>
-              <a:t>, </a:t>
-            </a:r>
-            <a:r>
-              <a:rPr b="1"/>
-              <a:t>R</a:t>
-            </a:r>
-            <a:r>
-              <a:rPr/>
-              <a:t>, and </a:t>
-            </a:r>
-            <a:r>
-              <a:rPr b="1"/>
-              <a:t>M</a:t>
-            </a:r>
-            <a:r>
-              <a:rPr/>
-              <a:t>?</a:t>
-            </a:r>
-          </a:p>
-          <a:p>
-            <a:pPr lvl="0" indent="0" marL="0">
-              <a:buNone/>
-            </a:pPr>
-            <a:r>
-              <a:rPr/>
-              <a:t>Discuss with a neighbor for 60 seconds.</a:t>
-            </a:r>
-          </a:p>
-        </p:txBody>
-      </p:sp>
-    </p:spTree>
-  </p:cSld>
-</p:sld>
-</file>
-
-<file path=ppt/slides/slide17.xml><?xml version="1.0" encoding="utf-8"?>
-<p:sld xmlns:a="http://schemas.openxmlformats.org/drawingml/2006/main" xmlns:r="http://schemas.openxmlformats.org/officeDocument/2006/relationships" xmlns:p="http://schemas.openxmlformats.org/presentationml/2006/main">
-  <p:cSld>
-    <p:spTree>
-      <p:nvGrpSpPr>
-        <p:cNvPr id="1" name=""/>
-        <p:cNvGrpSpPr/>
-        <p:nvPr/>
-      </p:nvGrpSpPr>
-      <p:grpSpPr>
-        <a:xfrm>
-          <a:off x="0" y="0"/>
-          <a:ext cx="0" cy="0"/>
-          <a:chOff x="0" y="0"/>
-          <a:chExt cx="0" cy="0"/>
-        </a:xfrm>
-      </p:grpSpPr>
-      <p:sp>
-        <p:nvSpPr>
-          <p:cNvPr id="2" name="Title 1"/>
-          <p:cNvSpPr>
-            <a:spLocks noGrp="1"/>
-          </p:cNvSpPr>
-          <p:nvPr>
-            <p:ph type="title"/>
-          </p:nvPr>
-        </p:nvSpPr>
-        <p:spPr/>
-        <p:txBody>
-          <a:bodyPr/>
-          <a:lstStyle/>
-          <a:p>
-            <a:pPr lvl="0" indent="0" marL="0">
-              <a:buNone/>
-            </a:pPr>
-            <a:r>
-              <a:rPr/>
-              <a:t>Key Insight</a:t>
-            </a:r>
-          </a:p>
-        </p:txBody>
-      </p:sp>
-      <p:sp>
-        <p:nvSpPr>
-          <p:cNvPr id="3" name="Content Placeholder 2"/>
-          <p:cNvSpPr>
-            <a:spLocks noGrp="1"/>
-          </p:cNvSpPr>
-          <p:nvPr>
-            <p:ph idx="1"/>
-          </p:nvPr>
-        </p:nvSpPr>
-        <p:spPr/>
-        <p:txBody>
-          <a:bodyPr/>
-          <a:lstStyle/>
-          <a:p>
-            <a:pPr lvl="0" indent="0" marL="0">
-              <a:buNone/>
-            </a:pPr>
-            <a:r>
-              <a:rPr/>
-              <a:t>The XLRM framework helps us:</a:t>
-            </a:r>
-          </a:p>
-          <a:p>
-            <a:pPr lvl="0" indent="-342900" marL="342900">
-              <a:buAutoNum type="arabicPeriod"/>
-            </a:pPr>
-            <a:r>
-              <a:rPr/>
-              <a:t>Identify what we know vs. what is uncertain</a:t>
-            </a:r>
-          </a:p>
-          <a:p>
-            <a:pPr lvl="0" indent="-342900" marL="342900">
-              <a:buAutoNum type="arabicPeriod"/>
-            </a:pPr>
-            <a:r>
-              <a:rPr/>
-              <a:t>Clarify what decisions we control</a:t>
-            </a:r>
-          </a:p>
-          <a:p>
-            <a:pPr lvl="0" indent="-342900" marL="342900">
-              <a:buAutoNum type="arabicPeriod"/>
-            </a:pPr>
-            <a:r>
-              <a:rPr/>
-              <a:t>Make explicit how we model the system</a:t>
-            </a:r>
-          </a:p>
-          <a:p>
-            <a:pPr lvl="0" indent="-342900" marL="342900">
-              <a:buAutoNum type="arabicPeriod"/>
-            </a:pPr>
-            <a:r>
-              <a:rPr/>
-              <a:t>Define how we measure success</a:t>
-            </a:r>
-          </a:p>
-          <a:p>
-            <a:pPr lvl="0" indent="0" marL="0">
-              <a:buNone/>
-            </a:pPr>
-            <a:r>
-              <a:rPr/>
-              <a:t>This is how we structure complex problems throughout the course.</a:t>
-            </a:r>
-          </a:p>
-        </p:txBody>
-      </p:sp>
-    </p:spTree>
-  </p:cSld>
-</p:sld>
-</file>
-
 <file path=ppt/slides/slide18.xml><?xml version="1.0" encoding="utf-8"?>
 <p:sld xmlns:a="http://schemas.openxmlformats.org/drawingml/2006/main" xmlns:r="http://schemas.openxmlformats.org/officeDocument/2006/relationships" xmlns:p="http://schemas.openxmlformats.org/presentationml/2006/main">
   <p:cSld>
@@ -6798,22 +7259,77 @@
             <p:ph type="title"/>
           </p:nvPr>
         </p:nvSpPr>
+        <p:spPr/>
+        <p:txBody>
+          <a:bodyPr/>
+          <a:lstStyle/>
+          <a:p>
+            <a:pPr lvl="0" indent="0" marL="0">
+              <a:buNone/>
+            </a:pPr>
+            <a:r>
+              <a:rPr/>
+              <a:t>Annual Expected Damages at Scale</a:t>
+            </a:r>
+          </a:p>
+        </p:txBody>
+      </p:sp>
+      <p:pic>
+        <p:nvPicPr>
+          <p:cNvPr descr="demoel_reducing_2014_fig2.png" id="0" name="Picture 1"/>
+          <p:cNvPicPr>
+            <a:picLocks noGrp="1" noChangeAspect="1"/>
+          </p:cNvPicPr>
+          <p:nvPr/>
+        </p:nvPicPr>
+        <p:blipFill>
+          <a:blip r:embed="rId3"/>
+          <a:stretch>
+            <a:fillRect/>
+          </a:stretch>
+        </p:blipFill>
+        <p:spPr bwMode="auto">
+          <a:xfrm>
+            <a:off x="2349500" y="1193800"/>
+            <a:ext cx="4445000" cy="2882900"/>
+          </a:xfrm>
+          <a:prstGeom prst="rect">
+            <a:avLst/>
+          </a:prstGeom>
+          <a:noFill/>
+          <a:ln w="9525">
+            <a:noFill/>
+            <a:headEnd/>
+            <a:tailEnd/>
+          </a:ln>
+        </p:spPr>
+      </p:pic>
+      <p:sp>
+        <p:nvSpPr>
+          <p:cNvPr id="1" name="TextBox 3"/>
+          <p:cNvSpPr txBox="1"/>
+          <p:nvPr/>
+        </p:nvSpPr>
         <p:spPr>
           <a:xfrm>
-            <a:off x="722313" y="3305176"/>
-            <a:ext cx="7772400" cy="1021556"/>
+            <a:off x="457200" y="4076700"/>
+            <a:ext cx="8229600" cy="508000"/>
           </a:xfrm>
+          <a:prstGeom prst="rect">
+            <a:avLst/>
+          </a:prstGeom>
+          <a:noFill/>
         </p:spPr>
         <p:txBody>
           <a:bodyPr/>
           <a:lstStyle/>
           <a:p>
-            <a:pPr lvl="0" indent="0" marL="0">
+            <a:pPr lvl="0" indent="0" marL="0" algn="ctr">
               <a:buNone/>
             </a:pPr>
             <a:r>
               <a:rPr/>
-              <a:t>Extreme Value Theory (Brief)</a:t>
+              <a:t>Figure 5: From hazard and exposure data through damage models to expected annual damage (EAD). Source: de Moel, van Vliet, and Aerts (2014)</a:t>
             </a:r>
           </a:p>
         </p:txBody>
@@ -6860,7 +7376,7 @@
             </a:pPr>
             <a:r>
               <a:rPr/>
-              <a:t>Why Extremes Matter</a:t>
+              <a:t>Your Turn</a:t>
             </a:r>
           </a:p>
         </p:txBody>
@@ -6885,11 +7401,36 @@
             </a:pPr>
             <a:r>
               <a:rPr/>
-              <a:t>Most flood damage comes from </a:t>
+              <a:t>A city is deciding whether to build a new seawall.</a:t>
+            </a:r>
+          </a:p>
+          <a:p>
+            <a:pPr lvl="0" indent="0" marL="0">
+              <a:buNone/>
+            </a:pPr>
+            <a:r>
+              <a:rPr/>
+              <a:t>Identify the </a:t>
             </a:r>
             <a:r>
               <a:rPr b="1"/>
-              <a:t>rare, extreme events</a:t>
+              <a:t>hazard</a:t>
+            </a:r>
+            <a:r>
+              <a:rPr/>
+              <a:t>, </a:t>
+            </a:r>
+            <a:r>
+              <a:rPr b="1"/>
+              <a:t>exposure</a:t>
+            </a:r>
+            <a:r>
+              <a:rPr/>
+              <a:t>, and </a:t>
+            </a:r>
+            <a:r>
+              <a:rPr b="1"/>
+              <a:t>vulnerability</a:t>
             </a:r>
             <a:r>
               <a:rPr/>
@@ -6902,24 +7443,7 @@
             </a:pPr>
             <a:r>
               <a:rPr/>
-              <a:t>The problem: Normal distributions </a:t>
-            </a:r>
-            <a:r>
-              <a:rPr b="1"/>
-              <a:t>underestimate extreme risks</a:t>
-            </a:r>
-            <a:r>
-              <a:rPr/>
-              <a:t>.</a:t>
-            </a:r>
-          </a:p>
-          <a:p>
-            <a:pPr lvl="0" indent="0" marL="0">
-              <a:buNone/>
-            </a:pPr>
-            <a:r>
-              <a:rPr/>
-              <a:t>We need specialized tools for modeling the tails of distributions.</a:t>
+              <a:t>Discuss with a neighbor for 60 seconds.</a:t>
             </a:r>
           </a:p>
         </p:txBody>
@@ -6948,6 +7472,31 @@
       </p:grpSpPr>
       <p:sp>
         <p:nvSpPr>
+          <p:cNvPr id="2" name="Title 1"/>
+          <p:cNvSpPr>
+            <a:spLocks noGrp="1"/>
+          </p:cNvSpPr>
+          <p:nvPr>
+            <p:ph type="title"/>
+          </p:nvPr>
+        </p:nvSpPr>
+        <p:spPr/>
+        <p:txBody>
+          <a:bodyPr/>
+          <a:lstStyle/>
+          <a:p>
+            <a:pPr lvl="0" indent="0" marL="0">
+              <a:buNone/>
+            </a:pPr>
+            <a:r>
+              <a:rPr/>
+              <a:t>What Is a Fair Insurance Premium?</a:t>
+            </a:r>
+          </a:p>
+        </p:txBody>
+      </p:sp>
+      <p:sp>
+        <p:nvSpPr>
           <p:cNvPr id="3" name="Content Placeholder 2"/>
           <p:cNvSpPr>
             <a:spLocks noGrp="1"/>
@@ -6965,12 +7514,35 @@
               <a:buNone/>
             </a:pPr>
             <a:r>
+              <a:rPr/>
+              <a:t>You own a house in a flood zone.</a:t>
+            </a:r>
+          </a:p>
+          <a:p>
+            <a:pPr lvl="0" indent="0" marL="0">
+              <a:buNone/>
+            </a:pPr>
+            <a:r>
+              <a:rPr/>
+              <a:t>An insurance company offers you a policy.</a:t>
+            </a:r>
+          </a:p>
+          <a:p>
+            <a:pPr lvl="0" indent="0" marL="0">
+              <a:buNone/>
+            </a:pPr>
+            <a:r>
               <a:rPr b="1"/>
-              <a:t>Draft Material:</a:t>
-            </a:r>
-            <a:r>
-              <a:rPr/>
-              <a:t> This content is under development and subject to change.</a:t>
+              <a:t>How do they decide what to charge you?</a:t>
+            </a:r>
+          </a:p>
+          <a:p>
+            <a:pPr lvl="0" indent="0" marL="0">
+              <a:buNone/>
+            </a:pPr>
+            <a:r>
+              <a:rPr/>
+              <a:t>Today: The math behind flood risk pricing.</a:t>
             </a:r>
           </a:p>
         </p:txBody>
@@ -6981,6 +7553,2409 @@
 </file>
 
 <file path=ppt/slides/slide20.xml><?xml version="1.0" encoding="utf-8"?>
+<p:sld xmlns:a="http://schemas.openxmlformats.org/drawingml/2006/main" xmlns:r="http://schemas.openxmlformats.org/officeDocument/2006/relationships" xmlns:p="http://schemas.openxmlformats.org/presentationml/2006/main">
+  <p:cSld>
+    <p:spTree>
+      <p:nvGrpSpPr>
+        <p:cNvPr id="1" name=""/>
+        <p:cNvGrpSpPr/>
+        <p:nvPr/>
+      </p:nvGrpSpPr>
+      <p:grpSpPr>
+        <a:xfrm>
+          <a:off x="0" y="0"/>
+          <a:ext cx="0" cy="0"/>
+          <a:chOff x="0" y="0"/>
+          <a:chExt cx="0" cy="0"/>
+        </a:xfrm>
+      </p:grpSpPr>
+      <p:sp>
+        <p:nvSpPr>
+          <p:cNvPr id="2" name="Title 1"/>
+          <p:cNvSpPr>
+            <a:spLocks noGrp="1"/>
+          </p:cNvSpPr>
+          <p:nvPr>
+            <p:ph type="title"/>
+          </p:nvPr>
+        </p:nvSpPr>
+        <p:spPr>
+          <a:xfrm>
+            <a:off x="722313" y="3305176"/>
+            <a:ext cx="7772400" cy="1021556"/>
+          </a:xfrm>
+        </p:spPr>
+        <p:txBody>
+          <a:bodyPr/>
+          <a:lstStyle/>
+          <a:p>
+            <a:pPr lvl="0" indent="0" marL="0">
+              <a:buNone/>
+            </a:pPr>
+            <a:r>
+              <a:rPr/>
+              <a:t>Convolution: Hazard → Damages</a:t>
+            </a:r>
+          </a:p>
+        </p:txBody>
+      </p:sp>
+    </p:spTree>
+  </p:cSld>
+</p:sld>
+</file>
+
+<file path=ppt/slides/slide21.xml><?xml version="1.0" encoding="utf-8"?>
+<p:sld xmlns:a="http://schemas.openxmlformats.org/drawingml/2006/main" xmlns:r="http://schemas.openxmlformats.org/officeDocument/2006/relationships" xmlns:p="http://schemas.openxmlformats.org/presentationml/2006/main">
+  <p:cSld>
+    <p:spTree>
+      <p:nvGrpSpPr>
+        <p:cNvPr id="1" name=""/>
+        <p:cNvGrpSpPr/>
+        <p:nvPr/>
+      </p:nvGrpSpPr>
+      <p:grpSpPr>
+        <a:xfrm>
+          <a:off x="0" y="0"/>
+          <a:ext cx="0" cy="0"/>
+          <a:chOff x="0" y="0"/>
+          <a:chExt cx="0" cy="0"/>
+        </a:xfrm>
+      </p:grpSpPr>
+      <p:sp>
+        <p:nvSpPr>
+          <p:cNvPr id="2" name="Title 1"/>
+          <p:cNvSpPr>
+            <a:spLocks noGrp="1"/>
+          </p:cNvSpPr>
+          <p:nvPr>
+            <p:ph type="title"/>
+          </p:nvPr>
+        </p:nvSpPr>
+        <p:spPr/>
+        <p:txBody>
+          <a:bodyPr/>
+          <a:lstStyle/>
+          <a:p>
+            <a:pPr lvl="0" indent="0" marL="0">
+              <a:buNone/>
+            </a:pPr>
+            <a:r>
+              <a:rPr/>
+              <a:t>The Key Mathematical Idea</a:t>
+            </a:r>
+          </a:p>
+        </p:txBody>
+      </p:sp>
+      <mc:AlternateContent xmlns:mc="http://schemas.openxmlformats.org/markup-compatibility/2006">
+        <mc:Choice xmlns:a14="http://schemas.microsoft.com/office/drawing/2010/main" Requires="a14">
+          <p:sp>
+            <p:nvSpPr>
+              <p:cNvPr id="3" name="Content Placeholder 2"/>
+              <p:cNvSpPr>
+                <a:spLocks noGrp="1"/>
+              </p:cNvSpPr>
+              <p:nvPr>
+                <p:ph idx="1"/>
+              </p:nvPr>
+            </p:nvSpPr>
+            <p:spPr/>
+            <p:txBody>
+              <a:bodyPr/>
+              <a:lstStyle/>
+              <a:p>
+                <a:pPr lvl="0" indent="0" marL="0">
+                  <a:buNone/>
+                </a:pPr>
+                <a:r>
+                  <a:rPr/>
+                  <a:t>We have:</a:t>
+                </a:r>
+              </a:p>
+              <a:p>
+                <a:pPr lvl="0"/>
+                <a:r>
+                  <a:rPr/>
+                  <a:t>A </a:t>
+                </a:r>
+                <a:r>
+                  <a:rPr b="1"/>
+                  <a:t>hazard distribution</a:t>
+                </a:r>
+                <a:r>
+                  <a:rPr/>
+                  <a:t> </a:t>
+                </a:r>
+                <a14:m>
+                  <m:oMath xmlns:m="http://schemas.openxmlformats.org/officeDocument/2006/math">
+                    <m:r>
+                      <m:t>p</m:t>
+                    </m:r>
+                    <m:d>
+                      <m:dPr>
+                        <m:begChr m:val="("/>
+                        <m:sepChr m:val=""/>
+                        <m:endChr m:val=")"/>
+                        <m:grow/>
+                      </m:dPr>
+                      <m:e>
+                        <m:r>
+                          <m:t>h</m:t>
+                        </m:r>
+                      </m:e>
+                    </m:d>
+                  </m:oMath>
+                </a14:m>
+                <a:r>
+                  <a:rPr/>
+                  <a:t>: probability of each flood depth</a:t>
+                </a:r>
+              </a:p>
+              <a:p>
+                <a:pPr lvl="0"/>
+                <a:r>
+                  <a:rPr/>
+                  <a:t>A </a:t>
+                </a:r>
+                <a:r>
+                  <a:rPr b="1"/>
+                  <a:t>damage function</a:t>
+                </a:r>
+                <a:r>
+                  <a:rPr/>
+                  <a:t> </a:t>
+                </a:r>
+                <a14:m>
+                  <m:oMath xmlns:m="http://schemas.openxmlformats.org/officeDocument/2006/math">
+                    <m:r>
+                      <m:t>D</m:t>
+                    </m:r>
+                    <m:d>
+                      <m:dPr>
+                        <m:begChr m:val="("/>
+                        <m:sepChr m:val=""/>
+                        <m:endChr m:val=")"/>
+                        <m:grow/>
+                      </m:dPr>
+                      <m:e>
+                        <m:r>
+                          <m:t>h</m:t>
+                        </m:r>
+                      </m:e>
+                    </m:d>
+                  </m:oMath>
+                </a14:m>
+                <a:r>
+                  <a:rPr/>
+                  <a:t>: damage given flood depth</a:t>
+                </a:r>
+              </a:p>
+              <a:p>
+                <a:pPr lvl="0" indent="0" marL="0">
+                  <a:buNone/>
+                </a:pPr>
+                <a:r>
+                  <a:rPr/>
+                  <a:t>We want:</a:t>
+                </a:r>
+              </a:p>
+              <a:p>
+                <a:pPr lvl="0"/>
+                <a:r>
+                  <a:rPr/>
+                  <a:t>The </a:t>
+                </a:r>
+                <a:r>
+                  <a:rPr b="1"/>
+                  <a:t>damage distribution</a:t>
+                </a:r>
+                <a:r>
+                  <a:rPr/>
+                  <a:t> </a:t>
+                </a:r>
+                <a14:m>
+                  <m:oMath xmlns:m="http://schemas.openxmlformats.org/officeDocument/2006/math">
+                    <m:r>
+                      <m:t>p</m:t>
+                    </m:r>
+                    <m:d>
+                      <m:dPr>
+                        <m:begChr m:val="("/>
+                        <m:sepChr m:val=""/>
+                        <m:endChr m:val=")"/>
+                        <m:grow/>
+                      </m:dPr>
+                      <m:e>
+                        <m:r>
+                          <m:t>D</m:t>
+                        </m:r>
+                      </m:e>
+                    </m:d>
+                  </m:oMath>
+                </a14:m>
+                <a:r>
+                  <a:rPr/>
+                  <a:t>: probability of each damage level</a:t>
+                </a:r>
+              </a:p>
+              <a:p>
+                <a:pPr lvl="0" indent="0" marL="0">
+                  <a:buNone/>
+                </a:pPr>
+                <a:r>
+                  <a:rPr/>
+                  <a:t>This transformation is called </a:t>
+                </a:r>
+                <a:r>
+                  <a:rPr b="1"/>
+                  <a:t>convolution</a:t>
+                </a:r>
+                <a:r>
+                  <a:rPr/>
+                  <a:t>.</a:t>
+                </a:r>
+              </a:p>
+            </p:txBody>
+          </p:sp>
+        </mc:Choice>
+      </mc:AlternateContent>
+    </p:spTree>
+  </p:cSld>
+</p:sld>
+</file>
+
+<file path=ppt/slides/slide22.xml><?xml version="1.0" encoding="utf-8"?>
+<p:sld xmlns:a="http://schemas.openxmlformats.org/drawingml/2006/main" xmlns:r="http://schemas.openxmlformats.org/officeDocument/2006/relationships" xmlns:p="http://schemas.openxmlformats.org/presentationml/2006/main">
+  <p:cSld>
+    <p:spTree>
+      <p:nvGrpSpPr>
+        <p:cNvPr id="1" name=""/>
+        <p:cNvGrpSpPr/>
+        <p:nvPr/>
+      </p:nvGrpSpPr>
+      <p:grpSpPr>
+        <a:xfrm>
+          <a:off x="0" y="0"/>
+          <a:ext cx="0" cy="0"/>
+          <a:chOff x="0" y="0"/>
+          <a:chExt cx="0" cy="0"/>
+        </a:xfrm>
+      </p:grpSpPr>
+      <p:sp>
+        <p:nvSpPr>
+          <p:cNvPr id="2" name="Title 1"/>
+          <p:cNvSpPr>
+            <a:spLocks noGrp="1"/>
+          </p:cNvSpPr>
+          <p:nvPr>
+            <p:ph type="title"/>
+          </p:nvPr>
+        </p:nvSpPr>
+        <p:spPr/>
+        <p:txBody>
+          <a:bodyPr/>
+          <a:lstStyle/>
+          <a:p>
+            <a:pPr lvl="0" indent="0" marL="0">
+              <a:buNone/>
+            </a:pPr>
+            <a:r>
+              <a:rPr/>
+              <a:t>Convolution Illustrated</a:t>
+            </a:r>
+          </a:p>
+        </p:txBody>
+      </p:sp>
+    </p:spTree>
+  </p:cSld>
+</p:sld>
+</file>
+
+<file path=ppt/slides/slide23.xml><?xml version="1.0" encoding="utf-8"?>
+<p:sld xmlns:a="http://schemas.openxmlformats.org/drawingml/2006/main" xmlns:r="http://schemas.openxmlformats.org/officeDocument/2006/relationships" xmlns:p="http://schemas.openxmlformats.org/presentationml/2006/main">
+  <p:cSld>
+    <p:spTree>
+      <p:nvGrpSpPr>
+        <p:cNvPr id="1" name=""/>
+        <p:cNvGrpSpPr/>
+        <p:nvPr/>
+      </p:nvGrpSpPr>
+      <p:grpSpPr>
+        <a:xfrm>
+          <a:off x="0" y="0"/>
+          <a:ext cx="0" cy="0"/>
+          <a:chOff x="0" y="0"/>
+          <a:chExt cx="0" cy="0"/>
+        </a:xfrm>
+      </p:grpSpPr>
+      <p:sp>
+        <p:nvSpPr>
+          <p:cNvPr id="3" name="Content Placeholder 2"/>
+          <p:cNvSpPr>
+            <a:spLocks noGrp="1"/>
+          </p:cNvSpPr>
+          <p:nvPr>
+            <p:ph idx="1" sz="half"/>
+          </p:nvPr>
+        </p:nvSpPr>
+        <p:spPr/>
+        <p:txBody>
+          <a:bodyPr/>
+          <a:lstStyle/>
+          <a:p>
+            <a:pPr lvl="0" indent="0" marL="0">
+              <a:buNone/>
+            </a:pPr>
+            <a:r>
+              <a:rPr b="1"/>
+              <a:t>Hazard Distribution</a:t>
+            </a:r>
+          </a:p>
+          <a:p>
+            <a:pPr lvl="0"/>
+            <a:r>
+              <a:rPr/>
+              <a:t>50% chance: no flood (h=0)</a:t>
+            </a:r>
+          </a:p>
+          <a:p>
+            <a:pPr lvl="0"/>
+            <a:r>
+              <a:rPr/>
+              <a:t>30% chance: minor flood (h=2ft)</a:t>
+            </a:r>
+          </a:p>
+          <a:p>
+            <a:pPr lvl="0"/>
+            <a:r>
+              <a:rPr/>
+              <a:t>20% chance: major flood (h=6ft)</a:t>
+            </a:r>
+          </a:p>
+        </p:txBody>
+      </p:sp>
+      <p:sp>
+        <p:nvSpPr>
+          <p:cNvPr id="4" name="Content Placeholder 3"/>
+          <p:cNvSpPr>
+            <a:spLocks noGrp="1"/>
+          </p:cNvSpPr>
+          <p:nvPr>
+            <p:ph idx="2" sz="half"/>
+          </p:nvPr>
+        </p:nvSpPr>
+        <p:spPr/>
+        <p:txBody>
+          <a:bodyPr/>
+          <a:lstStyle/>
+          <a:p>
+            <a:pPr lvl="0" indent="0" marL="0">
+              <a:buNone/>
+            </a:pPr>
+            <a:r>
+              <a:rPr b="1"/>
+              <a:t>Damage Function</a:t>
+            </a:r>
+          </a:p>
+          <a:p>
+            <a:pPr lvl="0"/>
+            <a:r>
+              <a:rPr/>
+              <a:t>h=0 → $0 damage</a:t>
+            </a:r>
+          </a:p>
+          <a:p>
+            <a:pPr lvl="0"/>
+            <a:r>
+              <a:rPr/>
+              <a:t>h=2ft → $10,000 damage</a:t>
+            </a:r>
+          </a:p>
+          <a:p>
+            <a:pPr lvl="0"/>
+            <a:r>
+              <a:rPr/>
+              <a:t>h=6ft → $100,000 damage</a:t>
+            </a:r>
+          </a:p>
+        </p:txBody>
+      </p:sp>
+    </p:spTree>
+  </p:cSld>
+</p:sld>
+</file>
+
+<file path=ppt/slides/slide24.xml><?xml version="1.0" encoding="utf-8"?>
+<p:sld xmlns:a="http://schemas.openxmlformats.org/drawingml/2006/main" xmlns:r="http://schemas.openxmlformats.org/officeDocument/2006/relationships" xmlns:p="http://schemas.openxmlformats.org/presentationml/2006/main">
+  <p:cSld>
+    <p:spTree>
+      <p:nvGrpSpPr>
+        <p:cNvPr id="1" name=""/>
+        <p:cNvGrpSpPr/>
+        <p:nvPr/>
+      </p:nvGrpSpPr>
+      <p:grpSpPr>
+        <a:xfrm>
+          <a:off x="0" y="0"/>
+          <a:ext cx="0" cy="0"/>
+          <a:chOff x="0" y="0"/>
+          <a:chExt cx="0" cy="0"/>
+        </a:xfrm>
+      </p:grpSpPr>
+      <p:sp>
+        <p:nvSpPr>
+          <p:cNvPr id="3" name="Content Placeholder 2"/>
+          <p:cNvSpPr>
+            <a:spLocks noGrp="1"/>
+          </p:cNvSpPr>
+          <p:nvPr>
+            <p:ph idx="1"/>
+          </p:nvPr>
+        </p:nvSpPr>
+        <p:spPr/>
+        <p:txBody>
+          <a:bodyPr/>
+          <a:lstStyle/>
+          <a:p>
+            <a:pPr lvl="0" indent="0" marL="0">
+              <a:buNone/>
+            </a:pPr>
+            <a:r>
+              <a:rPr b="1"/>
+              <a:t>Damage Distribution:</a:t>
+            </a:r>
+          </a:p>
+          <a:p>
+            <a:pPr lvl="0"/>
+            <a:r>
+              <a:rPr/>
+              <a:t>50% chance: $0</a:t>
+            </a:r>
+          </a:p>
+          <a:p>
+            <a:pPr lvl="0"/>
+            <a:r>
+              <a:rPr/>
+              <a:t>30% chance: $10,000</a:t>
+            </a:r>
+          </a:p>
+          <a:p>
+            <a:pPr lvl="0"/>
+            <a:r>
+              <a:rPr/>
+              <a:t>20% chance: $100,000</a:t>
+            </a:r>
+          </a:p>
+          <a:p>
+            <a:pPr lvl="0" indent="0" marL="0">
+              <a:buNone/>
+            </a:pPr>
+            <a:r>
+              <a:rPr/>
+              <a:t>Expected damage = $0.5(0) + 0.3(10k) + 0.2(100k) = </a:t>
+            </a:r>
+            <a:r>
+              <a:rPr b="1"/>
+              <a:t>$23,000</a:t>
+            </a:r>
+          </a:p>
+        </p:txBody>
+      </p:sp>
+    </p:spTree>
+  </p:cSld>
+</p:sld>
+</file>
+
+<file path=ppt/slides/slide25.xml><?xml version="1.0" encoding="utf-8"?>
+<p:sld xmlns:a="http://schemas.openxmlformats.org/drawingml/2006/main" xmlns:r="http://schemas.openxmlformats.org/officeDocument/2006/relationships" xmlns:p="http://schemas.openxmlformats.org/presentationml/2006/main">
+  <p:cSld>
+    <p:spTree>
+      <p:nvGrpSpPr>
+        <p:cNvPr id="1" name=""/>
+        <p:cNvGrpSpPr/>
+        <p:nvPr/>
+      </p:nvGrpSpPr>
+      <p:grpSpPr>
+        <a:xfrm>
+          <a:off x="0" y="0"/>
+          <a:ext cx="0" cy="0"/>
+          <a:chOff x="0" y="0"/>
+          <a:chExt cx="0" cy="0"/>
+        </a:xfrm>
+      </p:grpSpPr>
+      <p:sp>
+        <p:nvSpPr>
+          <p:cNvPr id="2" name="Title 1"/>
+          <p:cNvSpPr>
+            <a:spLocks noGrp="1"/>
+          </p:cNvSpPr>
+          <p:nvPr>
+            <p:ph type="title"/>
+          </p:nvPr>
+        </p:nvSpPr>
+        <p:spPr/>
+        <p:txBody>
+          <a:bodyPr/>
+          <a:lstStyle/>
+          <a:p>
+            <a:pPr lvl="0" indent="0" marL="0">
+              <a:buNone/>
+            </a:pPr>
+            <a:r>
+              <a:rPr/>
+              <a:t>Jensen’s Inequality</a:t>
+            </a:r>
+          </a:p>
+        </p:txBody>
+      </p:sp>
+      <mc:AlternateContent xmlns:mc="http://schemas.openxmlformats.org/markup-compatibility/2006">
+        <mc:Choice xmlns:a14="http://schemas.microsoft.com/office/drawing/2010/main" Requires="a14">
+          <p:sp>
+            <p:nvSpPr>
+              <p:cNvPr id="3" name="Content Placeholder 2"/>
+              <p:cNvSpPr>
+                <a:spLocks noGrp="1"/>
+              </p:cNvSpPr>
+              <p:nvPr>
+                <p:ph idx="1"/>
+              </p:nvPr>
+            </p:nvSpPr>
+            <p:spPr/>
+            <p:txBody>
+              <a:bodyPr/>
+              <a:lstStyle/>
+              <a:p>
+                <a:pPr lvl="0" indent="0" marL="0">
+                  <a:buNone/>
+                </a:pPr>
+                <a:r>
+                  <a:rPr/>
+                  <a:t>For any nonlinear function </a:t>
+                </a:r>
+                <a14:m>
+                  <m:oMath xmlns:m="http://schemas.openxmlformats.org/officeDocument/2006/math">
+                    <m:r>
+                      <m:t>f</m:t>
+                    </m:r>
+                  </m:oMath>
+                </a14:m>
+                <a:r>
+                  <a:rPr/>
+                  <a:t>:</a:t>
+                </a:r>
+              </a:p>
+              <a:p>
+                <a:pPr lvl="0" indent="0" marL="0">
+                  <a:buNone/>
+                </a:pPr>
+                <a14:m>
+                  <m:oMathPara xmlns:m="http://schemas.openxmlformats.org/officeDocument/2006/math">
+                    <m:oMathParaPr>
+                      <m:jc m:val="center"/>
+                    </m:oMathParaPr>
+                    <m:oMath>
+                      <m:r>
+                        <m:t>E</m:t>
+                      </m:r>
+                      <m:d>
+                        <m:dPr>
+                          <m:begChr m:val="["/>
+                          <m:sepChr m:val=""/>
+                          <m:endChr m:val="]"/>
+                          <m:grow/>
+                        </m:dPr>
+                        <m:e>
+                          <m:r>
+                            <m:t>f</m:t>
+                          </m:r>
+                          <m:d>
+                            <m:dPr>
+                              <m:begChr m:val="("/>
+                              <m:sepChr m:val=""/>
+                              <m:endChr m:val=")"/>
+                              <m:grow/>
+                            </m:dPr>
+                            <m:e>
+                              <m:r>
+                                <m:t>x</m:t>
+                              </m:r>
+                            </m:e>
+                          </m:d>
+                        </m:e>
+                      </m:d>
+                      <m:r>
+                        <m:rPr>
+                          <m:sty m:val="p"/>
+                        </m:rPr>
+                        <m:t>≠</m:t>
+                      </m:r>
+                      <m:r>
+                        <m:t>f</m:t>
+                      </m:r>
+                      <m:d>
+                        <m:dPr>
+                          <m:begChr m:val="("/>
+                          <m:sepChr m:val=""/>
+                          <m:endChr m:val=")"/>
+                          <m:grow/>
+                        </m:dPr>
+                        <m:e>
+                          <m:r>
+                            <m:t>E</m:t>
+                          </m:r>
+                          <m:d>
+                            <m:dPr>
+                              <m:begChr m:val="["/>
+                              <m:sepChr m:val=""/>
+                              <m:endChr m:val="]"/>
+                              <m:grow/>
+                            </m:dPr>
+                            <m:e>
+                              <m:r>
+                                <m:t>x</m:t>
+                              </m:r>
+                            </m:e>
+                          </m:d>
+                        </m:e>
+                      </m:d>
+                    </m:oMath>
+                  </m:oMathPara>
+                </a14:m>
+              </a:p>
+              <a:p>
+                <a:pPr lvl="0" indent="0" marL="0">
+                  <a:buNone/>
+                </a:pPr>
+                <a:r>
+                  <a:rPr b="1"/>
+                  <a:t>This will be on assessments. Know it.</a:t>
+                </a:r>
+              </a:p>
+            </p:txBody>
+          </p:sp>
+        </mc:Choice>
+      </mc:AlternateContent>
+    </p:spTree>
+  </p:cSld>
+</p:sld>
+</file>
+
+<file path=ppt/slides/slide26.xml><?xml version="1.0" encoding="utf-8"?>
+<p:sld xmlns:a="http://schemas.openxmlformats.org/drawingml/2006/main" xmlns:r="http://schemas.openxmlformats.org/officeDocument/2006/relationships" xmlns:p="http://schemas.openxmlformats.org/presentationml/2006/main">
+  <p:cSld>
+    <p:spTree>
+      <p:nvGrpSpPr>
+        <p:cNvPr id="1" name=""/>
+        <p:cNvGrpSpPr/>
+        <p:nvPr/>
+      </p:nvGrpSpPr>
+      <p:grpSpPr>
+        <a:xfrm>
+          <a:off x="0" y="0"/>
+          <a:ext cx="0" cy="0"/>
+          <a:chOff x="0" y="0"/>
+          <a:chExt cx="0" cy="0"/>
+        </a:xfrm>
+      </p:grpSpPr>
+      <p:sp>
+        <p:nvSpPr>
+          <p:cNvPr id="2" name="Title 1"/>
+          <p:cNvSpPr>
+            <a:spLocks noGrp="1"/>
+          </p:cNvSpPr>
+          <p:nvPr>
+            <p:ph type="title"/>
+          </p:nvPr>
+        </p:nvSpPr>
+        <p:spPr/>
+        <p:txBody>
+          <a:bodyPr/>
+          <a:lstStyle/>
+          <a:p>
+            <a:pPr lvl="0" indent="0" marL="0">
+              <a:buNone/>
+            </a:pPr>
+            <a:r>
+              <a:rPr/>
+              <a:t>Jensen’s Inequality: Example</a:t>
+            </a:r>
+          </a:p>
+        </p:txBody>
+      </p:sp>
+    </p:spTree>
+  </p:cSld>
+</p:sld>
+</file>
+
+<file path=ppt/slides/slide27.xml><?xml version="1.0" encoding="utf-8"?>
+<p:sld xmlns:a="http://schemas.openxmlformats.org/drawingml/2006/main" xmlns:r="http://schemas.openxmlformats.org/officeDocument/2006/relationships" xmlns:p="http://schemas.openxmlformats.org/presentationml/2006/main">
+  <p:cSld>
+    <p:spTree>
+      <p:nvGrpSpPr>
+        <p:cNvPr id="1" name=""/>
+        <p:cNvGrpSpPr/>
+        <p:nvPr/>
+      </p:nvGrpSpPr>
+      <p:grpSpPr>
+        <a:xfrm>
+          <a:off x="0" y="0"/>
+          <a:ext cx="0" cy="0"/>
+          <a:chOff x="0" y="0"/>
+          <a:chExt cx="0" cy="0"/>
+        </a:xfrm>
+      </p:grpSpPr>
+      <mc:AlternateContent xmlns:mc="http://schemas.openxmlformats.org/markup-compatibility/2006">
+        <mc:Choice xmlns:a14="http://schemas.microsoft.com/office/drawing/2010/main" Requires="a14">
+          <p:sp>
+            <p:nvSpPr>
+              <p:cNvPr id="3" name="Content Placeholder 2"/>
+              <p:cNvSpPr>
+                <a:spLocks noGrp="1"/>
+              </p:cNvSpPr>
+              <p:nvPr>
+                <p:ph idx="1" sz="half"/>
+              </p:nvPr>
+            </p:nvSpPr>
+            <p:spPr/>
+            <p:txBody>
+              <a:bodyPr/>
+              <a:lstStyle/>
+              <a:p>
+                <a:pPr lvl="0" indent="0" marL="0">
+                  <a:buNone/>
+                </a:pPr>
+                <a:r>
+                  <a:rPr b="1"/>
+                  <a:t>Hazard:</a:t>
+                </a:r>
+              </a:p>
+              <a:p>
+                <a:pPr lvl="0"/>
+                <a:r>
+                  <a:rPr/>
+                  <a:t>50% chance: 2 ft flood</a:t>
+                </a:r>
+              </a:p>
+              <a:p>
+                <a:pPr lvl="0"/>
+                <a:r>
+                  <a:rPr/>
+                  <a:t>50% chance: 8 ft flood</a:t>
+                </a:r>
+              </a:p>
+              <a:p>
+                <a:pPr lvl="0"/>
+                <a14:m>
+                  <m:oMath xmlns:m="http://schemas.openxmlformats.org/officeDocument/2006/math">
+                    <m:r>
+                      <m:t>E</m:t>
+                    </m:r>
+                    <m:d>
+                      <m:dPr>
+                        <m:begChr m:val="["/>
+                        <m:sepChr m:val=""/>
+                        <m:endChr m:val="]"/>
+                        <m:grow/>
+                      </m:dPr>
+                      <m:e>
+                        <m:r>
+                          <m:t>h</m:t>
+                        </m:r>
+                      </m:e>
+                    </m:d>
+                    <m:r>
+                      <m:rPr>
+                        <m:sty m:val="p"/>
+                      </m:rPr>
+                      <m:t>=</m:t>
+                    </m:r>
+                    <m:r>
+                      <m:t>5</m:t>
+                    </m:r>
+                  </m:oMath>
+                </a14:m>
+                <a:r>
+                  <a:rPr/>
+                  <a:t> ft</a:t>
+                </a:r>
+              </a:p>
+            </p:txBody>
+          </p:sp>
+        </mc:Choice>
+      </mc:AlternateContent>
+      <mc:AlternateContent xmlns:mc="http://schemas.openxmlformats.org/markup-compatibility/2006">
+        <mc:Choice xmlns:a14="http://schemas.microsoft.com/office/drawing/2010/main" Requires="a14">
+          <p:sp>
+            <p:nvSpPr>
+              <p:cNvPr id="4" name="Content Placeholder 3"/>
+              <p:cNvSpPr>
+                <a:spLocks noGrp="1"/>
+              </p:cNvSpPr>
+              <p:nvPr>
+                <p:ph idx="2" sz="half"/>
+              </p:nvPr>
+            </p:nvSpPr>
+            <p:spPr/>
+            <p:txBody>
+              <a:bodyPr/>
+              <a:lstStyle/>
+              <a:p>
+                <a:pPr lvl="0" indent="0" marL="0">
+                  <a:buNone/>
+                </a:pPr>
+                <a:r>
+                  <a:rPr b="1"/>
+                  <a:t>Damage function:</a:t>
+                </a:r>
+              </a:p>
+              <a:p>
+                <a:pPr lvl="0"/>
+                <a14:m>
+                  <m:oMath xmlns:m="http://schemas.openxmlformats.org/officeDocument/2006/math">
+                    <m:r>
+                      <m:t>D</m:t>
+                    </m:r>
+                    <m:d>
+                      <m:dPr>
+                        <m:begChr m:val="("/>
+                        <m:sepChr m:val=""/>
+                        <m:endChr m:val=")"/>
+                        <m:grow/>
+                      </m:dPr>
+                      <m:e>
+                        <m:r>
+                          <m:t>2</m:t>
+                        </m:r>
+                      </m:e>
+                    </m:d>
+                    <m:r>
+                      <m:rPr>
+                        <m:sty m:val="p"/>
+                      </m:rPr>
+                      <m:t>=</m:t>
+                    </m:r>
+                    <m:r>
+                      <m:rPr>
+                        <m:sty m:val="p"/>
+                      </m:rPr>
+                      <m:t>$</m:t>
+                    </m:r>
+                    <m:r>
+                      <m:t>5</m:t>
+                    </m:r>
+                    <m:r>
+                      <m:rPr>
+                        <m:sty m:val="p"/>
+                      </m:rPr>
+                      <m:t>,</m:t>
+                    </m:r>
+                    <m:r>
+                      <m:t>000</m:t>
+                    </m:r>
+                  </m:oMath>
+                </a14:m>
+              </a:p>
+              <a:p>
+                <a:pPr lvl="0"/>
+                <a14:m>
+                  <m:oMath xmlns:m="http://schemas.openxmlformats.org/officeDocument/2006/math">
+                    <m:r>
+                      <m:t>D</m:t>
+                    </m:r>
+                    <m:d>
+                      <m:dPr>
+                        <m:begChr m:val="("/>
+                        <m:sepChr m:val=""/>
+                        <m:endChr m:val=")"/>
+                        <m:grow/>
+                      </m:dPr>
+                      <m:e>
+                        <m:r>
+                          <m:t>8</m:t>
+                        </m:r>
+                      </m:e>
+                    </m:d>
+                    <m:r>
+                      <m:rPr>
+                        <m:sty m:val="p"/>
+                      </m:rPr>
+                      <m:t>=</m:t>
+                    </m:r>
+                    <m:r>
+                      <m:rPr>
+                        <m:sty m:val="p"/>
+                      </m:rPr>
+                      <m:t>$</m:t>
+                    </m:r>
+                    <m:r>
+                      <m:t>90</m:t>
+                    </m:r>
+                    <m:r>
+                      <m:rPr>
+                        <m:sty m:val="p"/>
+                      </m:rPr>
+                      <m:t>,</m:t>
+                    </m:r>
+                    <m:r>
+                      <m:t>000</m:t>
+                    </m:r>
+                  </m:oMath>
+                </a14:m>
+              </a:p>
+              <a:p>
+                <a:pPr lvl="0"/>
+                <a14:m>
+                  <m:oMath xmlns:m="http://schemas.openxmlformats.org/officeDocument/2006/math">
+                    <m:r>
+                      <m:t>D</m:t>
+                    </m:r>
+                    <m:d>
+                      <m:dPr>
+                        <m:begChr m:val="("/>
+                        <m:sepChr m:val=""/>
+                        <m:endChr m:val=")"/>
+                        <m:grow/>
+                      </m:dPr>
+                      <m:e>
+                        <m:r>
+                          <m:t>5</m:t>
+                        </m:r>
+                      </m:e>
+                    </m:d>
+                    <m:r>
+                      <m:rPr>
+                        <m:sty m:val="p"/>
+                      </m:rPr>
+                      <m:t>=</m:t>
+                    </m:r>
+                    <m:r>
+                      <m:rPr>
+                        <m:sty m:val="p"/>
+                      </m:rPr>
+                      <m:t>$</m:t>
+                    </m:r>
+                    <m:r>
+                      <m:t>20</m:t>
+                    </m:r>
+                    <m:r>
+                      <m:rPr>
+                        <m:sty m:val="p"/>
+                      </m:rPr>
+                      <m:t>,</m:t>
+                    </m:r>
+                    <m:r>
+                      <m:t>000</m:t>
+                    </m:r>
+                  </m:oMath>
+                </a14:m>
+              </a:p>
+            </p:txBody>
+          </p:sp>
+        </mc:Choice>
+      </mc:AlternateContent>
+    </p:spTree>
+  </p:cSld>
+</p:sld>
+</file>
+
+<file path=ppt/slides/slide28.xml><?xml version="1.0" encoding="utf-8"?>
+<p:sld xmlns:a="http://schemas.openxmlformats.org/drawingml/2006/main" xmlns:r="http://schemas.openxmlformats.org/officeDocument/2006/relationships" xmlns:p="http://schemas.openxmlformats.org/presentationml/2006/main">
+  <p:cSld>
+    <p:spTree>
+      <p:nvGrpSpPr>
+        <p:cNvPr id="1" name=""/>
+        <p:cNvGrpSpPr/>
+        <p:nvPr/>
+      </p:nvGrpSpPr>
+      <p:grpSpPr>
+        <a:xfrm>
+          <a:off x="0" y="0"/>
+          <a:ext cx="0" cy="0"/>
+          <a:chOff x="0" y="0"/>
+          <a:chExt cx="0" cy="0"/>
+        </a:xfrm>
+      </p:grpSpPr>
+      <mc:AlternateContent xmlns:mc="http://schemas.openxmlformats.org/markup-compatibility/2006">
+        <mc:Choice xmlns:a14="http://schemas.microsoft.com/office/drawing/2010/main" Requires="a14">
+          <p:sp>
+            <p:nvSpPr>
+              <p:cNvPr id="3" name="Content Placeholder 2"/>
+              <p:cNvSpPr>
+                <a:spLocks noGrp="1"/>
+              </p:cNvSpPr>
+              <p:nvPr>
+                <p:ph idx="1"/>
+              </p:nvPr>
+            </p:nvSpPr>
+            <p:spPr/>
+            <p:txBody>
+              <a:bodyPr/>
+              <a:lstStyle/>
+              <a:p>
+                <a:pPr lvl="0" indent="0" marL="0">
+                  <a:buNone/>
+                </a:pPr>
+                <a14:m>
+                  <m:oMath xmlns:m="http://schemas.openxmlformats.org/officeDocument/2006/math">
+                    <m:r>
+                      <m:t>D</m:t>
+                    </m:r>
+                    <m:d>
+                      <m:dPr>
+                        <m:begChr m:val="("/>
+                        <m:sepChr m:val=""/>
+                        <m:endChr m:val=")"/>
+                        <m:grow/>
+                      </m:dPr>
+                      <m:e>
+                        <m:r>
+                          <m:t>E</m:t>
+                        </m:r>
+                        <m:d>
+                          <m:dPr>
+                            <m:begChr m:val="["/>
+                            <m:sepChr m:val=""/>
+                            <m:endChr m:val="]"/>
+                            <m:grow/>
+                          </m:dPr>
+                          <m:e>
+                            <m:r>
+                              <m:t>h</m:t>
+                            </m:r>
+                          </m:e>
+                        </m:d>
+                      </m:e>
+                    </m:d>
+                    <m:r>
+                      <m:rPr>
+                        <m:sty m:val="p"/>
+                      </m:rPr>
+                      <m:t>=</m:t>
+                    </m:r>
+                    <m:r>
+                      <m:t>D</m:t>
+                    </m:r>
+                    <m:d>
+                      <m:dPr>
+                        <m:begChr m:val="("/>
+                        <m:sepChr m:val=""/>
+                        <m:endChr m:val=")"/>
+                        <m:grow/>
+                      </m:dPr>
+                      <m:e>
+                        <m:r>
+                          <m:t>5</m:t>
+                        </m:r>
+                      </m:e>
+                    </m:d>
+                    <m:r>
+                      <m:rPr>
+                        <m:sty m:val="p"/>
+                      </m:rPr>
+                      <m:t>=</m:t>
+                    </m:r>
+                    <m:r>
+                      <m:rPr>
+                        <m:sty m:val="p"/>
+                      </m:rPr>
+                      <m:t>$</m:t>
+                    </m:r>
+                    <m:r>
+                      <m:t>20</m:t>
+                    </m:r>
+                    <m:r>
+                      <m:rPr>
+                        <m:sty m:val="p"/>
+                      </m:rPr>
+                      <m:t>,</m:t>
+                    </m:r>
+                    <m:r>
+                      <m:t>000</m:t>
+                    </m:r>
+                  </m:oMath>
+                </a14:m>
+              </a:p>
+              <a:p>
+                <a:pPr lvl="0" indent="0" marL="0">
+                  <a:buNone/>
+                </a:pPr>
+                <a14:m>
+                  <m:oMath xmlns:m="http://schemas.openxmlformats.org/officeDocument/2006/math">
+                    <m:r>
+                      <m:t>E</m:t>
+                    </m:r>
+                    <m:d>
+                      <m:dPr>
+                        <m:begChr m:val="["/>
+                        <m:sepChr m:val=""/>
+                        <m:endChr m:val="]"/>
+                        <m:grow/>
+                      </m:dPr>
+                      <m:e>
+                        <m:r>
+                          <m:t>D</m:t>
+                        </m:r>
+                        <m:d>
+                          <m:dPr>
+                            <m:begChr m:val="("/>
+                            <m:sepChr m:val=""/>
+                            <m:endChr m:val=")"/>
+                            <m:grow/>
+                          </m:dPr>
+                          <m:e>
+                            <m:r>
+                              <m:t>h</m:t>
+                            </m:r>
+                          </m:e>
+                        </m:d>
+                      </m:e>
+                    </m:d>
+                    <m:r>
+                      <m:rPr>
+                        <m:sty m:val="p"/>
+                      </m:rPr>
+                      <m:t>=</m:t>
+                    </m:r>
+                    <m:r>
+                      <m:t>0.5</m:t>
+                    </m:r>
+                    <m:d>
+                      <m:dPr>
+                        <m:begChr m:val="("/>
+                        <m:sepChr m:val=""/>
+                        <m:endChr m:val=")"/>
+                        <m:grow/>
+                      </m:dPr>
+                      <m:e>
+                        <m:r>
+                          <m:rPr>
+                            <m:sty m:val="p"/>
+                          </m:rPr>
+                          <m:t>$</m:t>
+                        </m:r>
+                        <m:r>
+                          <m:t>5</m:t>
+                        </m:r>
+                        <m:r>
+                          <m:t>k</m:t>
+                        </m:r>
+                      </m:e>
+                    </m:d>
+                    <m:r>
+                      <m:rPr>
+                        <m:sty m:val="p"/>
+                      </m:rPr>
+                      <m:t>+</m:t>
+                    </m:r>
+                    <m:r>
+                      <m:t>0.5</m:t>
+                    </m:r>
+                    <m:d>
+                      <m:dPr>
+                        <m:begChr m:val="("/>
+                        <m:sepChr m:val=""/>
+                        <m:endChr m:val=")"/>
+                        <m:grow/>
+                      </m:dPr>
+                      <m:e>
+                        <m:r>
+                          <m:rPr>
+                            <m:sty m:val="p"/>
+                          </m:rPr>
+                          <m:t>$</m:t>
+                        </m:r>
+                        <m:r>
+                          <m:t>90</m:t>
+                        </m:r>
+                        <m:r>
+                          <m:t>k</m:t>
+                        </m:r>
+                      </m:e>
+                    </m:d>
+                    <m:r>
+                      <m:rPr>
+                        <m:sty m:val="p"/>
+                      </m:rPr>
+                      <m:t>=</m:t>
+                    </m:r>
+                    <m:r>
+                      <m:rPr>
+                        <m:sty m:val="p"/>
+                      </m:rPr>
+                      <m:t>$</m:t>
+                    </m:r>
+                    <m:r>
+                      <m:t>47</m:t>
+                    </m:r>
+                    <m:r>
+                      <m:rPr>
+                        <m:sty m:val="p"/>
+                      </m:rPr>
+                      <m:t>,</m:t>
+                    </m:r>
+                    <m:r>
+                      <m:t>500</m:t>
+                    </m:r>
+                  </m:oMath>
+                </a14:m>
+              </a:p>
+              <a:p>
+                <a:pPr lvl="0" indent="0" marL="0">
+                  <a:buNone/>
+                </a:pPr>
+                <a:r>
+                  <a:rPr/>
+                  <a:t>The difference matters: </a:t>
+                </a:r>
+                <a:r>
+                  <a:rPr b="1"/>
+                  <a:t>$27,500 underestimate</a:t>
+                </a:r>
+                <a:r>
+                  <a:rPr/>
+                  <a:t>.</a:t>
+                </a:r>
+              </a:p>
+            </p:txBody>
+          </p:sp>
+        </mc:Choice>
+      </mc:AlternateContent>
+    </p:spTree>
+  </p:cSld>
+</p:sld>
+</file>
+
+<file path=ppt/slides/slide29.xml><?xml version="1.0" encoding="utf-8"?>
+<p:sld xmlns:a="http://schemas.openxmlformats.org/drawingml/2006/main" xmlns:r="http://schemas.openxmlformats.org/officeDocument/2006/relationships" xmlns:p="http://schemas.openxmlformats.org/presentationml/2006/main">
+  <p:cSld>
+    <p:spTree>
+      <p:nvGrpSpPr>
+        <p:cNvPr id="1" name=""/>
+        <p:cNvGrpSpPr/>
+        <p:nvPr/>
+      </p:nvGrpSpPr>
+      <p:grpSpPr>
+        <a:xfrm>
+          <a:off x="0" y="0"/>
+          <a:ext cx="0" cy="0"/>
+          <a:chOff x="0" y="0"/>
+          <a:chExt cx="0" cy="0"/>
+        </a:xfrm>
+      </p:grpSpPr>
+      <p:sp>
+        <p:nvSpPr>
+          <p:cNvPr id="2" name="Title 1"/>
+          <p:cNvSpPr>
+            <a:spLocks noGrp="1"/>
+          </p:cNvSpPr>
+          <p:nvPr>
+            <p:ph type="title"/>
+          </p:nvPr>
+        </p:nvSpPr>
+        <p:spPr/>
+        <p:txBody>
+          <a:bodyPr/>
+          <a:lstStyle/>
+          <a:p>
+            <a:pPr lvl="0" indent="0" marL="0">
+              <a:buNone/>
+            </a:pPr>
+            <a:r>
+              <a:rPr/>
+              <a:t>Why Monte Carlo?</a:t>
+            </a:r>
+          </a:p>
+        </p:txBody>
+      </p:sp>
+      <mc:AlternateContent xmlns:mc="http://schemas.openxmlformats.org/markup-compatibility/2006">
+        <mc:Choice xmlns:a14="http://schemas.microsoft.com/office/drawing/2010/main" Requires="a14">
+          <p:sp>
+            <p:nvSpPr>
+              <p:cNvPr id="3" name="Content Placeholder 2"/>
+              <p:cNvSpPr>
+                <a:spLocks noGrp="1"/>
+              </p:cNvSpPr>
+              <p:nvPr>
+                <p:ph idx="1"/>
+              </p:nvPr>
+            </p:nvSpPr>
+            <p:spPr/>
+            <p:txBody>
+              <a:bodyPr/>
+              <a:lstStyle/>
+              <a:p>
+                <a:pPr lvl="0" indent="0" marL="0">
+                  <a:buNone/>
+                </a:pPr>
+                <a:r>
+                  <a:rPr/>
+                  <a:t>For continuous distributions, expected damage is an integral:</a:t>
+                </a:r>
+              </a:p>
+              <a:p>
+                <a:pPr lvl="0" indent="0" marL="0">
+                  <a:buNone/>
+                </a:pPr>
+                <a14:m>
+                  <m:oMathPara xmlns:m="http://schemas.openxmlformats.org/officeDocument/2006/math">
+                    <m:oMathParaPr>
+                      <m:jc m:val="center"/>
+                    </m:oMathParaPr>
+                    <m:oMath>
+                      <m:r>
+                        <m:t>E</m:t>
+                      </m:r>
+                      <m:d>
+                        <m:dPr>
+                          <m:begChr m:val="["/>
+                          <m:sepChr m:val=""/>
+                          <m:endChr m:val="]"/>
+                          <m:grow/>
+                        </m:dPr>
+                        <m:e>
+                          <m:r>
+                            <m:t>D</m:t>
+                          </m:r>
+                        </m:e>
+                      </m:d>
+                      <m:r>
+                        <m:rPr>
+                          <m:sty m:val="p"/>
+                        </m:rPr>
+                        <m:t>=</m:t>
+                      </m:r>
+                      <m:r>
+                        <m:rPr>
+                          <m:sty m:val="p"/>
+                        </m:rPr>
+                        <m:t>∫</m:t>
+                      </m:r>
+                      <m:r>
+                        <m:t>D</m:t>
+                      </m:r>
+                      <m:d>
+                        <m:dPr>
+                          <m:begChr m:val="("/>
+                          <m:sepChr m:val=""/>
+                          <m:endChr m:val=")"/>
+                          <m:grow/>
+                        </m:dPr>
+                        <m:e>
+                          <m:r>
+                            <m:t>h</m:t>
+                          </m:r>
+                        </m:e>
+                      </m:d>
+                      <m:r>
+                        <m:rPr>
+                          <m:sty m:val="p"/>
+                        </m:rPr>
+                        <m:t>⋅</m:t>
+                      </m:r>
+                      <m:r>
+                        <m:t>p</m:t>
+                      </m:r>
+                      <m:d>
+                        <m:dPr>
+                          <m:begChr m:val="("/>
+                          <m:sepChr m:val=""/>
+                          <m:endChr m:val=")"/>
+                          <m:grow/>
+                        </m:dPr>
+                        <m:e>
+                          <m:r>
+                            <m:t>h</m:t>
+                          </m:r>
+                        </m:e>
+                      </m:d>
+                      <m:r>
+                        <m:t> </m:t>
+                      </m:r>
+                      <m:r>
+                        <m:t>d</m:t>
+                      </m:r>
+                      <m:r>
+                        <m:t>h</m:t>
+                      </m:r>
+                    </m:oMath>
+                  </m:oMathPara>
+                </a14:m>
+              </a:p>
+              <a:p>
+                <a:pPr lvl="0" indent="0" marL="0">
+                  <a:buNone/>
+                </a:pPr>
+                <a:r>
+                  <a:rPr/>
+                  <a:t>This integral is </a:t>
+                </a:r>
+                <a:r>
+                  <a:rPr b="1"/>
+                  <a:t>intractable</a:t>
+                </a:r>
+                <a:r>
+                  <a:rPr/>
+                  <a:t> for nontrivial damage functions or probability density functions.</a:t>
+                </a:r>
+              </a:p>
+              <a:p>
+                <a:pPr lvl="0" indent="0" marL="0">
+                  <a:buNone/>
+                </a:pPr>
+                <a:r>
+                  <a:rPr b="1"/>
+                  <a:t>Solution:</a:t>
+                </a:r>
+                <a:r>
+                  <a:rPr/>
+                  <a:t> Monte Carlo integration approximates it with samples.</a:t>
+                </a:r>
+              </a:p>
+            </p:txBody>
+          </p:sp>
+        </mc:Choice>
+      </mc:AlternateContent>
+    </p:spTree>
+  </p:cSld>
+</p:sld>
+</file>
+
+<file path=ppt/slides/slide3.xml><?xml version="1.0" encoding="utf-8"?>
+<p:sld xmlns:a="http://schemas.openxmlformats.org/drawingml/2006/main" xmlns:r="http://schemas.openxmlformats.org/officeDocument/2006/relationships" xmlns:p="http://schemas.openxmlformats.org/presentationml/2006/main">
+  <p:cSld>
+    <p:spTree>
+      <p:nvGrpSpPr>
+        <p:cNvPr id="1" name=""/>
+        <p:cNvGrpSpPr/>
+        <p:nvPr/>
+      </p:nvGrpSpPr>
+      <p:grpSpPr>
+        <a:xfrm>
+          <a:off x="0" y="0"/>
+          <a:ext cx="0" cy="0"/>
+          <a:chOff x="0" y="0"/>
+          <a:chExt cx="0" cy="0"/>
+        </a:xfrm>
+      </p:grpSpPr>
+      <p:sp>
+        <p:nvSpPr>
+          <p:cNvPr id="2" name="Title 1"/>
+          <p:cNvSpPr>
+            <a:spLocks noGrp="1"/>
+          </p:cNvSpPr>
+          <p:nvPr>
+            <p:ph type="title"/>
+          </p:nvPr>
+        </p:nvSpPr>
+        <p:spPr>
+          <a:xfrm>
+            <a:off x="457201" y="204787"/>
+            <a:ext cx="3008313" cy="871538"/>
+          </a:xfrm>
+        </p:spPr>
+        <p:txBody>
+          <a:bodyPr/>
+          <a:lstStyle/>
+          <a:p>
+            <a:pPr lvl="0" indent="0" marL="0">
+              <a:buNone/>
+            </a:pPr>
+            <a:r>
+              <a:rPr/>
+              <a:t>Quick Estimate</a:t>
+            </a:r>
+          </a:p>
+        </p:txBody>
+      </p:sp>
+      <p:sp>
+        <p:nvSpPr>
+          <p:cNvPr id="4" name="Text Placeholder 3"/>
+          <p:cNvSpPr>
+            <a:spLocks noGrp="1"/>
+          </p:cNvSpPr>
+          <p:nvPr>
+            <p:ph idx="2" sz="half" type="body"/>
+          </p:nvPr>
+        </p:nvSpPr>
+        <p:spPr/>
+        <p:txBody>
+          <a:bodyPr/>
+          <a:lstStyle/>
+          <a:p>
+            <a:pPr lvl="0" indent="0" marL="0">
+              <a:buNone/>
+            </a:pPr>
+            <a:r>
+              <a:rPr/>
+              <a:t>A house faces two possible flood scenarios this year:</a:t>
+            </a:r>
+          </a:p>
+        </p:txBody>
+      </p:sp>
+      <p:graphicFrame>
+        <p:nvGraphicFramePr>
+          <p:cNvPr id="6" name="Content Placeholder 5"/>
+          <p:cNvGraphicFramePr>
+            <a:graphicFrameLocks noGrp="1"/>
+          </p:cNvGraphicFramePr>
+          <p:nvPr>
+            <p:ph idx="1"/>
+          </p:nvPr>
+        </p:nvGraphicFramePr>
+        <p:xfrm>
+          <a:off x="3568700" y="203200"/>
+          <a:ext cx="5105400" cy="4381500"/>
+        </p:xfrm>
+        <a:graphic>
+          <a:graphicData uri="http://schemas.openxmlformats.org/drawingml/2006/table">
+            <a:tbl>
+              <a:tblPr firstRow="1" bandRow="1">
+                <a:tableStyleId>{5C22544A-7EE6-4342-B048-85BDC9FD1C3A}</a:tableStyleId>
+              </a:tblPr>
+              <a:tblGrid>
+                <a:gridCol w="1701800"/>
+                <a:gridCol w="1701800"/>
+                <a:gridCol w="1701800"/>
+              </a:tblGrid>
+              <a:tr h="0">
+                <a:tc>
+                  <a:txBody>
+                    <a:bodyPr/>
+                    <a:lstStyle/>
+                    <a:p>
+                      <a:pPr lvl="0" indent="0" marL="0">
+                        <a:buNone/>
+                      </a:pPr>
+                      <a:r>
+                        <a:rPr/>
+                        <a:t>Scenario</a:t>
+                      </a:r>
+                    </a:p>
+                  </a:txBody>
+                  <a:tcPr/>
+                </a:tc>
+                <a:tc>
+                  <a:txBody>
+                    <a:bodyPr/>
+                    <a:lstStyle/>
+                    <a:p>
+                      <a:pPr lvl="0" indent="0" marL="0">
+                        <a:buNone/>
+                      </a:pPr>
+                      <a:r>
+                        <a:rPr/>
+                        <a:t>Probability</a:t>
+                      </a:r>
+                    </a:p>
+                  </a:txBody>
+                  <a:tcPr/>
+                </a:tc>
+                <a:tc>
+                  <a:txBody>
+                    <a:bodyPr/>
+                    <a:lstStyle/>
+                    <a:p>
+                      <a:pPr lvl="0" indent="0" marL="0">
+                        <a:buNone/>
+                      </a:pPr>
+                      <a:r>
+                        <a:rPr/>
+                        <a:t>Damage</a:t>
+                      </a:r>
+                    </a:p>
+                  </a:txBody>
+                  <a:tcPr/>
+                </a:tc>
+              </a:tr>
+              <a:tr h="0">
+                <a:tc>
+                  <a:txBody>
+                    <a:bodyPr/>
+                    <a:lstStyle/>
+                    <a:p>
+                      <a:pPr lvl="0" indent="0" marL="0">
+                        <a:buNone/>
+                      </a:pPr>
+                      <a:r>
+                        <a:rPr/>
+                        <a:t>No flood</a:t>
+                      </a:r>
+                    </a:p>
+                  </a:txBody>
+                </a:tc>
+                <a:tc>
+                  <a:txBody>
+                    <a:bodyPr/>
+                    <a:lstStyle/>
+                    <a:p>
+                      <a:pPr lvl="0" indent="0" marL="0">
+                        <a:buNone/>
+                      </a:pPr>
+                      <a:r>
+                        <a:rPr/>
+                        <a:t>80%</a:t>
+                      </a:r>
+                    </a:p>
+                  </a:txBody>
+                </a:tc>
+                <a:tc>
+                  <a:txBody>
+                    <a:bodyPr/>
+                    <a:lstStyle/>
+                    <a:p>
+                      <a:pPr lvl="0" indent="0" marL="0">
+                        <a:buNone/>
+                      </a:pPr>
+                      <a:r>
+                        <a:rPr/>
+                        <a:t>$0</a:t>
+                      </a:r>
+                    </a:p>
+                  </a:txBody>
+                </a:tc>
+              </a:tr>
+              <a:tr h="0">
+                <a:tc>
+                  <a:txBody>
+                    <a:bodyPr/>
+                    <a:lstStyle/>
+                    <a:p>
+                      <a:pPr lvl="0" indent="0" marL="0">
+                        <a:buNone/>
+                      </a:pPr>
+                      <a:r>
+                        <a:rPr/>
+                        <a:t>3 ft flood</a:t>
+                      </a:r>
+                    </a:p>
+                  </a:txBody>
+                </a:tc>
+                <a:tc>
+                  <a:txBody>
+                    <a:bodyPr/>
+                    <a:lstStyle/>
+                    <a:p>
+                      <a:pPr lvl="0" indent="0" marL="0">
+                        <a:buNone/>
+                      </a:pPr>
+                      <a:r>
+                        <a:rPr/>
+                        <a:t>20%</a:t>
+                      </a:r>
+                    </a:p>
+                  </a:txBody>
+                </a:tc>
+                <a:tc>
+                  <a:txBody>
+                    <a:bodyPr/>
+                    <a:lstStyle/>
+                    <a:p>
+                      <a:pPr lvl="0" indent="0" marL="0">
+                        <a:buNone/>
+                      </a:pPr>
+                      <a:r>
+                        <a:rPr/>
+                        <a:t>$50,000</a:t>
+                      </a:r>
+                    </a:p>
+                  </a:txBody>
+                </a:tc>
+              </a:tr>
+            </a:tbl>
+          </a:graphicData>
+        </a:graphic>
+      </p:graphicFrame>
+    </p:spTree>
+  </p:cSld>
+</p:sld>
+</file>
+
+<file path=ppt/slides/slide30.xml><?xml version="1.0" encoding="utf-8"?>
+<p:sld xmlns:a="http://schemas.openxmlformats.org/drawingml/2006/main" xmlns:r="http://schemas.openxmlformats.org/officeDocument/2006/relationships" xmlns:p="http://schemas.openxmlformats.org/presentationml/2006/main">
+  <p:cSld>
+    <p:spTree>
+      <p:nvGrpSpPr>
+        <p:cNvPr id="1" name=""/>
+        <p:cNvGrpSpPr/>
+        <p:nvPr/>
+      </p:nvGrpSpPr>
+      <p:grpSpPr>
+        <a:xfrm>
+          <a:off x="0" y="0"/>
+          <a:ext cx="0" cy="0"/>
+          <a:chOff x="0" y="0"/>
+          <a:chExt cx="0" cy="0"/>
+        </a:xfrm>
+      </p:grpSpPr>
+      <p:sp>
+        <p:nvSpPr>
+          <p:cNvPr id="2" name="Title 1"/>
+          <p:cNvSpPr>
+            <a:spLocks noGrp="1"/>
+          </p:cNvSpPr>
+          <p:nvPr>
+            <p:ph type="title"/>
+          </p:nvPr>
+        </p:nvSpPr>
+        <p:spPr/>
+        <p:txBody>
+          <a:bodyPr/>
+          <a:lstStyle/>
+          <a:p>
+            <a:pPr lvl="0" indent="0" marL="0">
+              <a:buNone/>
+            </a:pPr>
+            <a:r>
+              <a:rPr/>
+              <a:t>The Law of Large Numbers</a:t>
+            </a:r>
+          </a:p>
+        </p:txBody>
+      </p:sp>
+      <mc:AlternateContent xmlns:mc="http://schemas.openxmlformats.org/markup-compatibility/2006">
+        <mc:Choice xmlns:a14="http://schemas.microsoft.com/office/drawing/2010/main" Requires="a14">
+          <p:sp>
+            <p:nvSpPr>
+              <p:cNvPr id="3" name="Content Placeholder 2"/>
+              <p:cNvSpPr>
+                <a:spLocks noGrp="1"/>
+              </p:cNvSpPr>
+              <p:nvPr>
+                <p:ph idx="1"/>
+              </p:nvPr>
+            </p:nvSpPr>
+            <p:spPr/>
+            <p:txBody>
+              <a:bodyPr/>
+              <a:lstStyle/>
+              <a:p>
+                <a:pPr lvl="0" indent="0" marL="0">
+                  <a:buNone/>
+                </a:pPr>
+                <a:r>
+                  <a:rPr/>
+                  <a:t>If we draw </a:t>
+                </a:r>
+                <a14:m>
+                  <m:oMath xmlns:m="http://schemas.openxmlformats.org/officeDocument/2006/math">
+                    <m:r>
+                      <m:t>N</m:t>
+                    </m:r>
+                  </m:oMath>
+                </a14:m>
+                <a:r>
+                  <a:rPr/>
+                  <a:t> samples </a:t>
+                </a:r>
+                <a14:m>
+                  <m:oMath xmlns:m="http://schemas.openxmlformats.org/officeDocument/2006/math">
+                    <m:sSub>
+                      <m:e>
+                        <m:r>
+                          <m:t>h</m:t>
+                        </m:r>
+                      </m:e>
+                      <m:sub>
+                        <m:r>
+                          <m:t>1</m:t>
+                        </m:r>
+                      </m:sub>
+                    </m:sSub>
+                    <m:r>
+                      <m:rPr>
+                        <m:sty m:val="p"/>
+                      </m:rPr>
+                      <m:t>,</m:t>
+                    </m:r>
+                    <m:sSub>
+                      <m:e>
+                        <m:r>
+                          <m:t>h</m:t>
+                        </m:r>
+                      </m:e>
+                      <m:sub>
+                        <m:r>
+                          <m:t>2</m:t>
+                        </m:r>
+                      </m:sub>
+                    </m:sSub>
+                    <m:r>
+                      <m:rPr>
+                        <m:sty m:val="p"/>
+                      </m:rPr>
+                      <m:t>,</m:t>
+                    </m:r>
+                    <m:r>
+                      <m:rPr>
+                        <m:sty m:val="p"/>
+                      </m:rPr>
+                      <m:t>…</m:t>
+                    </m:r>
+                    <m:r>
+                      <m:rPr>
+                        <m:sty m:val="p"/>
+                      </m:rPr>
+                      <m:t>,</m:t>
+                    </m:r>
+                    <m:sSub>
+                      <m:e>
+                        <m:r>
+                          <m:t>h</m:t>
+                        </m:r>
+                      </m:e>
+                      <m:sub>
+                        <m:r>
+                          <m:t>N</m:t>
+                        </m:r>
+                      </m:sub>
+                    </m:sSub>
+                  </m:oMath>
+                </a14:m>
+                <a:r>
+                  <a:rPr/>
+                  <a:t> from </a:t>
+                </a:r>
+                <a14:m>
+                  <m:oMath xmlns:m="http://schemas.openxmlformats.org/officeDocument/2006/math">
+                    <m:r>
+                      <m:t>p</m:t>
+                    </m:r>
+                    <m:d>
+                      <m:dPr>
+                        <m:begChr m:val="("/>
+                        <m:sepChr m:val=""/>
+                        <m:endChr m:val=")"/>
+                        <m:grow/>
+                      </m:dPr>
+                      <m:e>
+                        <m:r>
+                          <m:t>h</m:t>
+                        </m:r>
+                      </m:e>
+                    </m:d>
+                  </m:oMath>
+                </a14:m>
+                <a:r>
+                  <a:rPr/>
+                  <a:t>:</a:t>
+                </a:r>
+              </a:p>
+              <a:p>
+                <a:pPr lvl="0" indent="0" marL="0">
+                  <a:buNone/>
+                </a:pPr>
+                <a14:m>
+                  <m:oMathPara xmlns:m="http://schemas.openxmlformats.org/officeDocument/2006/math">
+                    <m:oMathParaPr>
+                      <m:jc m:val="center"/>
+                    </m:oMathParaPr>
+                    <m:oMath>
+                      <m:f>
+                        <m:fPr>
+                          <m:type m:val="bar"/>
+                        </m:fPr>
+                        <m:num>
+                          <m:r>
+                            <m:t>1</m:t>
+                          </m:r>
+                        </m:num>
+                        <m:den>
+                          <m:r>
+                            <m:t>N</m:t>
+                          </m:r>
+                        </m:den>
+                      </m:f>
+                      <m:nary>
+                        <m:naryPr>
+                          <m:chr m:val="∑"/>
+                          <m:limLoc m:val="undOvr"/>
+                          <m:subHide m:val="off"/>
+                          <m:supHide m:val="off"/>
+                        </m:naryPr>
+                        <m:sub>
+                          <m:r>
+                            <m:t>i</m:t>
+                          </m:r>
+                          <m:r>
+                            <m:rPr>
+                              <m:sty m:val="p"/>
+                            </m:rPr>
+                            <m:t>=</m:t>
+                          </m:r>
+                          <m:r>
+                            <m:t>1</m:t>
+                          </m:r>
+                        </m:sub>
+                        <m:sup>
+                          <m:r>
+                            <m:t>N</m:t>
+                          </m:r>
+                        </m:sup>
+                        <m:e>
+                          <m:r>
+                            <m:t>D</m:t>
+                          </m:r>
+                        </m:e>
+                      </m:nary>
+                      <m:d>
+                        <m:dPr>
+                          <m:begChr m:val="("/>
+                          <m:sepChr m:val=""/>
+                          <m:endChr m:val=")"/>
+                          <m:grow/>
+                        </m:dPr>
+                        <m:e>
+                          <m:sSub>
+                            <m:e>
+                              <m:r>
+                                <m:t>h</m:t>
+                              </m:r>
+                            </m:e>
+                            <m:sub>
+                              <m:r>
+                                <m:t>i</m:t>
+                              </m:r>
+                            </m:sub>
+                          </m:sSub>
+                        </m:e>
+                      </m:d>
+                      <m:limUpp>
+                        <m:e>
+                          <m:r>
+                            <m:rPr>
+                              <m:sty m:val="p"/>
+                            </m:rPr>
+                            <m:t>→</m:t>
+                          </m:r>
+                        </m:e>
+                        <m:lim>
+                          <m:r>
+                            <m:t>N</m:t>
+                          </m:r>
+                          <m:r>
+                            <m:rPr>
+                              <m:sty m:val="p"/>
+                            </m:rPr>
+                            <m:t>→</m:t>
+                          </m:r>
+                          <m:r>
+                            <m:rPr>
+                              <m:sty m:val="p"/>
+                            </m:rPr>
+                            <m:t>∞</m:t>
+                          </m:r>
+                        </m:lim>
+                      </m:limUpp>
+                      <m:r>
+                        <m:t>E</m:t>
+                      </m:r>
+                      <m:d>
+                        <m:dPr>
+                          <m:begChr m:val="["/>
+                          <m:sepChr m:val=""/>
+                          <m:endChr m:val="]"/>
+                          <m:grow/>
+                        </m:dPr>
+                        <m:e>
+                          <m:r>
+                            <m:t>D</m:t>
+                          </m:r>
+                        </m:e>
+                      </m:d>
+                    </m:oMath>
+                  </m:oMathPara>
+                </a14:m>
+              </a:p>
+              <a:p>
+                <a:pPr lvl="0" indent="0" marL="0">
+                  <a:buNone/>
+                </a:pPr>
+                <a:r>
+                  <a:rPr b="1"/>
+                  <a:t>The sample average converges to the true expected value.</a:t>
+                </a:r>
+              </a:p>
+              <a:p>
+                <a:pPr lvl="0" indent="0" marL="0">
+                  <a:buNone/>
+                </a:pPr>
+                <a:r>
+                  <a:rPr/>
+                  <a:t>More samples → better approximation</a:t>
+                </a:r>
+              </a:p>
+            </p:txBody>
+          </p:sp>
+        </mc:Choice>
+      </mc:AlternateContent>
+    </p:spTree>
+  </p:cSld>
+</p:sld>
+</file>
+
+<file path=ppt/slides/slide31.xml><?xml version="1.0" encoding="utf-8"?>
+<p:sld xmlns:a="http://schemas.openxmlformats.org/drawingml/2006/main" xmlns:r="http://schemas.openxmlformats.org/officeDocument/2006/relationships" xmlns:p="http://schemas.openxmlformats.org/presentationml/2006/main">
+  <p:cSld>
+    <p:spTree>
+      <p:nvGrpSpPr>
+        <p:cNvPr id="1" name=""/>
+        <p:cNvGrpSpPr/>
+        <p:nvPr/>
+      </p:nvGrpSpPr>
+      <p:grpSpPr>
+        <a:xfrm>
+          <a:off x="0" y="0"/>
+          <a:ext cx="0" cy="0"/>
+          <a:chOff x="0" y="0"/>
+          <a:chExt cx="0" cy="0"/>
+        </a:xfrm>
+      </p:grpSpPr>
+      <p:sp>
+        <p:nvSpPr>
+          <p:cNvPr id="2" name="Title 1"/>
+          <p:cNvSpPr>
+            <a:spLocks noGrp="1"/>
+          </p:cNvSpPr>
+          <p:nvPr>
+            <p:ph type="title"/>
+          </p:nvPr>
+        </p:nvSpPr>
+        <p:spPr/>
+        <p:txBody>
+          <a:bodyPr/>
+          <a:lstStyle/>
+          <a:p>
+            <a:pPr lvl="0" indent="0" marL="0">
+              <a:buNone/>
+            </a:pPr>
+            <a:r>
+              <a:rPr/>
+              <a:t>Monte Carlo Recipe</a:t>
+            </a:r>
+          </a:p>
+        </p:txBody>
+      </p:sp>
+      <mc:AlternateContent xmlns:mc="http://schemas.openxmlformats.org/markup-compatibility/2006">
+        <mc:Choice xmlns:a14="http://schemas.microsoft.com/office/drawing/2010/main" Requires="a14">
+          <p:sp>
+            <p:nvSpPr>
+              <p:cNvPr id="3" name="Content Placeholder 2"/>
+              <p:cNvSpPr>
+                <a:spLocks noGrp="1"/>
+              </p:cNvSpPr>
+              <p:nvPr>
+                <p:ph idx="1"/>
+              </p:nvPr>
+            </p:nvSpPr>
+            <p:spPr/>
+            <p:txBody>
+              <a:bodyPr/>
+              <a:lstStyle/>
+              <a:p>
+                <a:pPr lvl="0" indent="-342900" marL="342900">
+                  <a:buAutoNum type="arabicPeriod"/>
+                </a:pPr>
+                <a:r>
+                  <a:rPr b="1"/>
+                  <a:t>Sample</a:t>
+                </a:r>
+                <a:r>
+                  <a:rPr/>
+                  <a:t> </a:t>
+                </a:r>
+                <a14:m>
+                  <m:oMath xmlns:m="http://schemas.openxmlformats.org/officeDocument/2006/math">
+                    <m:r>
+                      <m:t>N</m:t>
+                    </m:r>
+                  </m:oMath>
+                </a14:m>
+                <a:r>
+                  <a:rPr/>
+                  <a:t> flood scenarios from hazard distribution</a:t>
+                </a:r>
+              </a:p>
+              <a:p>
+                <a:pPr lvl="0" indent="-342900" marL="342900">
+                  <a:buAutoNum type="arabicPeriod"/>
+                </a:pPr>
+                <a:r>
+                  <a:rPr b="1"/>
+                  <a:t>Apply</a:t>
+                </a:r>
+                <a:r>
+                  <a:rPr/>
+                  <a:t> damage function: compute </a:t>
+                </a:r>
+                <a14:m>
+                  <m:oMath xmlns:m="http://schemas.openxmlformats.org/officeDocument/2006/math">
+                    <m:r>
+                      <m:t>D</m:t>
+                    </m:r>
+                    <m:d>
+                      <m:dPr>
+                        <m:begChr m:val="("/>
+                        <m:sepChr m:val=""/>
+                        <m:endChr m:val=")"/>
+                        <m:grow/>
+                      </m:dPr>
+                      <m:e>
+                        <m:sSub>
+                          <m:e>
+                            <m:r>
+                              <m:t>h</m:t>
+                            </m:r>
+                          </m:e>
+                          <m:sub>
+                            <m:r>
+                              <m:t>i</m:t>
+                            </m:r>
+                          </m:sub>
+                        </m:sSub>
+                      </m:e>
+                    </m:d>
+                  </m:oMath>
+                </a14:m>
+                <a:r>
+                  <a:rPr/>
+                  <a:t> for each</a:t>
+                </a:r>
+              </a:p>
+              <a:p>
+                <a:pPr lvl="0" indent="-342900" marL="342900">
+                  <a:buAutoNum type="arabicPeriod"/>
+                </a:pPr>
+                <a:r>
+                  <a:rPr b="1"/>
+                  <a:t>Summarize</a:t>
+                </a:r>
+                <a:r>
+                  <a:rPr/>
+                  <a:t> the damage samples</a:t>
+                </a:r>
+              </a:p>
+              <a:p>
+                <a:pPr lvl="0" indent="0" marL="0">
+                  <a:buNone/>
+                </a:pPr>
+                <a:r>
+                  <a:rPr/>
+                  <a:t>Once we have samples, we can compute </a:t>
+                </a:r>
+                <a:r>
+                  <a:rPr b="1"/>
+                  <a:t>any statistic</a:t>
+                </a:r>
+                <a:r>
+                  <a:rPr/>
+                  <a:t>:</a:t>
+                </a:r>
+              </a:p>
+              <a:p>
+                <a:pPr lvl="0"/>
+                <a:r>
+                  <a:rPr/>
+                  <a:t>Mean (expected annual damage)</a:t>
+                </a:r>
+              </a:p>
+              <a:p>
+                <a:pPr lvl="0"/>
+                <a:r>
+                  <a:rPr/>
+                  <a:t>Variance (how much does damage vary year-to-year?)</a:t>
+                </a:r>
+              </a:p>
+              <a:p>
+                <a:pPr lvl="0"/>
+                <a:r>
+                  <a:rPr/>
+                  <a:t>Quantiles (what’s the 99th percentile damage?)</a:t>
+                </a:r>
+              </a:p>
+              <a:p>
+                <a:pPr lvl="0" indent="0" marL="0">
+                  <a:buNone/>
+                </a:pPr>
+                <a:r>
+                  <a:rPr/>
+                  <a:t>This is exactly what you’ll implement on Friday.</a:t>
+                </a:r>
+              </a:p>
+            </p:txBody>
+          </p:sp>
+        </mc:Choice>
+      </mc:AlternateContent>
+    </p:spTree>
+  </p:cSld>
+</p:sld>
+</file>
+
+<file path=ppt/slides/slide32.xml><?xml version="1.0" encoding="utf-8"?>
+<p:sld xmlns:a="http://schemas.openxmlformats.org/drawingml/2006/main" xmlns:r="http://schemas.openxmlformats.org/officeDocument/2006/relationships" xmlns:p="http://schemas.openxmlformats.org/presentationml/2006/main">
+  <p:cSld>
+    <p:spTree>
+      <p:nvGrpSpPr>
+        <p:cNvPr id="1" name=""/>
+        <p:cNvGrpSpPr/>
+        <p:nvPr/>
+      </p:nvGrpSpPr>
+      <p:grpSpPr>
+        <a:xfrm>
+          <a:off x="0" y="0"/>
+          <a:ext cx="0" cy="0"/>
+          <a:chOff x="0" y="0"/>
+          <a:chExt cx="0" cy="0"/>
+        </a:xfrm>
+      </p:grpSpPr>
+      <p:sp>
+        <p:nvSpPr>
+          <p:cNvPr id="2" name="Title 1"/>
+          <p:cNvSpPr>
+            <a:spLocks noGrp="1"/>
+          </p:cNvSpPr>
+          <p:nvPr>
+            <p:ph type="title"/>
+          </p:nvPr>
+        </p:nvSpPr>
+        <p:spPr>
+          <a:xfrm>
+            <a:off x="722313" y="3305176"/>
+            <a:ext cx="7772400" cy="1021556"/>
+          </a:xfrm>
+        </p:spPr>
+        <p:txBody>
+          <a:bodyPr/>
+          <a:lstStyle/>
+          <a:p>
+            <a:pPr lvl="0" indent="0" marL="0">
+              <a:buNone/>
+            </a:pPr>
+            <a:r>
+              <a:rPr/>
+              <a:t>Extreme Value Theory</a:t>
+            </a:r>
+          </a:p>
+        </p:txBody>
+      </p:sp>
+    </p:spTree>
+  </p:cSld>
+</p:sld>
+</file>
+
+<file path=ppt/slides/slide33.xml><?xml version="1.0" encoding="utf-8"?>
+<p:sld xmlns:a="http://schemas.openxmlformats.org/drawingml/2006/main" xmlns:r="http://schemas.openxmlformats.org/officeDocument/2006/relationships" xmlns:p="http://schemas.openxmlformats.org/presentationml/2006/main">
+  <p:cSld>
+    <p:spTree>
+      <p:nvGrpSpPr>
+        <p:cNvPr id="1" name=""/>
+        <p:cNvGrpSpPr/>
+        <p:nvPr/>
+      </p:nvGrpSpPr>
+      <p:grpSpPr>
+        <a:xfrm>
+          <a:off x="0" y="0"/>
+          <a:ext cx="0" cy="0"/>
+          <a:chOff x="0" y="0"/>
+          <a:chExt cx="0" cy="0"/>
+        </a:xfrm>
+      </p:grpSpPr>
+      <p:sp>
+        <p:nvSpPr>
+          <p:cNvPr id="2" name="Title 1"/>
+          <p:cNvSpPr>
+            <a:spLocks noGrp="1"/>
+          </p:cNvSpPr>
+          <p:nvPr>
+            <p:ph type="title"/>
+          </p:nvPr>
+        </p:nvSpPr>
+        <p:spPr/>
+        <p:txBody>
+          <a:bodyPr/>
+          <a:lstStyle/>
+          <a:p>
+            <a:pPr lvl="0" indent="0" marL="0">
+              <a:buNone/>
+            </a:pPr>
+            <a:r>
+              <a:rPr/>
+              <a:t>Why Extremes Matter</a:t>
+            </a:r>
+          </a:p>
+        </p:txBody>
+      </p:sp>
+      <p:sp>
+        <p:nvSpPr>
+          <p:cNvPr id="3" name="Content Placeholder 2"/>
+          <p:cNvSpPr>
+            <a:spLocks noGrp="1"/>
+          </p:cNvSpPr>
+          <p:nvPr>
+            <p:ph idx="1"/>
+          </p:nvPr>
+        </p:nvSpPr>
+        <p:spPr/>
+        <p:txBody>
+          <a:bodyPr/>
+          <a:lstStyle/>
+          <a:p>
+            <a:pPr lvl="0" indent="0" marL="0">
+              <a:buNone/>
+            </a:pPr>
+            <a:r>
+              <a:rPr/>
+              <a:t>Most flood damage comes from </a:t>
+            </a:r>
+            <a:r>
+              <a:rPr b="1"/>
+              <a:t>rare, extreme events</a:t>
+            </a:r>
+            <a:r>
+              <a:rPr/>
+              <a:t>.</a:t>
+            </a:r>
+          </a:p>
+          <a:p>
+            <a:pPr lvl="0" indent="0" marL="0">
+              <a:buNone/>
+            </a:pPr>
+            <a:r>
+              <a:rPr/>
+              <a:t>The problem: Normal distributions </a:t>
+            </a:r>
+            <a:r>
+              <a:rPr b="1"/>
+              <a:t>underestimate extreme risks</a:t>
+            </a:r>
+            <a:r>
+              <a:rPr/>
+              <a:t>.</a:t>
+            </a:r>
+          </a:p>
+          <a:p>
+            <a:pPr lvl="0" indent="0" marL="0">
+              <a:buNone/>
+            </a:pPr>
+            <a:r>
+              <a:rPr/>
+              <a:t>We need specialized tools for modeling the </a:t>
+            </a:r>
+            <a:r>
+              <a:rPr b="1"/>
+              <a:t>tails</a:t>
+            </a:r>
+            <a:r>
+              <a:rPr/>
+              <a:t> of distributions.</a:t>
+            </a:r>
+          </a:p>
+        </p:txBody>
+      </p:sp>
+    </p:spTree>
+  </p:cSld>
+</p:sld>
+</file>
+
+<file path=ppt/slides/slide34.xml><?xml version="1.0" encoding="utf-8"?>
 <p:sld xmlns:a="http://schemas.openxmlformats.org/drawingml/2006/main" xmlns:r="http://schemas.openxmlformats.org/officeDocument/2006/relationships" xmlns:p="http://schemas.openxmlformats.org/presentationml/2006/main">
   <p:cSld>
     <p:spTree>
@@ -7110,15 +10085,33 @@
                 <a:pPr lvl="0" indent="0" marL="0">
                   <a:buNone/>
                 </a:pPr>
+                <a14:m>
+                  <m:oMath xmlns:m="http://schemas.openxmlformats.org/officeDocument/2006/math">
+                    <m:r>
+                      <m:t>ξ</m:t>
+                    </m:r>
+                    <m:r>
+                      <m:rPr>
+                        <m:sty m:val="p"/>
+                      </m:rPr>
+                      <m:t>&gt;</m:t>
+                    </m:r>
+                    <m:r>
+                      <m:t>0</m:t>
+                    </m:r>
+                  </m:oMath>
+                </a14:m>
                 <a:r>
                   <a:rPr/>
-                  <a:t>For a deeper dive: </a:t>
+                  <a:t> means </a:t>
                 </a:r>
                 <a:r>
-                  <a:rPr>
-                    <a:hlinkClick r:id="rId3"/>
-                  </a:rPr>
-                  <a:t>CEVE 543</a:t>
+                  <a:rPr b="1"/>
+                  <a:t>fat tails</a:t>
+                </a:r>
+                <a:r>
+                  <a:rPr/>
+                  <a:t>: extreme events are more likely than a normal distribution predicts.</a:t>
                 </a:r>
               </a:p>
             </p:txBody>
@@ -7130,7 +10123,7 @@
 </p:sld>
 </file>
 
-<file path=ppt/slides/slide21.xml><?xml version="1.0" encoding="utf-8"?>
+<file path=ppt/slides/slide35.xml><?xml version="1.0" encoding="utf-8"?>
 <p:sld xmlns:a="http://schemas.openxmlformats.org/drawingml/2006/main" xmlns:r="http://schemas.openxmlformats.org/officeDocument/2006/relationships" xmlns:p="http://schemas.openxmlformats.org/presentationml/2006/main">
   <p:cSld>
     <p:spTree>
@@ -7201,7 +10194,7 @@
             </a:pPr>
             <a:r>
               <a:rPr/>
-              <a:t>Fit a GEV distribution to real gauge data</a:t>
+              <a:t>Define a GEV distribution for storm surge</a:t>
             </a:r>
           </a:p>
           <a:p>
@@ -7210,7 +10203,7 @@
             </a:pPr>
             <a:r>
               <a:rPr/>
-              <a:t>Sample from it to generate many possible flood scenarios</a:t>
+              <a:t>Sample thousands of possible flood scenarios</a:t>
             </a:r>
           </a:p>
           <a:p>
@@ -7219,7 +10212,7 @@
             </a:pPr>
             <a:r>
               <a:rPr/>
-              <a:t>Pass those through a damage model</a:t>
+              <a:t>Pass each through a depth-damage function</a:t>
             </a:r>
           </a:p>
           <a:p>
@@ -7228,7 +10221,7 @@
             </a:pPr>
             <a:r>
               <a:rPr/>
-              <a:t>Study the resulting distribution of damages</a:t>
+              <a:t>Analyze the resulting damage distribution</a:t>
             </a:r>
           </a:p>
           <a:p>
@@ -7255,7 +10248,7 @@
 </p:sld>
 </file>
 
-<file path=ppt/slides/slide22.xml><?xml version="1.0" encoding="utf-8"?>
+<file path=ppt/slides/slide36.xml><?xml version="1.0" encoding="utf-8"?>
 <p:sld xmlns:a="http://schemas.openxmlformats.org/drawingml/2006/main" xmlns:r="http://schemas.openxmlformats.org/officeDocument/2006/relationships" xmlns:p="http://schemas.openxmlformats.org/presentationml/2006/main">
   <p:cSld>
     <p:spTree>
@@ -7297,7 +10290,7 @@
             </a:pPr>
             <a:r>
               <a:rPr/>
-              <a:t>The iCOW Model</a:t>
+              <a:t>The House Elevation Problem</a:t>
             </a:r>
           </a:p>
         </p:txBody>
@@ -7307,7 +10300,7 @@
 </p:sld>
 </file>
 
-<file path=ppt/slides/slide23.xml><?xml version="1.0" encoding="utf-8"?>
+<file path=ppt/slides/slide37.xml><?xml version="1.0" encoding="utf-8"?>
 <p:sld xmlns:a="http://schemas.openxmlformats.org/drawingml/2006/main" xmlns:r="http://schemas.openxmlformats.org/officeDocument/2006/relationships" xmlns:p="http://schemas.openxmlformats.org/presentationml/2006/main">
   <p:cSld>
     <p:spTree>
@@ -7344,86 +10337,7 @@
             </a:pPr>
             <a:r>
               <a:rPr/>
-              <a:t>Introducing iCOW</a:t>
-            </a:r>
-          </a:p>
-        </p:txBody>
-      </p:sp>
-      <p:sp>
-        <p:nvSpPr>
-          <p:cNvPr id="3" name="Content Placeholder 2"/>
-          <p:cNvSpPr>
-            <a:spLocks noGrp="1"/>
-          </p:cNvSpPr>
-          <p:nvPr>
-            <p:ph idx="1"/>
-          </p:nvPr>
-        </p:nvSpPr>
-        <p:spPr/>
-        <p:txBody>
-          <a:bodyPr/>
-          <a:lstStyle/>
-          <a:p>
-            <a:pPr lvl="0" indent="0" marL="0">
-              <a:buNone/>
-            </a:pPr>
-            <a:r>
-              <a:rPr b="1"/>
-              <a:t>iCOW</a:t>
-            </a:r>
-            <a:r>
-              <a:rPr/>
-              <a:t> = </a:t>
-            </a:r>
-            <a:r>
-              <a:rPr b="1"/>
-              <a:t>i</a:t>
-            </a:r>
-            <a:r>
-              <a:rPr/>
-              <a:t>dealized </a:t>
-            </a:r>
-            <a:r>
-              <a:rPr b="1"/>
-              <a:t>C</a:t>
-            </a:r>
-            <a:r>
-              <a:rPr/>
-              <a:t>ost </a:t>
-            </a:r>
-            <a:r>
-              <a:rPr b="1"/>
-              <a:t>o</a:t>
-            </a:r>
-            <a:r>
-              <a:rPr/>
-              <a:t>f </a:t>
-            </a:r>
-            <a:r>
-              <a:rPr b="1"/>
-              <a:t>W</a:t>
-            </a:r>
-            <a:r>
-              <a:rPr/>
-              <a:t>aiting</a:t>
-            </a:r>
-          </a:p>
-          <a:p>
-            <a:pPr lvl="0" indent="0" marL="0">
-              <a:buNone/>
-            </a:pPr>
-            <a:r>
-              <a:rPr/>
-              <a:t>Based on Ceres, Forest, and Keller (2019): “City on a Wedge”</a:t>
-            </a:r>
-          </a:p>
-          <a:p>
-            <a:pPr lvl="0" indent="0" marL="0">
-              <a:buNone/>
-            </a:pPr>
-            <a:r>
-              <a:rPr/>
-              <a:t>A simple, fast, pedagogical model for flood risk management.</a:t>
+              <a:t>A Concrete Decision</a:t>
             </a:r>
           </a:p>
         </p:txBody>
@@ -7433,7 +10347,7 @@
 </p:sld>
 </file>
 
-<file path=ppt/slides/slide24.xml><?xml version="1.0" encoding="utf-8"?>
+<file path=ppt/slides/slide38.xml><?xml version="1.0" encoding="utf-8"?>
 <p:sld xmlns:a="http://schemas.openxmlformats.org/drawingml/2006/main" xmlns:r="http://schemas.openxmlformats.org/officeDocument/2006/relationships" xmlns:p="http://schemas.openxmlformats.org/presentationml/2006/main">
   <p:cSld>
     <p:spTree>
@@ -7452,12 +10366,12 @@
       </p:grpSpPr>
       <p:sp>
         <p:nvSpPr>
-          <p:cNvPr id="2" name="Title 1"/>
-          <p:cNvSpPr>
-            <a:spLocks noGrp="1"/>
-          </p:cNvSpPr>
-          <p:nvPr>
-            <p:ph type="title"/>
+          <p:cNvPr id="3" name="Content Placeholder 2"/>
+          <p:cNvSpPr>
+            <a:spLocks noGrp="1"/>
+          </p:cNvSpPr>
+          <p:nvPr>
+            <p:ph idx="1" sz="half"/>
           </p:nvPr>
         </p:nvSpPr>
         <p:spPr/>
@@ -7470,53 +10384,16 @@
             </a:pPr>
             <a:r>
               <a:rPr/>
-              <a:t>City on a Wedge</a:t>
-            </a:r>
-          </a:p>
-        </p:txBody>
-      </p:sp>
-      <p:sp>
-        <p:nvSpPr>
-          <p:cNvPr id="3" name="Content Placeholder 2"/>
-          <p:cNvSpPr>
-            <a:spLocks noGrp="1"/>
-          </p:cNvSpPr>
-          <p:nvPr>
-            <p:ph idx="1"/>
-          </p:nvPr>
-        </p:nvSpPr>
-        <p:spPr/>
-        <p:txBody>
-          <a:bodyPr/>
-          <a:lstStyle/>
+              <a:t>A homeowner faces a choice:</a:t>
+            </a:r>
+          </a:p>
           <a:p>
             <a:pPr lvl="0" indent="0" marL="0">
               <a:buNone/>
             </a:pPr>
             <a:r>
-              <a:rPr/>
-              <a:t>Imagine a city on a triangular wedge:</a:t>
-            </a:r>
-          </a:p>
-          <a:p>
-            <a:pPr lvl="0"/>
-            <a:r>
-              <a:rPr/>
-              <a:t>One side faces the water</a:t>
-            </a:r>
-          </a:p>
-          <a:p>
-            <a:pPr lvl="0"/>
-            <a:r>
-              <a:rPr/>
-              <a:t>Elevation increases as you move inland</a:t>
-            </a:r>
-          </a:p>
-          <a:p>
-            <a:pPr lvl="0"/>
-            <a:r>
-              <a:rPr/>
-              <a:t>Houses at different elevations face different flood risks</a:t>
+              <a:rPr b="1"/>
+              <a:t>How high should I elevate my house?</a:t>
             </a:r>
           </a:p>
           <a:p>
@@ -7525,7 +10402,67 @@
             </a:pPr>
             <a:r>
               <a:rPr/>
-              <a:t>Simple geometry makes calculations tractable.</a:t>
+              <a:t>Higher elevation = more upfront cost, but less future flood damage.</a:t>
+            </a:r>
+          </a:p>
+        </p:txBody>
+      </p:sp>
+      <p:pic>
+        <p:nvPicPr>
+          <p:cNvPr descr="lee-meyerland-elevation.jpg" id="0" name="Picture 1"/>
+          <p:cNvPicPr>
+            <a:picLocks noGrp="1" noChangeAspect="1"/>
+          </p:cNvPicPr>
+          <p:nvPr/>
+        </p:nvPicPr>
+        <p:blipFill>
+          <a:blip r:embed="rId2"/>
+          <a:stretch>
+            <a:fillRect/>
+          </a:stretch>
+        </p:blipFill>
+        <p:spPr bwMode="auto">
+          <a:xfrm>
+            <a:off x="4648200" y="1295400"/>
+            <a:ext cx="4038600" cy="2692400"/>
+          </a:xfrm>
+          <a:prstGeom prst="rect">
+            <a:avLst/>
+          </a:prstGeom>
+          <a:noFill/>
+          <a:ln w="9525">
+            <a:noFill/>
+            <a:headEnd/>
+            <a:tailEnd/>
+          </a:ln>
+        </p:spPr>
+      </p:pic>
+      <p:sp>
+        <p:nvSpPr>
+          <p:cNvPr id="1" name="TextBox 3"/>
+          <p:cNvSpPr txBox="1"/>
+          <p:nvPr/>
+        </p:nvSpPr>
+        <p:spPr>
+          <a:xfrm>
+            <a:off x="4648200" y="4076700"/>
+            <a:ext cx="4038600" cy="508000"/>
+          </a:xfrm>
+          <a:prstGeom prst="rect">
+            <a:avLst/>
+          </a:prstGeom>
+          <a:noFill/>
+        </p:spPr>
+        <p:txBody>
+          <a:bodyPr/>
+          <a:lstStyle/>
+          <a:p>
+            <a:pPr lvl="0" indent="0" marL="0" algn="ctr">
+              <a:buNone/>
+            </a:pPr>
+            <a:r>
+              <a:rPr/>
+              <a:t>House elevation in Meyerland, Houston. Photo: Allison Lee / Houston Public Media</a:t>
             </a:r>
           </a:p>
         </p:txBody>
@@ -7535,7 +10472,7 @@
 </p:sld>
 </file>
 
-<file path=ppt/slides/slide25.xml><?xml version="1.0" encoding="utf-8"?>
+<file path=ppt/slides/slide39.xml><?xml version="1.0" encoding="utf-8"?>
 <p:sld xmlns:a="http://schemas.openxmlformats.org/drawingml/2006/main" xmlns:r="http://schemas.openxmlformats.org/officeDocument/2006/relationships" xmlns:p="http://schemas.openxmlformats.org/presentationml/2006/main">
   <p:cSld>
     <p:spTree>
@@ -7572,311 +10509,92 @@
             </a:pPr>
             <a:r>
               <a:rPr/>
-              <a:t>iCOW Components</a:t>
-            </a:r>
-          </a:p>
-        </p:txBody>
-      </p:sp>
-      <p:graphicFrame>
-        <p:nvGraphicFramePr>
-          <p:cNvPr id="6" name="Content Placeholder 5"/>
-          <p:cNvGraphicFramePr>
-            <a:graphicFrameLocks noGrp="1"/>
-          </p:cNvGraphicFramePr>
+              <a:t>The Trade-off</a:t>
+            </a:r>
+          </a:p>
+        </p:txBody>
+      </p:sp>
+      <p:sp>
+        <p:nvSpPr>
+          <p:cNvPr id="3" name="Content Placeholder 2"/>
+          <p:cNvSpPr>
+            <a:spLocks noGrp="1"/>
+          </p:cNvSpPr>
           <p:nvPr>
             <p:ph idx="1"/>
           </p:nvPr>
-        </p:nvGraphicFramePr>
-        <p:xfrm>
-          <a:off x="457200" y="1193800"/>
-          <a:ext cx="8229600" cy="3390900"/>
-        </p:xfrm>
-        <a:graphic>
-          <a:graphicData uri="http://schemas.openxmlformats.org/drawingml/2006/table">
-            <a:tbl>
-              <a:tblPr firstRow="1" bandRow="1">
-                <a:tableStyleId>{5C22544A-7EE6-4342-B048-85BDC9FD1C3A}</a:tableStyleId>
-              </a:tblPr>
-              <a:tblGrid>
-                <a:gridCol w="4114800"/>
-                <a:gridCol w="4114800"/>
-              </a:tblGrid>
-              <a:tr h="0">
-                <a:tc>
-                  <a:txBody>
-                    <a:bodyPr/>
-                    <a:lstStyle/>
-                    <a:p>
-                      <a:pPr lvl="0" indent="0" marL="0">
-                        <a:buNone/>
-                      </a:pPr>
-                      <a:r>
-                        <a:rPr/>
-                        <a:t>Component</a:t>
-                      </a:r>
-                    </a:p>
-                  </a:txBody>
-                  <a:tcPr/>
-                </a:tc>
-                <a:tc>
-                  <a:txBody>
-                    <a:bodyPr/>
-                    <a:lstStyle/>
-                    <a:p>
-                      <a:pPr lvl="0" indent="0" marL="0">
-                        <a:buNone/>
-                      </a:pPr>
-                      <a:r>
-                        <a:rPr/>
-                        <a:t>iCOW Implementation</a:t>
-                      </a:r>
-                    </a:p>
-                  </a:txBody>
-                  <a:tcPr/>
-                </a:tc>
-              </a:tr>
-              <a:tr h="0">
-                <a:tc>
-                  <a:txBody>
-                    <a:bodyPr/>
-                    <a:lstStyle/>
-                    <a:p>
-                      <a:pPr lvl="0" indent="0" marL="0">
-                        <a:buNone/>
-                      </a:pPr>
-                      <a:r>
-                        <a:rPr b="1"/>
-                        <a:t>Hazard</a:t>
-                      </a:r>
-                    </a:p>
-                  </a:txBody>
-                </a:tc>
-                <a:tc>
-                  <a:txBody>
-                    <a:bodyPr/>
-                    <a:lstStyle/>
-                    <a:p>
-                      <a:pPr lvl="0" indent="0" marL="0">
-                        <a:buNone/>
-                      </a:pPr>
-                      <a:r>
-                        <a:rPr/>
-                        <a:t>Storm surge / flood stage (GEV distribution)</a:t>
-                      </a:r>
-                    </a:p>
-                  </a:txBody>
-                </a:tc>
-              </a:tr>
-              <a:tr h="0">
-                <a:tc>
-                  <a:txBody>
-                    <a:bodyPr/>
-                    <a:lstStyle/>
-                    <a:p>
-                      <a:pPr lvl="0" indent="0" marL="0">
-                        <a:buNone/>
-                      </a:pPr>
-                      <a:r>
-                        <a:rPr b="1"/>
-                        <a:t>Exposure</a:t>
-                      </a:r>
-                    </a:p>
-                  </a:txBody>
-                </a:tc>
-                <a:tc>
-                  <a:txBody>
-                    <a:bodyPr/>
-                    <a:lstStyle/>
-                    <a:p>
-                      <a:pPr lvl="0" indent="0" marL="0">
-                        <a:buNone/>
-                      </a:pPr>
-                      <a:r>
-                        <a:rPr/>
-                        <a:t>Houses at different elevations</a:t>
-                      </a:r>
-                    </a:p>
-                  </a:txBody>
-                </a:tc>
-              </a:tr>
-              <a:tr h="0">
-                <a:tc>
-                  <a:txBody>
-                    <a:bodyPr/>
-                    <a:lstStyle/>
-                    <a:p>
-                      <a:pPr lvl="0" indent="0" marL="0">
-                        <a:buNone/>
-                      </a:pPr>
-                      <a:r>
-                        <a:rPr b="1"/>
-                        <a:t>Vulnerability</a:t>
-                      </a:r>
-                    </a:p>
-                  </a:txBody>
-                </a:tc>
-                <a:tc>
-                  <a:txBody>
-                    <a:bodyPr/>
-                    <a:lstStyle/>
-                    <a:p>
-                      <a:pPr lvl="0" indent="0" marL="0">
-                        <a:buNone/>
-                      </a:pPr>
-                      <a:r>
-                        <a:rPr/>
-                        <a:t>Depth-damage function</a:t>
-                      </a:r>
-                    </a:p>
-                  </a:txBody>
-                </a:tc>
-              </a:tr>
-              <a:tr h="0">
-                <a:tc>
-                  <a:txBody>
-                    <a:bodyPr/>
-                    <a:lstStyle/>
-                    <a:p>
-                      <a:pPr lvl="0" indent="0" marL="0">
-                        <a:buNone/>
-                      </a:pPr>
-                      <a:r>
-                        <a:rPr b="1"/>
-                        <a:t>Levers</a:t>
-                      </a:r>
-                    </a:p>
-                  </a:txBody>
-                </a:tc>
-                <a:tc>
-                  <a:txBody>
-                    <a:bodyPr/>
-                    <a:lstStyle/>
-                    <a:p>
-                      <a:pPr lvl="0" indent="0" marL="0">
-                        <a:buNone/>
-                      </a:pPr>
-                      <a:r>
-                        <a:rPr/>
-                        <a:t>Elevate houses, build seawall, managed retreat</a:t>
-                      </a:r>
-                    </a:p>
-                  </a:txBody>
-                </a:tc>
-              </a:tr>
-            </a:tbl>
-          </a:graphicData>
-        </a:graphic>
-      </p:graphicFrame>
-    </p:spTree>
-  </p:cSld>
-</p:sld>
-</file>
-
-<file path=ppt/slides/slide26.xml><?xml version="1.0" encoding="utf-8"?>
-<p:sld xmlns:a="http://schemas.openxmlformats.org/drawingml/2006/main" xmlns:r="http://schemas.openxmlformats.org/officeDocument/2006/relationships" xmlns:p="http://schemas.openxmlformats.org/presentationml/2006/main">
-  <p:cSld>
-    <p:spTree>
-      <p:nvGrpSpPr>
-        <p:cNvPr id="1" name=""/>
-        <p:cNvGrpSpPr/>
-        <p:nvPr/>
-      </p:nvGrpSpPr>
-      <p:grpSpPr>
-        <a:xfrm>
-          <a:off x="0" y="0"/>
-          <a:ext cx="0" cy="0"/>
-          <a:chOff x="0" y="0"/>
-          <a:chExt cx="0" cy="0"/>
-        </a:xfrm>
-      </p:grpSpPr>
-      <p:sp>
-        <p:nvSpPr>
-          <p:cNvPr id="2" name="Title 1"/>
-          <p:cNvSpPr>
-            <a:spLocks noGrp="1"/>
-          </p:cNvSpPr>
-          <p:nvPr>
-            <p:ph type="title"/>
-          </p:nvPr>
-        </p:nvSpPr>
-        <p:spPr/>
-        <p:txBody>
-          <a:bodyPr/>
-          <a:lstStyle/>
+        </p:nvSpPr>
+        <p:spPr/>
+        <p:txBody>
+          <a:bodyPr/>
+          <a:lstStyle/>
+          <a:p>
+            <a:pPr lvl="0"/>
+            <a:r>
+              <a:rPr b="1"/>
+              <a:t>Elevate 0 feet:</a:t>
+            </a:r>
+            <a:r>
+              <a:rPr/>
+              <a:t> No construction cost, high expected damages</a:t>
+            </a:r>
+          </a:p>
+          <a:p>
+            <a:pPr lvl="0"/>
+            <a:r>
+              <a:rPr b="1"/>
+              <a:t>Elevate 14 feet:</a:t>
+            </a:r>
+            <a:r>
+              <a:rPr/>
+              <a:t> High construction cost, near-zero damages</a:t>
+            </a:r>
+          </a:p>
+          <a:p>
+            <a:pPr lvl="0"/>
+            <a:r>
+              <a:rPr b="1"/>
+              <a:t>Somewhere in between:</a:t>
+            </a:r>
+            <a:r>
+              <a:rPr/>
+              <a:t> ???</a:t>
+            </a:r>
+          </a:p>
           <a:p>
             <a:pPr lvl="0" indent="0" marL="0">
               <a:buNone/>
             </a:pPr>
             <a:r>
               <a:rPr/>
-              <a:t>Why iCOW?</a:t>
-            </a:r>
-          </a:p>
-        </p:txBody>
-      </p:sp>
-      <p:sp>
-        <p:nvSpPr>
-          <p:cNvPr id="3" name="Content Placeholder 2"/>
-          <p:cNvSpPr>
-            <a:spLocks noGrp="1"/>
-          </p:cNvSpPr>
-          <p:nvPr>
-            <p:ph idx="1"/>
-          </p:nvPr>
-        </p:nvSpPr>
-        <p:spPr/>
-        <p:txBody>
-          <a:bodyPr/>
-          <a:lstStyle/>
-          <a:p>
-            <a:pPr lvl="0" indent="0" marL="0">
-              <a:buNone/>
+              <a:t>Finding the optimal elevation requires:</a:t>
+            </a:r>
+          </a:p>
+          <a:p>
+            <a:pPr lvl="0" indent="-342900" marL="342900">
+              <a:buAutoNum type="arabicPeriod"/>
             </a:pPr>
             <a:r>
               <a:rPr/>
-              <a:t>Why use this simplified model?</a:t>
-            </a:r>
-          </a:p>
-          <a:p>
-            <a:pPr lvl="0"/>
-            <a:r>
-              <a:rPr b="1"/>
-              <a:t>Fast enough</a:t>
-            </a:r>
-            <a:r>
-              <a:rPr/>
-              <a:t> for many Monte Carlo simulations</a:t>
-            </a:r>
-          </a:p>
-          <a:p>
-            <a:pPr lvl="0"/>
-            <a:r>
-              <a:rPr b="1"/>
-              <a:t>Simple enough</a:t>
-            </a:r>
-            <a:r>
-              <a:rPr/>
-              <a:t> to understand completely</a:t>
-            </a:r>
-          </a:p>
-          <a:p>
-            <a:pPr lvl="0"/>
-            <a:r>
-              <a:rPr b="1"/>
-              <a:t>Rich enough</a:t>
-            </a:r>
-            <a:r>
-              <a:rPr/>
-              <a:t> to explore real trade-offs</a:t>
-            </a:r>
-          </a:p>
-          <a:p>
-            <a:pPr lvl="0" indent="0" marL="0">
-              <a:buNone/>
+              <a:t>A hazard model (GEV distribution for surge)</a:t>
+            </a:r>
+          </a:p>
+          <a:p>
+            <a:pPr lvl="0" indent="-342900" marL="342900">
+              <a:buAutoNum type="arabicPeriod"/>
             </a:pPr>
             <a:r>
               <a:rPr/>
-              <a:t>We will use iCOW throughout the semester to explore risk management decisions.</a:t>
+              <a:t>A damage model (depth-damage function)</a:t>
+            </a:r>
+          </a:p>
+          <a:p>
+            <a:pPr lvl="0" indent="-342900" marL="342900">
+              <a:buAutoNum type="arabicPeriod"/>
+            </a:pPr>
+            <a:r>
+              <a:rPr/>
+              <a:t>A cost model (construction costs by elevation)</a:t>
             </a:r>
           </a:p>
         </p:txBody>
@@ -7919,7 +10637,7 @@
                                         <p:tgtEl>
                                           <p:spTgt spid="3">
                                             <p:txEl>
-                                              <p:pRg st="1" end="1"/>
+                                              <p:pRg st="0" end="0"/>
                                             </p:txEl>
                                           </p:spTgt>
                                         </p:tgtEl>
@@ -7968,7 +10686,7 @@
                                         <p:tgtEl>
                                           <p:spTgt spid="3">
                                             <p:txEl>
-                                              <p:pRg st="2" end="2"/>
+                                              <p:pRg st="1" end="1"/>
                                             </p:txEl>
                                           </p:spTgt>
                                         </p:tgtEl>
@@ -8017,7 +10735,7 @@
                                         <p:tgtEl>
                                           <p:spTgt spid="3">
                                             <p:txEl>
-                                              <p:pRg st="3" end="3"/>
+                                              <p:pRg st="2" end="2"/>
                                             </p:txEl>
                                           </p:spTgt>
                                         </p:tgtEl>
@@ -8066,565 +10784,6 @@
 </p:sld>
 </file>
 
-<file path=ppt/slides/slide27.xml><?xml version="1.0" encoding="utf-8"?>
-<p:sld xmlns:a="http://schemas.openxmlformats.org/drawingml/2006/main" xmlns:r="http://schemas.openxmlformats.org/officeDocument/2006/relationships" xmlns:p="http://schemas.openxmlformats.org/presentationml/2006/main">
-  <p:cSld>
-    <p:spTree>
-      <p:nvGrpSpPr>
-        <p:cNvPr id="1" name=""/>
-        <p:cNvGrpSpPr/>
-        <p:nvPr/>
-      </p:nvGrpSpPr>
-      <p:grpSpPr>
-        <a:xfrm>
-          <a:off x="0" y="0"/>
-          <a:ext cx="0" cy="0"/>
-          <a:chOff x="0" y="0"/>
-          <a:chExt cx="0" cy="0"/>
-        </a:xfrm>
-      </p:grpSpPr>
-      <p:sp>
-        <p:nvSpPr>
-          <p:cNvPr id="2" name="Title 1"/>
-          <p:cNvSpPr>
-            <a:spLocks noGrp="1"/>
-          </p:cNvSpPr>
-          <p:nvPr>
-            <p:ph type="title"/>
-          </p:nvPr>
-        </p:nvSpPr>
-        <p:spPr>
-          <a:xfrm>
-            <a:off x="722313" y="3305176"/>
-            <a:ext cx="7772400" cy="1021556"/>
-          </a:xfrm>
-        </p:spPr>
-        <p:txBody>
-          <a:bodyPr/>
-          <a:lstStyle/>
-          <a:p>
-            <a:pPr lvl="0" indent="0" marL="0">
-              <a:buNone/>
-            </a:pPr>
-            <a:r>
-              <a:rPr/>
-              <a:t>Wrap Up</a:t>
-            </a:r>
-          </a:p>
-        </p:txBody>
-      </p:sp>
-    </p:spTree>
-  </p:cSld>
-</p:sld>
-</file>
-
-<file path=ppt/slides/slide28.xml><?xml version="1.0" encoding="utf-8"?>
-<p:sld xmlns:a="http://schemas.openxmlformats.org/drawingml/2006/main" xmlns:r="http://schemas.openxmlformats.org/officeDocument/2006/relationships" xmlns:p="http://schemas.openxmlformats.org/presentationml/2006/main">
-  <p:cSld>
-    <p:spTree>
-      <p:nvGrpSpPr>
-        <p:cNvPr id="1" name=""/>
-        <p:cNvGrpSpPr/>
-        <p:nvPr/>
-      </p:nvGrpSpPr>
-      <p:grpSpPr>
-        <a:xfrm>
-          <a:off x="0" y="0"/>
-          <a:ext cx="0" cy="0"/>
-          <a:chOff x="0" y="0"/>
-          <a:chExt cx="0" cy="0"/>
-        </a:xfrm>
-      </p:grpSpPr>
-      <p:sp>
-        <p:nvSpPr>
-          <p:cNvPr id="2" name="Title 1"/>
-          <p:cNvSpPr>
-            <a:spLocks noGrp="1"/>
-          </p:cNvSpPr>
-          <p:nvPr>
-            <p:ph type="title"/>
-          </p:nvPr>
-        </p:nvSpPr>
-        <p:spPr/>
-        <p:txBody>
-          <a:bodyPr/>
-          <a:lstStyle/>
-          <a:p>
-            <a:pPr lvl="0" indent="0" marL="0">
-              <a:buNone/>
-            </a:pPr>
-            <a:r>
-              <a:rPr/>
-              <a:t>Key Takeaways</a:t>
-            </a:r>
-          </a:p>
-        </p:txBody>
-      </p:sp>
-      <p:sp>
-        <p:nvSpPr>
-          <p:cNvPr id="3" name="Content Placeholder 2"/>
-          <p:cNvSpPr>
-            <a:spLocks noGrp="1"/>
-          </p:cNvSpPr>
-          <p:nvPr>
-            <p:ph idx="1"/>
-          </p:nvPr>
-        </p:nvSpPr>
-        <p:spPr/>
-        <p:txBody>
-          <a:bodyPr/>
-          <a:lstStyle/>
-          <a:p>
-            <a:pPr lvl="0" indent="-342900" marL="342900">
-              <a:buAutoNum type="arabicPeriod"/>
-            </a:pPr>
-            <a:r>
-              <a:rPr b="1"/>
-              <a:t>Risk</a:t>
-            </a:r>
-            <a:r>
-              <a:rPr/>
-              <a:t> emerges from the interaction of hazard, exposure, and vulnerability</a:t>
-            </a:r>
-          </a:p>
-          <a:p>
-            <a:pPr lvl="0" indent="-342900" marL="342900">
-              <a:buAutoNum type="arabicPeriod"/>
-            </a:pPr>
-            <a:r>
-              <a:rPr b="1"/>
-              <a:t>XLRM</a:t>
-            </a:r>
-            <a:r>
-              <a:rPr/>
-              <a:t> helps us structure complex decision problems</a:t>
-            </a:r>
-          </a:p>
-          <a:p>
-            <a:pPr lvl="0" indent="-342900" marL="342900">
-              <a:buAutoNum type="arabicPeriod"/>
-            </a:pPr>
-            <a:r>
-              <a:rPr b="1"/>
-              <a:t>Extreme events</a:t>
-            </a:r>
-            <a:r>
-              <a:rPr/>
-              <a:t> require specialized distributions (GEV)</a:t>
-            </a:r>
-          </a:p>
-          <a:p>
-            <a:pPr lvl="0" indent="-342900" marL="342900">
-              <a:buAutoNum type="arabicPeriod"/>
-            </a:pPr>
-            <a:r>
-              <a:rPr b="1"/>
-              <a:t>iCOW</a:t>
-            </a:r>
-            <a:r>
-              <a:rPr/>
-              <a:t> is our pedagogical sandbox for exploring flood risk decisions</a:t>
-            </a:r>
-          </a:p>
-        </p:txBody>
-      </p:sp>
-    </p:spTree>
-  </p:cSld>
-</p:sld>
-</file>
-
-<file path=ppt/slides/slide29.xml><?xml version="1.0" encoding="utf-8"?>
-<p:sld xmlns:a="http://schemas.openxmlformats.org/drawingml/2006/main" xmlns:r="http://schemas.openxmlformats.org/officeDocument/2006/relationships" xmlns:p="http://schemas.openxmlformats.org/presentationml/2006/main">
-  <p:cSld>
-    <p:spTree>
-      <p:nvGrpSpPr>
-        <p:cNvPr id="1" name=""/>
-        <p:cNvGrpSpPr/>
-        <p:nvPr/>
-      </p:nvGrpSpPr>
-      <p:grpSpPr>
-        <a:xfrm>
-          <a:off x="0" y="0"/>
-          <a:ext cx="0" cy="0"/>
-          <a:chOff x="0" y="0"/>
-          <a:chExt cx="0" cy="0"/>
-        </a:xfrm>
-      </p:grpSpPr>
-      <p:sp>
-        <p:nvSpPr>
-          <p:cNvPr id="2" name="Title 1"/>
-          <p:cNvSpPr>
-            <a:spLocks noGrp="1"/>
-          </p:cNvSpPr>
-          <p:nvPr>
-            <p:ph type="title"/>
-          </p:nvPr>
-        </p:nvSpPr>
-        <p:spPr/>
-        <p:txBody>
-          <a:bodyPr/>
-          <a:lstStyle/>
-          <a:p>
-            <a:pPr lvl="0" indent="0" marL="0">
-              <a:buNone/>
-            </a:pPr>
-            <a:r>
-              <a:rPr/>
-              <a:t>Lab Preview</a:t>
-            </a:r>
-          </a:p>
-        </p:txBody>
-      </p:sp>
-      <p:sp>
-        <p:nvSpPr>
-          <p:cNvPr id="3" name="Content Placeholder 2"/>
-          <p:cNvSpPr>
-            <a:spLocks noGrp="1"/>
-          </p:cNvSpPr>
-          <p:nvPr>
-            <p:ph idx="1"/>
-          </p:nvPr>
-        </p:nvSpPr>
-        <p:spPr/>
-        <p:txBody>
-          <a:bodyPr/>
-          <a:lstStyle/>
-          <a:p>
-            <a:pPr lvl="0" indent="0" marL="0">
-              <a:buNone/>
-            </a:pPr>
-            <a:r>
-              <a:rPr/>
-              <a:t>On Friday, you will:</a:t>
-            </a:r>
-          </a:p>
-          <a:p>
-            <a:pPr lvl="0" indent="-342900" marL="342900">
-              <a:buAutoNum type="arabicPeriod"/>
-            </a:pPr>
-            <a:r>
-              <a:rPr/>
-              <a:t>Fit a GEV distribution to real flood gauge data</a:t>
-            </a:r>
-          </a:p>
-          <a:p>
-            <a:pPr lvl="0" indent="-342900" marL="342900">
-              <a:buAutoNum type="arabicPeriod"/>
-            </a:pPr>
-            <a:r>
-              <a:rPr/>
-              <a:t>Define a HAZUS-style depth-damage function</a:t>
-            </a:r>
-          </a:p>
-          <a:p>
-            <a:pPr lvl="0" indent="-342900" marL="342900">
-              <a:buAutoNum type="arabicPeriod"/>
-            </a:pPr>
-            <a:r>
-              <a:rPr/>
-              <a:t>Compute damage distributions using Monte Carlo</a:t>
-            </a:r>
-          </a:p>
-          <a:p>
-            <a:pPr lvl="0" indent="-342900" marL="342900">
-              <a:buAutoNum type="arabicPeriod"/>
-            </a:pPr>
-            <a:r>
-              <a:rPr/>
-              <a:t>Extend to 100 houses at varying elevations</a:t>
-            </a:r>
-          </a:p>
-          <a:p>
-            <a:pPr lvl="0" indent="-342900" marL="342900">
-              <a:buAutoNum type="arabicPeriod"/>
-            </a:pPr>
-            <a:r>
-              <a:rPr/>
-              <a:t>Get started with the ICOW package</a:t>
-            </a:r>
-          </a:p>
-        </p:txBody>
-      </p:sp>
-    </p:spTree>
-  </p:cSld>
-</p:sld>
-</file>
-
-<file path=ppt/slides/slide3.xml><?xml version="1.0" encoding="utf-8"?>
-<p:sld xmlns:a="http://schemas.openxmlformats.org/drawingml/2006/main" xmlns:r="http://schemas.openxmlformats.org/officeDocument/2006/relationships" xmlns:p="http://schemas.openxmlformats.org/presentationml/2006/main">
-  <p:cSld>
-    <p:spTree>
-      <p:nvGrpSpPr>
-        <p:cNvPr id="1" name=""/>
-        <p:cNvGrpSpPr/>
-        <p:nvPr/>
-      </p:nvGrpSpPr>
-      <p:grpSpPr>
-        <a:xfrm>
-          <a:off x="0" y="0"/>
-          <a:ext cx="0" cy="0"/>
-          <a:chOff x="0" y="0"/>
-          <a:chExt cx="0" cy="0"/>
-        </a:xfrm>
-      </p:grpSpPr>
-      <p:sp>
-        <p:nvSpPr>
-          <p:cNvPr id="2" name="Title 1"/>
-          <p:cNvSpPr>
-            <a:spLocks noGrp="1"/>
-          </p:cNvSpPr>
-          <p:nvPr>
-            <p:ph type="title"/>
-          </p:nvPr>
-        </p:nvSpPr>
-        <p:spPr>
-          <a:xfrm>
-            <a:off x="722313" y="3305176"/>
-            <a:ext cx="7772400" cy="1021556"/>
-          </a:xfrm>
-        </p:spPr>
-        <p:txBody>
-          <a:bodyPr/>
-          <a:lstStyle/>
-          <a:p>
-            <a:pPr lvl="0" indent="0" marL="0">
-              <a:buNone/>
-            </a:pPr>
-            <a:r>
-              <a:rPr/>
-              <a:t>Hook: The Insurance Dilemma</a:t>
-            </a:r>
-          </a:p>
-        </p:txBody>
-      </p:sp>
-    </p:spTree>
-  </p:cSld>
-</p:sld>
-</file>
-
-<file path=ppt/slides/slide30.xml><?xml version="1.0" encoding="utf-8"?>
-<p:sld xmlns:a="http://schemas.openxmlformats.org/drawingml/2006/main" xmlns:r="http://schemas.openxmlformats.org/officeDocument/2006/relationships" xmlns:p="http://schemas.openxmlformats.org/presentationml/2006/main">
-  <p:cSld>
-    <p:spTree>
-      <p:nvGrpSpPr>
-        <p:cNvPr id="1" name=""/>
-        <p:cNvGrpSpPr/>
-        <p:nvPr/>
-      </p:nvGrpSpPr>
-      <p:grpSpPr>
-        <a:xfrm>
-          <a:off x="0" y="0"/>
-          <a:ext cx="0" cy="0"/>
-          <a:chOff x="0" y="0"/>
-          <a:chExt cx="0" cy="0"/>
-        </a:xfrm>
-      </p:grpSpPr>
-      <p:sp>
-        <p:nvSpPr>
-          <p:cNvPr id="2" name="Title 1"/>
-          <p:cNvSpPr>
-            <a:spLocks noGrp="1"/>
-          </p:cNvSpPr>
-          <p:nvPr>
-            <p:ph type="title"/>
-          </p:nvPr>
-        </p:nvSpPr>
-        <p:spPr/>
-        <p:txBody>
-          <a:bodyPr/>
-          <a:lstStyle/>
-          <a:p>
-            <a:pPr lvl="0" indent="0" marL="0">
-              <a:buNone/>
-            </a:pPr>
-            <a:r>
-              <a:rPr/>
-              <a:t>Before Friday</a:t>
-            </a:r>
-          </a:p>
-        </p:txBody>
-      </p:sp>
-      <p:sp>
-        <p:nvSpPr>
-          <p:cNvPr id="3" name="Content Placeholder 2"/>
-          <p:cNvSpPr>
-            <a:spLocks noGrp="1"/>
-          </p:cNvSpPr>
-          <p:nvPr>
-            <p:ph idx="1"/>
-          </p:nvPr>
-        </p:nvSpPr>
-        <p:spPr/>
-        <p:txBody>
-          <a:bodyPr/>
-          <a:lstStyle/>
-          <a:p>
-            <a:pPr lvl="0" indent="0" marL="0">
-              <a:buNone/>
-            </a:pPr>
-            <a:r>
-              <a:rPr b="1"/>
-              <a:t>Reading:</a:t>
-            </a:r>
-            <a:r>
-              <a:rPr/>
-              <a:t> Ceres, Forest, and Keller (2019) “City on a Wedge”</a:t>
-            </a:r>
-          </a:p>
-          <a:p>
-            <a:pPr lvl="0"/>
-            <a:r>
-              <a:rPr/>
-              <a:t>Focus on Sections 1-3 (model description)</a:t>
-            </a:r>
-          </a:p>
-          <a:p>
-            <a:pPr lvl="0"/>
-            <a:r>
-              <a:rPr/>
-              <a:t>Understand the geometry and assumptions</a:t>
-            </a:r>
-          </a:p>
-          <a:p>
-            <a:pPr lvl="0"/>
-            <a:r>
-              <a:rPr/>
-              <a:t>Come prepared with questions</a:t>
-            </a:r>
-          </a:p>
-          <a:p>
-            <a:pPr lvl="0" indent="0" marL="0">
-              <a:buNone/>
-            </a:pPr>
-            <a:r>
-              <a:rPr/>
-              <a:t>This gives you context for the lab and the rest of the semester.</a:t>
-            </a:r>
-          </a:p>
-        </p:txBody>
-      </p:sp>
-    </p:spTree>
-  </p:cSld>
-</p:sld>
-</file>
-
-<file path=ppt/slides/slide31.xml><?xml version="1.0" encoding="utf-8"?>
-<p:sld xmlns:a="http://schemas.openxmlformats.org/drawingml/2006/main" xmlns:r="http://schemas.openxmlformats.org/officeDocument/2006/relationships" xmlns:p="http://schemas.openxmlformats.org/presentationml/2006/main">
-  <p:cSld>
-    <p:spTree>
-      <p:nvGrpSpPr>
-        <p:cNvPr id="1" name=""/>
-        <p:cNvGrpSpPr/>
-        <p:nvPr/>
-      </p:nvGrpSpPr>
-      <p:grpSpPr>
-        <a:xfrm>
-          <a:off x="0" y="0"/>
-          <a:ext cx="0" cy="0"/>
-          <a:chOff x="0" y="0"/>
-          <a:chExt cx="0" cy="0"/>
-        </a:xfrm>
-      </p:grpSpPr>
-      <p:sp>
-        <p:nvSpPr>
-          <p:cNvPr id="2" name="Title 1"/>
-          <p:cNvSpPr>
-            <a:spLocks noGrp="1"/>
-          </p:cNvSpPr>
-          <p:nvPr>
-            <p:ph type="title"/>
-          </p:nvPr>
-        </p:nvSpPr>
-        <p:spPr/>
-        <p:txBody>
-          <a:bodyPr/>
-          <a:lstStyle/>
-          <a:p>
-            <a:pPr lvl="0" indent="0" marL="0">
-              <a:buNone/>
-            </a:pPr>
-            <a:r>
-              <a:rPr/>
-              <a:t>References</a:t>
-            </a:r>
-          </a:p>
-        </p:txBody>
-      </p:sp>
-      <p:sp>
-        <p:nvSpPr>
-          <p:cNvPr id="3" name="Content Placeholder 2"/>
-          <p:cNvSpPr>
-            <a:spLocks noGrp="1"/>
-          </p:cNvSpPr>
-          <p:nvPr>
-            <p:ph idx="1"/>
-          </p:nvPr>
-        </p:nvSpPr>
-        <p:spPr/>
-        <p:txBody>
-          <a:bodyPr/>
-          <a:lstStyle/>
-          <a:p>
-            <a:pPr lvl="0" indent="0" marL="0">
-              <a:buNone/>
-            </a:pPr>
-            <a:r>
-              <a:rPr/>
-              <a:t>Ceres, Robert L., Chris E. Forest, and Klaus Keller. 2019. “Optimization of Multiple Storm Surge Risk Mitigation Strategies for an Island City On a Wedge.” </a:t>
-            </a:r>
-            <a:r>
-              <a:rPr i="1"/>
-              <a:t>Environmental Modelling &amp; Software</a:t>
-            </a:r>
-            <a:r>
-              <a:rPr/>
-              <a:t> 119 (September): 341–53. </a:t>
-            </a:r>
-            <a:r>
-              <a:rPr>
-                <a:hlinkClick r:id="rId2"/>
-              </a:rPr>
-              <a:t>https://doi.org/10.1016/j.envsoft.2019.06.011</a:t>
-            </a:r>
-            <a:r>
-              <a:rPr/>
-              <a:t>.</a:t>
-            </a:r>
-          </a:p>
-          <a:p>
-            <a:pPr lvl="0" indent="0" marL="0">
-              <a:buNone/>
-            </a:pPr>
-            <a:r>
-              <a:rPr/>
-              <a:t>Wing, Oliver E. J., Nicholas Pinter, Paul D. Bates, and Carolyn Kousky. 2020. “New Insights into US Flood Vulnerability Revealed from Flood Insurance Big Data.” </a:t>
-            </a:r>
-            <a:r>
-              <a:rPr i="1"/>
-              <a:t>Nature Communications</a:t>
-            </a:r>
-            <a:r>
-              <a:rPr/>
-              <a:t> 11 (1, 1): 1444. </a:t>
-            </a:r>
-            <a:r>
-              <a:rPr>
-                <a:hlinkClick r:id="rId3"/>
-              </a:rPr>
-              <a:t>https://doi.org/10.1038/s41467-020-15264-2</a:t>
-            </a:r>
-            <a:r>
-              <a:rPr/>
-              <a:t>.</a:t>
-            </a:r>
-          </a:p>
-        </p:txBody>
-      </p:sp>
-    </p:spTree>
-  </p:cSld>
-</p:sld>
-</file>
-
 <file path=ppt/slides/slide4.xml><?xml version="1.0" encoding="utf-8"?>
 <p:sld xmlns:a="http://schemas.openxmlformats.org/drawingml/2006/main" xmlns:r="http://schemas.openxmlformats.org/officeDocument/2006/relationships" xmlns:p="http://schemas.openxmlformats.org/presentationml/2006/main">
   <p:cSld>
@@ -8644,12 +10803,12 @@
       </p:grpSpPr>
       <p:sp>
         <p:nvSpPr>
-          <p:cNvPr id="2" name="Title 1"/>
-          <p:cNvSpPr>
-            <a:spLocks noGrp="1"/>
-          </p:cNvSpPr>
-          <p:nvPr>
-            <p:ph type="title"/>
+          <p:cNvPr id="3" name="Content Placeholder 2"/>
+          <p:cNvSpPr>
+            <a:spLocks noGrp="1"/>
+          </p:cNvSpPr>
+          <p:nvPr>
+            <p:ph idx="1"/>
           </p:nvPr>
         </p:nvSpPr>
         <p:spPr/>
@@ -8661,249 +10820,874 @@
               <a:buNone/>
             </a:pPr>
             <a:r>
-              <a:rPr/>
-              <a:t>A Pricing Problem</a:t>
-            </a:r>
-          </a:p>
-        </p:txBody>
-      </p:sp>
-      <p:sp>
-        <p:nvSpPr>
-          <p:cNvPr id="3" name="Content Placeholder 2"/>
-          <p:cNvSpPr>
-            <a:spLocks noGrp="1"/>
-          </p:cNvSpPr>
-          <p:nvPr>
-            <p:ph idx="1"/>
-          </p:nvPr>
-        </p:nvSpPr>
-        <p:spPr/>
-        <p:txBody>
-          <a:bodyPr/>
-          <a:lstStyle/>
+              <a:rPr b="1"/>
+              <a:t>What’s the expected annual damage?</a:t>
+            </a:r>
+          </a:p>
           <a:p>
             <a:pPr lvl="0" indent="0" marL="0">
               <a:buNone/>
             </a:pPr>
             <a:r>
-              <a:rPr/>
-              <a:t>An insurance company wants to offer flood insurance for coastal homes.</a:t>
-            </a:r>
-          </a:p>
-          <a:p>
-            <a:pPr lvl="0" indent="0" marL="0">
-              <a:buNone/>
-            </a:pPr>
-            <a:r>
-              <a:rPr/>
-              <a:t>To set premiums, they need to answer:</a:t>
-            </a:r>
-          </a:p>
-          <a:p>
-            <a:pPr lvl="0"/>
-            <a:r>
-              <a:rPr/>
-              <a:t>How often will floods occur?</a:t>
-            </a:r>
-          </a:p>
-          <a:p>
-            <a:pPr lvl="0"/>
-            <a:r>
-              <a:rPr/>
-              <a:t>How bad will those floods be?</a:t>
-            </a:r>
-          </a:p>
-          <a:p>
-            <a:pPr lvl="0"/>
-            <a:r>
-              <a:rPr/>
-              <a:t>How much damage will result?</a:t>
+              <a:rPr i="1"/>
+              <a:t>(30 seconds to think)</a:t>
             </a:r>
           </a:p>
         </p:txBody>
       </p:sp>
     </p:spTree>
   </p:cSld>
-  <p:timing>
-    <p:tnLst>
-      <p:par>
-        <p:cTn id="1" dur="indefinite" restart="never" nodeType="tmRoot">
-          <p:childTnLst>
-            <p:seq concurrent="1" nextAc="seek">
-              <p:cTn id="2" dur="indefinite" nodeType="mainSeq">
-                <p:childTnLst>
-                  <p:par>
-                    <p:cTn id="3" fill="hold">
-                      <p:stCondLst>
-                        <p:cond delay="indefinite"/>
-                      </p:stCondLst>
-                      <p:childTnLst>
-                        <p:par>
-                          <p:cTn id="4" fill="hold">
-                            <p:stCondLst>
-                              <p:cond delay="0"/>
-                            </p:stCondLst>
-                            <p:childTnLst>
-                              <p:par>
-                                <p:cTn id="5" presetID="1" presetClass="entr" presetSubtype="0" fill="hold" grpId="0" nodeType="clickEffect">
-                                  <p:stCondLst>
-                                    <p:cond delay="0"/>
-                                  </p:stCondLst>
-                                  <p:childTnLst>
-                                    <p:set>
-                                      <p:cBhvr>
-                                        <p:cTn id="6" dur="1" fill="hold">
-                                          <p:stCondLst>
-                                            <p:cond delay="0"/>
-                                          </p:stCondLst>
-                                        </p:cTn>
-                                        <p:tgtEl>
-                                          <p:spTgt spid="3">
-                                            <p:txEl>
-                                              <p:pRg st="2" end="2"/>
-                                            </p:txEl>
-                                          </p:spTgt>
-                                        </p:tgtEl>
-                                        <p:attrNameLst>
-                                          <p:attrName>style.visibility</p:attrName>
-                                        </p:attrNameLst>
-                                      </p:cBhvr>
-                                      <p:to>
-                                        <p:strVal val="visible"/>
-                                      </p:to>
-                                    </p:set>
-                                  </p:childTnLst>
-                                </p:cTn>
-                              </p:par>
-                            </p:childTnLst>
-                          </p:cTn>
-                        </p:par>
-                      </p:childTnLst>
-                    </p:cTn>
-                  </p:par>
-                  <p:par>
-                    <p:cTn id="7" fill="hold">
-                      <p:stCondLst>
-                        <p:cond delay="indefinite"/>
-                      </p:stCondLst>
-                      <p:childTnLst>
-                        <p:par>
-                          <p:cTn id="8" fill="hold">
-                            <p:stCondLst>
-                              <p:cond delay="0"/>
-                            </p:stCondLst>
-                            <p:childTnLst>
-                              <p:par>
-                                <p:cTn id="9" presetID="1" presetClass="entr" presetSubtype="0" fill="hold" grpId="0" nodeType="clickEffect">
-                                  <p:stCondLst>
-                                    <p:cond delay="0"/>
-                                  </p:stCondLst>
-                                  <p:childTnLst>
-                                    <p:set>
-                                      <p:cBhvr>
-                                        <p:cTn id="10" dur="1" fill="hold">
-                                          <p:stCondLst>
-                                            <p:cond delay="0"/>
-                                          </p:stCondLst>
-                                        </p:cTn>
-                                        <p:tgtEl>
-                                          <p:spTgt spid="3">
-                                            <p:txEl>
-                                              <p:pRg st="3" end="3"/>
-                                            </p:txEl>
-                                          </p:spTgt>
-                                        </p:tgtEl>
-                                        <p:attrNameLst>
-                                          <p:attrName>style.visibility</p:attrName>
-                                        </p:attrNameLst>
-                                      </p:cBhvr>
-                                      <p:to>
-                                        <p:strVal val="visible"/>
-                                      </p:to>
-                                    </p:set>
-                                  </p:childTnLst>
-                                </p:cTn>
-                              </p:par>
-                            </p:childTnLst>
-                          </p:cTn>
-                        </p:par>
-                      </p:childTnLst>
-                    </p:cTn>
-                  </p:par>
-                  <p:par>
-                    <p:cTn id="11" fill="hold">
-                      <p:stCondLst>
-                        <p:cond delay="indefinite"/>
-                      </p:stCondLst>
-                      <p:childTnLst>
-                        <p:par>
-                          <p:cTn id="12" fill="hold">
-                            <p:stCondLst>
-                              <p:cond delay="0"/>
-                            </p:stCondLst>
-                            <p:childTnLst>
-                              <p:par>
-                                <p:cTn id="13" presetID="1" presetClass="entr" presetSubtype="0" fill="hold" grpId="0" nodeType="clickEffect">
-                                  <p:stCondLst>
-                                    <p:cond delay="0"/>
-                                  </p:stCondLst>
-                                  <p:childTnLst>
-                                    <p:set>
-                                      <p:cBhvr>
-                                        <p:cTn id="14" dur="1" fill="hold">
-                                          <p:stCondLst>
-                                            <p:cond delay="0"/>
-                                          </p:stCondLst>
-                                        </p:cTn>
-                                        <p:tgtEl>
-                                          <p:spTgt spid="3">
-                                            <p:txEl>
-                                              <p:pRg st="4" end="4"/>
-                                            </p:txEl>
-                                          </p:spTgt>
-                                        </p:tgtEl>
-                                        <p:attrNameLst>
-                                          <p:attrName>style.visibility</p:attrName>
-                                        </p:attrNameLst>
-                                      </p:cBhvr>
-                                      <p:to>
-                                        <p:strVal val="visible"/>
-                                      </p:to>
-                                    </p:set>
-                                  </p:childTnLst>
-                                </p:cTn>
-                              </p:par>
-                            </p:childTnLst>
-                          </p:cTn>
-                        </p:par>
-                      </p:childTnLst>
-                    </p:cTn>
-                  </p:par>
-                </p:childTnLst>
-              </p:cTn>
-              <p:prevCondLst>
-                <p:cond evt="onPrev" delay="0">
-                  <p:tgtEl>
-                    <p:sldTgt/>
-                  </p:tgtEl>
-                </p:cond>
-              </p:prevCondLst>
-              <p:nextCondLst>
-                <p:cond evt="onNext" delay="0">
-                  <p:tgtEl>
-                    <p:sldTgt/>
-                  </p:tgtEl>
-                </p:cond>
-              </p:nextCondLst>
-            </p:seq>
-          </p:childTnLst>
-        </p:cTn>
-      </p:par>
-    </p:tnLst>
-    <p:bldLst>
-      <p:bldP spid="3" grpId="0" uiExpand="1" build="p"/>
-    </p:bldLst>
-  </p:timing>
+</p:sld>
+</file>
+
+<file path=ppt/slides/slide40.xml><?xml version="1.0" encoding="utf-8"?>
+<p:sld xmlns:a="http://schemas.openxmlformats.org/drawingml/2006/main" xmlns:r="http://schemas.openxmlformats.org/officeDocument/2006/relationships" xmlns:p="http://schemas.openxmlformats.org/presentationml/2006/main">
+  <p:cSld>
+    <p:spTree>
+      <p:nvGrpSpPr>
+        <p:cNvPr id="1" name=""/>
+        <p:cNvGrpSpPr/>
+        <p:nvPr/>
+      </p:nvGrpSpPr>
+      <p:grpSpPr>
+        <a:xfrm>
+          <a:off x="0" y="0"/>
+          <a:ext cx="0" cy="0"/>
+          <a:chOff x="0" y="0"/>
+          <a:chExt cx="0" cy="0"/>
+        </a:xfrm>
+      </p:grpSpPr>
+      <p:sp>
+        <p:nvSpPr>
+          <p:cNvPr id="2" name="Title 1"/>
+          <p:cNvSpPr>
+            <a:spLocks noGrp="1"/>
+          </p:cNvSpPr>
+          <p:nvPr>
+            <p:ph type="title"/>
+          </p:nvPr>
+        </p:nvSpPr>
+        <p:spPr>
+          <a:xfrm>
+            <a:off x="457201" y="204787"/>
+            <a:ext cx="3008313" cy="871538"/>
+          </a:xfrm>
+        </p:spPr>
+        <p:txBody>
+          <a:bodyPr/>
+          <a:lstStyle/>
+          <a:p>
+            <a:pPr lvl="0" indent="0" marL="0">
+              <a:buNone/>
+            </a:pPr>
+            <a:r>
+              <a:rPr/>
+              <a:t>This Semester’s Sandbox</a:t>
+            </a:r>
+          </a:p>
+        </p:txBody>
+      </p:sp>
+      <p:sp>
+        <p:nvSpPr>
+          <p:cNvPr id="4" name="Text Placeholder 3"/>
+          <p:cNvSpPr>
+            <a:spLocks noGrp="1"/>
+          </p:cNvSpPr>
+          <p:nvPr>
+            <p:ph idx="2" sz="half" type="body"/>
+          </p:nvPr>
+        </p:nvSpPr>
+        <p:spPr/>
+        <p:txBody>
+          <a:bodyPr/>
+          <a:lstStyle/>
+          <a:p>
+            <a:pPr lvl="0" indent="0" marL="0">
+              <a:buNone/>
+            </a:pPr>
+            <a:r>
+              <a:rPr/>
+              <a:t>We’ll use the </a:t>
+            </a:r>
+            <a:r>
+              <a:rPr b="1"/>
+              <a:t>house elevation problem</a:t>
+            </a:r>
+            <a:r>
+              <a:rPr/>
+              <a:t> throughout the course:</a:t>
+            </a:r>
+          </a:p>
+        </p:txBody>
+      </p:sp>
+      <p:graphicFrame>
+        <p:nvGraphicFramePr>
+          <p:cNvPr id="6" name="Content Placeholder 5"/>
+          <p:cNvGraphicFramePr>
+            <a:graphicFrameLocks noGrp="1"/>
+          </p:cNvGraphicFramePr>
+          <p:nvPr>
+            <p:ph idx="1"/>
+          </p:nvPr>
+        </p:nvGraphicFramePr>
+        <p:xfrm>
+          <a:off x="3568700" y="203200"/>
+          <a:ext cx="5105400" cy="4381500"/>
+        </p:xfrm>
+        <a:graphic>
+          <a:graphicData uri="http://schemas.openxmlformats.org/drawingml/2006/table">
+            <a:tbl>
+              <a:tblPr firstRow="1" bandRow="1">
+                <a:tableStyleId>{5C22544A-7EE6-4342-B048-85BDC9FD1C3A}</a:tableStyleId>
+              </a:tblPr>
+              <a:tblGrid>
+                <a:gridCol w="1701800"/>
+                <a:gridCol w="1701800"/>
+                <a:gridCol w="1701800"/>
+              </a:tblGrid>
+              <a:tr h="0">
+                <a:tc>
+                  <a:txBody>
+                    <a:bodyPr/>
+                    <a:lstStyle/>
+                    <a:p>
+                      <a:pPr lvl="0" indent="0" marL="0">
+                        <a:buNone/>
+                      </a:pPr>
+                      <a:r>
+                        <a:rPr/>
+                        <a:t>Week</a:t>
+                      </a:r>
+                    </a:p>
+                  </a:txBody>
+                  <a:tcPr/>
+                </a:tc>
+                <a:tc>
+                  <a:txBody>
+                    <a:bodyPr/>
+                    <a:lstStyle/>
+                    <a:p>
+                      <a:pPr lvl="0" indent="0" marL="0">
+                        <a:buNone/>
+                      </a:pPr>
+                      <a:r>
+                        <a:rPr/>
+                        <a:t>Topic</a:t>
+                      </a:r>
+                    </a:p>
+                  </a:txBody>
+                  <a:tcPr/>
+                </a:tc>
+                <a:tc>
+                  <a:txBody>
+                    <a:bodyPr/>
+                    <a:lstStyle/>
+                    <a:p>
+                      <a:pPr lvl="0" indent="0" marL="0">
+                        <a:buNone/>
+                      </a:pPr>
+                      <a:r>
+                        <a:rPr/>
+                        <a:t>What We Add</a:t>
+                      </a:r>
+                    </a:p>
+                  </a:txBody>
+                  <a:tcPr/>
+                </a:tc>
+              </a:tr>
+              <a:tr h="0">
+                <a:tc>
+                  <a:txBody>
+                    <a:bodyPr/>
+                    <a:lstStyle/>
+                    <a:p>
+                      <a:pPr lvl="0" indent="0" marL="0">
+                        <a:buNone/>
+                      </a:pPr>
+                      <a:r>
+                        <a:rPr/>
+                        <a:t>2</a:t>
+                      </a:r>
+                    </a:p>
+                  </a:txBody>
+                </a:tc>
+                <a:tc>
+                  <a:txBody>
+                    <a:bodyPr/>
+                    <a:lstStyle/>
+                    <a:p>
+                      <a:pPr lvl="0" indent="0" marL="0">
+                        <a:buNone/>
+                      </a:pPr>
+                      <a:r>
+                        <a:rPr/>
+                        <a:t>Hazard-Damage Convolution</a:t>
+                      </a:r>
+                    </a:p>
+                  </a:txBody>
+                </a:tc>
+                <a:tc>
+                  <a:txBody>
+                    <a:bodyPr/>
+                    <a:lstStyle/>
+                    <a:p>
+                      <a:pPr lvl="0" indent="0" marL="0">
+                        <a:buNone/>
+                      </a:pPr>
+                      <a:r>
+                        <a:rPr/>
+                        <a:t>Basic Monte Carlo</a:t>
+                      </a:r>
+                    </a:p>
+                  </a:txBody>
+                </a:tc>
+              </a:tr>
+              <a:tr h="0">
+                <a:tc>
+                  <a:txBody>
+                    <a:bodyPr/>
+                    <a:lstStyle/>
+                    <a:p>
+                      <a:pPr lvl="0" indent="0" marL="0">
+                        <a:buNone/>
+                      </a:pPr>
+                      <a:r>
+                        <a:rPr/>
+                        <a:t>3-5</a:t>
+                      </a:r>
+                    </a:p>
+                  </a:txBody>
+                </a:tc>
+                <a:tc>
+                  <a:txBody>
+                    <a:bodyPr/>
+                    <a:lstStyle/>
+                    <a:p>
+                      <a:pPr lvl="0" indent="0" marL="0">
+                        <a:buNone/>
+                      </a:pPr>
+                      <a:r>
+                        <a:rPr/>
+                        <a:t>Risk Metrics</a:t>
+                      </a:r>
+                    </a:p>
+                  </a:txBody>
+                </a:tc>
+                <a:tc>
+                  <a:txBody>
+                    <a:bodyPr/>
+                    <a:lstStyle/>
+                    <a:p>
+                      <a:pPr lvl="0" indent="0" marL="0">
+                        <a:buNone/>
+                      </a:pPr>
+                      <a:r>
+                        <a:rPr/>
+                        <a:t>EAD, VaR, CVaR</a:t>
+                      </a:r>
+                    </a:p>
+                  </a:txBody>
+                </a:tc>
+              </a:tr>
+              <a:tr h="0">
+                <a:tc>
+                  <a:txBody>
+                    <a:bodyPr/>
+                    <a:lstStyle/>
+                    <a:p>
+                      <a:pPr lvl="0" indent="0" marL="0">
+                        <a:buNone/>
+                      </a:pPr>
+                      <a:r>
+                        <a:rPr/>
+                        <a:t>6-8</a:t>
+                      </a:r>
+                    </a:p>
+                  </a:txBody>
+                </a:tc>
+                <a:tc>
+                  <a:txBody>
+                    <a:bodyPr/>
+                    <a:lstStyle/>
+                    <a:p>
+                      <a:pPr lvl="0" indent="0" marL="0">
+                        <a:buNone/>
+                      </a:pPr>
+                      <a:r>
+                        <a:rPr/>
+                        <a:t>Decision Analysis</a:t>
+                      </a:r>
+                    </a:p>
+                  </a:txBody>
+                </a:tc>
+                <a:tc>
+                  <a:txBody>
+                    <a:bodyPr/>
+                    <a:lstStyle/>
+                    <a:p>
+                      <a:pPr lvl="0" indent="0" marL="0">
+                        <a:buNone/>
+                      </a:pPr>
+                      <a:r>
+                        <a:rPr/>
+                        <a:t>Optimal static decisions</a:t>
+                      </a:r>
+                    </a:p>
+                  </a:txBody>
+                </a:tc>
+              </a:tr>
+              <a:tr h="0">
+                <a:tc>
+                  <a:txBody>
+                    <a:bodyPr/>
+                    <a:lstStyle/>
+                    <a:p>
+                      <a:pPr lvl="0" indent="0" marL="0">
+                        <a:buNone/>
+                      </a:pPr>
+                      <a:r>
+                        <a:rPr/>
+                        <a:t>10-13</a:t>
+                      </a:r>
+                    </a:p>
+                  </a:txBody>
+                </a:tc>
+                <a:tc>
+                  <a:txBody>
+                    <a:bodyPr/>
+                    <a:lstStyle/>
+                    <a:p>
+                      <a:pPr lvl="0" indent="0" marL="0">
+                        <a:buNone/>
+                      </a:pPr>
+                      <a:r>
+                        <a:rPr/>
+                        <a:t>Deep Uncertainty</a:t>
+                      </a:r>
+                    </a:p>
+                  </a:txBody>
+                </a:tc>
+                <a:tc>
+                  <a:txBody>
+                    <a:bodyPr/>
+                    <a:lstStyle/>
+                    <a:p>
+                      <a:pPr lvl="0" indent="0" marL="0">
+                        <a:buNone/>
+                      </a:pPr>
+                      <a:r>
+                        <a:rPr/>
+                        <a:t>Robust optimization</a:t>
+                      </a:r>
+                    </a:p>
+                  </a:txBody>
+                </a:tc>
+              </a:tr>
+            </a:tbl>
+          </a:graphicData>
+        </a:graphic>
+      </p:graphicFrame>
+    </p:spTree>
+  </p:cSld>
+</p:sld>
+</file>
+
+<file path=ppt/slides/slide41.xml><?xml version="1.0" encoding="utf-8"?>
+<p:sld xmlns:a="http://schemas.openxmlformats.org/drawingml/2006/main" xmlns:r="http://schemas.openxmlformats.org/officeDocument/2006/relationships" xmlns:p="http://schemas.openxmlformats.org/presentationml/2006/main">
+  <p:cSld>
+    <p:spTree>
+      <p:nvGrpSpPr>
+        <p:cNvPr id="1" name=""/>
+        <p:cNvGrpSpPr/>
+        <p:nvPr/>
+      </p:nvGrpSpPr>
+      <p:grpSpPr>
+        <a:xfrm>
+          <a:off x="0" y="0"/>
+          <a:ext cx="0" cy="0"/>
+          <a:chOff x="0" y="0"/>
+          <a:chExt cx="0" cy="0"/>
+        </a:xfrm>
+      </p:grpSpPr>
+      <p:sp>
+        <p:nvSpPr>
+          <p:cNvPr id="2" name="Title 1"/>
+          <p:cNvSpPr>
+            <a:spLocks noGrp="1"/>
+          </p:cNvSpPr>
+          <p:nvPr>
+            <p:ph type="title"/>
+          </p:nvPr>
+        </p:nvSpPr>
+        <p:spPr>
+          <a:xfrm>
+            <a:off x="722313" y="3305176"/>
+            <a:ext cx="7772400" cy="1021556"/>
+          </a:xfrm>
+        </p:spPr>
+        <p:txBody>
+          <a:bodyPr/>
+          <a:lstStyle/>
+          <a:p>
+            <a:pPr lvl="0" indent="0" marL="0">
+              <a:buNone/>
+            </a:pPr>
+            <a:r>
+              <a:rPr/>
+              <a:t>Wrap Up</a:t>
+            </a:r>
+          </a:p>
+        </p:txBody>
+      </p:sp>
+    </p:spTree>
+  </p:cSld>
+</p:sld>
+</file>
+
+<file path=ppt/slides/slide42.xml><?xml version="1.0" encoding="utf-8"?>
+<p:sld xmlns:a="http://schemas.openxmlformats.org/drawingml/2006/main" xmlns:r="http://schemas.openxmlformats.org/officeDocument/2006/relationships" xmlns:p="http://schemas.openxmlformats.org/presentationml/2006/main">
+  <p:cSld>
+    <p:spTree>
+      <p:nvGrpSpPr>
+        <p:cNvPr id="1" name=""/>
+        <p:cNvGrpSpPr/>
+        <p:nvPr/>
+      </p:nvGrpSpPr>
+      <p:grpSpPr>
+        <a:xfrm>
+          <a:off x="0" y="0"/>
+          <a:ext cx="0" cy="0"/>
+          <a:chOff x="0" y="0"/>
+          <a:chExt cx="0" cy="0"/>
+        </a:xfrm>
+      </p:grpSpPr>
+      <p:sp>
+        <p:nvSpPr>
+          <p:cNvPr id="2" name="Title 1"/>
+          <p:cNvSpPr>
+            <a:spLocks noGrp="1"/>
+          </p:cNvSpPr>
+          <p:nvPr>
+            <p:ph type="title"/>
+          </p:nvPr>
+        </p:nvSpPr>
+        <p:spPr/>
+        <p:txBody>
+          <a:bodyPr/>
+          <a:lstStyle/>
+          <a:p>
+            <a:pPr lvl="0" indent="0" marL="0">
+              <a:buNone/>
+            </a:pPr>
+            <a:r>
+              <a:rPr/>
+              <a:t>Key Takeaways</a:t>
+            </a:r>
+          </a:p>
+        </p:txBody>
+      </p:sp>
+      <p:sp>
+        <p:nvSpPr>
+          <p:cNvPr id="3" name="Content Placeholder 2"/>
+          <p:cNvSpPr>
+            <a:spLocks noGrp="1"/>
+          </p:cNvSpPr>
+          <p:nvPr>
+            <p:ph idx="1"/>
+          </p:nvPr>
+        </p:nvSpPr>
+        <p:spPr/>
+        <p:txBody>
+          <a:bodyPr/>
+          <a:lstStyle/>
+          <a:p>
+            <a:pPr lvl="0" indent="-342900" marL="342900">
+              <a:buAutoNum type="arabicPeriod"/>
+            </a:pPr>
+            <a:r>
+              <a:rPr b="1"/>
+              <a:t>Risk</a:t>
+            </a:r>
+            <a:r>
+              <a:rPr/>
+              <a:t> emerges from the interaction of hazard, exposure, and vulnerability</a:t>
+            </a:r>
+          </a:p>
+          <a:p>
+            <a:pPr lvl="0" indent="-342900" marL="342900">
+              <a:buAutoNum type="arabicPeriod"/>
+            </a:pPr>
+            <a:r>
+              <a:rPr b="1"/>
+              <a:t>Exposure is growing</a:t>
+            </a:r>
+            <a:r>
+              <a:rPr/>
+              <a:t>: More assets in harm’s way</a:t>
+            </a:r>
+          </a:p>
+          <a:p>
+            <a:pPr lvl="0" indent="-342900" marL="342900">
+              <a:buAutoNum type="arabicPeriod"/>
+            </a:pPr>
+            <a:r>
+              <a:rPr b="1"/>
+              <a:t>Convolution</a:t>
+            </a:r>
+            <a:r>
+              <a:rPr/>
+              <a:t> transforms hazard distributions into damage distributions</a:t>
+            </a:r>
+          </a:p>
+          <a:p>
+            <a:pPr lvl="0" indent="-342900" marL="342900">
+              <a:buAutoNum type="arabicPeriod"/>
+            </a:pPr>
+            <a:r>
+              <a:rPr b="1"/>
+              <a:t>Monte Carlo</a:t>
+            </a:r>
+            <a:r>
+              <a:rPr/>
+              <a:t> lets us handle complex, nonlinear systems</a:t>
+            </a:r>
+          </a:p>
+          <a:p>
+            <a:pPr lvl="0" indent="-342900" marL="342900">
+              <a:buAutoNum type="arabicPeriod"/>
+            </a:pPr>
+            <a:r>
+              <a:rPr/>
+              <a:t>The </a:t>
+            </a:r>
+            <a:r>
+              <a:rPr b="1"/>
+              <a:t>house elevation problem</a:t>
+            </a:r>
+            <a:r>
+              <a:rPr/>
+              <a:t> gives us a concrete sandbox</a:t>
+            </a:r>
+          </a:p>
+        </p:txBody>
+      </p:sp>
+    </p:spTree>
+  </p:cSld>
+</p:sld>
+</file>
+
+<file path=ppt/slides/slide43.xml><?xml version="1.0" encoding="utf-8"?>
+<p:sld xmlns:a="http://schemas.openxmlformats.org/drawingml/2006/main" xmlns:r="http://schemas.openxmlformats.org/officeDocument/2006/relationships" xmlns:p="http://schemas.openxmlformats.org/presentationml/2006/main">
+  <p:cSld>
+    <p:spTree>
+      <p:nvGrpSpPr>
+        <p:cNvPr id="1" name=""/>
+        <p:cNvGrpSpPr/>
+        <p:nvPr/>
+      </p:nvGrpSpPr>
+      <p:grpSpPr>
+        <a:xfrm>
+          <a:off x="0" y="0"/>
+          <a:ext cx="0" cy="0"/>
+          <a:chOff x="0" y="0"/>
+          <a:chExt cx="0" cy="0"/>
+        </a:xfrm>
+      </p:grpSpPr>
+      <p:sp>
+        <p:nvSpPr>
+          <p:cNvPr id="2" name="Title 1"/>
+          <p:cNvSpPr>
+            <a:spLocks noGrp="1"/>
+          </p:cNvSpPr>
+          <p:nvPr>
+            <p:ph type="title"/>
+          </p:nvPr>
+        </p:nvSpPr>
+        <p:spPr/>
+        <p:txBody>
+          <a:bodyPr/>
+          <a:lstStyle/>
+          <a:p>
+            <a:pPr lvl="0" indent="0" marL="0">
+              <a:buNone/>
+            </a:pPr>
+            <a:r>
+              <a:rPr/>
+              <a:t>Lab Preview: Friday</a:t>
+            </a:r>
+          </a:p>
+        </p:txBody>
+      </p:sp>
+      <p:sp>
+        <p:nvSpPr>
+          <p:cNvPr id="3" name="Content Placeholder 2"/>
+          <p:cNvSpPr>
+            <a:spLocks noGrp="1"/>
+          </p:cNvSpPr>
+          <p:nvPr>
+            <p:ph idx="1"/>
+          </p:nvPr>
+        </p:nvSpPr>
+        <p:spPr/>
+        <p:txBody>
+          <a:bodyPr/>
+          <a:lstStyle/>
+          <a:p>
+            <a:pPr lvl="0" indent="0" marL="0">
+              <a:buNone/>
+            </a:pPr>
+            <a:r>
+              <a:rPr/>
+              <a:t>On Friday, you will:</a:t>
+            </a:r>
+          </a:p>
+          <a:p>
+            <a:pPr lvl="0" indent="-342900" marL="342900">
+              <a:buAutoNum type="arabicPeriod"/>
+            </a:pPr>
+            <a:r>
+              <a:rPr/>
+              <a:t>Define a GEV distribution for storm surge</a:t>
+            </a:r>
+          </a:p>
+          <a:p>
+            <a:pPr lvl="0" indent="-342900" marL="342900">
+              <a:buAutoNum type="arabicPeriod"/>
+            </a:pPr>
+            <a:r>
+              <a:rPr/>
+              <a:t>Implement a depth-damage function</a:t>
+            </a:r>
+          </a:p>
+          <a:p>
+            <a:pPr lvl="0" indent="-342900" marL="342900">
+              <a:buAutoNum type="arabicPeriod"/>
+            </a:pPr>
+            <a:r>
+              <a:rPr/>
+              <a:t>Use Monte Carlo to compute damage distributions</a:t>
+            </a:r>
+          </a:p>
+          <a:p>
+            <a:pPr lvl="0" indent="-342900" marL="342900">
+              <a:buAutoNum type="arabicPeriod"/>
+            </a:pPr>
+            <a:r>
+              <a:rPr/>
+              <a:t>Extend to 100 houses at varying elevations</a:t>
+            </a:r>
+          </a:p>
+          <a:p>
+            <a:pPr lvl="0" indent="-342900" marL="342900">
+              <a:buAutoNum type="arabicPeriod"/>
+            </a:pPr>
+            <a:r>
+              <a:rPr/>
+              <a:t>Begin using the SimOptDecisions.jl framework</a:t>
+            </a:r>
+          </a:p>
+        </p:txBody>
+      </p:sp>
+    </p:spTree>
+  </p:cSld>
+</p:sld>
+</file>
+
+<file path=ppt/slides/slide44.xml><?xml version="1.0" encoding="utf-8"?>
+<p:sld xmlns:a="http://schemas.openxmlformats.org/drawingml/2006/main" xmlns:r="http://schemas.openxmlformats.org/officeDocument/2006/relationships" xmlns:p="http://schemas.openxmlformats.org/presentationml/2006/main">
+  <p:cSld>
+    <p:spTree>
+      <p:nvGrpSpPr>
+        <p:cNvPr id="1" name=""/>
+        <p:cNvGrpSpPr/>
+        <p:nvPr/>
+      </p:nvGrpSpPr>
+      <p:grpSpPr>
+        <a:xfrm>
+          <a:off x="0" y="0"/>
+          <a:ext cx="0" cy="0"/>
+          <a:chOff x="0" y="0"/>
+          <a:chExt cx="0" cy="0"/>
+        </a:xfrm>
+      </p:grpSpPr>
+      <p:sp>
+        <p:nvSpPr>
+          <p:cNvPr id="2" name="Title 1"/>
+          <p:cNvSpPr>
+            <a:spLocks noGrp="1"/>
+          </p:cNvSpPr>
+          <p:nvPr>
+            <p:ph type="title"/>
+          </p:nvPr>
+        </p:nvSpPr>
+        <p:spPr/>
+        <p:txBody>
+          <a:bodyPr/>
+          <a:lstStyle/>
+          <a:p>
+            <a:pPr lvl="0" indent="0" marL="0">
+              <a:buNone/>
+            </a:pPr>
+            <a:r>
+              <a:rPr/>
+              <a:t>References</a:t>
+            </a:r>
+          </a:p>
+        </p:txBody>
+      </p:sp>
+      <p:sp>
+        <p:nvSpPr>
+          <p:cNvPr id="3" name="Content Placeholder 2"/>
+          <p:cNvSpPr>
+            <a:spLocks noGrp="1"/>
+          </p:cNvSpPr>
+          <p:nvPr>
+            <p:ph idx="1"/>
+          </p:nvPr>
+        </p:nvSpPr>
+        <p:spPr/>
+        <p:txBody>
+          <a:bodyPr/>
+          <a:lstStyle/>
+          <a:p>
+            <a:pPr lvl="0" indent="0" marL="0">
+              <a:buNone/>
+            </a:pPr>
+            <a:r>
+              <a:rPr/>
+              <a:t>Gidaris, Ioannis, Jamie E. Padgett, Andre R. Barbosa, Suren Chen, Daniel Cox, Bret Webb, and Amy Cerato. 2017. “Multiple-Hazard Fragility and Restoration Models of Highway Bridges for Regional Risk and Resilience Assessment in the United States: State-of-the-Art Review.” </a:t>
+            </a:r>
+            <a:r>
+              <a:rPr i="1"/>
+              <a:t>Journal of Structural Engineering</a:t>
+            </a:r>
+            <a:r>
+              <a:rPr/>
+              <a:t> 143 (3): 04016188. </a:t>
+            </a:r>
+            <a:r>
+              <a:rPr>
+                <a:hlinkClick r:id="rId2"/>
+              </a:rPr>
+              <a:t>https://doi.org/10.1061/(ASCE)ST.1943-541X.0001672</a:t>
+            </a:r>
+            <a:r>
+              <a:rPr/>
+              <a:t>.</a:t>
+            </a:r>
+          </a:p>
+          <a:p>
+            <a:pPr lvl="0" indent="0" marL="0">
+              <a:buNone/>
+            </a:pPr>
+            <a:r>
+              <a:rPr/>
+              <a:t>Jongman, Brenden, Philip J Ward, and Jeroen C J H Aerts. 2012. “Global Exposure to River and Coastal Flooding: Long Term Trends and Changes.” </a:t>
+            </a:r>
+            <a:r>
+              <a:rPr i="1"/>
+              <a:t>Global Environmental Change</a:t>
+            </a:r>
+            <a:r>
+              <a:rPr/>
+              <a:t> 22 (4): 823–35. </a:t>
+            </a:r>
+            <a:r>
+              <a:rPr>
+                <a:hlinkClick r:id="rId3"/>
+              </a:rPr>
+              <a:t>https://doi.org/10.1016/j.gloenvcha.2012.07.004</a:t>
+            </a:r>
+            <a:r>
+              <a:rPr/>
+              <a:t>.</a:t>
+            </a:r>
+          </a:p>
+          <a:p>
+            <a:pPr lvl="0" indent="0" marL="0">
+              <a:buNone/>
+            </a:pPr>
+            <a:r>
+              <a:rPr/>
+              <a:t>Moel, Hans de, Mathijs van Vliet, and Jeroen C. J. H. Aerts. 2014. “Evaluating the Effect of Flood Damage-Reducing Measures: A Case Study of the Unembanked Area of Rotterdam, the Netherlands.” </a:t>
+            </a:r>
+            <a:r>
+              <a:rPr i="1"/>
+              <a:t>Regional Environmental Change</a:t>
+            </a:r>
+            <a:r>
+              <a:rPr/>
+              <a:t> 14 (3): 895–908. </a:t>
+            </a:r>
+            <a:r>
+              <a:rPr>
+                <a:hlinkClick r:id="rId4"/>
+              </a:rPr>
+              <a:t>https://doi.org/10.1007/s10113-013-0420-z</a:t>
+            </a:r>
+            <a:r>
+              <a:rPr/>
+              <a:t>.</a:t>
+            </a:r>
+          </a:p>
+          <a:p>
+            <a:pPr lvl="0" indent="0" marL="0">
+              <a:buNone/>
+            </a:pPr>
+            <a:r>
+              <a:rPr/>
+              <a:t>Tedesco, Marco, Steven McAlpine, and Jeremy R. Porter. 2020. “Exposure of Real Estate Properties to the 2018 Hurricane Florence Flooding.” </a:t>
+            </a:r>
+            <a:r>
+              <a:rPr i="1"/>
+              <a:t>Natural Hazards and Earth System Sciences</a:t>
+            </a:r>
+            <a:r>
+              <a:rPr/>
+              <a:t> 20 (3): 907–20. </a:t>
+            </a:r>
+            <a:r>
+              <a:rPr>
+                <a:hlinkClick r:id="rId5"/>
+              </a:rPr>
+              <a:t>https://doi.org/10.5194/nhess-20-907-2020</a:t>
+            </a:r>
+            <a:r>
+              <a:rPr/>
+              <a:t>.</a:t>
+            </a:r>
+          </a:p>
+          <a:p>
+            <a:pPr lvl="0" indent="0" marL="0">
+              <a:buNone/>
+            </a:pPr>
+            <a:r>
+              <a:rPr/>
+              <a:t>Wing, Oliver E. J., Nicholas Pinter, Paul D. Bates, and Carolyn Kousky. 2020. “New Insights into US Flood Vulnerability Revealed from Flood Insurance Big Data.” </a:t>
+            </a:r>
+            <a:r>
+              <a:rPr i="1"/>
+              <a:t>Nature Communications</a:t>
+            </a:r>
+            <a:r>
+              <a:rPr/>
+              <a:t> 11 (1, 1): 1444. </a:t>
+            </a:r>
+            <a:r>
+              <a:rPr>
+                <a:hlinkClick r:id="rId6"/>
+              </a:rPr>
+              <a:t>https://doi.org/10.1038/s41467-020-15264-2</a:t>
+            </a:r>
+            <a:r>
+              <a:rPr/>
+              <a:t>.</a:t>
+            </a:r>
+          </a:p>
+        </p:txBody>
+      </p:sp>
+    </p:spTree>
+  </p:cSld>
 </p:sld>
 </file>
 
@@ -8944,312 +11728,182 @@
             </a:pPr>
             <a:r>
               <a:rPr/>
-              <a:t>The Core Question</a:t>
-            </a:r>
-          </a:p>
-        </p:txBody>
-      </p:sp>
-      <p:sp>
-        <p:nvSpPr>
-          <p:cNvPr id="3" name="Content Placeholder 2"/>
-          <p:cNvSpPr>
-            <a:spLocks noGrp="1"/>
-          </p:cNvSpPr>
-          <p:nvPr>
-            <p:ph idx="1"/>
-          </p:nvPr>
-        </p:nvSpPr>
-        <p:spPr/>
-        <p:txBody>
-          <a:bodyPr/>
-          <a:lstStyle/>
-          <a:p>
-            <a:pPr lvl="0" indent="0" marL="0">
-              <a:buNone/>
-            </a:pPr>
-            <a:r>
-              <a:rPr b="1"/>
-              <a:t>How do we translate hazards into damages?</a:t>
-            </a:r>
-          </a:p>
-          <a:p>
-            <a:pPr lvl="0" indent="0" marL="0">
-              <a:buNone/>
-            </a:pPr>
-            <a:r>
-              <a:rPr/>
-              <a:t>Today we will:</a:t>
-            </a:r>
-          </a:p>
-          <a:p>
-            <a:pPr lvl="0" indent="-342900" marL="342900">
-              <a:buAutoNum type="arabicPeriod"/>
-            </a:pPr>
-            <a:r>
-              <a:rPr/>
-              <a:t>Define key vocabulary: hazard, exposure, vulnerability</a:t>
-            </a:r>
-          </a:p>
-          <a:p>
-            <a:pPr lvl="0" indent="-342900" marL="342900">
-              <a:buAutoNum type="arabicPeriod"/>
-            </a:pPr>
-            <a:r>
-              <a:rPr/>
-              <a:t>Review the XLRM framework for structuring risk problems</a:t>
-            </a:r>
-          </a:p>
-          <a:p>
-            <a:pPr lvl="0" indent="-342900" marL="342900">
-              <a:buAutoNum type="arabicPeriod"/>
-            </a:pPr>
-            <a:r>
-              <a:rPr/>
-              <a:t>Introduce the GEV distribution for extreme events</a:t>
-            </a:r>
-          </a:p>
-          <a:p>
-            <a:pPr lvl="0" indent="-342900" marL="342900">
-              <a:buAutoNum type="arabicPeriod"/>
-            </a:pPr>
-            <a:r>
-              <a:rPr/>
-              <a:t>Preview the iCOW model we’ll use all semester</a:t>
-            </a:r>
-          </a:p>
-        </p:txBody>
-      </p:sp>
+              <a:t>Quick Estimate: Answer</a:t>
+            </a:r>
+          </a:p>
+        </p:txBody>
+      </p:sp>
+      <mc:AlternateContent xmlns:mc="http://schemas.openxmlformats.org/markup-compatibility/2006">
+        <mc:Choice xmlns:a14="http://schemas.microsoft.com/office/drawing/2010/main" Requires="a14">
+          <p:sp>
+            <p:nvSpPr>
+              <p:cNvPr id="3" name="Content Placeholder 2"/>
+              <p:cNvSpPr>
+                <a:spLocks noGrp="1"/>
+              </p:cNvSpPr>
+              <p:nvPr>
+                <p:ph idx="1"/>
+              </p:nvPr>
+            </p:nvSpPr>
+            <p:spPr/>
+            <p:txBody>
+              <a:bodyPr/>
+              <a:lstStyle/>
+              <a:p>
+                <a:pPr lvl="0" indent="0" marL="0">
+                  <a:buNone/>
+                </a:pPr>
+                <a14:m>
+                  <m:oMathPara xmlns:m="http://schemas.openxmlformats.org/officeDocument/2006/math">
+                    <m:oMathParaPr>
+                      <m:jc m:val="center"/>
+                    </m:oMathParaPr>
+                    <m:oMath>
+                      <m:r>
+                        <m:t>E</m:t>
+                      </m:r>
+                      <m:d>
+                        <m:dPr>
+                          <m:begChr m:val="["/>
+                          <m:sepChr m:val=""/>
+                          <m:endChr m:val="]"/>
+                          <m:grow/>
+                        </m:dPr>
+                        <m:e>
+                          <m:r>
+                            <m:rPr>
+                              <m:nor/>
+                              <m:sty m:val="p"/>
+                            </m:rPr>
+                            <m:t>Damage</m:t>
+                          </m:r>
+                        </m:e>
+                      </m:d>
+                      <m:r>
+                        <m:rPr>
+                          <m:sty m:val="p"/>
+                        </m:rPr>
+                        <m:t>=</m:t>
+                      </m:r>
+                      <m:r>
+                        <m:t>0.8</m:t>
+                      </m:r>
+                      <m:r>
+                        <m:rPr>
+                          <m:sty m:val="p"/>
+                        </m:rPr>
+                        <m:t>×</m:t>
+                      </m:r>
+                      <m:r>
+                        <m:rPr>
+                          <m:sty m:val="p"/>
+                        </m:rPr>
+                        <m:t>$</m:t>
+                      </m:r>
+                      <m:r>
+                        <m:t>0</m:t>
+                      </m:r>
+                      <m:r>
+                        <m:rPr>
+                          <m:sty m:val="p"/>
+                        </m:rPr>
+                        <m:t>+</m:t>
+                      </m:r>
+                      <m:r>
+                        <m:t>0.2</m:t>
+                      </m:r>
+                      <m:r>
+                        <m:rPr>
+                          <m:sty m:val="p"/>
+                        </m:rPr>
+                        <m:t>×</m:t>
+                      </m:r>
+                      <m:r>
+                        <m:rPr>
+                          <m:sty m:val="p"/>
+                        </m:rPr>
+                        <m:t>$</m:t>
+                      </m:r>
+                      <m:r>
+                        <m:t>50</m:t>
+                      </m:r>
+                      <m:r>
+                        <m:rPr>
+                          <m:sty m:val="p"/>
+                        </m:rPr>
+                        <m:t>,</m:t>
+                      </m:r>
+                      <m:r>
+                        <m:t>000</m:t>
+                      </m:r>
+                      <m:r>
+                        <m:rPr>
+                          <m:sty m:val="p"/>
+                        </m:rPr>
+                        <m:t>=</m:t>
+                      </m:r>
+                      <m:r>
+                        <m:rPr>
+                          <m:sty m:val="p"/>
+                        </m:rPr>
+                        <m:t>$</m:t>
+                      </m:r>
+                      <m:r>
+                        <m:t>10</m:t>
+                      </m:r>
+                      <m:r>
+                        <m:rPr>
+                          <m:sty m:val="p"/>
+                        </m:rPr>
+                        <m:t>,</m:t>
+                      </m:r>
+                      <m:r>
+                        <m:t>000</m:t>
+                      </m:r>
+                    </m:oMath>
+                  </m:oMathPara>
+                </a14:m>
+              </a:p>
+              <a:p>
+                <a:pPr lvl="0" indent="0" marL="0">
+                  <a:buNone/>
+                </a:pPr>
+                <a:r>
+                  <a:rPr/>
+                  <a:t>This simple calculation is the core of </a:t>
+                </a:r>
+                <a:r>
+                  <a:rPr b="1"/>
+                  <a:t>risk analysis</a:t>
+                </a:r>
+                <a:r>
+                  <a:rPr/>
+                  <a:t>.</a:t>
+                </a:r>
+              </a:p>
+              <a:p>
+                <a:pPr lvl="0" indent="0" marL="0">
+                  <a:buNone/>
+                </a:pPr>
+                <a:r>
+                  <a:rPr/>
+                  <a:t>Today: How do we do this when floods and damages are </a:t>
+                </a:r>
+                <a:r>
+                  <a:rPr i="1"/>
+                  <a:t>continuous</a:t>
+                </a:r>
+                <a:r>
+                  <a:rPr/>
+                  <a:t>?</a:t>
+                </a:r>
+              </a:p>
+            </p:txBody>
+          </p:sp>
+        </mc:Choice>
+      </mc:AlternateContent>
     </p:spTree>
   </p:cSld>
-  <p:timing>
-    <p:tnLst>
-      <p:par>
-        <p:cTn id="1" dur="indefinite" restart="never" nodeType="tmRoot">
-          <p:childTnLst>
-            <p:seq concurrent="1" nextAc="seek">
-              <p:cTn id="2" dur="indefinite" nodeType="mainSeq">
-                <p:childTnLst>
-                  <p:par>
-                    <p:cTn id="3" fill="hold">
-                      <p:stCondLst>
-                        <p:cond delay="indefinite"/>
-                      </p:stCondLst>
-                      <p:childTnLst>
-                        <p:par>
-                          <p:cTn id="4" fill="hold">
-                            <p:stCondLst>
-                              <p:cond delay="0"/>
-                            </p:stCondLst>
-                            <p:childTnLst>
-                              <p:par>
-                                <p:cTn id="5" presetID="1" presetClass="entr" presetSubtype="0" fill="hold" grpId="0" nodeType="clickEffect">
-                                  <p:stCondLst>
-                                    <p:cond delay="0"/>
-                                  </p:stCondLst>
-                                  <p:childTnLst>
-                                    <p:set>
-                                      <p:cBhvr>
-                                        <p:cTn id="6" dur="1" fill="hold">
-                                          <p:stCondLst>
-                                            <p:cond delay="0"/>
-                                          </p:stCondLst>
-                                        </p:cTn>
-                                        <p:tgtEl>
-                                          <p:spTgt spid="3">
-                                            <p:txEl>
-                                              <p:pRg st="2" end="2"/>
-                                            </p:txEl>
-                                          </p:spTgt>
-                                        </p:tgtEl>
-                                        <p:attrNameLst>
-                                          <p:attrName>style.visibility</p:attrName>
-                                        </p:attrNameLst>
-                                      </p:cBhvr>
-                                      <p:to>
-                                        <p:strVal val="visible"/>
-                                      </p:to>
-                                    </p:set>
-                                  </p:childTnLst>
-                                </p:cTn>
-                              </p:par>
-                            </p:childTnLst>
-                          </p:cTn>
-                        </p:par>
-                      </p:childTnLst>
-                    </p:cTn>
-                  </p:par>
-                  <p:par>
-                    <p:cTn id="7" fill="hold">
-                      <p:stCondLst>
-                        <p:cond delay="indefinite"/>
-                      </p:stCondLst>
-                      <p:childTnLst>
-                        <p:par>
-                          <p:cTn id="8" fill="hold">
-                            <p:stCondLst>
-                              <p:cond delay="0"/>
-                            </p:stCondLst>
-                            <p:childTnLst>
-                              <p:par>
-                                <p:cTn id="9" presetID="1" presetClass="entr" presetSubtype="0" fill="hold" grpId="0" nodeType="clickEffect">
-                                  <p:stCondLst>
-                                    <p:cond delay="0"/>
-                                  </p:stCondLst>
-                                  <p:childTnLst>
-                                    <p:set>
-                                      <p:cBhvr>
-                                        <p:cTn id="10" dur="1" fill="hold">
-                                          <p:stCondLst>
-                                            <p:cond delay="0"/>
-                                          </p:stCondLst>
-                                        </p:cTn>
-                                        <p:tgtEl>
-                                          <p:spTgt spid="3">
-                                            <p:txEl>
-                                              <p:pRg st="3" end="3"/>
-                                            </p:txEl>
-                                          </p:spTgt>
-                                        </p:tgtEl>
-                                        <p:attrNameLst>
-                                          <p:attrName>style.visibility</p:attrName>
-                                        </p:attrNameLst>
-                                      </p:cBhvr>
-                                      <p:to>
-                                        <p:strVal val="visible"/>
-                                      </p:to>
-                                    </p:set>
-                                  </p:childTnLst>
-                                </p:cTn>
-                              </p:par>
-                            </p:childTnLst>
-                          </p:cTn>
-                        </p:par>
-                      </p:childTnLst>
-                    </p:cTn>
-                  </p:par>
-                  <p:par>
-                    <p:cTn id="11" fill="hold">
-                      <p:stCondLst>
-                        <p:cond delay="indefinite"/>
-                      </p:stCondLst>
-                      <p:childTnLst>
-                        <p:par>
-                          <p:cTn id="12" fill="hold">
-                            <p:stCondLst>
-                              <p:cond delay="0"/>
-                            </p:stCondLst>
-                            <p:childTnLst>
-                              <p:par>
-                                <p:cTn id="13" presetID="1" presetClass="entr" presetSubtype="0" fill="hold" grpId="0" nodeType="clickEffect">
-                                  <p:stCondLst>
-                                    <p:cond delay="0"/>
-                                  </p:stCondLst>
-                                  <p:childTnLst>
-                                    <p:set>
-                                      <p:cBhvr>
-                                        <p:cTn id="14" dur="1" fill="hold">
-                                          <p:stCondLst>
-                                            <p:cond delay="0"/>
-                                          </p:stCondLst>
-                                        </p:cTn>
-                                        <p:tgtEl>
-                                          <p:spTgt spid="3">
-                                            <p:txEl>
-                                              <p:pRg st="4" end="4"/>
-                                            </p:txEl>
-                                          </p:spTgt>
-                                        </p:tgtEl>
-                                        <p:attrNameLst>
-                                          <p:attrName>style.visibility</p:attrName>
-                                        </p:attrNameLst>
-                                      </p:cBhvr>
-                                      <p:to>
-                                        <p:strVal val="visible"/>
-                                      </p:to>
-                                    </p:set>
-                                  </p:childTnLst>
-                                </p:cTn>
-                              </p:par>
-                            </p:childTnLst>
-                          </p:cTn>
-                        </p:par>
-                      </p:childTnLst>
-                    </p:cTn>
-                  </p:par>
-                  <p:par>
-                    <p:cTn id="15" fill="hold">
-                      <p:stCondLst>
-                        <p:cond delay="indefinite"/>
-                      </p:stCondLst>
-                      <p:childTnLst>
-                        <p:par>
-                          <p:cTn id="16" fill="hold">
-                            <p:stCondLst>
-                              <p:cond delay="0"/>
-                            </p:stCondLst>
-                            <p:childTnLst>
-                              <p:par>
-                                <p:cTn id="17" presetID="1" presetClass="entr" presetSubtype="0" fill="hold" grpId="0" nodeType="clickEffect">
-                                  <p:stCondLst>
-                                    <p:cond delay="0"/>
-                                  </p:stCondLst>
-                                  <p:childTnLst>
-                                    <p:set>
-                                      <p:cBhvr>
-                                        <p:cTn id="18" dur="1" fill="hold">
-                                          <p:stCondLst>
-                                            <p:cond delay="0"/>
-                                          </p:stCondLst>
-                                        </p:cTn>
-                                        <p:tgtEl>
-                                          <p:spTgt spid="3">
-                                            <p:txEl>
-                                              <p:pRg st="5" end="5"/>
-                                            </p:txEl>
-                                          </p:spTgt>
-                                        </p:tgtEl>
-                                        <p:attrNameLst>
-                                          <p:attrName>style.visibility</p:attrName>
-                                        </p:attrNameLst>
-                                      </p:cBhvr>
-                                      <p:to>
-                                        <p:strVal val="visible"/>
-                                      </p:to>
-                                    </p:set>
-                                  </p:childTnLst>
-                                </p:cTn>
-                              </p:par>
-                            </p:childTnLst>
-                          </p:cTn>
-                        </p:par>
-                      </p:childTnLst>
-                    </p:cTn>
-                  </p:par>
-                </p:childTnLst>
-              </p:cTn>
-              <p:prevCondLst>
-                <p:cond evt="onPrev" delay="0">
-                  <p:tgtEl>
-                    <p:sldTgt/>
-                  </p:tgtEl>
-                </p:cond>
-              </p:prevCondLst>
-              <p:nextCondLst>
-                <p:cond evt="onNext" delay="0">
-                  <p:tgtEl>
-                    <p:sldTgt/>
-                  </p:tgtEl>
-                </p:cond>
-              </p:nextCondLst>
-            </p:seq>
-          </p:childTnLst>
-        </p:cTn>
-      </p:par>
-    </p:tnLst>
-    <p:bldLst>
-      <p:bldP spid="3" grpId="0" uiExpand="1" build="p"/>
-    </p:bldLst>
-  </p:timing>
 </p:sld>
 </file>
 
@@ -9280,12 +11934,7 @@
             <p:ph type="title"/>
           </p:nvPr>
         </p:nvSpPr>
-        <p:spPr>
-          <a:xfrm>
-            <a:off x="722313" y="3305176"/>
-            <a:ext cx="7772400" cy="1021556"/>
-          </a:xfrm>
-        </p:spPr>
+        <p:spPr/>
         <p:txBody>
           <a:bodyPr/>
           <a:lstStyle/>
@@ -9295,11 +11944,143 @@
             </a:pPr>
             <a:r>
               <a:rPr/>
-              <a:t>Risk Analysis Vocabulary</a:t>
-            </a:r>
-          </a:p>
-        </p:txBody>
-      </p:sp>
+              <a:t>Today</a:t>
+            </a:r>
+          </a:p>
+        </p:txBody>
+      </p:sp>
+      <mc:AlternateContent xmlns:mc="http://schemas.openxmlformats.org/markup-compatibility/2006">
+        <mc:Choice xmlns:a14="http://schemas.microsoft.com/office/drawing/2010/main" Requires="a14">
+          <p:sp>
+            <p:nvSpPr>
+              <p:cNvPr id="3" name="Content Placeholder 2"/>
+              <p:cNvSpPr>
+                <a:spLocks noGrp="1"/>
+              </p:cNvSpPr>
+              <p:nvPr>
+                <p:ph idx="1"/>
+              </p:nvPr>
+            </p:nvSpPr>
+            <p:spPr/>
+            <p:txBody>
+              <a:bodyPr/>
+              <a:lstStyle/>
+              <a:p>
+                <a:pPr lvl="0" indent="-342900" marL="342900">
+                  <a:buAutoNum type="arabicPeriod"/>
+                </a:pPr>
+                <a:r>
+                  <a:rPr/>
+                  <a:t>Define key vocabulary: hazard, exposure, vulnerability</a:t>
+                </a:r>
+              </a:p>
+              <a:p>
+                <a:pPr lvl="0" indent="-342900" marL="342900">
+                  <a:buAutoNum type="arabicPeriod"/>
+                </a:pPr>
+                <a:r>
+                  <a:rPr/>
+                  <a:t>See how these combine to produce </a:t>
+                </a:r>
+                <a:r>
+                  <a:rPr b="1"/>
+                  <a:t>risk</a:t>
+                </a:r>
+              </a:p>
+              <a:p>
+                <a:pPr lvl="0" indent="-342900" marL="342900">
+                  <a:buAutoNum type="arabicPeriod"/>
+                </a:pPr>
+                <a:r>
+                  <a:rPr/>
+                  <a:t>Learn why </a:t>
+                </a:r>
+                <a14:m>
+                  <m:oMath xmlns:m="http://schemas.openxmlformats.org/officeDocument/2006/math">
+                    <m:r>
+                      <m:t>E</m:t>
+                    </m:r>
+                    <m:d>
+                      <m:dPr>
+                        <m:begChr m:val="["/>
+                        <m:sepChr m:val=""/>
+                        <m:endChr m:val="]"/>
+                        <m:grow/>
+                      </m:dPr>
+                      <m:e>
+                        <m:r>
+                          <m:t>f</m:t>
+                        </m:r>
+                        <m:d>
+                          <m:dPr>
+                            <m:begChr m:val="("/>
+                            <m:sepChr m:val=""/>
+                            <m:endChr m:val=")"/>
+                            <m:grow/>
+                          </m:dPr>
+                          <m:e>
+                            <m:r>
+                              <m:t>x</m:t>
+                            </m:r>
+                          </m:e>
+                        </m:d>
+                      </m:e>
+                    </m:d>
+                    <m:r>
+                      <m:rPr>
+                        <m:sty m:val="p"/>
+                      </m:rPr>
+                      <m:t>≠</m:t>
+                    </m:r>
+                    <m:r>
+                      <m:t>f</m:t>
+                    </m:r>
+                    <m:d>
+                      <m:dPr>
+                        <m:begChr m:val="("/>
+                        <m:sepChr m:val=""/>
+                        <m:endChr m:val=")"/>
+                        <m:grow/>
+                      </m:dPr>
+                      <m:e>
+                        <m:r>
+                          <m:t>E</m:t>
+                        </m:r>
+                        <m:d>
+                          <m:dPr>
+                            <m:begChr m:val="["/>
+                            <m:sepChr m:val=""/>
+                            <m:endChr m:val="]"/>
+                            <m:grow/>
+                          </m:dPr>
+                          <m:e>
+                            <m:r>
+                              <m:t>x</m:t>
+                            </m:r>
+                          </m:e>
+                        </m:d>
+                      </m:e>
+                    </m:d>
+                  </m:oMath>
+                </a14:m>
+                <a:r>
+                  <a:rPr/>
+                  <a:t> (Jensen’s inequality)</a:t>
+                </a:r>
+              </a:p>
+              <a:p>
+                <a:pPr lvl="0" indent="-342900" marL="342900">
+                  <a:buAutoNum type="arabicPeriod"/>
+                </a:pPr>
+                <a:r>
+                  <a:rPr/>
+                  <a:t>Introduce Monte Carlo for complex damage functions</a:t>
+                </a:r>
+              </a:p>
+            </p:txBody>
+          </p:sp>
+        </mc:Choice>
+      </mc:AlternateContent>
     </p:spTree>
   </p:cSld>
 </p:sld>
@@ -9332,7 +12113,12 @@
             <p:ph type="title"/>
           </p:nvPr>
         </p:nvSpPr>
-        <p:spPr/>
+        <p:spPr>
+          <a:xfrm>
+            <a:off x="722313" y="3305176"/>
+            <a:ext cx="7772400" cy="1021556"/>
+          </a:xfrm>
+        </p:spPr>
         <p:txBody>
           <a:bodyPr/>
           <a:lstStyle/>
@@ -9342,81 +12128,7 @@
             </a:pPr>
             <a:r>
               <a:rPr/>
-              <a:t>Hazard</a:t>
-            </a:r>
-          </a:p>
-        </p:txBody>
-      </p:sp>
-      <p:sp>
-        <p:nvSpPr>
-          <p:cNvPr id="3" name="Content Placeholder 2"/>
-          <p:cNvSpPr>
-            <a:spLocks noGrp="1"/>
-          </p:cNvSpPr>
-          <p:nvPr>
-            <p:ph idx="1"/>
-          </p:nvPr>
-        </p:nvSpPr>
-        <p:spPr/>
-        <p:txBody>
-          <a:bodyPr/>
-          <a:lstStyle/>
-          <a:p>
-            <a:pPr lvl="0" indent="0" marL="0">
-              <a:buNone/>
-            </a:pPr>
-            <a:r>
-              <a:rPr b="1"/>
-              <a:t>Hazard:</a:t>
-            </a:r>
-            <a:r>
-              <a:rPr/>
-              <a:t> The physical event or phenomenon</a:t>
-            </a:r>
-          </a:p>
-          <a:p>
-            <a:pPr lvl="0"/>
-            <a:r>
-              <a:rPr/>
-              <a:t>Flood depth at a location</a:t>
-            </a:r>
-          </a:p>
-          <a:p>
-            <a:pPr lvl="0"/>
-            <a:r>
-              <a:rPr/>
-              <a:t>Wind speed during a storm</a:t>
-            </a:r>
-          </a:p>
-          <a:p>
-            <a:pPr lvl="0"/>
-            <a:r>
-              <a:rPr/>
-              <a:t>Ground shaking from an earthquake</a:t>
-            </a:r>
-          </a:p>
-          <a:p>
-            <a:pPr lvl="0"/>
-            <a:r>
-              <a:rPr/>
-              <a:t>Extreme temperature</a:t>
-            </a:r>
-          </a:p>
-          <a:p>
-            <a:pPr lvl="0" indent="0" marL="0">
-              <a:buNone/>
-            </a:pPr>
-            <a:r>
-              <a:rPr/>
-              <a:t>Key insight: Hazards are characterized by </a:t>
-            </a:r>
-            <a:r>
-              <a:rPr b="1"/>
-              <a:t>probability distributions</a:t>
-            </a:r>
-            <a:r>
-              <a:rPr/>
-              <a:t>, not single values.</a:t>
+              <a:t>Risk Analysis Vocabulary</a:t>
             </a:r>
           </a:p>
         </p:txBody>
@@ -9463,7 +12175,7 @@
             </a:pPr>
             <a:r>
               <a:rPr/>
-              <a:t>Exposure</a:t>
+              <a:t>Hazard</a:t>
             </a:r>
           </a:p>
         </p:txBody>
@@ -9488,39 +12200,39 @@
             </a:pPr>
             <a:r>
               <a:rPr b="1"/>
-              <a:t>Exposure:</a:t>
-            </a:r>
-            <a:r>
-              <a:rPr/>
-              <a:t> What is at risk?</a:t>
+              <a:t>Hazard:</a:t>
+            </a:r>
+            <a:r>
+              <a:rPr/>
+              <a:t> The physical event or phenomenon</a:t>
             </a:r>
           </a:p>
           <a:p>
             <a:pPr lvl="0"/>
             <a:r>
               <a:rPr/>
-              <a:t>Buildings and infrastructure</a:t>
+              <a:t>Flood depth at a location</a:t>
             </a:r>
           </a:p>
           <a:p>
             <a:pPr lvl="0"/>
             <a:r>
               <a:rPr/>
-              <a:t>People and livelihoods</a:t>
+              <a:t>Wind speed during a storm</a:t>
             </a:r>
           </a:p>
           <a:p>
             <a:pPr lvl="0"/>
             <a:r>
               <a:rPr/>
-              <a:t>Agricultural land</a:t>
+              <a:t>Ground shaking from an earthquake</a:t>
             </a:r>
           </a:p>
           <a:p>
             <a:pPr lvl="0"/>
             <a:r>
               <a:rPr/>
-              <a:t>Economic activity</a:t>
+              <a:t>Extreme temperature</a:t>
             </a:r>
           </a:p>
           <a:p>
@@ -9529,15 +12241,15 @@
             </a:pPr>
             <a:r>
               <a:rPr/>
-              <a:t>Key insight: Exposure </a:t>
+              <a:t>Key insight: Hazards are characterized by </a:t>
             </a:r>
             <a:r>
               <a:rPr b="1"/>
-              <a:t>changes over time</a:t>
-            </a:r>
-            <a:r>
-              <a:rPr/>
-              <a:t> with development and migration.</a:t>
+              <a:t>probability distributions</a:t>
+            </a:r>
+            <a:r>
+              <a:rPr/>
+              <a:t>, not single values.</a:t>
             </a:r>
           </a:p>
         </p:txBody>
@@ -9584,84 +12296,7 @@
             </a:pPr>
             <a:r>
               <a:rPr/>
-              <a:t>Vulnerability</a:t>
-            </a:r>
-          </a:p>
-        </p:txBody>
-      </p:sp>
-      <p:sp>
-        <p:nvSpPr>
-          <p:cNvPr id="3" name="Content Placeholder 2"/>
-          <p:cNvSpPr>
-            <a:spLocks noGrp="1"/>
-          </p:cNvSpPr>
-          <p:nvPr>
-            <p:ph idx="1"/>
-          </p:nvPr>
-        </p:nvSpPr>
-        <p:spPr/>
-        <p:txBody>
-          <a:bodyPr/>
-          <a:lstStyle/>
-          <a:p>
-            <a:pPr lvl="0" indent="0" marL="0">
-              <a:buNone/>
-            </a:pPr>
-            <a:r>
-              <a:rPr b="1"/>
-              <a:t>Vulnerability:</a:t>
-            </a:r>
-            <a:r>
-              <a:rPr/>
-              <a:t> Propensity to suffer damage given exposure to hazard</a:t>
-            </a:r>
-          </a:p>
-          <a:p>
-            <a:pPr lvl="0" indent="0" marL="0">
-              <a:buNone/>
-            </a:pPr>
-            <a:r>
-              <a:rPr/>
-              <a:t>Important distinction:</a:t>
-            </a:r>
-          </a:p>
-          <a:p>
-            <a:pPr lvl="0"/>
-            <a:r>
-              <a:rPr b="1"/>
-              <a:t>Fragility:</a:t>
-            </a:r>
-            <a:r>
-              <a:rPr/>
-              <a:t> Probability of failure (binary)</a:t>
-            </a:r>
-          </a:p>
-          <a:p>
-            <a:pPr lvl="0"/>
-            <a:r>
-              <a:rPr b="1"/>
-              <a:t>Vulnerability:</a:t>
-            </a:r>
-            <a:r>
-              <a:rPr/>
-              <a:t> Degree of damage (continuous)</a:t>
-            </a:r>
-          </a:p>
-          <a:p>
-            <a:pPr lvl="0" indent="0" marL="0">
-              <a:buNone/>
-            </a:pPr>
-            <a:r>
-              <a:rPr/>
-              <a:t>For floods, we typically use </a:t>
-            </a:r>
-            <a:r>
-              <a:rPr b="1"/>
-              <a:t>depth-damage functions</a:t>
-            </a:r>
-            <a:r>
-              <a:rPr/>
-              <a:t> to quantify vulnerability.</a:t>
+              <a:t>Exposure: What’s at Risk?</a:t>
             </a:r>
           </a:p>
         </p:txBody>

--- a/lectures/week-02/index.pptx
+++ b/lectures/week-02/index.pptx
@@ -6088,7 +6088,15 @@
             </a:pPr>
             <a:r>
               <a:rPr/>
-              <a:t>Figure 1: Global flood exposure has grown 10× since 1970. Source: Jongman, Ward, and Aerts (2012)</a:t>
+              <a:t>Figure 1: Global flood exposure has grown 10× since 1970. Source: (</a:t>
+            </a:r>
+            <a:r>
+              <a:rPr b="1"/>
+              <a:t>jongman_exposure:2012?</a:t>
+            </a:r>
+            <a:r>
+              <a:rPr/>
+              <a:t>)</a:t>
             </a:r>
           </a:p>
         </p:txBody>
@@ -6195,7 +6203,15 @@
             </a:pPr>
             <a:r>
               <a:rPr/>
-              <a:t>Figure 2: Houston’s built footprint 1800-2018. Development into flood-prone areas increases exposure. Source: Tedesco, McAlpine, and Porter (2020)</a:t>
+              <a:t>Figure 2: Houston’s built footprint 1800-2018. Development into flood-prone areas increases exposure. Source: (</a:t>
+            </a:r>
+            <a:r>
+              <a:rPr b="1"/>
+              <a:t>tedesco_exposure:2020?</a:t>
+            </a:r>
+            <a:r>
+              <a:rPr/>
+              <a:t>)</a:t>
             </a:r>
           </a:p>
         </p:txBody>
@@ -11582,21 +11598,21 @@
             </a:pPr>
             <a:r>
               <a:rPr/>
-              <a:t>Jongman, Brenden, Philip J Ward, and Jeroen C J H Aerts. 2012. “Global Exposure to River and Coastal Flooding: Long Term Trends and Changes.” </a:t>
+              <a:t>Moel, Hans de, Mathijs van Vliet, and Jeroen C. J. H. Aerts. 2014. “Evaluating the Effect of Flood Damage-Reducing Measures: A Case Study of the Unembanked Area of Rotterdam, the Netherlands.” </a:t>
             </a:r>
             <a:r>
               <a:rPr i="1"/>
-              <a:t>Global Environmental Change</a:t>
-            </a:r>
-            <a:r>
-              <a:rPr/>
-              <a:t> 22 (4): 823–35. </a:t>
+              <a:t>Regional Environmental Change</a:t>
+            </a:r>
+            <a:r>
+              <a:rPr/>
+              <a:t> 14 (3): 895–908. </a:t>
             </a:r>
             <a:r>
               <a:rPr>
                 <a:hlinkClick r:id="rId3"/>
               </a:rPr>
-              <a:t>https://doi.org/10.1016/j.gloenvcha.2012.07.004</a:t>
+              <a:t>https://doi.org/10.1007/s10113-013-0420-z</a:t>
             </a:r>
             <a:r>
               <a:rPr/>
@@ -11609,73 +11625,19 @@
             </a:pPr>
             <a:r>
               <a:rPr/>
-              <a:t>Moel, Hans de, Mathijs van Vliet, and Jeroen C. J. H. Aerts. 2014. “Evaluating the Effect of Flood Damage-Reducing Measures: A Case Study of the Unembanked Area of Rotterdam, the Netherlands.” </a:t>
+              <a:t>Wing, Oliver E. J., Nicholas Pinter, Paul D. Bates, and Carolyn Kousky. 2020. “New Insights into US Flood Vulnerability Revealed from Flood Insurance Big Data.” </a:t>
             </a:r>
             <a:r>
               <a:rPr i="1"/>
-              <a:t>Regional Environmental Change</a:t>
-            </a:r>
-            <a:r>
-              <a:rPr/>
-              <a:t> 14 (3): 895–908. </a:t>
+              <a:t>Nature Communications</a:t>
+            </a:r>
+            <a:r>
+              <a:rPr/>
+              <a:t> 11 (1, 1): 1444. </a:t>
             </a:r>
             <a:r>
               <a:rPr>
                 <a:hlinkClick r:id="rId4"/>
-              </a:rPr>
-              <a:t>https://doi.org/10.1007/s10113-013-0420-z</a:t>
-            </a:r>
-            <a:r>
-              <a:rPr/>
-              <a:t>.</a:t>
-            </a:r>
-          </a:p>
-          <a:p>
-            <a:pPr lvl="0" indent="0" marL="0">
-              <a:buNone/>
-            </a:pPr>
-            <a:r>
-              <a:rPr/>
-              <a:t>Tedesco, Marco, Steven McAlpine, and Jeremy R. Porter. 2020. “Exposure of Real Estate Properties to the 2018 Hurricane Florence Flooding.” </a:t>
-            </a:r>
-            <a:r>
-              <a:rPr i="1"/>
-              <a:t>Natural Hazards and Earth System Sciences</a:t>
-            </a:r>
-            <a:r>
-              <a:rPr/>
-              <a:t> 20 (3): 907–20. </a:t>
-            </a:r>
-            <a:r>
-              <a:rPr>
-                <a:hlinkClick r:id="rId5"/>
-              </a:rPr>
-              <a:t>https://doi.org/10.5194/nhess-20-907-2020</a:t>
-            </a:r>
-            <a:r>
-              <a:rPr/>
-              <a:t>.</a:t>
-            </a:r>
-          </a:p>
-          <a:p>
-            <a:pPr lvl="0" indent="0" marL="0">
-              <a:buNone/>
-            </a:pPr>
-            <a:r>
-              <a:rPr/>
-              <a:t>Wing, Oliver E. J., Nicholas Pinter, Paul D. Bates, and Carolyn Kousky. 2020. “New Insights into US Flood Vulnerability Revealed from Flood Insurance Big Data.” </a:t>
-            </a:r>
-            <a:r>
-              <a:rPr i="1"/>
-              <a:t>Nature Communications</a:t>
-            </a:r>
-            <a:r>
-              <a:rPr/>
-              <a:t> 11 (1, 1): 1444. </a:t>
-            </a:r>
-            <a:r>
-              <a:rPr>
-                <a:hlinkClick r:id="rId6"/>
               </a:rPr>
               <a:t>https://doi.org/10.1038/s41467-020-15264-2</a:t>
             </a:r>

--- a/lectures/week-02/index.pptx
+++ b/lectures/week-02/index.pptx
@@ -6088,15 +6088,7 @@
             </a:pPr>
             <a:r>
               <a:rPr/>
-              <a:t>Figure 1: Global flood exposure has grown 10× since 1970. Source: (</a:t>
-            </a:r>
-            <a:r>
-              <a:rPr b="1"/>
-              <a:t>jongman_exposure:2012?</a:t>
-            </a:r>
-            <a:r>
-              <a:rPr/>
-              <a:t>)</a:t>
+              <a:t>Figure 1: Global flood exposure has grown 10× since 1970. Source: Jongman, Ward, and Aerts (2012)</a:t>
             </a:r>
           </a:p>
         </p:txBody>
@@ -6203,15 +6195,7 @@
             </a:pPr>
             <a:r>
               <a:rPr/>
-              <a:t>Figure 2: Houston’s built footprint 1800-2018. Development into flood-prone areas increases exposure. Source: (</a:t>
-            </a:r>
-            <a:r>
-              <a:rPr b="1"/>
-              <a:t>tedesco_exposure:2020?</a:t>
-            </a:r>
-            <a:r>
-              <a:rPr/>
-              <a:t>)</a:t>
+              <a:t>Figure 2: Houston’s built footprint 1800-2018. Development into flood-prone areas increases exposure. Source: Tedesco, McAlpine, and Porter (2020)</a:t>
             </a:r>
           </a:p>
         </p:txBody>
@@ -11598,21 +11582,75 @@
             </a:pPr>
             <a:r>
               <a:rPr/>
-              <a:t>Moel, Hans de, Mathijs van Vliet, and Jeroen C. J. H. Aerts. 2014. “Evaluating the Effect of Flood Damage-Reducing Measures: A Case Study of the Unembanked Area of Rotterdam, the Netherlands.” </a:t>
+              <a:t>Jongman, Brenden, Philip J Ward, and Jeroen C J H Aerts. 2012. “Global Exposure to River and Coastal Flooding: Long Term Trends and Changes.” </a:t>
             </a:r>
             <a:r>
               <a:rPr i="1"/>
-              <a:t>Regional Environmental Change</a:t>
-            </a:r>
-            <a:r>
-              <a:rPr/>
-              <a:t> 14 (3): 895–908. </a:t>
+              <a:t>Global Environmental Change</a:t>
+            </a:r>
+            <a:r>
+              <a:rPr/>
+              <a:t> 22 (4): 823–35. </a:t>
             </a:r>
             <a:r>
               <a:rPr>
                 <a:hlinkClick r:id="rId3"/>
               </a:rPr>
+              <a:t>https://doi.org/10.1016/j.gloenvcha.2012.07.004</a:t>
+            </a:r>
+            <a:r>
+              <a:rPr/>
+              <a:t>.</a:t>
+            </a:r>
+          </a:p>
+          <a:p>
+            <a:pPr lvl="0" indent="0" marL="0">
+              <a:buNone/>
+            </a:pPr>
+            <a:r>
+              <a:rPr/>
+              <a:t>Moel, Hans de, Mathijs van Vliet, and Jeroen C. J. H. Aerts. 2014. “Evaluating the Effect of Flood Damage-Reducing Measures: A Case Study of the Unembanked Area of Rotterdam, the Netherlands.” </a:t>
+            </a:r>
+            <a:r>
+              <a:rPr i="1"/>
+              <a:t>Regional Environmental Change</a:t>
+            </a:r>
+            <a:r>
+              <a:rPr/>
+              <a:t> 14 (3): 895–908. </a:t>
+            </a:r>
+            <a:r>
+              <a:rPr>
+                <a:hlinkClick r:id="rId4"/>
+              </a:rPr>
               <a:t>https://doi.org/10.1007/s10113-013-0420-z</a:t>
+            </a:r>
+            <a:r>
+              <a:rPr/>
+              <a:t>.</a:t>
+            </a:r>
+          </a:p>
+          <a:p>
+            <a:pPr lvl="0" indent="0" marL="0">
+              <a:buNone/>
+            </a:pPr>
+            <a:r>
+              <a:rPr/>
+              <a:t>Tedesco, Marco, Steven McAlpine, and Jeremy R. Porter. 2020. “Exposure of Real Estate Properties to the 2018 Hurricane Florence Flooding.” </a:t>
+            </a:r>
+            <a:r>
+              <a:rPr i="1"/>
+              <a:t>Natural Hazards and Earth System Sciences</a:t>
+            </a:r>
+            <a:r>
+              <a:rPr/>
+              <a:t> 20 (3): 907–20. </a:t>
+            </a:r>
+            <a:r>
+              <a:rPr>
+                <a:hlinkClick r:id="rId5"/>
+              </a:rPr>
+              <a:t>https://doi.org/10.5194/nhess-20-907-2020</a:t>
             </a:r>
             <a:r>
               <a:rPr/>
@@ -11637,7 +11675,7 @@
             </a:r>
             <a:r>
               <a:rPr>
-                <a:hlinkClick r:id="rId4"/>
+                <a:hlinkClick r:id="rId6"/>
               </a:rPr>
               <a:t>https://doi.org/10.1038/s41467-020-15264-2</a:t>
             </a:r>

--- a/lectures/week-02/index.pptx
+++ b/lectures/week-02/index.pptx
@@ -5924,7 +5924,7 @@
             <a:br/>
             <a:r>
               <a:rPr/>
-              <a:t>Dr. James Doss-Gollin</a:t>
+              <a:t>James Doss-Gollin</a:t>
             </a:r>
           </a:p>
         </p:txBody>

--- a/lectures/week-02/index.pptx
+++ b/lectures/week-02/index.pptx
@@ -6067,7 +6067,9 @@
         <p:nvSpPr>
           <p:cNvPr id="1" name="TextBox 3"/>
           <p:cNvSpPr txBox="1"/>
-          <p:nvPr/>
+          <p:nvPr>
+            <p:ph idx="1"/>
+          </p:nvPr>
         </p:nvSpPr>
         <p:spPr>
           <a:xfrm>
@@ -6088,7 +6090,7 @@
             </a:pPr>
             <a:r>
               <a:rPr/>
-              <a:t>Figure 1: Global flood exposure has grown 10× since 1970. Source: Jongman, Ward, and Aerts (2012)</a:t>
+              <a:t>Figure 1: Global flood exposure has grown 10× since 1970. Source: Jongman et al. (2012)</a:t>
             </a:r>
           </a:p>
         </p:txBody>
@@ -6174,7 +6176,9 @@
         <p:nvSpPr>
           <p:cNvPr id="1" name="TextBox 3"/>
           <p:cNvSpPr txBox="1"/>
-          <p:nvPr/>
+          <p:nvPr>
+            <p:ph idx="1"/>
+          </p:nvPr>
         </p:nvSpPr>
         <p:spPr>
           <a:xfrm>
@@ -6195,7 +6199,7 @@
             </a:pPr>
             <a:r>
               <a:rPr/>
-              <a:t>Figure 2: Houston’s built footprint 1800-2018. Development into flood-prone areas increases exposure. Source: Tedesco, McAlpine, and Porter (2020)</a:t>
+              <a:t>Figure 2: Houston’s built footprint 1800-2018. Development into flood-prone areas increases exposure. Source: Tedesco et al. (2020)</a:t>
             </a:r>
           </a:p>
         </p:txBody>
@@ -6388,7 +6392,9 @@
         <p:nvSpPr>
           <p:cNvPr id="1" name="TextBox 3"/>
           <p:cNvSpPr txBox="1"/>
-          <p:nvPr/>
+          <p:nvPr>
+            <p:ph idx="1"/>
+          </p:nvPr>
         </p:nvSpPr>
         <p:spPr>
           <a:xfrm>
@@ -6533,7 +6539,9 @@
         <p:nvSpPr>
           <p:cNvPr id="1" name="TextBox 3"/>
           <p:cNvSpPr txBox="1"/>
-          <p:nvPr/>
+          <p:nvPr>
+            <p:ph idx="1"/>
+          </p:nvPr>
         </p:nvSpPr>
         <p:spPr>
           <a:xfrm>
@@ -7046,19 +7054,21 @@
                         </m:rPr>
                         <m:t>Vulnerability</m:t>
                       </m:r>
-                      <m:d>
-                        <m:dPr>
-                          <m:begChr m:val="("/>
-                          <m:sepChr m:val=""/>
-                          <m:endChr m:val=")"/>
-                          <m:grow/>
-                        </m:dPr>
-                        <m:e>
-                          <m:r>
-                            <m:t>h</m:t>
-                          </m:r>
-                        </m:e>
-                      </m:d>
+                      <m:r>
+                        <m:rPr>
+                          <m:sty m:val="p"/>
+                        </m:rPr>
+                        <m:t>(</m:t>
+                      </m:r>
+                      <m:r>
+                        <m:t>h</m:t>
+                      </m:r>
+                      <m:r>
+                        <m:rPr>
+                          <m:sty m:val="p"/>
+                        </m:rPr>
+                        <m:t>)</m:t>
+                      </m:r>
                       <m:r>
                         <m:rPr>
                           <m:sty m:val="p"/>
@@ -7126,23 +7136,25 @@
                       <m:r>
                         <m:t>E</m:t>
                       </m:r>
-                      <m:d>
-                        <m:dPr>
-                          <m:begChr m:val="["/>
-                          <m:sepChr m:val=""/>
-                          <m:endChr m:val="]"/>
-                          <m:grow/>
-                        </m:dPr>
-                        <m:e>
-                          <m:r>
-                            <m:rPr>
-                              <m:nor/>
-                              <m:sty m:val="p"/>
-                            </m:rPr>
-                            <m:t>Damage</m:t>
-                          </m:r>
-                        </m:e>
-                      </m:d>
+                      <m:r>
+                        <m:rPr>
+                          <m:sty m:val="p"/>
+                        </m:rPr>
+                        <m:t>[</m:t>
+                      </m:r>
+                      <m:r>
+                        <m:rPr>
+                          <m:nor/>
+                          <m:sty m:val="p"/>
+                        </m:rPr>
+                        <m:t>Damage</m:t>
+                      </m:r>
+                      <m:r>
+                        <m:rPr>
+                          <m:sty m:val="p"/>
+                        </m:rPr>
+                        <m:t>]</m:t>
+                      </m:r>
                       <m:r>
                         <m:rPr>
                           <m:sty m:val="p"/>
@@ -7162,19 +7174,21 @@
                         </m:rPr>
                         <m:t>Vulnerability</m:t>
                       </m:r>
-                      <m:d>
-                        <m:dPr>
-                          <m:begChr m:val="("/>
-                          <m:sepChr m:val=""/>
-                          <m:endChr m:val=")"/>
-                          <m:grow/>
-                        </m:dPr>
-                        <m:e>
-                          <m:r>
-                            <m:t>h</m:t>
-                          </m:r>
-                        </m:e>
-                      </m:d>
+                      <m:r>
+                        <m:rPr>
+                          <m:sty m:val="p"/>
+                        </m:rPr>
+                        <m:t>(</m:t>
+                      </m:r>
+                      <m:r>
+                        <m:t>h</m:t>
+                      </m:r>
+                      <m:r>
+                        <m:rPr>
+                          <m:sty m:val="p"/>
+                        </m:rPr>
+                        <m:t>)</m:t>
+                      </m:r>
                       <m:r>
                         <m:rPr>
                           <m:sty m:val="p"/>
@@ -7197,19 +7211,21 @@
                       <m:r>
                         <m:t>p</m:t>
                       </m:r>
-                      <m:d>
-                        <m:dPr>
-                          <m:begChr m:val="("/>
-                          <m:sepChr m:val=""/>
-                          <m:endChr m:val=")"/>
-                          <m:grow/>
-                        </m:dPr>
-                        <m:e>
-                          <m:r>
-                            <m:t>h</m:t>
-                          </m:r>
-                        </m:e>
-                      </m:d>
+                      <m:r>
+                        <m:rPr>
+                          <m:sty m:val="p"/>
+                        </m:rPr>
+                        <m:t>(</m:t>
+                      </m:r>
+                      <m:r>
+                        <m:t>h</m:t>
+                      </m:r>
+                      <m:r>
+                        <m:rPr>
+                          <m:sty m:val="p"/>
+                        </m:rPr>
+                        <m:t>)</m:t>
+                      </m:r>
                       <m:r>
                         <m:t> </m:t>
                       </m:r>
@@ -7308,7 +7324,9 @@
         <p:nvSpPr>
           <p:cNvPr id="1" name="TextBox 3"/>
           <p:cNvSpPr txBox="1"/>
-          <p:nvPr/>
+          <p:nvPr>
+            <p:ph idx="1"/>
+          </p:nvPr>
         </p:nvSpPr>
         <p:spPr>
           <a:xfrm>
@@ -7329,7 +7347,7 @@
             </a:pPr>
             <a:r>
               <a:rPr/>
-              <a:t>Figure 5: From hazard and exposure data through damage models to expected annual damage (EAD). Source: de Moel, van Vliet, and Aerts (2014)</a:t>
+              <a:t>Figure 5: From hazard and exposure data through damage models to expected annual damage (EAD). Source: de Moel et al. (2014)</a:t>
             </a:r>
           </a:p>
         </p:txBody>
@@ -7690,19 +7708,21 @@
                     <m:r>
                       <m:t>p</m:t>
                     </m:r>
-                    <m:d>
-                      <m:dPr>
-                        <m:begChr m:val="("/>
-                        <m:sepChr m:val=""/>
-                        <m:endChr m:val=")"/>
-                        <m:grow/>
-                      </m:dPr>
-                      <m:e>
-                        <m:r>
-                          <m:t>h</m:t>
-                        </m:r>
-                      </m:e>
-                    </m:d>
+                    <m:r>
+                      <m:rPr>
+                        <m:sty m:val="p"/>
+                      </m:rPr>
+                      <m:t>(</m:t>
+                    </m:r>
+                    <m:r>
+                      <m:t>h</m:t>
+                    </m:r>
+                    <m:r>
+                      <m:rPr>
+                        <m:sty m:val="p"/>
+                      </m:rPr>
+                      <m:t>)</m:t>
+                    </m:r>
                   </m:oMath>
                 </a14:m>
                 <a:r>
@@ -7729,19 +7749,21 @@
                     <m:r>
                       <m:t>D</m:t>
                     </m:r>
-                    <m:d>
-                      <m:dPr>
-                        <m:begChr m:val="("/>
-                        <m:sepChr m:val=""/>
-                        <m:endChr m:val=")"/>
-                        <m:grow/>
-                      </m:dPr>
-                      <m:e>
-                        <m:r>
-                          <m:t>h</m:t>
-                        </m:r>
-                      </m:e>
-                    </m:d>
+                    <m:r>
+                      <m:rPr>
+                        <m:sty m:val="p"/>
+                      </m:rPr>
+                      <m:t>(</m:t>
+                    </m:r>
+                    <m:r>
+                      <m:t>h</m:t>
+                    </m:r>
+                    <m:r>
+                      <m:rPr>
+                        <m:sty m:val="p"/>
+                      </m:rPr>
+                      <m:t>)</m:t>
+                    </m:r>
                   </m:oMath>
                 </a14:m>
                 <a:r>
@@ -7777,19 +7799,21 @@
                     <m:r>
                       <m:t>p</m:t>
                     </m:r>
-                    <m:d>
-                      <m:dPr>
-                        <m:begChr m:val="("/>
-                        <m:sepChr m:val=""/>
-                        <m:endChr m:val=")"/>
-                        <m:grow/>
-                      </m:dPr>
-                      <m:e>
-                        <m:r>
-                          <m:t>D</m:t>
-                        </m:r>
-                      </m:e>
-                    </m:d>
+                    <m:r>
+                      <m:rPr>
+                        <m:sty m:val="p"/>
+                      </m:rPr>
+                      <m:t>(</m:t>
+                    </m:r>
+                    <m:r>
+                      <m:t>D</m:t>
+                    </m:r>
+                    <m:r>
+                      <m:rPr>
+                        <m:sty m:val="p"/>
+                      </m:rPr>
+                      <m:t>)</m:t>
+                    </m:r>
                   </m:oMath>
                 </a14:m>
                 <a:r>
@@ -8156,32 +8180,36 @@
                       <m:r>
                         <m:t>E</m:t>
                       </m:r>
-                      <m:d>
-                        <m:dPr>
-                          <m:begChr m:val="["/>
-                          <m:sepChr m:val=""/>
-                          <m:endChr m:val="]"/>
-                          <m:grow/>
-                        </m:dPr>
-                        <m:e>
-                          <m:r>
-                            <m:t>f</m:t>
-                          </m:r>
-                          <m:d>
-                            <m:dPr>
-                              <m:begChr m:val="("/>
-                              <m:sepChr m:val=""/>
-                              <m:endChr m:val=")"/>
-                              <m:grow/>
-                            </m:dPr>
-                            <m:e>
-                              <m:r>
-                                <m:t>x</m:t>
-                              </m:r>
-                            </m:e>
-                          </m:d>
-                        </m:e>
-                      </m:d>
+                      <m:r>
+                        <m:rPr>
+                          <m:sty m:val="p"/>
+                        </m:rPr>
+                        <m:t>[</m:t>
+                      </m:r>
+                      <m:r>
+                        <m:t>f</m:t>
+                      </m:r>
+                      <m:r>
+                        <m:rPr>
+                          <m:sty m:val="p"/>
+                        </m:rPr>
+                        <m:t>(</m:t>
+                      </m:r>
+                      <m:r>
+                        <m:t>x</m:t>
+                      </m:r>
+                      <m:r>
+                        <m:rPr>
+                          <m:sty m:val="p"/>
+                        </m:rPr>
+                        <m:t>)</m:t>
+                      </m:r>
+                      <m:r>
+                        <m:rPr>
+                          <m:sty m:val="p"/>
+                        </m:rPr>
+                        <m:t>]</m:t>
+                      </m:r>
                       <m:r>
                         <m:rPr>
                           <m:sty m:val="p"/>
@@ -8191,32 +8219,36 @@
                       <m:r>
                         <m:t>f</m:t>
                       </m:r>
-                      <m:d>
-                        <m:dPr>
-                          <m:begChr m:val="("/>
-                          <m:sepChr m:val=""/>
-                          <m:endChr m:val=")"/>
-                          <m:grow/>
-                        </m:dPr>
-                        <m:e>
-                          <m:r>
-                            <m:t>E</m:t>
-                          </m:r>
-                          <m:d>
-                            <m:dPr>
-                              <m:begChr m:val="["/>
-                              <m:sepChr m:val=""/>
-                              <m:endChr m:val="]"/>
-                              <m:grow/>
-                            </m:dPr>
-                            <m:e>
-                              <m:r>
-                                <m:t>x</m:t>
-                              </m:r>
-                            </m:e>
-                          </m:d>
-                        </m:e>
-                      </m:d>
+                      <m:r>
+                        <m:rPr>
+                          <m:sty m:val="p"/>
+                        </m:rPr>
+                        <m:t>(</m:t>
+                      </m:r>
+                      <m:r>
+                        <m:t>E</m:t>
+                      </m:r>
+                      <m:r>
+                        <m:rPr>
+                          <m:sty m:val="p"/>
+                        </m:rPr>
+                        <m:t>[</m:t>
+                      </m:r>
+                      <m:r>
+                        <m:t>x</m:t>
+                      </m:r>
+                      <m:r>
+                        <m:rPr>
+                          <m:sty m:val="p"/>
+                        </m:rPr>
+                        <m:t>]</m:t>
+                      </m:r>
+                      <m:r>
+                        <m:rPr>
+                          <m:sty m:val="p"/>
+                        </m:rPr>
+                        <m:t>)</m:t>
+                      </m:r>
                     </m:oMath>
                   </m:oMathPara>
                 </a14:m>
@@ -8349,19 +8381,21 @@
                     <m:r>
                       <m:t>E</m:t>
                     </m:r>
-                    <m:d>
-                      <m:dPr>
-                        <m:begChr m:val="["/>
-                        <m:sepChr m:val=""/>
-                        <m:endChr m:val="]"/>
-                        <m:grow/>
-                      </m:dPr>
-                      <m:e>
-                        <m:r>
-                          <m:t>h</m:t>
-                        </m:r>
-                      </m:e>
-                    </m:d>
+                    <m:r>
+                      <m:rPr>
+                        <m:sty m:val="p"/>
+                      </m:rPr>
+                      <m:t>[</m:t>
+                    </m:r>
+                    <m:r>
+                      <m:t>h</m:t>
+                    </m:r>
+                    <m:r>
+                      <m:rPr>
+                        <m:sty m:val="p"/>
+                      </m:rPr>
+                      <m:t>]</m:t>
+                    </m:r>
                     <m:r>
                       <m:rPr>
                         <m:sty m:val="p"/>
@@ -8414,19 +8448,21 @@
                     <m:r>
                       <m:t>D</m:t>
                     </m:r>
-                    <m:d>
-                      <m:dPr>
-                        <m:begChr m:val="("/>
-                        <m:sepChr m:val=""/>
-                        <m:endChr m:val=")"/>
-                        <m:grow/>
-                      </m:dPr>
-                      <m:e>
-                        <m:r>
-                          <m:t>2</m:t>
-                        </m:r>
-                      </m:e>
-                    </m:d>
+                    <m:r>
+                      <m:rPr>
+                        <m:sty m:val="p"/>
+                      </m:rPr>
+                      <m:t>(</m:t>
+                    </m:r>
+                    <m:r>
+                      <m:t>2</m:t>
+                    </m:r>
+                    <m:r>
+                      <m:rPr>
+                        <m:sty m:val="p"/>
+                      </m:rPr>
+                      <m:t>)</m:t>
+                    </m:r>
                     <m:r>
                       <m:rPr>
                         <m:sty m:val="p"/>
@@ -8461,19 +8497,21 @@
                     <m:r>
                       <m:t>D</m:t>
                     </m:r>
-                    <m:d>
-                      <m:dPr>
-                        <m:begChr m:val="("/>
-                        <m:sepChr m:val=""/>
-                        <m:endChr m:val=")"/>
-                        <m:grow/>
-                      </m:dPr>
-                      <m:e>
-                        <m:r>
-                          <m:t>8</m:t>
-                        </m:r>
-                      </m:e>
-                    </m:d>
+                    <m:r>
+                      <m:rPr>
+                        <m:sty m:val="p"/>
+                      </m:rPr>
+                      <m:t>(</m:t>
+                    </m:r>
+                    <m:r>
+                      <m:t>8</m:t>
+                    </m:r>
+                    <m:r>
+                      <m:rPr>
+                        <m:sty m:val="p"/>
+                      </m:rPr>
+                      <m:t>)</m:t>
+                    </m:r>
                     <m:r>
                       <m:rPr>
                         <m:sty m:val="p"/>
@@ -8508,19 +8546,21 @@
                     <m:r>
                       <m:t>D</m:t>
                     </m:r>
-                    <m:d>
-                      <m:dPr>
-                        <m:begChr m:val="("/>
-                        <m:sepChr m:val=""/>
-                        <m:endChr m:val=")"/>
-                        <m:grow/>
-                      </m:dPr>
-                      <m:e>
-                        <m:r>
-                          <m:t>5</m:t>
-                        </m:r>
-                      </m:e>
-                    </m:d>
+                    <m:r>
+                      <m:rPr>
+                        <m:sty m:val="p"/>
+                      </m:rPr>
+                      <m:t>(</m:t>
+                    </m:r>
+                    <m:r>
+                      <m:t>5</m:t>
+                    </m:r>
+                    <m:r>
+                      <m:rPr>
+                        <m:sty m:val="p"/>
+                      </m:rPr>
+                      <m:t>)</m:t>
+                    </m:r>
                     <m:r>
                       <m:rPr>
                         <m:sty m:val="p"/>
@@ -8599,32 +8639,36 @@
                     <m:r>
                       <m:t>D</m:t>
                     </m:r>
-                    <m:d>
-                      <m:dPr>
-                        <m:begChr m:val="("/>
-                        <m:sepChr m:val=""/>
-                        <m:endChr m:val=")"/>
-                        <m:grow/>
-                      </m:dPr>
-                      <m:e>
-                        <m:r>
-                          <m:t>E</m:t>
-                        </m:r>
-                        <m:d>
-                          <m:dPr>
-                            <m:begChr m:val="["/>
-                            <m:sepChr m:val=""/>
-                            <m:endChr m:val="]"/>
-                            <m:grow/>
-                          </m:dPr>
-                          <m:e>
-                            <m:r>
-                              <m:t>h</m:t>
-                            </m:r>
-                          </m:e>
-                        </m:d>
-                      </m:e>
-                    </m:d>
+                    <m:r>
+                      <m:rPr>
+                        <m:sty m:val="p"/>
+                      </m:rPr>
+                      <m:t>(</m:t>
+                    </m:r>
+                    <m:r>
+                      <m:t>E</m:t>
+                    </m:r>
+                    <m:r>
+                      <m:rPr>
+                        <m:sty m:val="p"/>
+                      </m:rPr>
+                      <m:t>[</m:t>
+                    </m:r>
+                    <m:r>
+                      <m:t>h</m:t>
+                    </m:r>
+                    <m:r>
+                      <m:rPr>
+                        <m:sty m:val="p"/>
+                      </m:rPr>
+                      <m:t>]</m:t>
+                    </m:r>
+                    <m:r>
+                      <m:rPr>
+                        <m:sty m:val="p"/>
+                      </m:rPr>
+                      <m:t>)</m:t>
+                    </m:r>
                     <m:r>
                       <m:rPr>
                         <m:sty m:val="p"/>
@@ -8634,19 +8678,21 @@
                     <m:r>
                       <m:t>D</m:t>
                     </m:r>
-                    <m:d>
-                      <m:dPr>
-                        <m:begChr m:val="("/>
-                        <m:sepChr m:val=""/>
-                        <m:endChr m:val=")"/>
-                        <m:grow/>
-                      </m:dPr>
-                      <m:e>
-                        <m:r>
-                          <m:t>5</m:t>
-                        </m:r>
-                      </m:e>
-                    </m:d>
+                    <m:r>
+                      <m:rPr>
+                        <m:sty m:val="p"/>
+                      </m:rPr>
+                      <m:t>(</m:t>
+                    </m:r>
+                    <m:r>
+                      <m:t>5</m:t>
+                    </m:r>
+                    <m:r>
+                      <m:rPr>
+                        <m:sty m:val="p"/>
+                      </m:rPr>
+                      <m:t>)</m:t>
+                    </m:r>
                     <m:r>
                       <m:rPr>
                         <m:sty m:val="p"/>
@@ -8683,32 +8729,36 @@
                     <m:r>
                       <m:t>E</m:t>
                     </m:r>
-                    <m:d>
-                      <m:dPr>
-                        <m:begChr m:val="["/>
-                        <m:sepChr m:val=""/>
-                        <m:endChr m:val="]"/>
-                        <m:grow/>
-                      </m:dPr>
-                      <m:e>
-                        <m:r>
-                          <m:t>D</m:t>
-                        </m:r>
-                        <m:d>
-                          <m:dPr>
-                            <m:begChr m:val="("/>
-                            <m:sepChr m:val=""/>
-                            <m:endChr m:val=")"/>
-                            <m:grow/>
-                          </m:dPr>
-                          <m:e>
-                            <m:r>
-                              <m:t>h</m:t>
-                            </m:r>
-                          </m:e>
-                        </m:d>
-                      </m:e>
-                    </m:d>
+                    <m:r>
+                      <m:rPr>
+                        <m:sty m:val="p"/>
+                      </m:rPr>
+                      <m:t>[</m:t>
+                    </m:r>
+                    <m:r>
+                      <m:t>D</m:t>
+                    </m:r>
+                    <m:r>
+                      <m:rPr>
+                        <m:sty m:val="p"/>
+                      </m:rPr>
+                      <m:t>(</m:t>
+                    </m:r>
+                    <m:r>
+                      <m:t>h</m:t>
+                    </m:r>
+                    <m:r>
+                      <m:rPr>
+                        <m:sty m:val="p"/>
+                      </m:rPr>
+                      <m:t>)</m:t>
+                    </m:r>
+                    <m:r>
+                      <m:rPr>
+                        <m:sty m:val="p"/>
+                      </m:rPr>
+                      <m:t>]</m:t>
+                    </m:r>
                     <m:r>
                       <m:rPr>
                         <m:sty m:val="p"/>
@@ -8718,28 +8768,30 @@
                     <m:r>
                       <m:t>0.5</m:t>
                     </m:r>
-                    <m:d>
-                      <m:dPr>
-                        <m:begChr m:val="("/>
-                        <m:sepChr m:val=""/>
-                        <m:endChr m:val=")"/>
-                        <m:grow/>
-                      </m:dPr>
-                      <m:e>
-                        <m:r>
-                          <m:rPr>
-                            <m:sty m:val="p"/>
-                          </m:rPr>
-                          <m:t>$</m:t>
-                        </m:r>
-                        <m:r>
-                          <m:t>5</m:t>
-                        </m:r>
-                        <m:r>
-                          <m:t>k</m:t>
-                        </m:r>
-                      </m:e>
-                    </m:d>
+                    <m:r>
+                      <m:rPr>
+                        <m:sty m:val="p"/>
+                      </m:rPr>
+                      <m:t>(</m:t>
+                    </m:r>
+                    <m:r>
+                      <m:rPr>
+                        <m:sty m:val="p"/>
+                      </m:rPr>
+                      <m:t>$</m:t>
+                    </m:r>
+                    <m:r>
+                      <m:t>5</m:t>
+                    </m:r>
+                    <m:r>
+                      <m:t>k</m:t>
+                    </m:r>
+                    <m:r>
+                      <m:rPr>
+                        <m:sty m:val="p"/>
+                      </m:rPr>
+                      <m:t>)</m:t>
+                    </m:r>
                     <m:r>
                       <m:rPr>
                         <m:sty m:val="p"/>
@@ -8749,28 +8801,30 @@
                     <m:r>
                       <m:t>0.5</m:t>
                     </m:r>
-                    <m:d>
-                      <m:dPr>
-                        <m:begChr m:val="("/>
-                        <m:sepChr m:val=""/>
-                        <m:endChr m:val=")"/>
-                        <m:grow/>
-                      </m:dPr>
-                      <m:e>
-                        <m:r>
-                          <m:rPr>
-                            <m:sty m:val="p"/>
-                          </m:rPr>
-                          <m:t>$</m:t>
-                        </m:r>
-                        <m:r>
-                          <m:t>90</m:t>
-                        </m:r>
-                        <m:r>
-                          <m:t>k</m:t>
-                        </m:r>
-                      </m:e>
-                    </m:d>
+                    <m:r>
+                      <m:rPr>
+                        <m:sty m:val="p"/>
+                      </m:rPr>
+                      <m:t>(</m:t>
+                    </m:r>
+                    <m:r>
+                      <m:rPr>
+                        <m:sty m:val="p"/>
+                      </m:rPr>
+                      <m:t>$</m:t>
+                    </m:r>
+                    <m:r>
+                      <m:t>90</m:t>
+                    </m:r>
+                    <m:r>
+                      <m:t>k</m:t>
+                    </m:r>
+                    <m:r>
+                      <m:rPr>
+                        <m:sty m:val="p"/>
+                      </m:rPr>
+                      <m:t>)</m:t>
+                    </m:r>
                     <m:r>
                       <m:rPr>
                         <m:sty m:val="p"/>
@@ -8904,19 +8958,21 @@
                       <m:r>
                         <m:t>E</m:t>
                       </m:r>
-                      <m:d>
-                        <m:dPr>
-                          <m:begChr m:val="["/>
-                          <m:sepChr m:val=""/>
-                          <m:endChr m:val="]"/>
-                          <m:grow/>
-                        </m:dPr>
-                        <m:e>
-                          <m:r>
-                            <m:t>D</m:t>
-                          </m:r>
-                        </m:e>
-                      </m:d>
+                      <m:r>
+                        <m:rPr>
+                          <m:sty m:val="p"/>
+                        </m:rPr>
+                        <m:t>[</m:t>
+                      </m:r>
+                      <m:r>
+                        <m:t>D</m:t>
+                      </m:r>
+                      <m:r>
+                        <m:rPr>
+                          <m:sty m:val="p"/>
+                        </m:rPr>
+                        <m:t>]</m:t>
+                      </m:r>
                       <m:r>
                         <m:rPr>
                           <m:sty m:val="p"/>
@@ -8932,19 +8988,21 @@
                       <m:r>
                         <m:t>D</m:t>
                       </m:r>
-                      <m:d>
-                        <m:dPr>
-                          <m:begChr m:val="("/>
-                          <m:sepChr m:val=""/>
-                          <m:endChr m:val=")"/>
-                          <m:grow/>
-                        </m:dPr>
-                        <m:e>
-                          <m:r>
-                            <m:t>h</m:t>
-                          </m:r>
-                        </m:e>
-                      </m:d>
+                      <m:r>
+                        <m:rPr>
+                          <m:sty m:val="p"/>
+                        </m:rPr>
+                        <m:t>(</m:t>
+                      </m:r>
+                      <m:r>
+                        <m:t>h</m:t>
+                      </m:r>
+                      <m:r>
+                        <m:rPr>
+                          <m:sty m:val="p"/>
+                        </m:rPr>
+                        <m:t>)</m:t>
+                      </m:r>
                       <m:r>
                         <m:rPr>
                           <m:sty m:val="p"/>
@@ -8954,19 +9012,21 @@
                       <m:r>
                         <m:t>p</m:t>
                       </m:r>
-                      <m:d>
-                        <m:dPr>
-                          <m:begChr m:val="("/>
-                          <m:sepChr m:val=""/>
-                          <m:endChr m:val=")"/>
-                          <m:grow/>
-                        </m:dPr>
-                        <m:e>
-                          <m:r>
-                            <m:t>h</m:t>
-                          </m:r>
-                        </m:e>
-                      </m:d>
+                      <m:r>
+                        <m:rPr>
+                          <m:sty m:val="p"/>
+                        </m:rPr>
+                        <m:t>(</m:t>
+                      </m:r>
+                      <m:r>
+                        <m:t>h</m:t>
+                      </m:r>
+                      <m:r>
+                        <m:rPr>
+                          <m:sty m:val="p"/>
+                        </m:rPr>
+                        <m:t>)</m:t>
+                      </m:r>
                       <m:r>
                         <m:t> </m:t>
                       </m:r>
@@ -9419,19 +9479,21 @@
                     <m:r>
                       <m:t>p</m:t>
                     </m:r>
-                    <m:d>
-                      <m:dPr>
-                        <m:begChr m:val="("/>
-                        <m:sepChr m:val=""/>
-                        <m:endChr m:val=")"/>
-                        <m:grow/>
-                      </m:dPr>
-                      <m:e>
-                        <m:r>
-                          <m:t>h</m:t>
-                        </m:r>
-                      </m:e>
-                    </m:d>
+                    <m:r>
+                      <m:rPr>
+                        <m:sty m:val="p"/>
+                      </m:rPr>
+                      <m:t>(</m:t>
+                    </m:r>
+                    <m:r>
+                      <m:t>h</m:t>
+                    </m:r>
+                    <m:r>
+                      <m:rPr>
+                        <m:sty m:val="p"/>
+                      </m:rPr>
+                      <m:t>)</m:t>
+                    </m:r>
                   </m:oMath>
                 </a14:m>
                 <a:r>
@@ -9496,28 +9558,30 @@
                           </m:r>
                         </m:e>
                       </m:nary>
-                      <m:d>
-                        <m:dPr>
-                          <m:begChr m:val="("/>
-                          <m:sepChr m:val=""/>
-                          <m:endChr m:val=")"/>
-                          <m:grow/>
-                        </m:dPr>
+                      <m:r>
+                        <m:rPr>
+                          <m:sty m:val="p"/>
+                        </m:rPr>
+                        <m:t>(</m:t>
+                      </m:r>
+                      <m:sSub>
                         <m:e>
-                          <m:sSub>
-                            <m:e>
-                              <m:r>
-                                <m:t>h</m:t>
-                              </m:r>
-                            </m:e>
-                            <m:sub>
-                              <m:r>
-                                <m:t>i</m:t>
-                              </m:r>
-                            </m:sub>
-                          </m:sSub>
+                          <m:r>
+                            <m:t>h</m:t>
+                          </m:r>
                         </m:e>
-                      </m:d>
+                        <m:sub>
+                          <m:r>
+                            <m:t>i</m:t>
+                          </m:r>
+                        </m:sub>
+                      </m:sSub>
+                      <m:r>
+                        <m:rPr>
+                          <m:sty m:val="p"/>
+                        </m:rPr>
+                        <m:t>)</m:t>
+                      </m:r>
                       <m:limUpp>
                         <m:e>
                           <m:r>
@@ -9548,19 +9612,21 @@
                       <m:r>
                         <m:t>E</m:t>
                       </m:r>
-                      <m:d>
-                        <m:dPr>
-                          <m:begChr m:val="["/>
-                          <m:sepChr m:val=""/>
-                          <m:endChr m:val="]"/>
-                          <m:grow/>
-                        </m:dPr>
-                        <m:e>
-                          <m:r>
-                            <m:t>D</m:t>
-                          </m:r>
-                        </m:e>
-                      </m:d>
+                      <m:r>
+                        <m:rPr>
+                          <m:sty m:val="p"/>
+                        </m:rPr>
+                        <m:t>[</m:t>
+                      </m:r>
+                      <m:r>
+                        <m:t>D</m:t>
+                      </m:r>
+                      <m:r>
+                        <m:rPr>
+                          <m:sty m:val="p"/>
+                        </m:rPr>
+                        <m:t>]</m:t>
+                      </m:r>
                     </m:oMath>
                   </m:oMathPara>
                 </a14:m>
@@ -9691,28 +9757,30 @@
                     <m:r>
                       <m:t>D</m:t>
                     </m:r>
-                    <m:d>
-                      <m:dPr>
-                        <m:begChr m:val="("/>
-                        <m:sepChr m:val=""/>
-                        <m:endChr m:val=")"/>
-                        <m:grow/>
-                      </m:dPr>
+                    <m:r>
+                      <m:rPr>
+                        <m:sty m:val="p"/>
+                      </m:rPr>
+                      <m:t>(</m:t>
+                    </m:r>
+                    <m:sSub>
                       <m:e>
-                        <m:sSub>
-                          <m:e>
-                            <m:r>
-                              <m:t>h</m:t>
-                            </m:r>
-                          </m:e>
-                          <m:sub>
-                            <m:r>
-                              <m:t>i</m:t>
-                            </m:r>
-                          </m:sub>
-                        </m:sSub>
+                        <m:r>
+                          <m:t>h</m:t>
+                        </m:r>
                       </m:e>
-                    </m:d>
+                      <m:sub>
+                        <m:r>
+                          <m:t>i</m:t>
+                        </m:r>
+                      </m:sub>
+                    </m:sSub>
+                    <m:r>
+                      <m:rPr>
+                        <m:sty m:val="p"/>
+                      </m:rPr>
+                      <m:t>)</m:t>
+                    </m:r>
                   </m:oMath>
                 </a14:m>
                 <a:r>
@@ -10441,7 +10509,9 @@
         <p:nvSpPr>
           <p:cNvPr id="1" name="TextBox 3"/>
           <p:cNvSpPr txBox="1"/>
-          <p:nvPr/>
+          <p:nvPr>
+            <p:ph idx="1"/>
+          </p:nvPr>
         </p:nvSpPr>
         <p:spPr>
           <a:xfrm>
@@ -11555,7 +11625,7 @@
             </a:pPr>
             <a:r>
               <a:rPr/>
-              <a:t>Gidaris, Ioannis, Jamie E. Padgett, Andre R. Barbosa, Suren Chen, Daniel Cox, Bret Webb, and Amy Cerato. 2017. “Multiple-Hazard Fragility and Restoration Models of Highway Bridges for Regional Risk and Resilience Assessment in the United States: State-of-the-Art Review.” </a:t>
+              <a:t>Gidaris, Ioannis, Jamie E. Padgett, Andre R. Barbosa, et al. 2017. “Multiple-Hazard Fragility and Restoration Models of Highway Bridges for Regional Risk and Resilience Assessment in the United States: State-of-the-Art Review.” </a:t>
             </a:r>
             <a:r>
               <a:rPr i="1"/>
@@ -11762,23 +11832,25 @@
                       <m:r>
                         <m:t>E</m:t>
                       </m:r>
-                      <m:d>
-                        <m:dPr>
-                          <m:begChr m:val="["/>
-                          <m:sepChr m:val=""/>
-                          <m:endChr m:val="]"/>
-                          <m:grow/>
-                        </m:dPr>
-                        <m:e>
-                          <m:r>
-                            <m:rPr>
-                              <m:nor/>
-                              <m:sty m:val="p"/>
-                            </m:rPr>
-                            <m:t>Damage</m:t>
-                          </m:r>
-                        </m:e>
-                      </m:d>
+                      <m:r>
+                        <m:rPr>
+                          <m:sty m:val="p"/>
+                        </m:rPr>
+                        <m:t>[</m:t>
+                      </m:r>
+                      <m:r>
+                        <m:rPr>
+                          <m:nor/>
+                          <m:sty m:val="p"/>
+                        </m:rPr>
+                        <m:t>Damage</m:t>
+                      </m:r>
+                      <m:r>
+                        <m:rPr>
+                          <m:sty m:val="p"/>
+                        </m:rPr>
+                        <m:t>]</m:t>
+                      </m:r>
                       <m:r>
                         <m:rPr>
                           <m:sty m:val="p"/>
@@ -12000,32 +12072,36 @@
                     <m:r>
                       <m:t>E</m:t>
                     </m:r>
-                    <m:d>
-                      <m:dPr>
-                        <m:begChr m:val="["/>
-                        <m:sepChr m:val=""/>
-                        <m:endChr m:val="]"/>
-                        <m:grow/>
-                      </m:dPr>
-                      <m:e>
-                        <m:r>
-                          <m:t>f</m:t>
-                        </m:r>
-                        <m:d>
-                          <m:dPr>
-                            <m:begChr m:val="("/>
-                            <m:sepChr m:val=""/>
-                            <m:endChr m:val=")"/>
-                            <m:grow/>
-                          </m:dPr>
-                          <m:e>
-                            <m:r>
-                              <m:t>x</m:t>
-                            </m:r>
-                          </m:e>
-                        </m:d>
-                      </m:e>
-                    </m:d>
+                    <m:r>
+                      <m:rPr>
+                        <m:sty m:val="p"/>
+                      </m:rPr>
+                      <m:t>[</m:t>
+                    </m:r>
+                    <m:r>
+                      <m:t>f</m:t>
+                    </m:r>
+                    <m:r>
+                      <m:rPr>
+                        <m:sty m:val="p"/>
+                      </m:rPr>
+                      <m:t>(</m:t>
+                    </m:r>
+                    <m:r>
+                      <m:t>x</m:t>
+                    </m:r>
+                    <m:r>
+                      <m:rPr>
+                        <m:sty m:val="p"/>
+                      </m:rPr>
+                      <m:t>)</m:t>
+                    </m:r>
+                    <m:r>
+                      <m:rPr>
+                        <m:sty m:val="p"/>
+                      </m:rPr>
+                      <m:t>]</m:t>
+                    </m:r>
                     <m:r>
                       <m:rPr>
                         <m:sty m:val="p"/>
@@ -12035,32 +12111,36 @@
                     <m:r>
                       <m:t>f</m:t>
                     </m:r>
-                    <m:d>
-                      <m:dPr>
-                        <m:begChr m:val="("/>
-                        <m:sepChr m:val=""/>
-                        <m:endChr m:val=")"/>
-                        <m:grow/>
-                      </m:dPr>
-                      <m:e>
-                        <m:r>
-                          <m:t>E</m:t>
-                        </m:r>
-                        <m:d>
-                          <m:dPr>
-                            <m:begChr m:val="["/>
-                            <m:sepChr m:val=""/>
-                            <m:endChr m:val="]"/>
-                            <m:grow/>
-                          </m:dPr>
-                          <m:e>
-                            <m:r>
-                              <m:t>x</m:t>
-                            </m:r>
-                          </m:e>
-                        </m:d>
-                      </m:e>
-                    </m:d>
+                    <m:r>
+                      <m:rPr>
+                        <m:sty m:val="p"/>
+                      </m:rPr>
+                      <m:t>(</m:t>
+                    </m:r>
+                    <m:r>
+                      <m:t>E</m:t>
+                    </m:r>
+                    <m:r>
+                      <m:rPr>
+                        <m:sty m:val="p"/>
+                      </m:rPr>
+                      <m:t>[</m:t>
+                    </m:r>
+                    <m:r>
+                      <m:t>x</m:t>
+                    </m:r>
+                    <m:r>
+                      <m:rPr>
+                        <m:sty m:val="p"/>
+                      </m:rPr>
+                      <m:t>]</m:t>
+                    </m:r>
+                    <m:r>
+                      <m:rPr>
+                        <m:sty m:val="p"/>
+                      </m:rPr>
+                      <m:t>)</m:t>
+                    </m:r>
                   </m:oMath>
                 </a14:m>
                 <a:r>
